--- a/docs/icg_final.pptx
+++ b/docs/icg_final.pptx
@@ -5,19 +5,18 @@
     <p:sldMasterId id="2147483648" r:id="rId1"/>
   </p:sldMasterIdLst>
   <p:notesMasterIdLst>
-    <p:notesMasterId r:id="rId12"/>
+    <p:notesMasterId r:id="rId11"/>
   </p:notesMasterIdLst>
   <p:sldIdLst>
     <p:sldId id="256" r:id="rId2"/>
     <p:sldId id="257" r:id="rId3"/>
-    <p:sldId id="258" r:id="rId4"/>
-    <p:sldId id="259" r:id="rId5"/>
-    <p:sldId id="260" r:id="rId6"/>
-    <p:sldId id="261" r:id="rId7"/>
-    <p:sldId id="262" r:id="rId8"/>
-    <p:sldId id="263" r:id="rId9"/>
-    <p:sldId id="264" r:id="rId10"/>
-    <p:sldId id="265" r:id="rId11"/>
+    <p:sldId id="259" r:id="rId4"/>
+    <p:sldId id="260" r:id="rId5"/>
+    <p:sldId id="261" r:id="rId6"/>
+    <p:sldId id="262" r:id="rId7"/>
+    <p:sldId id="263" r:id="rId8"/>
+    <p:sldId id="264" r:id="rId9"/>
+    <p:sldId id="265" r:id="rId10"/>
   </p:sldIdLst>
   <p:sldSz cx="12192000" cy="6858000"/>
   <p:notesSz cx="6858000" cy="9144000"/>
@@ -127,13 +126,987 @@
 <file path=ppt/revisionInfo.xml><?xml version="1.0" encoding="utf-8"?>
 <p1510:revInfo xmlns:a="http://schemas.openxmlformats.org/drawingml/2006/main" xmlns:r="http://schemas.openxmlformats.org/officeDocument/2006/relationships" xmlns:p1510="http://schemas.microsoft.com/office/powerpoint/2015/10/main">
   <p1510:revLst>
-    <p1510:client id="{B8FFF8AF-4563-4B10-A0DD-FF77C4350ACA}" v="1" dt="2024-04-21T15:26:47.099"/>
+    <p1510:client id="{5F5A64CD-14DA-4429-AD0D-339DD7191AF6}" v="53" dt="2024-06-02T22:13:07.837"/>
   </p1510:revLst>
 </p1510:revInfo>
 </file>
 
 <file path=ppt/changesInfos/changesInfo1.xml><?xml version="1.0" encoding="utf-8"?>
 <pc:chgInfo xmlns:a="http://schemas.openxmlformats.org/drawingml/2006/main" xmlns:r="http://schemas.openxmlformats.org/officeDocument/2006/relationships" xmlns:ac="http://schemas.microsoft.com/office/drawing/2013/main/command" xmlns:pc="http://schemas.microsoft.com/office/powerpoint/2013/main/command">
+  <pc:docChgLst>
+    <pc:chgData name="João Gaspar" userId="7dec15aa-df9c-4e56-83fb-de5e1da84347" providerId="ADAL" clId="{5F5A64CD-14DA-4429-AD0D-339DD7191AF6}"/>
+    <pc:docChg chg="undo custSel addSld delSld modSld">
+      <pc:chgData name="João Gaspar" userId="7dec15aa-df9c-4e56-83fb-de5e1da84347" providerId="ADAL" clId="{5F5A64CD-14DA-4429-AD0D-339DD7191AF6}" dt="2024-06-02T22:14:27.270" v="716" actId="27636"/>
+      <pc:docMkLst>
+        <pc:docMk/>
+      </pc:docMkLst>
+      <pc:sldChg chg="addSp delSp modSp mod setBg">
+        <pc:chgData name="João Gaspar" userId="7dec15aa-df9c-4e56-83fb-de5e1da84347" providerId="ADAL" clId="{5F5A64CD-14DA-4429-AD0D-339DD7191AF6}" dt="2024-06-02T21:57:12.289" v="333" actId="207"/>
+        <pc:sldMkLst>
+          <pc:docMk/>
+          <pc:sldMk cId="4202033261" sldId="256"/>
+        </pc:sldMkLst>
+        <pc:spChg chg="mod">
+          <ac:chgData name="João Gaspar" userId="7dec15aa-df9c-4e56-83fb-de5e1da84347" providerId="ADAL" clId="{5F5A64CD-14DA-4429-AD0D-339DD7191AF6}" dt="2024-06-02T19:47:27.845" v="26" actId="26606"/>
+          <ac:spMkLst>
+            <pc:docMk/>
+            <pc:sldMk cId="4202033261" sldId="256"/>
+            <ac:spMk id="2" creationId="{D88944CE-65E2-282D-054B-101CEE226DDD}"/>
+          </ac:spMkLst>
+        </pc:spChg>
+        <pc:spChg chg="mod">
+          <ac:chgData name="João Gaspar" userId="7dec15aa-df9c-4e56-83fb-de5e1da84347" providerId="ADAL" clId="{5F5A64CD-14DA-4429-AD0D-339DD7191AF6}" dt="2024-06-02T19:47:27.845" v="26" actId="26606"/>
+          <ac:spMkLst>
+            <pc:docMk/>
+            <pc:sldMk cId="4202033261" sldId="256"/>
+            <ac:spMk id="3" creationId="{7558EDDC-59F9-82DB-AC8D-FADD282C0232}"/>
+          </ac:spMkLst>
+        </pc:spChg>
+        <pc:spChg chg="del">
+          <ac:chgData name="João Gaspar" userId="7dec15aa-df9c-4e56-83fb-de5e1da84347" providerId="ADAL" clId="{5F5A64CD-14DA-4429-AD0D-339DD7191AF6}" dt="2024-06-02T19:47:12.877" v="23" actId="478"/>
+          <ac:spMkLst>
+            <pc:docMk/>
+            <pc:sldMk cId="4202033261" sldId="256"/>
+            <ac:spMk id="4" creationId="{51921409-2F16-8E6A-0FA4-9DA6A5D95230}"/>
+          </ac:spMkLst>
+        </pc:spChg>
+        <pc:spChg chg="del">
+          <ac:chgData name="João Gaspar" userId="7dec15aa-df9c-4e56-83fb-de5e1da84347" providerId="ADAL" clId="{5F5A64CD-14DA-4429-AD0D-339DD7191AF6}" dt="2024-06-02T19:47:14.566" v="24" actId="478"/>
+          <ac:spMkLst>
+            <pc:docMk/>
+            <pc:sldMk cId="4202033261" sldId="256"/>
+            <ac:spMk id="5" creationId="{34E9C846-0417-B26F-1E2B-784ECEEFF9ED}"/>
+          </ac:spMkLst>
+        </pc:spChg>
+        <pc:spChg chg="add">
+          <ac:chgData name="João Gaspar" userId="7dec15aa-df9c-4e56-83fb-de5e1da84347" providerId="ADAL" clId="{5F5A64CD-14DA-4429-AD0D-339DD7191AF6}" dt="2024-06-02T19:47:27.845" v="26" actId="26606"/>
+          <ac:spMkLst>
+            <pc:docMk/>
+            <pc:sldMk cId="4202033261" sldId="256"/>
+            <ac:spMk id="8" creationId="{007891EC-4501-44ED-A8C8-B11B6DB767AB}"/>
+          </ac:spMkLst>
+        </pc:spChg>
+        <pc:spChg chg="add">
+          <ac:chgData name="João Gaspar" userId="7dec15aa-df9c-4e56-83fb-de5e1da84347" providerId="ADAL" clId="{5F5A64CD-14DA-4429-AD0D-339DD7191AF6}" dt="2024-06-02T19:47:27.845" v="26" actId="26606"/>
+          <ac:spMkLst>
+            <pc:docMk/>
+            <pc:sldMk cId="4202033261" sldId="256"/>
+            <ac:spMk id="9" creationId="{C1DD1A8A-57D5-4A81-AD04-532B043C5611}"/>
+          </ac:spMkLst>
+        </pc:spChg>
+        <pc:spChg chg="add del mod">
+          <ac:chgData name="João Gaspar" userId="7dec15aa-df9c-4e56-83fb-de5e1da84347" providerId="ADAL" clId="{5F5A64CD-14DA-4429-AD0D-339DD7191AF6}" dt="2024-06-02T21:57:10.568" v="331" actId="478"/>
+          <ac:spMkLst>
+            <pc:docMk/>
+            <pc:sldMk cId="4202033261" sldId="256"/>
+            <ac:spMk id="10" creationId="{62B289E1-7B23-31C8-F736-5AE442C59EA0}"/>
+          </ac:spMkLst>
+        </pc:spChg>
+        <pc:spChg chg="add del mod">
+          <ac:chgData name="João Gaspar" userId="7dec15aa-df9c-4e56-83fb-de5e1da84347" providerId="ADAL" clId="{5F5A64CD-14DA-4429-AD0D-339DD7191AF6}" dt="2024-06-02T21:55:18.470" v="289" actId="478"/>
+          <ac:spMkLst>
+            <pc:docMk/>
+            <pc:sldMk cId="4202033261" sldId="256"/>
+            <ac:spMk id="11" creationId="{D08AA367-0BA7-4BD0-941A-798750D66C23}"/>
+          </ac:spMkLst>
+        </pc:spChg>
+        <pc:spChg chg="add mod">
+          <ac:chgData name="João Gaspar" userId="7dec15aa-df9c-4e56-83fb-de5e1da84347" providerId="ADAL" clId="{5F5A64CD-14DA-4429-AD0D-339DD7191AF6}" dt="2024-06-02T21:55:29.052" v="290" actId="207"/>
+          <ac:spMkLst>
+            <pc:docMk/>
+            <pc:sldMk cId="4202033261" sldId="256"/>
+            <ac:spMk id="12" creationId="{F9AB9492-B00B-8872-D353-CF19E1834A8A}"/>
+          </ac:spMkLst>
+        </pc:spChg>
+        <pc:spChg chg="add mod">
+          <ac:chgData name="João Gaspar" userId="7dec15aa-df9c-4e56-83fb-de5e1da84347" providerId="ADAL" clId="{5F5A64CD-14DA-4429-AD0D-339DD7191AF6}" dt="2024-06-02T21:57:12.289" v="333" actId="207"/>
+          <ac:spMkLst>
+            <pc:docMk/>
+            <pc:sldMk cId="4202033261" sldId="256"/>
+            <ac:spMk id="13" creationId="{553C187F-04E9-F835-9084-3CA1B06D94FF}"/>
+          </ac:spMkLst>
+        </pc:spChg>
+        <pc:picChg chg="add">
+          <ac:chgData name="João Gaspar" userId="7dec15aa-df9c-4e56-83fb-de5e1da84347" providerId="ADAL" clId="{5F5A64CD-14DA-4429-AD0D-339DD7191AF6}" dt="2024-06-02T19:47:27.845" v="26" actId="26606"/>
+          <ac:picMkLst>
+            <pc:docMk/>
+            <pc:sldMk cId="4202033261" sldId="256"/>
+            <ac:picMk id="6" creationId="{D6DC46D9-EA7D-9B2F-C7D3-94E88D11DF35}"/>
+          </ac:picMkLst>
+        </pc:picChg>
+        <pc:picChg chg="add del mod">
+          <ac:chgData name="João Gaspar" userId="7dec15aa-df9c-4e56-83fb-de5e1da84347" providerId="ADAL" clId="{5F5A64CD-14DA-4429-AD0D-339DD7191AF6}" dt="2024-06-02T19:47:22.091" v="25" actId="478"/>
+          <ac:picMkLst>
+            <pc:docMk/>
+            <pc:sldMk cId="4202033261" sldId="256"/>
+            <ac:picMk id="7" creationId="{47ABA087-8182-3D3A-32DD-A82D250FC98D}"/>
+          </ac:picMkLst>
+        </pc:picChg>
+      </pc:sldChg>
+      <pc:sldChg chg="addSp delSp modSp mod setBg">
+        <pc:chgData name="João Gaspar" userId="7dec15aa-df9c-4e56-83fb-de5e1da84347" providerId="ADAL" clId="{5F5A64CD-14DA-4429-AD0D-339DD7191AF6}" dt="2024-06-02T22:14:20.945" v="714" actId="27636"/>
+        <pc:sldMkLst>
+          <pc:docMk/>
+          <pc:sldMk cId="3190298846" sldId="257"/>
+        </pc:sldMkLst>
+        <pc:spChg chg="mod">
+          <ac:chgData name="João Gaspar" userId="7dec15aa-df9c-4e56-83fb-de5e1da84347" providerId="ADAL" clId="{5F5A64CD-14DA-4429-AD0D-339DD7191AF6}" dt="2024-06-02T20:50:39.979" v="124" actId="1076"/>
+          <ac:spMkLst>
+            <pc:docMk/>
+            <pc:sldMk cId="3190298846" sldId="257"/>
+            <ac:spMk id="2" creationId="{563673AD-ED13-D61E-386F-BDEF278C99A6}"/>
+          </ac:spMkLst>
+        </pc:spChg>
+        <pc:spChg chg="mod">
+          <ac:chgData name="João Gaspar" userId="7dec15aa-df9c-4e56-83fb-de5e1da84347" providerId="ADAL" clId="{5F5A64CD-14DA-4429-AD0D-339DD7191AF6}" dt="2024-06-02T22:14:20.945" v="714" actId="27636"/>
+          <ac:spMkLst>
+            <pc:docMk/>
+            <pc:sldMk cId="3190298846" sldId="257"/>
+            <ac:spMk id="3" creationId="{E24A2F5C-F60B-CFE4-C4B8-B078B376D440}"/>
+          </ac:spMkLst>
+        </pc:spChg>
+        <pc:spChg chg="add del mod">
+          <ac:chgData name="João Gaspar" userId="7dec15aa-df9c-4e56-83fb-de5e1da84347" providerId="ADAL" clId="{5F5A64CD-14DA-4429-AD0D-339DD7191AF6}" dt="2024-06-02T21:55:08.934" v="287" actId="478"/>
+          <ac:spMkLst>
+            <pc:docMk/>
+            <pc:sldMk cId="3190298846" sldId="257"/>
+            <ac:spMk id="4" creationId="{1DBA1369-5566-5583-1D4C-3B18759FF354}"/>
+          </ac:spMkLst>
+        </pc:spChg>
+        <pc:spChg chg="mod ord">
+          <ac:chgData name="João Gaspar" userId="7dec15aa-df9c-4e56-83fb-de5e1da84347" providerId="ADAL" clId="{5F5A64CD-14DA-4429-AD0D-339DD7191AF6}" dt="2024-06-02T19:47:59.637" v="29" actId="26606"/>
+          <ac:spMkLst>
+            <pc:docMk/>
+            <pc:sldMk cId="3190298846" sldId="257"/>
+            <ac:spMk id="5" creationId="{7B81D6DC-8FED-F23F-1030-4B65AB9A598D}"/>
+          </ac:spMkLst>
+        </pc:spChg>
+        <pc:spChg chg="del mod">
+          <ac:chgData name="João Gaspar" userId="7dec15aa-df9c-4e56-83fb-de5e1da84347" providerId="ADAL" clId="{5F5A64CD-14DA-4429-AD0D-339DD7191AF6}" dt="2024-06-02T21:57:06.620" v="329" actId="478"/>
+          <ac:spMkLst>
+            <pc:docMk/>
+            <pc:sldMk cId="3190298846" sldId="257"/>
+            <ac:spMk id="6" creationId="{5D06981F-3CC6-BEED-655A-47BEBF52B2ED}"/>
+          </ac:spMkLst>
+        </pc:spChg>
+        <pc:spChg chg="add mod">
+          <ac:chgData name="João Gaspar" userId="7dec15aa-df9c-4e56-83fb-de5e1da84347" providerId="ADAL" clId="{5F5A64CD-14DA-4429-AD0D-339DD7191AF6}" dt="2024-06-02T21:57:17.659" v="334" actId="207"/>
+          <ac:spMkLst>
+            <pc:docMk/>
+            <pc:sldMk cId="3190298846" sldId="257"/>
+            <ac:spMk id="7" creationId="{9ED0A3A5-E52B-0C4A-51C2-A7D7BB976161}"/>
+          </ac:spMkLst>
+        </pc:spChg>
+        <pc:spChg chg="add">
+          <ac:chgData name="João Gaspar" userId="7dec15aa-df9c-4e56-83fb-de5e1da84347" providerId="ADAL" clId="{5F5A64CD-14DA-4429-AD0D-339DD7191AF6}" dt="2024-06-02T19:47:59.637" v="29" actId="26606"/>
+          <ac:spMkLst>
+            <pc:docMk/>
+            <pc:sldMk cId="3190298846" sldId="257"/>
+            <ac:spMk id="12" creationId="{3ECBE1F1-D69B-4AFA-ABD5-8E41720EF6DE}"/>
+          </ac:spMkLst>
+        </pc:spChg>
+        <pc:spChg chg="add">
+          <ac:chgData name="João Gaspar" userId="7dec15aa-df9c-4e56-83fb-de5e1da84347" providerId="ADAL" clId="{5F5A64CD-14DA-4429-AD0D-339DD7191AF6}" dt="2024-06-02T19:47:59.637" v="29" actId="26606"/>
+          <ac:spMkLst>
+            <pc:docMk/>
+            <pc:sldMk cId="3190298846" sldId="257"/>
+            <ac:spMk id="14" creationId="{603A6265-E10C-4B85-9C20-E75FCAF9CC63}"/>
+          </ac:spMkLst>
+        </pc:spChg>
+        <pc:picChg chg="add mod">
+          <ac:chgData name="João Gaspar" userId="7dec15aa-df9c-4e56-83fb-de5e1da84347" providerId="ADAL" clId="{5F5A64CD-14DA-4429-AD0D-339DD7191AF6}" dt="2024-06-02T20:49:56.588" v="105" actId="14826"/>
+          <ac:picMkLst>
+            <pc:docMk/>
+            <pc:sldMk cId="3190298846" sldId="257"/>
+            <ac:picMk id="8" creationId="{553E8F7C-074D-8D9F-7FDA-ACA0EB2E6A9E}"/>
+          </ac:picMkLst>
+        </pc:picChg>
+      </pc:sldChg>
+      <pc:sldChg chg="addSp modSp del mod setBg">
+        <pc:chgData name="João Gaspar" userId="7dec15aa-df9c-4e56-83fb-de5e1da84347" providerId="ADAL" clId="{5F5A64CD-14DA-4429-AD0D-339DD7191AF6}" dt="2024-06-02T20:53:43.456" v="153" actId="47"/>
+        <pc:sldMkLst>
+          <pc:docMk/>
+          <pc:sldMk cId="2453939418" sldId="258"/>
+        </pc:sldMkLst>
+        <pc:spChg chg="mod">
+          <ac:chgData name="João Gaspar" userId="7dec15aa-df9c-4e56-83fb-de5e1da84347" providerId="ADAL" clId="{5F5A64CD-14DA-4429-AD0D-339DD7191AF6}" dt="2024-06-02T20:45:32.420" v="30" actId="26606"/>
+          <ac:spMkLst>
+            <pc:docMk/>
+            <pc:sldMk cId="2453939418" sldId="258"/>
+            <ac:spMk id="2" creationId="{A74DD990-9309-D707-B679-295DD784B8F8}"/>
+          </ac:spMkLst>
+        </pc:spChg>
+        <pc:spChg chg="mod">
+          <ac:chgData name="João Gaspar" userId="7dec15aa-df9c-4e56-83fb-de5e1da84347" providerId="ADAL" clId="{5F5A64CD-14DA-4429-AD0D-339DD7191AF6}" dt="2024-06-02T20:45:32.420" v="30" actId="26606"/>
+          <ac:spMkLst>
+            <pc:docMk/>
+            <pc:sldMk cId="2453939418" sldId="258"/>
+            <ac:spMk id="3" creationId="{69CEDF8A-2D7C-1EDC-03F2-EE94899FD802}"/>
+          </ac:spMkLst>
+        </pc:spChg>
+        <pc:spChg chg="mod">
+          <ac:chgData name="João Gaspar" userId="7dec15aa-df9c-4e56-83fb-de5e1da84347" providerId="ADAL" clId="{5F5A64CD-14DA-4429-AD0D-339DD7191AF6}" dt="2024-06-02T20:45:32.420" v="30" actId="26606"/>
+          <ac:spMkLst>
+            <pc:docMk/>
+            <pc:sldMk cId="2453939418" sldId="258"/>
+            <ac:spMk id="4" creationId="{D0CCF110-5399-143F-71BC-991248911FFE}"/>
+          </ac:spMkLst>
+        </pc:spChg>
+        <pc:spChg chg="mod">
+          <ac:chgData name="João Gaspar" userId="7dec15aa-df9c-4e56-83fb-de5e1da84347" providerId="ADAL" clId="{5F5A64CD-14DA-4429-AD0D-339DD7191AF6}" dt="2024-06-02T20:45:32.420" v="30" actId="26606"/>
+          <ac:spMkLst>
+            <pc:docMk/>
+            <pc:sldMk cId="2453939418" sldId="258"/>
+            <ac:spMk id="5" creationId="{AF153F99-2DC2-5A29-B9D0-3A08D66689CF}"/>
+          </ac:spMkLst>
+        </pc:spChg>
+        <pc:spChg chg="add">
+          <ac:chgData name="João Gaspar" userId="7dec15aa-df9c-4e56-83fb-de5e1da84347" providerId="ADAL" clId="{5F5A64CD-14DA-4429-AD0D-339DD7191AF6}" dt="2024-06-02T20:45:32.420" v="30" actId="26606"/>
+          <ac:spMkLst>
+            <pc:docMk/>
+            <pc:sldMk cId="2453939418" sldId="258"/>
+            <ac:spMk id="11" creationId="{C0763A76-9F1C-4FC5-82B7-DD475DA461B2}"/>
+          </ac:spMkLst>
+        </pc:spChg>
+        <pc:spChg chg="add">
+          <ac:chgData name="João Gaspar" userId="7dec15aa-df9c-4e56-83fb-de5e1da84347" providerId="ADAL" clId="{5F5A64CD-14DA-4429-AD0D-339DD7191AF6}" dt="2024-06-02T20:45:32.420" v="30" actId="26606"/>
+          <ac:spMkLst>
+            <pc:docMk/>
+            <pc:sldMk cId="2453939418" sldId="258"/>
+            <ac:spMk id="13" creationId="{E81BF4F6-F2CF-4984-9D14-D6966D92F99F}"/>
+          </ac:spMkLst>
+        </pc:spChg>
+        <pc:picChg chg="add">
+          <ac:chgData name="João Gaspar" userId="7dec15aa-df9c-4e56-83fb-de5e1da84347" providerId="ADAL" clId="{5F5A64CD-14DA-4429-AD0D-339DD7191AF6}" dt="2024-06-02T20:45:32.420" v="30" actId="26606"/>
+          <ac:picMkLst>
+            <pc:docMk/>
+            <pc:sldMk cId="2453939418" sldId="258"/>
+            <ac:picMk id="7" creationId="{BC753DBE-E68C-E6F0-58CB-C0B304A42FDB}"/>
+          </ac:picMkLst>
+        </pc:picChg>
+      </pc:sldChg>
+      <pc:sldChg chg="addSp delSp modSp mod setBg">
+        <pc:chgData name="João Gaspar" userId="7dec15aa-df9c-4e56-83fb-de5e1da84347" providerId="ADAL" clId="{5F5A64CD-14DA-4429-AD0D-339DD7191AF6}" dt="2024-06-02T22:14:17.003" v="712" actId="2710"/>
+        <pc:sldMkLst>
+          <pc:docMk/>
+          <pc:sldMk cId="1111987917" sldId="259"/>
+        </pc:sldMkLst>
+        <pc:spChg chg="mod">
+          <ac:chgData name="João Gaspar" userId="7dec15aa-df9c-4e56-83fb-de5e1da84347" providerId="ADAL" clId="{5F5A64CD-14DA-4429-AD0D-339DD7191AF6}" dt="2024-06-02T20:45:36.183" v="31" actId="26606"/>
+          <ac:spMkLst>
+            <pc:docMk/>
+            <pc:sldMk cId="1111987917" sldId="259"/>
+            <ac:spMk id="2" creationId="{44DB5274-431B-6EFB-56B1-B3309A117188}"/>
+          </ac:spMkLst>
+        </pc:spChg>
+        <pc:spChg chg="mod">
+          <ac:chgData name="João Gaspar" userId="7dec15aa-df9c-4e56-83fb-de5e1da84347" providerId="ADAL" clId="{5F5A64CD-14DA-4429-AD0D-339DD7191AF6}" dt="2024-06-02T22:14:17.003" v="712" actId="2710"/>
+          <ac:spMkLst>
+            <pc:docMk/>
+            <pc:sldMk cId="1111987917" sldId="259"/>
+            <ac:spMk id="3" creationId="{340F0F31-346D-0EB3-59C5-A11D190BB3CE}"/>
+          </ac:spMkLst>
+        </pc:spChg>
+        <pc:spChg chg="del mod">
+          <ac:chgData name="João Gaspar" userId="7dec15aa-df9c-4e56-83fb-de5e1da84347" providerId="ADAL" clId="{5F5A64CD-14DA-4429-AD0D-339DD7191AF6}" dt="2024-06-02T21:57:03.373" v="327" actId="478"/>
+          <ac:spMkLst>
+            <pc:docMk/>
+            <pc:sldMk cId="1111987917" sldId="259"/>
+            <ac:spMk id="4" creationId="{3735F962-797A-96FB-8054-4EA8F37D6D60}"/>
+          </ac:spMkLst>
+        </pc:spChg>
+        <pc:spChg chg="mod">
+          <ac:chgData name="João Gaspar" userId="7dec15aa-df9c-4e56-83fb-de5e1da84347" providerId="ADAL" clId="{5F5A64CD-14DA-4429-AD0D-339DD7191AF6}" dt="2024-06-02T20:45:36.183" v="31" actId="26606"/>
+          <ac:spMkLst>
+            <pc:docMk/>
+            <pc:sldMk cId="1111987917" sldId="259"/>
+            <ac:spMk id="5" creationId="{8DBCDEA0-CDC7-BE53-B012-696C9B1C0AE7}"/>
+          </ac:spMkLst>
+        </pc:spChg>
+        <pc:spChg chg="add mod">
+          <ac:chgData name="João Gaspar" userId="7dec15aa-df9c-4e56-83fb-de5e1da84347" providerId="ADAL" clId="{5F5A64CD-14DA-4429-AD0D-339DD7191AF6}" dt="2024-06-02T21:57:03.677" v="328"/>
+          <ac:spMkLst>
+            <pc:docMk/>
+            <pc:sldMk cId="1111987917" sldId="259"/>
+            <ac:spMk id="6" creationId="{9B218848-1FA0-DA85-A878-6DD1EFBE1598}"/>
+          </ac:spMkLst>
+        </pc:spChg>
+        <pc:spChg chg="add del mod">
+          <ac:chgData name="João Gaspar" userId="7dec15aa-df9c-4e56-83fb-de5e1da84347" providerId="ADAL" clId="{5F5A64CD-14DA-4429-AD0D-339DD7191AF6}" dt="2024-06-02T21:57:29.942" v="336" actId="478"/>
+          <ac:spMkLst>
+            <pc:docMk/>
+            <pc:sldMk cId="1111987917" sldId="259"/>
+            <ac:spMk id="8" creationId="{13C58D86-47D6-7146-2673-EBE67B2E5A8B}"/>
+          </ac:spMkLst>
+        </pc:spChg>
+        <pc:spChg chg="add">
+          <ac:chgData name="João Gaspar" userId="7dec15aa-df9c-4e56-83fb-de5e1da84347" providerId="ADAL" clId="{5F5A64CD-14DA-4429-AD0D-339DD7191AF6}" dt="2024-06-02T20:45:36.183" v="31" actId="26606"/>
+          <ac:spMkLst>
+            <pc:docMk/>
+            <pc:sldMk cId="1111987917" sldId="259"/>
+            <ac:spMk id="11" creationId="{C0763A76-9F1C-4FC5-82B7-DD475DA461B2}"/>
+          </ac:spMkLst>
+        </pc:spChg>
+        <pc:spChg chg="add">
+          <ac:chgData name="João Gaspar" userId="7dec15aa-df9c-4e56-83fb-de5e1da84347" providerId="ADAL" clId="{5F5A64CD-14DA-4429-AD0D-339DD7191AF6}" dt="2024-06-02T20:45:36.183" v="31" actId="26606"/>
+          <ac:spMkLst>
+            <pc:docMk/>
+            <pc:sldMk cId="1111987917" sldId="259"/>
+            <ac:spMk id="13" creationId="{E81BF4F6-F2CF-4984-9D14-D6966D92F99F}"/>
+          </ac:spMkLst>
+        </pc:spChg>
+        <pc:picChg chg="add mod">
+          <ac:chgData name="João Gaspar" userId="7dec15aa-df9c-4e56-83fb-de5e1da84347" providerId="ADAL" clId="{5F5A64CD-14DA-4429-AD0D-339DD7191AF6}" dt="2024-06-02T21:54:24.970" v="285" actId="14826"/>
+          <ac:picMkLst>
+            <pc:docMk/>
+            <pc:sldMk cId="1111987917" sldId="259"/>
+            <ac:picMk id="7" creationId="{CC918716-95D2-CCED-CC13-030701CBDC63}"/>
+          </ac:picMkLst>
+        </pc:picChg>
+      </pc:sldChg>
+      <pc:sldChg chg="addSp delSp modSp mod setBg modNotesTx">
+        <pc:chgData name="João Gaspar" userId="7dec15aa-df9c-4e56-83fb-de5e1da84347" providerId="ADAL" clId="{5F5A64CD-14DA-4429-AD0D-339DD7191AF6}" dt="2024-06-02T22:14:13.101" v="711" actId="2710"/>
+        <pc:sldMkLst>
+          <pc:docMk/>
+          <pc:sldMk cId="1623836021" sldId="260"/>
+        </pc:sldMkLst>
+        <pc:spChg chg="mod">
+          <ac:chgData name="João Gaspar" userId="7dec15aa-df9c-4e56-83fb-de5e1da84347" providerId="ADAL" clId="{5F5A64CD-14DA-4429-AD0D-339DD7191AF6}" dt="2024-06-02T20:45:42.415" v="32" actId="26606"/>
+          <ac:spMkLst>
+            <pc:docMk/>
+            <pc:sldMk cId="1623836021" sldId="260"/>
+            <ac:spMk id="2" creationId="{DC8B6D5C-15CE-B61B-84A3-E2BD3FF4A127}"/>
+          </ac:spMkLst>
+        </pc:spChg>
+        <pc:spChg chg="mod">
+          <ac:chgData name="João Gaspar" userId="7dec15aa-df9c-4e56-83fb-de5e1da84347" providerId="ADAL" clId="{5F5A64CD-14DA-4429-AD0D-339DD7191AF6}" dt="2024-06-02T22:14:13.101" v="711" actId="2710"/>
+          <ac:spMkLst>
+            <pc:docMk/>
+            <pc:sldMk cId="1623836021" sldId="260"/>
+            <ac:spMk id="3" creationId="{101CFC4D-8A21-E6F7-817A-F16C73908F00}"/>
+          </ac:spMkLst>
+        </pc:spChg>
+        <pc:spChg chg="del mod">
+          <ac:chgData name="João Gaspar" userId="7dec15aa-df9c-4e56-83fb-de5e1da84347" providerId="ADAL" clId="{5F5A64CD-14DA-4429-AD0D-339DD7191AF6}" dt="2024-06-02T21:56:58.932" v="325" actId="478"/>
+          <ac:spMkLst>
+            <pc:docMk/>
+            <pc:sldMk cId="1623836021" sldId="260"/>
+            <ac:spMk id="4" creationId="{84085DA4-8C08-D6E6-244C-6F9A02049D5E}"/>
+          </ac:spMkLst>
+        </pc:spChg>
+        <pc:spChg chg="mod">
+          <ac:chgData name="João Gaspar" userId="7dec15aa-df9c-4e56-83fb-de5e1da84347" providerId="ADAL" clId="{5F5A64CD-14DA-4429-AD0D-339DD7191AF6}" dt="2024-06-02T20:45:42.415" v="32" actId="26606"/>
+          <ac:spMkLst>
+            <pc:docMk/>
+            <pc:sldMk cId="1623836021" sldId="260"/>
+            <ac:spMk id="5" creationId="{8DFE5CDA-5E21-71DD-F590-331350D021C5}"/>
+          </ac:spMkLst>
+        </pc:spChg>
+        <pc:spChg chg="add mod">
+          <ac:chgData name="João Gaspar" userId="7dec15aa-df9c-4e56-83fb-de5e1da84347" providerId="ADAL" clId="{5F5A64CD-14DA-4429-AD0D-339DD7191AF6}" dt="2024-06-02T21:57:34.029" v="337" actId="207"/>
+          <ac:spMkLst>
+            <pc:docMk/>
+            <pc:sldMk cId="1623836021" sldId="260"/>
+            <ac:spMk id="6" creationId="{DF4FE554-BEE3-8209-714A-28C16066FA19}"/>
+          </ac:spMkLst>
+        </pc:spChg>
+        <pc:spChg chg="add">
+          <ac:chgData name="João Gaspar" userId="7dec15aa-df9c-4e56-83fb-de5e1da84347" providerId="ADAL" clId="{5F5A64CD-14DA-4429-AD0D-339DD7191AF6}" dt="2024-06-02T20:45:42.415" v="32" actId="26606"/>
+          <ac:spMkLst>
+            <pc:docMk/>
+            <pc:sldMk cId="1623836021" sldId="260"/>
+            <ac:spMk id="11" creationId="{B65C0385-5E30-4D2E-AF9F-4639659D34E9}"/>
+          </ac:spMkLst>
+        </pc:spChg>
+        <pc:spChg chg="add">
+          <ac:chgData name="João Gaspar" userId="7dec15aa-df9c-4e56-83fb-de5e1da84347" providerId="ADAL" clId="{5F5A64CD-14DA-4429-AD0D-339DD7191AF6}" dt="2024-06-02T20:45:42.415" v="32" actId="26606"/>
+          <ac:spMkLst>
+            <pc:docMk/>
+            <pc:sldMk cId="1623836021" sldId="260"/>
+            <ac:spMk id="13" creationId="{E335820B-3A29-42C5-AA8D-10ECA43CD985}"/>
+          </ac:spMkLst>
+        </pc:spChg>
+        <pc:picChg chg="add mod">
+          <ac:chgData name="João Gaspar" userId="7dec15aa-df9c-4e56-83fb-de5e1da84347" providerId="ADAL" clId="{5F5A64CD-14DA-4429-AD0D-339DD7191AF6}" dt="2024-06-02T21:53:50.346" v="284" actId="14100"/>
+          <ac:picMkLst>
+            <pc:docMk/>
+            <pc:sldMk cId="1623836021" sldId="260"/>
+            <ac:picMk id="7" creationId="{796166FB-D679-52F5-022E-0B0D60A315F4}"/>
+          </ac:picMkLst>
+        </pc:picChg>
+      </pc:sldChg>
+      <pc:sldChg chg="addSp delSp modSp mod setBg">
+        <pc:chgData name="João Gaspar" userId="7dec15aa-df9c-4e56-83fb-de5e1da84347" providerId="ADAL" clId="{5F5A64CD-14DA-4429-AD0D-339DD7191AF6}" dt="2024-06-02T22:14:09.296" v="710" actId="2710"/>
+        <pc:sldMkLst>
+          <pc:docMk/>
+          <pc:sldMk cId="2569888114" sldId="261"/>
+        </pc:sldMkLst>
+        <pc:spChg chg="mod">
+          <ac:chgData name="João Gaspar" userId="7dec15aa-df9c-4e56-83fb-de5e1da84347" providerId="ADAL" clId="{5F5A64CD-14DA-4429-AD0D-339DD7191AF6}" dt="2024-06-02T21:43:09.006" v="252" actId="26606"/>
+          <ac:spMkLst>
+            <pc:docMk/>
+            <pc:sldMk cId="2569888114" sldId="261"/>
+            <ac:spMk id="2" creationId="{D4EAC386-2116-E6B4-0B03-45113820C92E}"/>
+          </ac:spMkLst>
+        </pc:spChg>
+        <pc:spChg chg="mod">
+          <ac:chgData name="João Gaspar" userId="7dec15aa-df9c-4e56-83fb-de5e1da84347" providerId="ADAL" clId="{5F5A64CD-14DA-4429-AD0D-339DD7191AF6}" dt="2024-06-02T22:14:09.296" v="710" actId="2710"/>
+          <ac:spMkLst>
+            <pc:docMk/>
+            <pc:sldMk cId="2569888114" sldId="261"/>
+            <ac:spMk id="3" creationId="{C63E7569-D78E-A980-42C5-E03FCBCB4FAE}"/>
+          </ac:spMkLst>
+        </pc:spChg>
+        <pc:spChg chg="del mod">
+          <ac:chgData name="João Gaspar" userId="7dec15aa-df9c-4e56-83fb-de5e1da84347" providerId="ADAL" clId="{5F5A64CD-14DA-4429-AD0D-339DD7191AF6}" dt="2024-06-02T21:56:55.643" v="323" actId="478"/>
+          <ac:spMkLst>
+            <pc:docMk/>
+            <pc:sldMk cId="2569888114" sldId="261"/>
+            <ac:spMk id="4" creationId="{8FF36D00-7B5C-37A5-80A6-33841E343B24}"/>
+          </ac:spMkLst>
+        </pc:spChg>
+        <pc:spChg chg="mod">
+          <ac:chgData name="João Gaspar" userId="7dec15aa-df9c-4e56-83fb-de5e1da84347" providerId="ADAL" clId="{5F5A64CD-14DA-4429-AD0D-339DD7191AF6}" dt="2024-06-02T21:43:09.006" v="252" actId="26606"/>
+          <ac:spMkLst>
+            <pc:docMk/>
+            <pc:sldMk cId="2569888114" sldId="261"/>
+            <ac:spMk id="5" creationId="{B8B4F806-50C1-2A3B-B7FF-66DE4B6A8F81}"/>
+          </ac:spMkLst>
+        </pc:spChg>
+        <pc:spChg chg="add mod">
+          <ac:chgData name="João Gaspar" userId="7dec15aa-df9c-4e56-83fb-de5e1da84347" providerId="ADAL" clId="{5F5A64CD-14DA-4429-AD0D-339DD7191AF6}" dt="2024-06-02T21:56:56.020" v="324"/>
+          <ac:spMkLst>
+            <pc:docMk/>
+            <pc:sldMk cId="2569888114" sldId="261"/>
+            <ac:spMk id="9" creationId="{657D4DD8-B153-875E-387A-A6DA46DCA0A3}"/>
+          </ac:spMkLst>
+        </pc:spChg>
+        <pc:spChg chg="add del">
+          <ac:chgData name="João Gaspar" userId="7dec15aa-df9c-4e56-83fb-de5e1da84347" providerId="ADAL" clId="{5F5A64CD-14DA-4429-AD0D-339DD7191AF6}" dt="2024-06-02T21:43:09.006" v="252" actId="26606"/>
+          <ac:spMkLst>
+            <pc:docMk/>
+            <pc:sldMk cId="2569888114" sldId="261"/>
+            <ac:spMk id="11" creationId="{AE3A741D-C19B-960A-5803-1C5887147820}"/>
+          </ac:spMkLst>
+        </pc:spChg>
+        <pc:spChg chg="add del">
+          <ac:chgData name="João Gaspar" userId="7dec15aa-df9c-4e56-83fb-de5e1da84347" providerId="ADAL" clId="{5F5A64CD-14DA-4429-AD0D-339DD7191AF6}" dt="2024-06-02T21:43:09.006" v="252" actId="26606"/>
+          <ac:spMkLst>
+            <pc:docMk/>
+            <pc:sldMk cId="2569888114" sldId="261"/>
+            <ac:spMk id="13" creationId="{9C3A50E9-9119-7BC3-083B-2D84CCC78E47}"/>
+          </ac:spMkLst>
+        </pc:spChg>
+        <pc:spChg chg="add del">
+          <ac:chgData name="João Gaspar" userId="7dec15aa-df9c-4e56-83fb-de5e1da84347" providerId="ADAL" clId="{5F5A64CD-14DA-4429-AD0D-339DD7191AF6}" dt="2024-06-02T21:43:09.006" v="252" actId="26606"/>
+          <ac:spMkLst>
+            <pc:docMk/>
+            <pc:sldMk cId="2569888114" sldId="261"/>
+            <ac:spMk id="15" creationId="{DC39DE25-0E4E-0AA7-0932-1D78C2372786}"/>
+          </ac:spMkLst>
+        </pc:spChg>
+        <pc:spChg chg="add del">
+          <ac:chgData name="João Gaspar" userId="7dec15aa-df9c-4e56-83fb-de5e1da84347" providerId="ADAL" clId="{5F5A64CD-14DA-4429-AD0D-339DD7191AF6}" dt="2024-06-02T21:43:09.006" v="252" actId="26606"/>
+          <ac:spMkLst>
+            <pc:docMk/>
+            <pc:sldMk cId="2569888114" sldId="261"/>
+            <ac:spMk id="17" creationId="{8D6EA299-0840-6DEA-E670-C49AEBC87E89}"/>
+          </ac:spMkLst>
+        </pc:spChg>
+        <pc:spChg chg="add">
+          <ac:chgData name="João Gaspar" userId="7dec15aa-df9c-4e56-83fb-de5e1da84347" providerId="ADAL" clId="{5F5A64CD-14DA-4429-AD0D-339DD7191AF6}" dt="2024-06-02T21:43:09.006" v="252" actId="26606"/>
+          <ac:spMkLst>
+            <pc:docMk/>
+            <pc:sldMk cId="2569888114" sldId="261"/>
+            <ac:spMk id="22" creationId="{C0763A76-9F1C-4FC5-82B7-DD475DA461B2}"/>
+          </ac:spMkLst>
+        </pc:spChg>
+        <pc:spChg chg="add">
+          <ac:chgData name="João Gaspar" userId="7dec15aa-df9c-4e56-83fb-de5e1da84347" providerId="ADAL" clId="{5F5A64CD-14DA-4429-AD0D-339DD7191AF6}" dt="2024-06-02T21:43:09.006" v="252" actId="26606"/>
+          <ac:spMkLst>
+            <pc:docMk/>
+            <pc:sldMk cId="2569888114" sldId="261"/>
+            <ac:spMk id="24" creationId="{E81BF4F6-F2CF-4984-9D14-D6966D92F99F}"/>
+          </ac:spMkLst>
+        </pc:spChg>
+        <pc:picChg chg="add mod">
+          <ac:chgData name="João Gaspar" userId="7dec15aa-df9c-4e56-83fb-de5e1da84347" providerId="ADAL" clId="{5F5A64CD-14DA-4429-AD0D-339DD7191AF6}" dt="2024-06-02T21:42:54.411" v="250"/>
+          <ac:picMkLst>
+            <pc:docMk/>
+            <pc:sldMk cId="2569888114" sldId="261"/>
+            <ac:picMk id="6" creationId="{86CA146D-8624-719A-01F3-F6D87063F06C}"/>
+          </ac:picMkLst>
+        </pc:picChg>
+        <pc:picChg chg="add del mod">
+          <ac:chgData name="João Gaspar" userId="7dec15aa-df9c-4e56-83fb-de5e1da84347" providerId="ADAL" clId="{5F5A64CD-14DA-4429-AD0D-339DD7191AF6}" dt="2024-06-02T21:43:17.412" v="255" actId="14826"/>
+          <ac:picMkLst>
+            <pc:docMk/>
+            <pc:sldMk cId="2569888114" sldId="261"/>
+            <ac:picMk id="7" creationId="{E4A09083-226A-4A96-D9E8-8941DA5EF78C}"/>
+          </ac:picMkLst>
+        </pc:picChg>
+        <pc:picChg chg="add del mod">
+          <ac:chgData name="João Gaspar" userId="7dec15aa-df9c-4e56-83fb-de5e1da84347" providerId="ADAL" clId="{5F5A64CD-14DA-4429-AD0D-339DD7191AF6}" dt="2024-06-02T21:43:12.447" v="254" actId="478"/>
+          <ac:picMkLst>
+            <pc:docMk/>
+            <pc:sldMk cId="2569888114" sldId="261"/>
+            <ac:picMk id="8" creationId="{B571A055-3F1E-BEC3-C729-404F1657F1F8}"/>
+          </ac:picMkLst>
+        </pc:picChg>
+      </pc:sldChg>
+      <pc:sldChg chg="addSp delSp modSp mod setBg">
+        <pc:chgData name="João Gaspar" userId="7dec15aa-df9c-4e56-83fb-de5e1da84347" providerId="ADAL" clId="{5F5A64CD-14DA-4429-AD0D-339DD7191AF6}" dt="2024-06-02T22:14:02.941" v="709" actId="2710"/>
+        <pc:sldMkLst>
+          <pc:docMk/>
+          <pc:sldMk cId="567565778" sldId="262"/>
+        </pc:sldMkLst>
+        <pc:spChg chg="mod">
+          <ac:chgData name="João Gaspar" userId="7dec15aa-df9c-4e56-83fb-de5e1da84347" providerId="ADAL" clId="{5F5A64CD-14DA-4429-AD0D-339DD7191AF6}" dt="2024-06-02T22:04:52.283" v="684" actId="26606"/>
+          <ac:spMkLst>
+            <pc:docMk/>
+            <pc:sldMk cId="567565778" sldId="262"/>
+            <ac:spMk id="2" creationId="{33446C54-F7AE-CA4F-E5CE-50948D8171E6}"/>
+          </ac:spMkLst>
+        </pc:spChg>
+        <pc:spChg chg="mod">
+          <ac:chgData name="João Gaspar" userId="7dec15aa-df9c-4e56-83fb-de5e1da84347" providerId="ADAL" clId="{5F5A64CD-14DA-4429-AD0D-339DD7191AF6}" dt="2024-06-02T22:14:02.941" v="709" actId="2710"/>
+          <ac:spMkLst>
+            <pc:docMk/>
+            <pc:sldMk cId="567565778" sldId="262"/>
+            <ac:spMk id="3" creationId="{02672098-09A7-756F-7E43-F974D6424264}"/>
+          </ac:spMkLst>
+        </pc:spChg>
+        <pc:spChg chg="del mod">
+          <ac:chgData name="João Gaspar" userId="7dec15aa-df9c-4e56-83fb-de5e1da84347" providerId="ADAL" clId="{5F5A64CD-14DA-4429-AD0D-339DD7191AF6}" dt="2024-06-02T21:56:52.353" v="321" actId="478"/>
+          <ac:spMkLst>
+            <pc:docMk/>
+            <pc:sldMk cId="567565778" sldId="262"/>
+            <ac:spMk id="4" creationId="{64CC3025-9489-A6D4-FC95-F988DA8BBC1E}"/>
+          </ac:spMkLst>
+        </pc:spChg>
+        <pc:spChg chg="mod ord">
+          <ac:chgData name="João Gaspar" userId="7dec15aa-df9c-4e56-83fb-de5e1da84347" providerId="ADAL" clId="{5F5A64CD-14DA-4429-AD0D-339DD7191AF6}" dt="2024-06-02T22:04:52.283" v="684" actId="26606"/>
+          <ac:spMkLst>
+            <pc:docMk/>
+            <pc:sldMk cId="567565778" sldId="262"/>
+            <ac:spMk id="5" creationId="{C6690917-D9BF-558B-1172-6B72C41CE0A0}"/>
+          </ac:spMkLst>
+        </pc:spChg>
+        <pc:spChg chg="add mod">
+          <ac:chgData name="João Gaspar" userId="7dec15aa-df9c-4e56-83fb-de5e1da84347" providerId="ADAL" clId="{5F5A64CD-14DA-4429-AD0D-339DD7191AF6}" dt="2024-06-02T22:04:52.283" v="684" actId="26606"/>
+          <ac:spMkLst>
+            <pc:docMk/>
+            <pc:sldMk cId="567565778" sldId="262"/>
+            <ac:spMk id="6" creationId="{9DEC26D1-9B75-2C97-F0C4-7EEBEEAE11F9}"/>
+          </ac:spMkLst>
+        </pc:spChg>
+        <pc:spChg chg="add del">
+          <ac:chgData name="João Gaspar" userId="7dec15aa-df9c-4e56-83fb-de5e1da84347" providerId="ADAL" clId="{5F5A64CD-14DA-4429-AD0D-339DD7191AF6}" dt="2024-06-02T20:46:07.913" v="35" actId="26606"/>
+          <ac:spMkLst>
+            <pc:docMk/>
+            <pc:sldMk cId="567565778" sldId="262"/>
+            <ac:spMk id="11" creationId="{AE3A741D-C19B-960A-5803-1C5887147820}"/>
+          </ac:spMkLst>
+        </pc:spChg>
+        <pc:spChg chg="add del">
+          <ac:chgData name="João Gaspar" userId="7dec15aa-df9c-4e56-83fb-de5e1da84347" providerId="ADAL" clId="{5F5A64CD-14DA-4429-AD0D-339DD7191AF6}" dt="2024-06-02T20:46:07.913" v="35" actId="26606"/>
+          <ac:spMkLst>
+            <pc:docMk/>
+            <pc:sldMk cId="567565778" sldId="262"/>
+            <ac:spMk id="13" creationId="{9C3A50E9-9119-7BC3-083B-2D84CCC78E47}"/>
+          </ac:spMkLst>
+        </pc:spChg>
+        <pc:spChg chg="add del">
+          <ac:chgData name="João Gaspar" userId="7dec15aa-df9c-4e56-83fb-de5e1da84347" providerId="ADAL" clId="{5F5A64CD-14DA-4429-AD0D-339DD7191AF6}" dt="2024-06-02T20:46:07.913" v="35" actId="26606"/>
+          <ac:spMkLst>
+            <pc:docMk/>
+            <pc:sldMk cId="567565778" sldId="262"/>
+            <ac:spMk id="15" creationId="{DC39DE25-0E4E-0AA7-0932-1D78C2372786}"/>
+          </ac:spMkLst>
+        </pc:spChg>
+        <pc:spChg chg="add del">
+          <ac:chgData name="João Gaspar" userId="7dec15aa-df9c-4e56-83fb-de5e1da84347" providerId="ADAL" clId="{5F5A64CD-14DA-4429-AD0D-339DD7191AF6}" dt="2024-06-02T20:46:07.913" v="35" actId="26606"/>
+          <ac:spMkLst>
+            <pc:docMk/>
+            <pc:sldMk cId="567565778" sldId="262"/>
+            <ac:spMk id="17" creationId="{8D6EA299-0840-6DEA-E670-C49AEBC87E89}"/>
+          </ac:spMkLst>
+        </pc:spChg>
+        <pc:spChg chg="add del">
+          <ac:chgData name="João Gaspar" userId="7dec15aa-df9c-4e56-83fb-de5e1da84347" providerId="ADAL" clId="{5F5A64CD-14DA-4429-AD0D-339DD7191AF6}" dt="2024-06-02T21:48:43.757" v="270" actId="26606"/>
+          <ac:spMkLst>
+            <pc:docMk/>
+            <pc:sldMk cId="567565778" sldId="262"/>
+            <ac:spMk id="19" creationId="{9F7D5CDA-D291-4307-BF55-1381FED29634}"/>
+          </ac:spMkLst>
+        </pc:spChg>
+        <pc:spChg chg="add del">
+          <ac:chgData name="João Gaspar" userId="7dec15aa-df9c-4e56-83fb-de5e1da84347" providerId="ADAL" clId="{5F5A64CD-14DA-4429-AD0D-339DD7191AF6}" dt="2024-06-02T21:49:35.755" v="277" actId="26606"/>
+          <ac:spMkLst>
+            <pc:docMk/>
+            <pc:sldMk cId="567565778" sldId="262"/>
+            <ac:spMk id="25" creationId="{C0763A76-9F1C-4FC5-82B7-DD475DA461B2}"/>
+          </ac:spMkLst>
+        </pc:spChg>
+        <pc:spChg chg="add del">
+          <ac:chgData name="João Gaspar" userId="7dec15aa-df9c-4e56-83fb-de5e1da84347" providerId="ADAL" clId="{5F5A64CD-14DA-4429-AD0D-339DD7191AF6}" dt="2024-06-02T21:49:35.755" v="277" actId="26606"/>
+          <ac:spMkLst>
+            <pc:docMk/>
+            <pc:sldMk cId="567565778" sldId="262"/>
+            <ac:spMk id="27" creationId="{E81BF4F6-F2CF-4984-9D14-D6966D92F99F}"/>
+          </ac:spMkLst>
+        </pc:spChg>
+        <pc:spChg chg="add del">
+          <ac:chgData name="João Gaspar" userId="7dec15aa-df9c-4e56-83fb-de5e1da84347" providerId="ADAL" clId="{5F5A64CD-14DA-4429-AD0D-339DD7191AF6}" dt="2024-06-02T21:49:24.767" v="276" actId="26606"/>
+          <ac:spMkLst>
+            <pc:docMk/>
+            <pc:sldMk cId="567565778" sldId="262"/>
+            <ac:spMk id="29" creationId="{E81BF4F6-F2CF-4984-9D14-D6966D92F99F}"/>
+          </ac:spMkLst>
+        </pc:spChg>
+        <pc:spChg chg="add del">
+          <ac:chgData name="João Gaspar" userId="7dec15aa-df9c-4e56-83fb-de5e1da84347" providerId="ADAL" clId="{5F5A64CD-14DA-4429-AD0D-339DD7191AF6}" dt="2024-06-02T22:04:52.283" v="684" actId="26606"/>
+          <ac:spMkLst>
+            <pc:docMk/>
+            <pc:sldMk cId="567565778" sldId="262"/>
+            <ac:spMk id="30" creationId="{C0763A76-9F1C-4FC5-82B7-DD475DA461B2}"/>
+          </ac:spMkLst>
+        </pc:spChg>
+        <pc:spChg chg="add del">
+          <ac:chgData name="João Gaspar" userId="7dec15aa-df9c-4e56-83fb-de5e1da84347" providerId="ADAL" clId="{5F5A64CD-14DA-4429-AD0D-339DD7191AF6}" dt="2024-06-02T22:04:52.283" v="684" actId="26606"/>
+          <ac:spMkLst>
+            <pc:docMk/>
+            <pc:sldMk cId="567565778" sldId="262"/>
+            <ac:spMk id="31" creationId="{E81BF4F6-F2CF-4984-9D14-D6966D92F99F}"/>
+          </ac:spMkLst>
+        </pc:spChg>
+        <pc:spChg chg="add del">
+          <ac:chgData name="João Gaspar" userId="7dec15aa-df9c-4e56-83fb-de5e1da84347" providerId="ADAL" clId="{5F5A64CD-14DA-4429-AD0D-339DD7191AF6}" dt="2024-06-02T21:48:59.524" v="272" actId="26606"/>
+          <ac:spMkLst>
+            <pc:docMk/>
+            <pc:sldMk cId="567565778" sldId="262"/>
+            <ac:spMk id="32" creationId="{B65C0385-5E30-4D2E-AF9F-4639659D34E9}"/>
+          </ac:spMkLst>
+        </pc:spChg>
+        <pc:spChg chg="add">
+          <ac:chgData name="João Gaspar" userId="7dec15aa-df9c-4e56-83fb-de5e1da84347" providerId="ADAL" clId="{5F5A64CD-14DA-4429-AD0D-339DD7191AF6}" dt="2024-06-02T22:04:52.283" v="684" actId="26606"/>
+          <ac:spMkLst>
+            <pc:docMk/>
+            <pc:sldMk cId="567565778" sldId="262"/>
+            <ac:spMk id="33" creationId="{3ECBE1F1-D69B-4AFA-ABD5-8E41720EF6DE}"/>
+          </ac:spMkLst>
+        </pc:spChg>
+        <pc:spChg chg="add del">
+          <ac:chgData name="João Gaspar" userId="7dec15aa-df9c-4e56-83fb-de5e1da84347" providerId="ADAL" clId="{5F5A64CD-14DA-4429-AD0D-339DD7191AF6}" dt="2024-06-02T21:48:59.524" v="272" actId="26606"/>
+          <ac:spMkLst>
+            <pc:docMk/>
+            <pc:sldMk cId="567565778" sldId="262"/>
+            <ac:spMk id="34" creationId="{E335820B-3A29-42C5-AA8D-10ECA43CD985}"/>
+          </ac:spMkLst>
+        </pc:spChg>
+        <pc:spChg chg="add">
+          <ac:chgData name="João Gaspar" userId="7dec15aa-df9c-4e56-83fb-de5e1da84347" providerId="ADAL" clId="{5F5A64CD-14DA-4429-AD0D-339DD7191AF6}" dt="2024-06-02T22:04:52.283" v="684" actId="26606"/>
+          <ac:spMkLst>
+            <pc:docMk/>
+            <pc:sldMk cId="567565778" sldId="262"/>
+            <ac:spMk id="38" creationId="{603A6265-E10C-4B85-9C20-E75FCAF9CC63}"/>
+          </ac:spMkLst>
+        </pc:spChg>
+        <pc:grpChg chg="add del">
+          <ac:chgData name="João Gaspar" userId="7dec15aa-df9c-4e56-83fb-de5e1da84347" providerId="ADAL" clId="{5F5A64CD-14DA-4429-AD0D-339DD7191AF6}" dt="2024-06-02T21:49:05.522" v="274" actId="26606"/>
+          <ac:grpSpMkLst>
+            <pc:docMk/>
+            <pc:sldMk cId="567565778" sldId="262"/>
+            <ac:grpSpMk id="36" creationId="{5EFBDE31-BB3E-6CFC-23CD-B5976DA38438}"/>
+          </ac:grpSpMkLst>
+        </pc:grpChg>
+        <pc:picChg chg="add del">
+          <ac:chgData name="João Gaspar" userId="7dec15aa-df9c-4e56-83fb-de5e1da84347" providerId="ADAL" clId="{5F5A64CD-14DA-4429-AD0D-339DD7191AF6}" dt="2024-06-02T20:46:07.913" v="35" actId="26606"/>
+          <ac:picMkLst>
+            <pc:docMk/>
+            <pc:sldMk cId="567565778" sldId="262"/>
+            <ac:picMk id="7" creationId="{4215EBE2-516F-9B43-6570-51512D8A57AD}"/>
+          </ac:picMkLst>
+        </pc:picChg>
+        <pc:picChg chg="add mod ord">
+          <ac:chgData name="João Gaspar" userId="7dec15aa-df9c-4e56-83fb-de5e1da84347" providerId="ADAL" clId="{5F5A64CD-14DA-4429-AD0D-339DD7191AF6}" dt="2024-06-02T22:04:52.283" v="684" actId="26606"/>
+          <ac:picMkLst>
+            <pc:docMk/>
+            <pc:sldMk cId="567565778" sldId="262"/>
+            <ac:picMk id="20" creationId="{F697300D-85D4-02BA-46CA-6D444AA9FB97}"/>
+          </ac:picMkLst>
+        </pc:picChg>
+      </pc:sldChg>
+      <pc:sldChg chg="addSp delSp modSp mod setBg">
+        <pc:chgData name="João Gaspar" userId="7dec15aa-df9c-4e56-83fb-de5e1da84347" providerId="ADAL" clId="{5F5A64CD-14DA-4429-AD0D-339DD7191AF6}" dt="2024-06-02T22:13:59.117" v="708" actId="2710"/>
+        <pc:sldMkLst>
+          <pc:docMk/>
+          <pc:sldMk cId="2832385390" sldId="263"/>
+        </pc:sldMkLst>
+        <pc:spChg chg="mod">
+          <ac:chgData name="João Gaspar" userId="7dec15aa-df9c-4e56-83fb-de5e1da84347" providerId="ADAL" clId="{5F5A64CD-14DA-4429-AD0D-339DD7191AF6}" dt="2024-06-02T22:04:44.303" v="683" actId="26606"/>
+          <ac:spMkLst>
+            <pc:docMk/>
+            <pc:sldMk cId="2832385390" sldId="263"/>
+            <ac:spMk id="2" creationId="{42C9CCDD-7F42-FFCC-3807-54BD3E902B5B}"/>
+          </ac:spMkLst>
+        </pc:spChg>
+        <pc:spChg chg="mod">
+          <ac:chgData name="João Gaspar" userId="7dec15aa-df9c-4e56-83fb-de5e1da84347" providerId="ADAL" clId="{5F5A64CD-14DA-4429-AD0D-339DD7191AF6}" dt="2024-06-02T22:13:59.117" v="708" actId="2710"/>
+          <ac:spMkLst>
+            <pc:docMk/>
+            <pc:sldMk cId="2832385390" sldId="263"/>
+            <ac:spMk id="3" creationId="{C25F349C-DF7A-76B3-539A-D9AC348B7850}"/>
+          </ac:spMkLst>
+        </pc:spChg>
+        <pc:spChg chg="del mod">
+          <ac:chgData name="João Gaspar" userId="7dec15aa-df9c-4e56-83fb-de5e1da84347" providerId="ADAL" clId="{5F5A64CD-14DA-4429-AD0D-339DD7191AF6}" dt="2024-06-02T21:56:49.127" v="319" actId="478"/>
+          <ac:spMkLst>
+            <pc:docMk/>
+            <pc:sldMk cId="2832385390" sldId="263"/>
+            <ac:spMk id="4" creationId="{279D06DA-5B84-415C-8F61-C7847742AAB1}"/>
+          </ac:spMkLst>
+        </pc:spChg>
+        <pc:spChg chg="mod">
+          <ac:chgData name="João Gaspar" userId="7dec15aa-df9c-4e56-83fb-de5e1da84347" providerId="ADAL" clId="{5F5A64CD-14DA-4429-AD0D-339DD7191AF6}" dt="2024-06-02T22:04:44.303" v="683" actId="26606"/>
+          <ac:spMkLst>
+            <pc:docMk/>
+            <pc:sldMk cId="2832385390" sldId="263"/>
+            <ac:spMk id="5" creationId="{1D3DFBEB-7750-F056-BE82-8158E725F8BE}"/>
+          </ac:spMkLst>
+        </pc:spChg>
+        <pc:spChg chg="add mod ord">
+          <ac:chgData name="João Gaspar" userId="7dec15aa-df9c-4e56-83fb-de5e1da84347" providerId="ADAL" clId="{5F5A64CD-14DA-4429-AD0D-339DD7191AF6}" dt="2024-06-02T22:04:44.303" v="683" actId="26606"/>
+          <ac:spMkLst>
+            <pc:docMk/>
+            <pc:sldMk cId="2832385390" sldId="263"/>
+            <ac:spMk id="6" creationId="{9ED20EE6-852D-1387-4E9C-0E925B78142B}"/>
+          </ac:spMkLst>
+        </pc:spChg>
+        <pc:spChg chg="add del">
+          <ac:chgData name="João Gaspar" userId="7dec15aa-df9c-4e56-83fb-de5e1da84347" providerId="ADAL" clId="{5F5A64CD-14DA-4429-AD0D-339DD7191AF6}" dt="2024-06-02T22:04:44.303" v="683" actId="26606"/>
+          <ac:spMkLst>
+            <pc:docMk/>
+            <pc:sldMk cId="2832385390" sldId="263"/>
+            <ac:spMk id="11" creationId="{9F7D5CDA-D291-4307-BF55-1381FED29634}"/>
+          </ac:spMkLst>
+        </pc:spChg>
+        <pc:spChg chg="add">
+          <ac:chgData name="João Gaspar" userId="7dec15aa-df9c-4e56-83fb-de5e1da84347" providerId="ADAL" clId="{5F5A64CD-14DA-4429-AD0D-339DD7191AF6}" dt="2024-06-02T22:04:44.303" v="683" actId="26606"/>
+          <ac:spMkLst>
+            <pc:docMk/>
+            <pc:sldMk cId="2832385390" sldId="263"/>
+            <ac:spMk id="16" creationId="{C0763A76-9F1C-4FC5-82B7-DD475DA461B2}"/>
+          </ac:spMkLst>
+        </pc:spChg>
+        <pc:spChg chg="add">
+          <ac:chgData name="João Gaspar" userId="7dec15aa-df9c-4e56-83fb-de5e1da84347" providerId="ADAL" clId="{5F5A64CD-14DA-4429-AD0D-339DD7191AF6}" dt="2024-06-02T22:04:44.303" v="683" actId="26606"/>
+          <ac:spMkLst>
+            <pc:docMk/>
+            <pc:sldMk cId="2832385390" sldId="263"/>
+            <ac:spMk id="18" creationId="{E81BF4F6-F2CF-4984-9D14-D6966D92F99F}"/>
+          </ac:spMkLst>
+        </pc:spChg>
+        <pc:picChg chg="add mod">
+          <ac:chgData name="João Gaspar" userId="7dec15aa-df9c-4e56-83fb-de5e1da84347" providerId="ADAL" clId="{5F5A64CD-14DA-4429-AD0D-339DD7191AF6}" dt="2024-06-02T22:04:44.303" v="683" actId="26606"/>
+          <ac:picMkLst>
+            <pc:docMk/>
+            <pc:sldMk cId="2832385390" sldId="263"/>
+            <ac:picMk id="7" creationId="{DDF14196-F223-ADCE-F3CC-8573A5AB48A0}"/>
+          </ac:picMkLst>
+        </pc:picChg>
+      </pc:sldChg>
+      <pc:sldChg chg="addSp delSp modSp mod setBg">
+        <pc:chgData name="João Gaspar" userId="7dec15aa-df9c-4e56-83fb-de5e1da84347" providerId="ADAL" clId="{5F5A64CD-14DA-4429-AD0D-339DD7191AF6}" dt="2024-06-02T22:13:49.960" v="707" actId="2710"/>
+        <pc:sldMkLst>
+          <pc:docMk/>
+          <pc:sldMk cId="3173771447" sldId="264"/>
+        </pc:sldMkLst>
+        <pc:spChg chg="mod">
+          <ac:chgData name="João Gaspar" userId="7dec15aa-df9c-4e56-83fb-de5e1da84347" providerId="ADAL" clId="{5F5A64CD-14DA-4429-AD0D-339DD7191AF6}" dt="2024-06-02T20:46:56.222" v="38" actId="26606"/>
+          <ac:spMkLst>
+            <pc:docMk/>
+            <pc:sldMk cId="3173771447" sldId="264"/>
+            <ac:spMk id="2" creationId="{06EE0CD9-859B-FFDC-7F6F-65A1864810C7}"/>
+          </ac:spMkLst>
+        </pc:spChg>
+        <pc:spChg chg="mod">
+          <ac:chgData name="João Gaspar" userId="7dec15aa-df9c-4e56-83fb-de5e1da84347" providerId="ADAL" clId="{5F5A64CD-14DA-4429-AD0D-339DD7191AF6}" dt="2024-06-02T22:13:49.960" v="707" actId="2710"/>
+          <ac:spMkLst>
+            <pc:docMk/>
+            <pc:sldMk cId="3173771447" sldId="264"/>
+            <ac:spMk id="3" creationId="{63326C6E-5F1E-0E8D-F642-983D87164C61}"/>
+          </ac:spMkLst>
+        </pc:spChg>
+        <pc:spChg chg="del mod">
+          <ac:chgData name="João Gaspar" userId="7dec15aa-df9c-4e56-83fb-de5e1da84347" providerId="ADAL" clId="{5F5A64CD-14DA-4429-AD0D-339DD7191AF6}" dt="2024-06-02T21:56:41.579" v="317" actId="478"/>
+          <ac:spMkLst>
+            <pc:docMk/>
+            <pc:sldMk cId="3173771447" sldId="264"/>
+            <ac:spMk id="4" creationId="{F1EA4CEC-2557-52C3-FD71-204BDA1E6BAF}"/>
+          </ac:spMkLst>
+        </pc:spChg>
+        <pc:spChg chg="mod">
+          <ac:chgData name="João Gaspar" userId="7dec15aa-df9c-4e56-83fb-de5e1da84347" providerId="ADAL" clId="{5F5A64CD-14DA-4429-AD0D-339DD7191AF6}" dt="2024-06-02T20:46:56.222" v="38" actId="26606"/>
+          <ac:spMkLst>
+            <pc:docMk/>
+            <pc:sldMk cId="3173771447" sldId="264"/>
+            <ac:spMk id="5" creationId="{09584837-1C74-DD42-E69B-D85B02C81CBA}"/>
+          </ac:spMkLst>
+        </pc:spChg>
+        <pc:spChg chg="add mod">
+          <ac:chgData name="João Gaspar" userId="7dec15aa-df9c-4e56-83fb-de5e1da84347" providerId="ADAL" clId="{5F5A64CD-14DA-4429-AD0D-339DD7191AF6}" dt="2024-06-02T21:57:42.187" v="338" actId="207"/>
+          <ac:spMkLst>
+            <pc:docMk/>
+            <pc:sldMk cId="3173771447" sldId="264"/>
+            <ac:spMk id="6" creationId="{029FED57-33C5-855C-4776-592884EB5D56}"/>
+          </ac:spMkLst>
+        </pc:spChg>
+        <pc:spChg chg="add">
+          <ac:chgData name="João Gaspar" userId="7dec15aa-df9c-4e56-83fb-de5e1da84347" providerId="ADAL" clId="{5F5A64CD-14DA-4429-AD0D-339DD7191AF6}" dt="2024-06-02T20:46:56.222" v="38" actId="26606"/>
+          <ac:spMkLst>
+            <pc:docMk/>
+            <pc:sldMk cId="3173771447" sldId="264"/>
+            <ac:spMk id="11" creationId="{3ECBE1F1-D69B-4AFA-ABD5-8E41720EF6DE}"/>
+          </ac:spMkLst>
+        </pc:spChg>
+        <pc:spChg chg="add">
+          <ac:chgData name="João Gaspar" userId="7dec15aa-df9c-4e56-83fb-de5e1da84347" providerId="ADAL" clId="{5F5A64CD-14DA-4429-AD0D-339DD7191AF6}" dt="2024-06-02T20:46:56.222" v="38" actId="26606"/>
+          <ac:spMkLst>
+            <pc:docMk/>
+            <pc:sldMk cId="3173771447" sldId="264"/>
+            <ac:spMk id="13" creationId="{603A6265-E10C-4B85-9C20-E75FCAF9CC63}"/>
+          </ac:spMkLst>
+        </pc:spChg>
+        <pc:picChg chg="add">
+          <ac:chgData name="João Gaspar" userId="7dec15aa-df9c-4e56-83fb-de5e1da84347" providerId="ADAL" clId="{5F5A64CD-14DA-4429-AD0D-339DD7191AF6}" dt="2024-06-02T20:46:56.222" v="38" actId="26606"/>
+          <ac:picMkLst>
+            <pc:docMk/>
+            <pc:sldMk cId="3173771447" sldId="264"/>
+            <ac:picMk id="7" creationId="{1D6FD1B4-CA86-95E3-721F-84754E4148ED}"/>
+          </ac:picMkLst>
+        </pc:picChg>
+      </pc:sldChg>
+      <pc:sldChg chg="addSp modSp add del mod setBg">
+        <pc:chgData name="João Gaspar" userId="7dec15aa-df9c-4e56-83fb-de5e1da84347" providerId="ADAL" clId="{5F5A64CD-14DA-4429-AD0D-339DD7191AF6}" dt="2024-06-02T20:47:30.225" v="42" actId="47"/>
+        <pc:sldMkLst>
+          <pc:docMk/>
+          <pc:sldMk cId="1501253385" sldId="265"/>
+        </pc:sldMkLst>
+        <pc:spChg chg="mod">
+          <ac:chgData name="João Gaspar" userId="7dec15aa-df9c-4e56-83fb-de5e1da84347" providerId="ADAL" clId="{5F5A64CD-14DA-4429-AD0D-339DD7191AF6}" dt="2024-06-02T20:47:00.258" v="39" actId="26606"/>
+          <ac:spMkLst>
+            <pc:docMk/>
+            <pc:sldMk cId="1501253385" sldId="265"/>
+            <ac:spMk id="2" creationId="{2D31232B-71A3-AC7C-39CB-459AD3EBF036}"/>
+          </ac:spMkLst>
+        </pc:spChg>
+        <pc:spChg chg="mod">
+          <ac:chgData name="João Gaspar" userId="7dec15aa-df9c-4e56-83fb-de5e1da84347" providerId="ADAL" clId="{5F5A64CD-14DA-4429-AD0D-339DD7191AF6}" dt="2024-06-02T20:47:00.258" v="39" actId="26606"/>
+          <ac:spMkLst>
+            <pc:docMk/>
+            <pc:sldMk cId="1501253385" sldId="265"/>
+            <ac:spMk id="3" creationId="{66C0E097-CB4A-4A39-1006-BCCC06BDE904}"/>
+          </ac:spMkLst>
+        </pc:spChg>
+        <pc:spChg chg="mod">
+          <ac:chgData name="João Gaspar" userId="7dec15aa-df9c-4e56-83fb-de5e1da84347" providerId="ADAL" clId="{5F5A64CD-14DA-4429-AD0D-339DD7191AF6}" dt="2024-06-02T20:47:00.258" v="39" actId="26606"/>
+          <ac:spMkLst>
+            <pc:docMk/>
+            <pc:sldMk cId="1501253385" sldId="265"/>
+            <ac:spMk id="4" creationId="{E7ECCBBE-C215-B776-15D1-1104CF272226}"/>
+          </ac:spMkLst>
+        </pc:spChg>
+        <pc:spChg chg="mod">
+          <ac:chgData name="João Gaspar" userId="7dec15aa-df9c-4e56-83fb-de5e1da84347" providerId="ADAL" clId="{5F5A64CD-14DA-4429-AD0D-339DD7191AF6}" dt="2024-06-02T20:47:00.258" v="39" actId="26606"/>
+          <ac:spMkLst>
+            <pc:docMk/>
+            <pc:sldMk cId="1501253385" sldId="265"/>
+            <ac:spMk id="5" creationId="{FAA63990-17BD-B879-DD9C-8B239398B75F}"/>
+          </ac:spMkLst>
+        </pc:spChg>
+        <pc:spChg chg="add">
+          <ac:chgData name="João Gaspar" userId="7dec15aa-df9c-4e56-83fb-de5e1da84347" providerId="ADAL" clId="{5F5A64CD-14DA-4429-AD0D-339DD7191AF6}" dt="2024-06-02T20:47:00.258" v="39" actId="26606"/>
+          <ac:spMkLst>
+            <pc:docMk/>
+            <pc:sldMk cId="1501253385" sldId="265"/>
+            <ac:spMk id="11" creationId="{3ECBE1F1-D69B-4AFA-ABD5-8E41720EF6DE}"/>
+          </ac:spMkLst>
+        </pc:spChg>
+        <pc:spChg chg="add">
+          <ac:chgData name="João Gaspar" userId="7dec15aa-df9c-4e56-83fb-de5e1da84347" providerId="ADAL" clId="{5F5A64CD-14DA-4429-AD0D-339DD7191AF6}" dt="2024-06-02T20:47:00.258" v="39" actId="26606"/>
+          <ac:spMkLst>
+            <pc:docMk/>
+            <pc:sldMk cId="1501253385" sldId="265"/>
+            <ac:spMk id="13" creationId="{603A6265-E10C-4B85-9C20-E75FCAF9CC63}"/>
+          </ac:spMkLst>
+        </pc:spChg>
+        <pc:picChg chg="add">
+          <ac:chgData name="João Gaspar" userId="7dec15aa-df9c-4e56-83fb-de5e1da84347" providerId="ADAL" clId="{5F5A64CD-14DA-4429-AD0D-339DD7191AF6}" dt="2024-06-02T20:47:00.258" v="39" actId="26606"/>
+          <ac:picMkLst>
+            <pc:docMk/>
+            <pc:sldMk cId="1501253385" sldId="265"/>
+            <ac:picMk id="7" creationId="{0660631A-5310-A303-DDE1-E28636F7FD36}"/>
+          </ac:picMkLst>
+        </pc:picChg>
+      </pc:sldChg>
+      <pc:sldChg chg="addSp modSp new mod setBg">
+        <pc:chgData name="João Gaspar" userId="7dec15aa-df9c-4e56-83fb-de5e1da84347" providerId="ADAL" clId="{5F5A64CD-14DA-4429-AD0D-339DD7191AF6}" dt="2024-06-02T22:14:27.270" v="716" actId="27636"/>
+        <pc:sldMkLst>
+          <pc:docMk/>
+          <pc:sldMk cId="1925614804" sldId="265"/>
+        </pc:sldMkLst>
+        <pc:spChg chg="mod">
+          <ac:chgData name="João Gaspar" userId="7dec15aa-df9c-4e56-83fb-de5e1da84347" providerId="ADAL" clId="{5F5A64CD-14DA-4429-AD0D-339DD7191AF6}" dt="2024-06-02T20:47:45.942" v="54" actId="20577"/>
+          <ac:spMkLst>
+            <pc:docMk/>
+            <pc:sldMk cId="1925614804" sldId="265"/>
+            <ac:spMk id="2" creationId="{2E9F1C5F-BD9A-6944-1470-43BD4692C181}"/>
+          </ac:spMkLst>
+        </pc:spChg>
+        <pc:spChg chg="mod">
+          <ac:chgData name="João Gaspar" userId="7dec15aa-df9c-4e56-83fb-de5e1da84347" providerId="ADAL" clId="{5F5A64CD-14DA-4429-AD0D-339DD7191AF6}" dt="2024-06-02T22:14:27.270" v="716" actId="27636"/>
+          <ac:spMkLst>
+            <pc:docMk/>
+            <pc:sldMk cId="1925614804" sldId="265"/>
+            <ac:spMk id="3" creationId="{192A18D7-40DF-B571-AC86-94A7727F42DB}"/>
+          </ac:spMkLst>
+        </pc:spChg>
+        <pc:spChg chg="mod">
+          <ac:chgData name="João Gaspar" userId="7dec15aa-df9c-4e56-83fb-de5e1da84347" providerId="ADAL" clId="{5F5A64CD-14DA-4429-AD0D-339DD7191AF6}" dt="2024-06-02T21:56:32.041" v="316" actId="6549"/>
+          <ac:spMkLst>
+            <pc:docMk/>
+            <pc:sldMk cId="1925614804" sldId="265"/>
+            <ac:spMk id="4" creationId="{8EEE3120-0213-4797-7B33-01179BA1C6C9}"/>
+          </ac:spMkLst>
+        </pc:spChg>
+        <pc:spChg chg="mod">
+          <ac:chgData name="João Gaspar" userId="7dec15aa-df9c-4e56-83fb-de5e1da84347" providerId="ADAL" clId="{5F5A64CD-14DA-4429-AD0D-339DD7191AF6}" dt="2024-06-02T20:47:37.345" v="44" actId="26606"/>
+          <ac:spMkLst>
+            <pc:docMk/>
+            <pc:sldMk cId="1925614804" sldId="265"/>
+            <ac:spMk id="5" creationId="{BE4B7072-FBFB-97F0-E61C-8E5F249DF43A}"/>
+          </ac:spMkLst>
+        </pc:spChg>
+        <pc:spChg chg="add mod">
+          <ac:chgData name="João Gaspar" userId="7dec15aa-df9c-4e56-83fb-de5e1da84347" providerId="ADAL" clId="{5F5A64CD-14DA-4429-AD0D-339DD7191AF6}" dt="2024-06-02T20:49:11.978" v="98" actId="571"/>
+          <ac:spMkLst>
+            <pc:docMk/>
+            <pc:sldMk cId="1925614804" sldId="265"/>
+            <ac:spMk id="6" creationId="{35C595F3-E946-B179-41AC-BADF78BB0036}"/>
+          </ac:spMkLst>
+        </pc:spChg>
+        <pc:spChg chg="add">
+          <ac:chgData name="João Gaspar" userId="7dec15aa-df9c-4e56-83fb-de5e1da84347" providerId="ADAL" clId="{5F5A64CD-14DA-4429-AD0D-339DD7191AF6}" dt="2024-06-02T20:47:37.345" v="44" actId="26606"/>
+          <ac:spMkLst>
+            <pc:docMk/>
+            <pc:sldMk cId="1925614804" sldId="265"/>
+            <ac:spMk id="10" creationId="{EEBFA4C8-C301-60A7-C96E-E85360F5DFB4}"/>
+          </ac:spMkLst>
+        </pc:spChg>
+      </pc:sldChg>
+    </pc:docChg>
+  </pc:docChgLst>
   <pc:docChgLst>
     <pc:chgData name="João Gaspar" userId="7dec15aa-df9c-4e56-83fb-de5e1da84347" providerId="ADAL" clId="{B8FFF8AF-4563-4B10-A0DD-FF77C4350ACA}"/>
     <pc:docChg chg="undo custSel modSld">
@@ -360,7 +1333,7 @@
             </a:lvl1pPr>
           </a:lstStyle>
           <a:p>
-            <a:endParaRPr lang="pt-PT"/>
+            <a:endParaRPr lang="pt-PT" dirty="0"/>
           </a:p>
         </p:txBody>
       </p:sp>
@@ -393,9 +1366,9 @@
           <a:p>
             <a:fld id="{AB38FD77-722C-49E2-AEB2-4580223DE7D4}" type="datetimeFigureOut">
               <a:rPr lang="pt-PT" smtClean="0"/>
-              <a:t>21/04/2024</a:t>
+              <a:t>02/06/2024</a:t>
             </a:fld>
-            <a:endParaRPr lang="pt-PT"/>
+            <a:endParaRPr lang="pt-PT" dirty="0"/>
           </a:p>
         </p:txBody>
       </p:sp>
@@ -428,7 +1401,7 @@
           <a:bodyPr vert="horz" lIns="91440" tIns="45720" rIns="91440" bIns="45720" rtlCol="0" anchor="ctr"/>
           <a:lstStyle/>
           <a:p>
-            <a:endParaRPr lang="pt-PT"/>
+            <a:endParaRPr lang="pt-PT" dirty="0"/>
           </a:p>
         </p:txBody>
       </p:sp>
@@ -518,7 +1491,7 @@
             </a:lvl1pPr>
           </a:lstStyle>
           <a:p>
-            <a:endParaRPr lang="pt-PT"/>
+            <a:endParaRPr lang="pt-PT" dirty="0"/>
           </a:p>
         </p:txBody>
       </p:sp>
@@ -553,7 +1526,7 @@
               <a:rPr lang="pt-PT" smtClean="0"/>
               <a:t>‹nº›</a:t>
             </a:fld>
-            <a:endParaRPr lang="pt-PT"/>
+            <a:endParaRPr lang="pt-PT" dirty="0"/>
           </a:p>
         </p:txBody>
       </p:sp>
@@ -660,6 +1633,426 @@
 </p:notesMaster>
 </file>
 
+<file path=ppt/notesSlides/notesSlide1.xml><?xml version="1.0" encoding="utf-8"?>
+<p:notes xmlns:a="http://schemas.openxmlformats.org/drawingml/2006/main" xmlns:r="http://schemas.openxmlformats.org/officeDocument/2006/relationships" xmlns:p="http://schemas.openxmlformats.org/presentationml/2006/main">
+  <p:cSld>
+    <p:spTree>
+      <p:nvGrpSpPr>
+        <p:cNvPr id="1" name=""/>
+        <p:cNvGrpSpPr/>
+        <p:nvPr/>
+      </p:nvGrpSpPr>
+      <p:grpSpPr>
+        <a:xfrm>
+          <a:off x="0" y="0"/>
+          <a:ext cx="0" cy="0"/>
+          <a:chOff x="0" y="0"/>
+          <a:chExt cx="0" cy="0"/>
+        </a:xfrm>
+      </p:grpSpPr>
+      <p:sp>
+        <p:nvSpPr>
+          <p:cNvPr id="2" name="Marcador de Posição da Imagem do Diapositivo 1"/>
+          <p:cNvSpPr>
+            <a:spLocks noGrp="1" noRot="1" noChangeAspect="1"/>
+          </p:cNvSpPr>
+          <p:nvPr>
+            <p:ph type="sldImg"/>
+          </p:nvPr>
+        </p:nvSpPr>
+        <p:spPr/>
+      </p:sp>
+      <p:sp>
+        <p:nvSpPr>
+          <p:cNvPr id="3" name="Marcador de Posição de Notas 2"/>
+          <p:cNvSpPr>
+            <a:spLocks noGrp="1"/>
+          </p:cNvSpPr>
+          <p:nvPr>
+            <p:ph type="body" idx="1"/>
+          </p:nvPr>
+        </p:nvSpPr>
+        <p:spPr/>
+        <p:txBody>
+          <a:bodyPr/>
+          <a:lstStyle/>
+          <a:p>
+            <a:pPr algn="l">
+              <a:buFont typeface="+mj-lt"/>
+              <a:buAutoNum type="arabicPeriod"/>
+            </a:pPr>
+            <a:r>
+              <a:rPr lang="pt-PT" b="1" i="0" dirty="0">
+                <a:solidFill>
+                  <a:srgbClr val="ECECEC"/>
+                </a:solidFill>
+                <a:effectLst/>
+                <a:highlight>
+                  <a:srgbClr val="212121"/>
+                </a:highlight>
+                <a:latin typeface="ui-sans-serif"/>
+              </a:rPr>
+              <a:t>Animação da Floresta e Objetos 3D</a:t>
+            </a:r>
+            <a:r>
+              <a:rPr lang="pt-PT" b="0" i="0" dirty="0">
+                <a:solidFill>
+                  <a:srgbClr val="ECECEC"/>
+                </a:solidFill>
+                <a:effectLst/>
+                <a:highlight>
+                  <a:srgbClr val="212121"/>
+                </a:highlight>
+                <a:latin typeface="ui-sans-serif"/>
+              </a:rPr>
+              <a:t>:</a:t>
+            </a:r>
+          </a:p>
+          <a:p>
+            <a:pPr marL="742950" lvl="1" indent="-285750" algn="l">
+              <a:buFont typeface="+mj-lt"/>
+              <a:buAutoNum type="arabicPeriod"/>
+            </a:pPr>
+            <a:r>
+              <a:rPr lang="pt-PT" b="0" i="0" dirty="0">
+                <a:solidFill>
+                  <a:srgbClr val="ECECEC"/>
+                </a:solidFill>
+                <a:effectLst/>
+                <a:highlight>
+                  <a:srgbClr val="212121"/>
+                </a:highlight>
+                <a:latin typeface="ui-sans-serif"/>
+              </a:rPr>
+              <a:t>Árvores, casa, torre e outros objetos 3D são carregados e posicionados na cena sem animação contínua, mas estão presentes no cenário.</a:t>
+            </a:r>
+          </a:p>
+          <a:p>
+            <a:pPr algn="l">
+              <a:buFont typeface="+mj-lt"/>
+              <a:buAutoNum type="arabicPeriod"/>
+            </a:pPr>
+            <a:r>
+              <a:rPr lang="pt-PT" b="1" i="0" dirty="0">
+                <a:solidFill>
+                  <a:srgbClr val="ECECEC"/>
+                </a:solidFill>
+                <a:effectLst/>
+                <a:highlight>
+                  <a:srgbClr val="212121"/>
+                </a:highlight>
+                <a:latin typeface="ui-sans-serif"/>
+              </a:rPr>
+              <a:t>Movimento do Jogador</a:t>
+            </a:r>
+            <a:r>
+              <a:rPr lang="pt-PT" b="0" i="0" dirty="0">
+                <a:solidFill>
+                  <a:srgbClr val="ECECEC"/>
+                </a:solidFill>
+                <a:effectLst/>
+                <a:highlight>
+                  <a:srgbClr val="212121"/>
+                </a:highlight>
+                <a:latin typeface="ui-sans-serif"/>
+              </a:rPr>
+              <a:t>:</a:t>
+            </a:r>
+          </a:p>
+          <a:p>
+            <a:pPr marL="742950" lvl="1" indent="-285750" algn="l">
+              <a:buFont typeface="+mj-lt"/>
+              <a:buAutoNum type="arabicPeriod"/>
+            </a:pPr>
+            <a:r>
+              <a:rPr lang="pt-PT" b="0" i="0" dirty="0">
+                <a:solidFill>
+                  <a:srgbClr val="ECECEC"/>
+                </a:solidFill>
+                <a:effectLst/>
+                <a:highlight>
+                  <a:srgbClr val="212121"/>
+                </a:highlight>
+                <a:latin typeface="ui-sans-serif"/>
+              </a:rPr>
+              <a:t>O movimento do jogador é atualizado a cada frame para refletir a posição e rotação do corpo físico (CANNON.js) e a câmera (THREE.js).</a:t>
+            </a:r>
+          </a:p>
+          <a:p>
+            <a:pPr algn="l">
+              <a:buFont typeface="+mj-lt"/>
+              <a:buAutoNum type="arabicPeriod"/>
+            </a:pPr>
+            <a:r>
+              <a:rPr lang="pt-PT" b="1" i="0" dirty="0">
+                <a:solidFill>
+                  <a:srgbClr val="ECECEC"/>
+                </a:solidFill>
+                <a:effectLst/>
+                <a:highlight>
+                  <a:srgbClr val="212121"/>
+                </a:highlight>
+                <a:latin typeface="ui-sans-serif"/>
+              </a:rPr>
+              <a:t>Movimento do Fantasma (Ghost)</a:t>
+            </a:r>
+            <a:r>
+              <a:rPr lang="pt-PT" b="0" i="0" dirty="0">
+                <a:solidFill>
+                  <a:srgbClr val="ECECEC"/>
+                </a:solidFill>
+                <a:effectLst/>
+                <a:highlight>
+                  <a:srgbClr val="212121"/>
+                </a:highlight>
+                <a:latin typeface="ui-sans-serif"/>
+              </a:rPr>
+              <a:t>:</a:t>
+            </a:r>
+          </a:p>
+          <a:p>
+            <a:pPr marL="742950" lvl="1" indent="-285750" algn="l">
+              <a:buFont typeface="+mj-lt"/>
+              <a:buAutoNum type="arabicPeriod"/>
+            </a:pPr>
+            <a:r>
+              <a:rPr lang="pt-PT" b="0" i="0" dirty="0">
+                <a:solidFill>
+                  <a:srgbClr val="ECECEC"/>
+                </a:solidFill>
+                <a:effectLst/>
+                <a:highlight>
+                  <a:srgbClr val="212121"/>
+                </a:highlight>
+                <a:latin typeface="ui-sans-serif"/>
+              </a:rPr>
+              <a:t>O fantasma se move continuamente em direção ao jogador, ajustando sua posição e rotação.</a:t>
+            </a:r>
+          </a:p>
+          <a:p>
+            <a:pPr algn="l">
+              <a:buFont typeface="+mj-lt"/>
+              <a:buAutoNum type="arabicPeriod"/>
+            </a:pPr>
+            <a:r>
+              <a:rPr lang="pt-PT" b="1" i="0" dirty="0">
+                <a:solidFill>
+                  <a:srgbClr val="ECECEC"/>
+                </a:solidFill>
+                <a:effectLst/>
+                <a:highlight>
+                  <a:srgbClr val="212121"/>
+                </a:highlight>
+                <a:latin typeface="ui-sans-serif"/>
+              </a:rPr>
+              <a:t>Disparo de Balas</a:t>
+            </a:r>
+            <a:r>
+              <a:rPr lang="pt-PT" b="0" i="0" dirty="0">
+                <a:solidFill>
+                  <a:srgbClr val="ECECEC"/>
+                </a:solidFill>
+                <a:effectLst/>
+                <a:highlight>
+                  <a:srgbClr val="212121"/>
+                </a:highlight>
+                <a:latin typeface="ui-sans-serif"/>
+              </a:rPr>
+              <a:t>:</a:t>
+            </a:r>
+          </a:p>
+          <a:p>
+            <a:pPr marL="742950" lvl="1" indent="-285750" algn="l">
+              <a:buFont typeface="+mj-lt"/>
+              <a:buAutoNum type="arabicPeriod"/>
+            </a:pPr>
+            <a:r>
+              <a:rPr lang="pt-PT" b="0" i="0" dirty="0">
+                <a:solidFill>
+                  <a:srgbClr val="ECECEC"/>
+                </a:solidFill>
+                <a:effectLst/>
+                <a:highlight>
+                  <a:srgbClr val="212121"/>
+                </a:highlight>
+                <a:latin typeface="ui-sans-serif"/>
+              </a:rPr>
+              <a:t>As balas são disparadas da posição do jogador e se movem na direção em que a câmera está apontada.</a:t>
+            </a:r>
+          </a:p>
+          <a:p>
+            <a:pPr algn="l">
+              <a:buFont typeface="+mj-lt"/>
+              <a:buAutoNum type="arabicPeriod"/>
+            </a:pPr>
+            <a:r>
+              <a:rPr lang="pt-PT" b="1" i="0" dirty="0">
+                <a:solidFill>
+                  <a:srgbClr val="ECECEC"/>
+                </a:solidFill>
+                <a:effectLst/>
+                <a:highlight>
+                  <a:srgbClr val="212121"/>
+                </a:highlight>
+                <a:latin typeface="ui-sans-serif"/>
+              </a:rPr>
+              <a:t>Colisões e Atualização de Vida</a:t>
+            </a:r>
+            <a:r>
+              <a:rPr lang="pt-PT" b="0" i="0" dirty="0">
+                <a:solidFill>
+                  <a:srgbClr val="ECECEC"/>
+                </a:solidFill>
+                <a:effectLst/>
+                <a:highlight>
+                  <a:srgbClr val="212121"/>
+                </a:highlight>
+                <a:latin typeface="ui-sans-serif"/>
+              </a:rPr>
+              <a:t>:</a:t>
+            </a:r>
+          </a:p>
+          <a:p>
+            <a:pPr marL="742950" lvl="1" indent="-285750" algn="l">
+              <a:buFont typeface="+mj-lt"/>
+              <a:buAutoNum type="arabicPeriod"/>
+            </a:pPr>
+            <a:r>
+              <a:rPr lang="pt-PT" b="0" i="0" dirty="0">
+                <a:solidFill>
+                  <a:srgbClr val="ECECEC"/>
+                </a:solidFill>
+                <a:effectLst/>
+                <a:highlight>
+                  <a:srgbClr val="212121"/>
+                </a:highlight>
+                <a:latin typeface="ui-sans-serif"/>
+              </a:rPr>
+              <a:t>As colisões entre o jogador, fantasma e balas são detetadas e geridas, atualizando as vidas e estados dos objetos.</a:t>
+            </a:r>
+          </a:p>
+        </p:txBody>
+      </p:sp>
+      <p:sp>
+        <p:nvSpPr>
+          <p:cNvPr id="4" name="Marcador de Posição do Número do Diapositivo 3"/>
+          <p:cNvSpPr>
+            <a:spLocks noGrp="1"/>
+          </p:cNvSpPr>
+          <p:nvPr>
+            <p:ph type="sldNum" sz="quarter" idx="5"/>
+          </p:nvPr>
+        </p:nvSpPr>
+        <p:spPr/>
+        <p:txBody>
+          <a:bodyPr/>
+          <a:lstStyle/>
+          <a:p>
+            <a:fld id="{5C0AF832-54E1-4B1C-8983-BE7858CA31D0}" type="slidenum">
+              <a:rPr lang="pt-PT" smtClean="0"/>
+              <a:t>4</a:t>
+            </a:fld>
+            <a:endParaRPr lang="pt-PT" dirty="0"/>
+          </a:p>
+        </p:txBody>
+      </p:sp>
+    </p:spTree>
+    <p:extLst>
+      <p:ext uri="{BB962C8B-B14F-4D97-AF65-F5344CB8AC3E}">
+        <p14:creationId xmlns:p14="http://schemas.microsoft.com/office/powerpoint/2010/main" val="2894585034"/>
+      </p:ext>
+    </p:extLst>
+  </p:cSld>
+  <p:clrMapOvr>
+    <a:masterClrMapping/>
+  </p:clrMapOvr>
+</p:notes>
+</file>
+
+<file path=ppt/notesSlides/notesSlide2.xml><?xml version="1.0" encoding="utf-8"?>
+<p:notes xmlns:a="http://schemas.openxmlformats.org/drawingml/2006/main" xmlns:r="http://schemas.openxmlformats.org/officeDocument/2006/relationships" xmlns:p="http://schemas.openxmlformats.org/presentationml/2006/main">
+  <p:cSld>
+    <p:spTree>
+      <p:nvGrpSpPr>
+        <p:cNvPr id="1" name=""/>
+        <p:cNvGrpSpPr/>
+        <p:nvPr/>
+      </p:nvGrpSpPr>
+      <p:grpSpPr>
+        <a:xfrm>
+          <a:off x="0" y="0"/>
+          <a:ext cx="0" cy="0"/>
+          <a:chOff x="0" y="0"/>
+          <a:chExt cx="0" cy="0"/>
+        </a:xfrm>
+      </p:grpSpPr>
+      <p:sp>
+        <p:nvSpPr>
+          <p:cNvPr id="2" name="Marcador de Posição da Imagem do Diapositivo 1"/>
+          <p:cNvSpPr>
+            <a:spLocks noGrp="1" noRot="1" noChangeAspect="1"/>
+          </p:cNvSpPr>
+          <p:nvPr>
+            <p:ph type="sldImg"/>
+          </p:nvPr>
+        </p:nvSpPr>
+        <p:spPr/>
+      </p:sp>
+      <p:sp>
+        <p:nvSpPr>
+          <p:cNvPr id="3" name="Marcador de Posição de Notas 2"/>
+          <p:cNvSpPr>
+            <a:spLocks noGrp="1"/>
+          </p:cNvSpPr>
+          <p:nvPr>
+            <p:ph type="body" idx="1"/>
+          </p:nvPr>
+        </p:nvSpPr>
+        <p:spPr/>
+        <p:txBody>
+          <a:bodyPr/>
+          <a:lstStyle/>
+          <a:p>
+            <a:endParaRPr lang="pt-PT" dirty="0"/>
+          </a:p>
+        </p:txBody>
+      </p:sp>
+      <p:sp>
+        <p:nvSpPr>
+          <p:cNvPr id="4" name="Marcador de Posição do Número do Diapositivo 3"/>
+          <p:cNvSpPr>
+            <a:spLocks noGrp="1"/>
+          </p:cNvSpPr>
+          <p:nvPr>
+            <p:ph type="sldNum" sz="quarter" idx="5"/>
+          </p:nvPr>
+        </p:nvSpPr>
+        <p:spPr/>
+        <p:txBody>
+          <a:bodyPr/>
+          <a:lstStyle/>
+          <a:p>
+            <a:fld id="{5C0AF832-54E1-4B1C-8983-BE7858CA31D0}" type="slidenum">
+              <a:rPr lang="pt-PT" smtClean="0"/>
+              <a:t>5</a:t>
+            </a:fld>
+            <a:endParaRPr lang="pt-PT" dirty="0"/>
+          </a:p>
+        </p:txBody>
+      </p:sp>
+    </p:spTree>
+    <p:extLst>
+      <p:ext uri="{BB962C8B-B14F-4D97-AF65-F5344CB8AC3E}">
+        <p14:creationId xmlns:p14="http://schemas.microsoft.com/office/powerpoint/2010/main" val="988820243"/>
+      </p:ext>
+    </p:extLst>
+  </p:cSld>
+  <p:clrMapOvr>
+    <a:masterClrMapping/>
+  </p:clrMapOvr>
+</p:notes>
+</file>
+
 <file path=ppt/slideLayouts/slideLayout1.xml><?xml version="1.0" encoding="utf-8"?>
 <p:sldLayout xmlns:a="http://schemas.openxmlformats.org/drawingml/2006/main" xmlns:r="http://schemas.openxmlformats.org/officeDocument/2006/relationships" xmlns:p="http://schemas.openxmlformats.org/presentationml/2006/main" type="title" preserve="1">
   <p:cSld name="Diapositivo de Título">
@@ -806,7 +2199,7 @@
           <a:lstStyle/>
           <a:p>
             <a:r>
-              <a:rPr lang="pt-PT"/>
+              <a:rPr lang="pt-PT" dirty="0"/>
               <a:t>ICG - 2021/2022 - Project 1</a:t>
             </a:r>
           </a:p>
@@ -833,7 +2226,7 @@
           <a:bodyPr/>
           <a:lstStyle/>
           <a:p>
-            <a:endParaRPr lang="pt-PT"/>
+            <a:endParaRPr lang="pt-PT" dirty="0"/>
           </a:p>
         </p:txBody>
       </p:sp>
@@ -862,7 +2255,7 @@
               <a:rPr lang="pt-PT" smtClean="0"/>
               <a:t>‹nº›</a:t>
             </a:fld>
-            <a:endParaRPr lang="pt-PT"/>
+            <a:endParaRPr lang="pt-PT" dirty="0"/>
           </a:p>
         </p:txBody>
       </p:sp>
@@ -1003,7 +2396,7 @@
           <a:lstStyle/>
           <a:p>
             <a:r>
-              <a:rPr lang="pt-PT"/>
+              <a:rPr lang="pt-PT" dirty="0"/>
               <a:t>ICG - 2021/2022 - Project 1</a:t>
             </a:r>
           </a:p>
@@ -1030,7 +2423,7 @@
           <a:bodyPr/>
           <a:lstStyle/>
           <a:p>
-            <a:endParaRPr lang="pt-PT"/>
+            <a:endParaRPr lang="pt-PT" dirty="0"/>
           </a:p>
         </p:txBody>
       </p:sp>
@@ -1059,7 +2452,7 @@
               <a:rPr lang="pt-PT" smtClean="0"/>
               <a:t>‹nº›</a:t>
             </a:fld>
-            <a:endParaRPr lang="pt-PT"/>
+            <a:endParaRPr lang="pt-PT" dirty="0"/>
           </a:p>
         </p:txBody>
       </p:sp>
@@ -1210,7 +2603,7 @@
           <a:lstStyle/>
           <a:p>
             <a:r>
-              <a:rPr lang="pt-PT"/>
+              <a:rPr lang="pt-PT" dirty="0"/>
               <a:t>ICG - 2021/2022 - Project 1</a:t>
             </a:r>
           </a:p>
@@ -1237,7 +2630,7 @@
           <a:bodyPr/>
           <a:lstStyle/>
           <a:p>
-            <a:endParaRPr lang="pt-PT"/>
+            <a:endParaRPr lang="pt-PT" dirty="0"/>
           </a:p>
         </p:txBody>
       </p:sp>
@@ -1266,7 +2659,7 @@
               <a:rPr lang="pt-PT" smtClean="0"/>
               <a:t>‹nº›</a:t>
             </a:fld>
-            <a:endParaRPr lang="pt-PT"/>
+            <a:endParaRPr lang="pt-PT" dirty="0"/>
           </a:p>
         </p:txBody>
       </p:sp>
@@ -1407,7 +2800,7 @@
           <a:lstStyle/>
           <a:p>
             <a:r>
-              <a:rPr lang="pt-PT"/>
+              <a:rPr lang="pt-PT" dirty="0"/>
               <a:t>ICG - 2021/2022 - Project 1</a:t>
             </a:r>
           </a:p>
@@ -1434,7 +2827,7 @@
           <a:bodyPr/>
           <a:lstStyle/>
           <a:p>
-            <a:endParaRPr lang="pt-PT"/>
+            <a:endParaRPr lang="pt-PT" dirty="0"/>
           </a:p>
         </p:txBody>
       </p:sp>
@@ -1463,7 +2856,7 @@
               <a:rPr lang="pt-PT" smtClean="0"/>
               <a:t>‹nº›</a:t>
             </a:fld>
-            <a:endParaRPr lang="pt-PT"/>
+            <a:endParaRPr lang="pt-PT" dirty="0"/>
           </a:p>
         </p:txBody>
       </p:sp>
@@ -1681,7 +3074,7 @@
           <a:lstStyle/>
           <a:p>
             <a:r>
-              <a:rPr lang="pt-PT"/>
+              <a:rPr lang="pt-PT" dirty="0"/>
               <a:t>ICG - 2021/2022 - Project 1</a:t>
             </a:r>
           </a:p>
@@ -1708,7 +3101,7 @@
           <a:bodyPr/>
           <a:lstStyle/>
           <a:p>
-            <a:endParaRPr lang="pt-PT"/>
+            <a:endParaRPr lang="pt-PT" dirty="0"/>
           </a:p>
         </p:txBody>
       </p:sp>
@@ -1737,7 +3130,7 @@
               <a:rPr lang="pt-PT" smtClean="0"/>
               <a:t>‹nº›</a:t>
             </a:fld>
-            <a:endParaRPr lang="pt-PT"/>
+            <a:endParaRPr lang="pt-PT" dirty="0"/>
           </a:p>
         </p:txBody>
       </p:sp>
@@ -1945,7 +3338,7 @@
           <a:lstStyle/>
           <a:p>
             <a:r>
-              <a:rPr lang="pt-PT"/>
+              <a:rPr lang="pt-PT" dirty="0"/>
               <a:t>ICG - 2021/2022 - Project 1</a:t>
             </a:r>
           </a:p>
@@ -1972,7 +3365,7 @@
           <a:bodyPr/>
           <a:lstStyle/>
           <a:p>
-            <a:endParaRPr lang="pt-PT"/>
+            <a:endParaRPr lang="pt-PT" dirty="0"/>
           </a:p>
         </p:txBody>
       </p:sp>
@@ -2001,7 +3394,7 @@
               <a:rPr lang="pt-PT" smtClean="0"/>
               <a:t>‹nº›</a:t>
             </a:fld>
-            <a:endParaRPr lang="pt-PT"/>
+            <a:endParaRPr lang="pt-PT" dirty="0"/>
           </a:p>
         </p:txBody>
       </p:sp>
@@ -2356,7 +3749,7 @@
           <a:lstStyle/>
           <a:p>
             <a:r>
-              <a:rPr lang="pt-PT"/>
+              <a:rPr lang="pt-PT" dirty="0"/>
               <a:t>ICG - 2021/2022 - Project 1</a:t>
             </a:r>
           </a:p>
@@ -2383,7 +3776,7 @@
           <a:bodyPr/>
           <a:lstStyle/>
           <a:p>
-            <a:endParaRPr lang="pt-PT"/>
+            <a:endParaRPr lang="pt-PT" dirty="0"/>
           </a:p>
         </p:txBody>
       </p:sp>
@@ -2412,7 +3805,7 @@
               <a:rPr lang="pt-PT" smtClean="0"/>
               <a:t>‹nº›</a:t>
             </a:fld>
-            <a:endParaRPr lang="pt-PT"/>
+            <a:endParaRPr lang="pt-PT" dirty="0"/>
           </a:p>
         </p:txBody>
       </p:sp>
@@ -2496,7 +3889,7 @@
           <a:lstStyle/>
           <a:p>
             <a:r>
-              <a:rPr lang="pt-PT"/>
+              <a:rPr lang="pt-PT" dirty="0"/>
               <a:t>ICG - 2021/2022 - Project 1</a:t>
             </a:r>
           </a:p>
@@ -2523,7 +3916,7 @@
           <a:bodyPr/>
           <a:lstStyle/>
           <a:p>
-            <a:endParaRPr lang="pt-PT"/>
+            <a:endParaRPr lang="pt-PT" dirty="0"/>
           </a:p>
         </p:txBody>
       </p:sp>
@@ -2552,7 +3945,7 @@
               <a:rPr lang="pt-PT" smtClean="0"/>
               <a:t>‹nº›</a:t>
             </a:fld>
-            <a:endParaRPr lang="pt-PT"/>
+            <a:endParaRPr lang="pt-PT" dirty="0"/>
           </a:p>
         </p:txBody>
       </p:sp>
@@ -2608,7 +4001,7 @@
           <a:lstStyle/>
           <a:p>
             <a:r>
-              <a:rPr lang="pt-PT"/>
+              <a:rPr lang="pt-PT" dirty="0"/>
               <a:t>ICG - 2021/2022 - Project 1</a:t>
             </a:r>
           </a:p>
@@ -2635,7 +4028,7 @@
           <a:bodyPr/>
           <a:lstStyle/>
           <a:p>
-            <a:endParaRPr lang="pt-PT"/>
+            <a:endParaRPr lang="pt-PT" dirty="0"/>
           </a:p>
         </p:txBody>
       </p:sp>
@@ -2664,7 +4057,7 @@
               <a:rPr lang="pt-PT" smtClean="0"/>
               <a:t>‹nº›</a:t>
             </a:fld>
-            <a:endParaRPr lang="pt-PT"/>
+            <a:endParaRPr lang="pt-PT" dirty="0"/>
           </a:p>
         </p:txBody>
       </p:sp>
@@ -2918,7 +4311,7 @@
           <a:lstStyle/>
           <a:p>
             <a:r>
-              <a:rPr lang="pt-PT"/>
+              <a:rPr lang="pt-PT" dirty="0"/>
               <a:t>ICG - 2021/2022 - Project 1</a:t>
             </a:r>
           </a:p>
@@ -2945,7 +4338,7 @@
           <a:bodyPr/>
           <a:lstStyle/>
           <a:p>
-            <a:endParaRPr lang="pt-PT"/>
+            <a:endParaRPr lang="pt-PT" dirty="0"/>
           </a:p>
         </p:txBody>
       </p:sp>
@@ -2974,7 +4367,7 @@
               <a:rPr lang="pt-PT" smtClean="0"/>
               <a:t>‹nº›</a:t>
             </a:fld>
-            <a:endParaRPr lang="pt-PT"/>
+            <a:endParaRPr lang="pt-PT" dirty="0"/>
           </a:p>
         </p:txBody>
       </p:sp>
@@ -3108,7 +4501,7 @@
             </a:lvl9pPr>
           </a:lstStyle>
           <a:p>
-            <a:endParaRPr lang="pt-PT"/>
+            <a:endParaRPr lang="pt-PT" dirty="0"/>
           </a:p>
         </p:txBody>
       </p:sp>
@@ -3205,7 +4598,7 @@
           <a:lstStyle/>
           <a:p>
             <a:r>
-              <a:rPr lang="pt-PT"/>
+              <a:rPr lang="pt-PT" dirty="0"/>
               <a:t>ICG - 2021/2022 - Project 1</a:t>
             </a:r>
           </a:p>
@@ -3232,7 +4625,7 @@
           <a:bodyPr/>
           <a:lstStyle/>
           <a:p>
-            <a:endParaRPr lang="pt-PT"/>
+            <a:endParaRPr lang="pt-PT" dirty="0"/>
           </a:p>
         </p:txBody>
       </p:sp>
@@ -3261,7 +4654,7 @@
               <a:rPr lang="pt-PT" smtClean="0"/>
               <a:t>‹nº›</a:t>
             </a:fld>
-            <a:endParaRPr lang="pt-PT"/>
+            <a:endParaRPr lang="pt-PT" dirty="0"/>
           </a:p>
         </p:txBody>
       </p:sp>
@@ -3445,7 +4838,7 @@
           </a:lstStyle>
           <a:p>
             <a:r>
-              <a:rPr lang="pt-PT"/>
+              <a:rPr lang="pt-PT" dirty="0"/>
               <a:t>ICG - 2021/2022 - Project 1</a:t>
             </a:r>
           </a:p>
@@ -3490,7 +4883,7 @@
             </a:lvl1pPr>
           </a:lstStyle>
           <a:p>
-            <a:endParaRPr lang="pt-PT"/>
+            <a:endParaRPr lang="pt-PT" dirty="0"/>
           </a:p>
         </p:txBody>
       </p:sp>
@@ -3537,7 +4930,7 @@
               <a:rPr lang="pt-PT" smtClean="0"/>
               <a:t>‹nº›</a:t>
             </a:fld>
-            <a:endParaRPr lang="pt-PT"/>
+            <a:endParaRPr lang="pt-PT" dirty="0"/>
           </a:p>
         </p:txBody>
       </p:sp>
@@ -3849,6 +5242,14 @@
 <file path=ppt/slides/slide1.xml><?xml version="1.0" encoding="utf-8"?>
 <p:sld xmlns:a="http://schemas.openxmlformats.org/drawingml/2006/main" xmlns:r="http://schemas.openxmlformats.org/officeDocument/2006/relationships" xmlns:p="http://schemas.openxmlformats.org/presentationml/2006/main">
   <p:cSld>
+    <p:bg>
+      <p:bgPr>
+        <a:solidFill>
+          <a:schemeClr val="bg1"/>
+        </a:solidFill>
+        <a:effectLst/>
+      </p:bgPr>
+    </p:bg>
     <p:spTree>
       <p:nvGrpSpPr>
         <p:cNvPr id="1" name=""/>
@@ -3863,6 +5264,186 @@
           <a:chExt cx="0" cy="0"/>
         </a:xfrm>
       </p:grpSpPr>
+      <p:sp useBgFill="1">
+        <p:nvSpPr>
+          <p:cNvPr id="9" name="Rectangle 8">
+            <a:extLst>
+              <a:ext uri="{FF2B5EF4-FFF2-40B4-BE49-F238E27FC236}">
+                <a16:creationId xmlns:a16="http://schemas.microsoft.com/office/drawing/2014/main" id="{C1DD1A8A-57D5-4A81-AD04-532B043C5611}"/>
+              </a:ext>
+              <a:ext uri="{C183D7F6-B498-43B3-948B-1728B52AA6E4}">
+                <adec:decorative xmlns:adec="http://schemas.microsoft.com/office/drawing/2017/decorative" val="1"/>
+              </a:ext>
+            </a:extLst>
+          </p:cNvPr>
+          <p:cNvSpPr>
+            <a:spLocks noGrp="1" noRot="1" noChangeAspect="1" noMove="1" noResize="1" noEditPoints="1" noAdjustHandles="1" noChangeArrowheads="1" noChangeShapeType="1" noTextEdit="1"/>
+          </p:cNvSpPr>
+          <p:nvPr>
+            <p:extLst>
+              <p:ext uri="{386F3935-93C4-4BCD-93E2-E3B085C9AB24}">
+                <p16:designElem xmlns:p16="http://schemas.microsoft.com/office/powerpoint/2015/main" val="1"/>
+              </p:ext>
+            </p:extLst>
+          </p:nvPr>
+        </p:nvSpPr>
+        <p:spPr>
+          <a:xfrm>
+            <a:off x="-1" y="0"/>
+            <a:ext cx="12188952" cy="6858000"/>
+          </a:xfrm>
+          <a:prstGeom prst="rect">
+            <a:avLst/>
+          </a:prstGeom>
+          <a:ln>
+            <a:noFill/>
+          </a:ln>
+        </p:spPr>
+        <p:style>
+          <a:lnRef idx="2">
+            <a:schemeClr val="accent1">
+              <a:shade val="50000"/>
+            </a:schemeClr>
+          </a:lnRef>
+          <a:fillRef idx="1">
+            <a:schemeClr val="accent1"/>
+          </a:fillRef>
+          <a:effectRef idx="0">
+            <a:schemeClr val="accent1"/>
+          </a:effectRef>
+          <a:fontRef idx="minor">
+            <a:schemeClr val="lt1"/>
+          </a:fontRef>
+        </p:style>
+        <p:txBody>
+          <a:bodyPr rtlCol="0" anchor="ctr"/>
+          <a:lstStyle/>
+          <a:p>
+            <a:pPr algn="ctr"/>
+            <a:endParaRPr lang="en-US" dirty="0"/>
+          </a:p>
+        </p:txBody>
+      </p:sp>
+      <p:pic>
+        <p:nvPicPr>
+          <p:cNvPr id="6" name="Picture 4" descr="Illuminated street light">
+            <a:extLst>
+              <a:ext uri="{FF2B5EF4-FFF2-40B4-BE49-F238E27FC236}">
+                <a16:creationId xmlns:a16="http://schemas.microsoft.com/office/drawing/2014/main" id="{D6DC46D9-EA7D-9B2F-C7D3-94E88D11DF35}"/>
+              </a:ext>
+            </a:extLst>
+          </p:cNvPr>
+          <p:cNvPicPr>
+            <a:picLocks noChangeAspect="1"/>
+          </p:cNvPicPr>
+          <p:nvPr/>
+        </p:nvPicPr>
+        <p:blipFill rotWithShape="1">
+          <a:blip r:embed="rId2"/>
+          <a:srcRect t="5101" b="10630"/>
+          <a:stretch/>
+        </p:blipFill>
+        <p:spPr>
+          <a:xfrm>
+            <a:off x="-3047" y="10"/>
+            <a:ext cx="12191999" cy="6857990"/>
+          </a:xfrm>
+          <a:prstGeom prst="rect">
+            <a:avLst/>
+          </a:prstGeom>
+        </p:spPr>
+      </p:pic>
+      <p:sp>
+        <p:nvSpPr>
+          <p:cNvPr id="8" name="Rectangle 10">
+            <a:extLst>
+              <a:ext uri="{FF2B5EF4-FFF2-40B4-BE49-F238E27FC236}">
+                <a16:creationId xmlns:a16="http://schemas.microsoft.com/office/drawing/2014/main" id="{007891EC-4501-44ED-A8C8-B11B6DB767AB}"/>
+              </a:ext>
+              <a:ext uri="{C183D7F6-B498-43B3-948B-1728B52AA6E4}">
+                <adec:decorative xmlns:adec="http://schemas.microsoft.com/office/drawing/2017/decorative" val="1"/>
+              </a:ext>
+            </a:extLst>
+          </p:cNvPr>
+          <p:cNvSpPr>
+            <a:spLocks noGrp="1" noRot="1" noChangeAspect="1" noMove="1" noResize="1" noEditPoints="1" noAdjustHandles="1" noChangeArrowheads="1" noChangeShapeType="1" noTextEdit="1"/>
+          </p:cNvSpPr>
+          <p:nvPr>
+            <p:extLst>
+              <p:ext uri="{386F3935-93C4-4BCD-93E2-E3B085C9AB24}">
+                <p16:designElem xmlns:p16="http://schemas.microsoft.com/office/powerpoint/2015/main" val="1"/>
+              </p:ext>
+            </p:extLst>
+          </p:nvPr>
+        </p:nvSpPr>
+        <p:spPr>
+          <a:xfrm>
+            <a:off x="0" y="2207602"/>
+            <a:ext cx="12191999" cy="3162146"/>
+          </a:xfrm>
+          <a:prstGeom prst="rect">
+            <a:avLst/>
+          </a:prstGeom>
+          <a:gradFill flip="none" rotWithShape="1">
+            <a:gsLst>
+              <a:gs pos="0">
+                <a:srgbClr val="000000">
+                  <a:alpha val="0"/>
+                </a:srgbClr>
+              </a:gs>
+              <a:gs pos="25000">
+                <a:srgbClr val="000000">
+                  <a:alpha val="15000"/>
+                </a:srgbClr>
+              </a:gs>
+              <a:gs pos="75000">
+                <a:srgbClr val="000000">
+                  <a:alpha val="15000"/>
+                </a:srgbClr>
+              </a:gs>
+              <a:gs pos="50000">
+                <a:srgbClr val="000000">
+                  <a:alpha val="30000"/>
+                </a:srgbClr>
+              </a:gs>
+              <a:gs pos="100000">
+                <a:srgbClr val="000000">
+                  <a:alpha val="0"/>
+                </a:srgbClr>
+              </a:gs>
+            </a:gsLst>
+            <a:lin ang="16200000" scaled="1"/>
+            <a:tileRect/>
+          </a:gradFill>
+          <a:ln>
+            <a:noFill/>
+          </a:ln>
+        </p:spPr>
+        <p:style>
+          <a:lnRef idx="2">
+            <a:schemeClr val="accent1">
+              <a:shade val="50000"/>
+            </a:schemeClr>
+          </a:lnRef>
+          <a:fillRef idx="1">
+            <a:schemeClr val="accent1"/>
+          </a:fillRef>
+          <a:effectRef idx="0">
+            <a:schemeClr val="accent1"/>
+          </a:effectRef>
+          <a:fontRef idx="minor">
+            <a:schemeClr val="lt1"/>
+          </a:fontRef>
+        </p:style>
+        <p:txBody>
+          <a:bodyPr rtlCol="0" anchor="ctr"/>
+          <a:lstStyle/>
+          <a:p>
+            <a:pPr algn="ctr"/>
+            <a:endParaRPr lang="en-US" dirty="0"/>
+          </a:p>
+        </p:txBody>
+      </p:sp>
       <p:sp>
         <p:nvSpPr>
           <p:cNvPr id="2" name="Título 1">
@@ -3879,12 +5460,33 @@
             <p:ph type="ctrTitle"/>
           </p:nvPr>
         </p:nvSpPr>
-        <p:spPr/>
-        <p:txBody>
-          <a:bodyPr/>
-          <a:lstStyle/>
-          <a:p>
-            <a:endParaRPr lang="pt-PT" dirty="0"/>
+        <p:spPr>
+          <a:xfrm>
+            <a:off x="1097280" y="325550"/>
+            <a:ext cx="10058400" cy="3574778"/>
+          </a:xfrm>
+          <a:effectLst>
+            <a:outerShdw blurRad="50800" dist="38100" dir="2700000" algn="tl" rotWithShape="0">
+              <a:prstClr val="black">
+                <a:alpha val="40000"/>
+              </a:prstClr>
+            </a:outerShdw>
+          </a:effectLst>
+        </p:spPr>
+        <p:txBody>
+          <a:bodyPr>
+            <a:normAutofit/>
+          </a:bodyPr>
+          <a:lstStyle/>
+          <a:p>
+            <a:r>
+              <a:rPr lang="pt-PT" sz="5200" dirty="0">
+                <a:solidFill>
+                  <a:srgbClr val="FFFFFF"/>
+                </a:solidFill>
+              </a:rPr>
+              <a:t>Dark Night</a:t>
+            </a:r>
           </a:p>
         </p:txBody>
       </p:sp>
@@ -3904,88 +5506,258 @@
             <p:ph type="subTitle" idx="1"/>
           </p:nvPr>
         </p:nvSpPr>
-        <p:spPr/>
+        <p:spPr>
+          <a:xfrm>
+            <a:off x="1100051" y="4072043"/>
+            <a:ext cx="10058400" cy="1282707"/>
+          </a:xfrm>
+          <a:effectLst>
+            <a:outerShdw blurRad="50800" dist="38100" dir="2700000" algn="tl" rotWithShape="0">
+              <a:prstClr val="black">
+                <a:alpha val="40000"/>
+              </a:prstClr>
+            </a:outerShdw>
+          </a:effectLst>
+        </p:spPr>
         <p:txBody>
           <a:bodyPr>
-            <a:normAutofit lnSpcReduction="10000"/>
+            <a:normAutofit/>
           </a:bodyPr>
           <a:lstStyle/>
           <a:p>
-            <a:endParaRPr lang="pt-PT"/>
-          </a:p>
-          <a:p>
-            <a:r>
-              <a:rPr lang="pt-PT"/>
+            <a:endParaRPr lang="pt-PT" sz="1300" dirty="0">
+              <a:solidFill>
+                <a:srgbClr val="FFFFFF"/>
+              </a:solidFill>
+            </a:endParaRPr>
+          </a:p>
+          <a:p>
+            <a:r>
+              <a:rPr lang="pt-PT" sz="1300" dirty="0">
+                <a:solidFill>
+                  <a:srgbClr val="FFFFFF"/>
+                </a:solidFill>
+              </a:rPr>
               <a:t>João Gaspar, 107708</a:t>
             </a:r>
           </a:p>
           <a:p>
-            <a:endParaRPr lang="pt-PT"/>
-          </a:p>
-          <a:p>
-            <a:r>
-              <a:rPr lang="pt-PT"/>
-              <a:t>Introduction to Computer Graphics – 2023/2024 – Project 1</a:t>
-            </a:r>
-            <a:endParaRPr lang="pt-PT" dirty="0"/>
-          </a:p>
-        </p:txBody>
-      </p:sp>
-      <p:sp>
-        <p:nvSpPr>
-          <p:cNvPr id="4" name="Marcador de Posição da Data 3">
-            <a:extLst>
-              <a:ext uri="{FF2B5EF4-FFF2-40B4-BE49-F238E27FC236}">
-                <a16:creationId xmlns:a16="http://schemas.microsoft.com/office/drawing/2014/main" id="{51921409-2F16-8E6A-0FA4-9DA6A5D95230}"/>
-              </a:ext>
-            </a:extLst>
-          </p:cNvPr>
-          <p:cNvSpPr>
-            <a:spLocks noGrp="1"/>
-          </p:cNvSpPr>
-          <p:nvPr>
-            <p:ph type="dt" sz="half" idx="10"/>
-          </p:nvPr>
-        </p:nvSpPr>
-        <p:spPr/>
-        <p:txBody>
-          <a:bodyPr/>
-          <a:lstStyle/>
-          <a:p>
-            <a:r>
-              <a:rPr lang="pt-PT"/>
-              <a:t>ICG - 2023/2024 - Project 1</a:t>
-            </a:r>
-            <a:endParaRPr lang="pt-PT" dirty="0"/>
-          </a:p>
-        </p:txBody>
-      </p:sp>
-      <p:sp>
-        <p:nvSpPr>
-          <p:cNvPr id="5" name="Marcador de Posição do Número do Diapositivo 4">
-            <a:extLst>
-              <a:ext uri="{FF2B5EF4-FFF2-40B4-BE49-F238E27FC236}">
-                <a16:creationId xmlns:a16="http://schemas.microsoft.com/office/drawing/2014/main" id="{34E9C846-0417-B26F-1E2B-784ECEEFF9ED}"/>
-              </a:ext>
-            </a:extLst>
-          </p:cNvPr>
-          <p:cNvSpPr>
-            <a:spLocks noGrp="1"/>
-          </p:cNvSpPr>
-          <p:nvPr>
-            <p:ph type="sldNum" sz="quarter" idx="12"/>
-          </p:nvPr>
-        </p:nvSpPr>
-        <p:spPr/>
-        <p:txBody>
-          <a:bodyPr/>
-          <a:lstStyle/>
-          <a:p>
+            <a:endParaRPr lang="pt-PT" sz="1300" dirty="0">
+              <a:solidFill>
+                <a:srgbClr val="FFFFFF"/>
+              </a:solidFill>
+            </a:endParaRPr>
+          </a:p>
+          <a:p>
+            <a:r>
+              <a:rPr lang="pt-PT" sz="1300" dirty="0">
+                <a:solidFill>
+                  <a:srgbClr val="FFFFFF"/>
+                </a:solidFill>
+              </a:rPr>
+              <a:t>Introduction to Computer Graphics – 2023/2024</a:t>
+            </a:r>
+          </a:p>
+        </p:txBody>
+      </p:sp>
+      <p:sp>
+        <p:nvSpPr>
+          <p:cNvPr id="12" name="Marcador de Posição do Número do Diapositivo 4">
+            <a:extLst>
+              <a:ext uri="{FF2B5EF4-FFF2-40B4-BE49-F238E27FC236}">
+                <a16:creationId xmlns:a16="http://schemas.microsoft.com/office/drawing/2014/main" id="{F9AB9492-B00B-8872-D353-CF19E1834A8A}"/>
+              </a:ext>
+            </a:extLst>
+          </p:cNvPr>
+          <p:cNvSpPr txBox="1">
+            <a:spLocks/>
+          </p:cNvSpPr>
+          <p:nvPr/>
+        </p:nvSpPr>
+        <p:spPr>
+          <a:xfrm>
+            <a:off x="8732520" y="6356350"/>
+            <a:ext cx="3200400" cy="365125"/>
+          </a:xfrm>
+          <a:prstGeom prst="rect">
+            <a:avLst/>
+          </a:prstGeom>
+        </p:spPr>
+        <p:txBody>
+          <a:bodyPr vert="horz" lIns="91440" tIns="45720" rIns="91440" bIns="45720" rtlCol="0" anchor="ctr">
+            <a:normAutofit/>
+          </a:bodyPr>
+          <a:lstStyle>
+            <a:defPPr>
+              <a:defRPr lang="pt-PT"/>
+            </a:defPPr>
+            <a:lvl1pPr marL="0" algn="r" defTabSz="914400" rtl="0" eaLnBrk="1" latinLnBrk="0" hangingPunct="1">
+              <a:defRPr sz="1200" kern="1200">
+                <a:solidFill>
+                  <a:schemeClr val="tx1">
+                    <a:tint val="75000"/>
+                  </a:schemeClr>
+                </a:solidFill>
+                <a:latin typeface="+mn-lt"/>
+                <a:ea typeface="+mn-ea"/>
+                <a:cs typeface="+mn-cs"/>
+              </a:defRPr>
+            </a:lvl1pPr>
+            <a:lvl2pPr marL="457200" algn="l" defTabSz="914400" rtl="0" eaLnBrk="1" latinLnBrk="0" hangingPunct="1">
+              <a:defRPr sz="1800" kern="1200">
+                <a:solidFill>
+                  <a:schemeClr val="tx1"/>
+                </a:solidFill>
+                <a:latin typeface="+mn-lt"/>
+                <a:ea typeface="+mn-ea"/>
+                <a:cs typeface="+mn-cs"/>
+              </a:defRPr>
+            </a:lvl2pPr>
+            <a:lvl3pPr marL="914400" algn="l" defTabSz="914400" rtl="0" eaLnBrk="1" latinLnBrk="0" hangingPunct="1">
+              <a:defRPr sz="1800" kern="1200">
+                <a:solidFill>
+                  <a:schemeClr val="tx1"/>
+                </a:solidFill>
+                <a:latin typeface="+mn-lt"/>
+                <a:ea typeface="+mn-ea"/>
+                <a:cs typeface="+mn-cs"/>
+              </a:defRPr>
+            </a:lvl3pPr>
+            <a:lvl4pPr marL="1371600" algn="l" defTabSz="914400" rtl="0" eaLnBrk="1" latinLnBrk="0" hangingPunct="1">
+              <a:defRPr sz="1800" kern="1200">
+                <a:solidFill>
+                  <a:schemeClr val="tx1"/>
+                </a:solidFill>
+                <a:latin typeface="+mn-lt"/>
+                <a:ea typeface="+mn-ea"/>
+                <a:cs typeface="+mn-cs"/>
+              </a:defRPr>
+            </a:lvl4pPr>
+            <a:lvl5pPr marL="1828800" algn="l" defTabSz="914400" rtl="0" eaLnBrk="1" latinLnBrk="0" hangingPunct="1">
+              <a:defRPr sz="1800" kern="1200">
+                <a:solidFill>
+                  <a:schemeClr val="tx1"/>
+                </a:solidFill>
+                <a:latin typeface="+mn-lt"/>
+                <a:ea typeface="+mn-ea"/>
+                <a:cs typeface="+mn-cs"/>
+              </a:defRPr>
+            </a:lvl5pPr>
+            <a:lvl6pPr marL="2286000" algn="l" defTabSz="914400" rtl="0" eaLnBrk="1" latinLnBrk="0" hangingPunct="1">
+              <a:defRPr sz="1800" kern="1200">
+                <a:solidFill>
+                  <a:schemeClr val="tx1"/>
+                </a:solidFill>
+                <a:latin typeface="+mn-lt"/>
+                <a:ea typeface="+mn-ea"/>
+                <a:cs typeface="+mn-cs"/>
+              </a:defRPr>
+            </a:lvl6pPr>
+            <a:lvl7pPr marL="2743200" algn="l" defTabSz="914400" rtl="0" eaLnBrk="1" latinLnBrk="0" hangingPunct="1">
+              <a:defRPr sz="1800" kern="1200">
+                <a:solidFill>
+                  <a:schemeClr val="tx1"/>
+                </a:solidFill>
+                <a:latin typeface="+mn-lt"/>
+                <a:ea typeface="+mn-ea"/>
+                <a:cs typeface="+mn-cs"/>
+              </a:defRPr>
+            </a:lvl7pPr>
+            <a:lvl8pPr marL="3200400" algn="l" defTabSz="914400" rtl="0" eaLnBrk="1" latinLnBrk="0" hangingPunct="1">
+              <a:defRPr sz="1800" kern="1200">
+                <a:solidFill>
+                  <a:schemeClr val="tx1"/>
+                </a:solidFill>
+                <a:latin typeface="+mn-lt"/>
+                <a:ea typeface="+mn-ea"/>
+                <a:cs typeface="+mn-cs"/>
+              </a:defRPr>
+            </a:lvl8pPr>
+            <a:lvl9pPr marL="3657600" algn="l" defTabSz="914400" rtl="0" eaLnBrk="1" latinLnBrk="0" hangingPunct="1">
+              <a:defRPr sz="1800" kern="1200">
+                <a:solidFill>
+                  <a:schemeClr val="tx1"/>
+                </a:solidFill>
+                <a:latin typeface="+mn-lt"/>
+                <a:ea typeface="+mn-ea"/>
+                <a:cs typeface="+mn-cs"/>
+              </a:defRPr>
+            </a:lvl9pPr>
+          </a:lstStyle>
+          <a:p>
+            <a:pPr>
+              <a:spcAft>
+                <a:spcPts val="600"/>
+              </a:spcAft>
+            </a:pPr>
             <a:fld id="{A275E76C-0B34-4617-92BE-2419D92E4442}" type="slidenum">
-              <a:rPr lang="pt-PT" smtClean="0"/>
+              <a:rPr lang="pt-PT" smtClean="0">
+                <a:solidFill>
+                  <a:schemeClr val="bg1">
+                    <a:lumMod val="50000"/>
+                  </a:schemeClr>
+                </a:solidFill>
+              </a:rPr>
+              <a:pPr>
+                <a:spcAft>
+                  <a:spcPts val="600"/>
+                </a:spcAft>
+              </a:pPr>
               <a:t>1</a:t>
             </a:fld>
-            <a:endParaRPr lang="pt-PT"/>
+            <a:endParaRPr lang="pt-PT" dirty="0">
+              <a:solidFill>
+                <a:schemeClr val="bg1">
+                  <a:lumMod val="50000"/>
+                </a:schemeClr>
+              </a:solidFill>
+            </a:endParaRPr>
+          </a:p>
+        </p:txBody>
+      </p:sp>
+      <p:sp>
+        <p:nvSpPr>
+          <p:cNvPr id="13" name="Marcador de Posição da Data 3">
+            <a:extLst>
+              <a:ext uri="{FF2B5EF4-FFF2-40B4-BE49-F238E27FC236}">
+                <a16:creationId xmlns:a16="http://schemas.microsoft.com/office/drawing/2014/main" id="{553C187F-04E9-F835-9084-3CA1B06D94FF}"/>
+              </a:ext>
+            </a:extLst>
+          </p:cNvPr>
+          <p:cNvSpPr>
+            <a:spLocks noGrp="1"/>
+          </p:cNvSpPr>
+          <p:nvPr>
+            <p:ph type="dt" sz="half" idx="10"/>
+          </p:nvPr>
+        </p:nvSpPr>
+        <p:spPr>
+          <a:xfrm>
+            <a:off x="243025" y="6356349"/>
+            <a:ext cx="2743200" cy="365125"/>
+          </a:xfrm>
+        </p:spPr>
+        <p:txBody>
+          <a:bodyPr>
+            <a:normAutofit/>
+          </a:bodyPr>
+          <a:lstStyle/>
+          <a:p>
+            <a:pPr>
+              <a:spcAft>
+                <a:spcPts val="600"/>
+              </a:spcAft>
+            </a:pPr>
+            <a:r>
+              <a:rPr lang="pt-PT" dirty="0">
+                <a:solidFill>
+                  <a:schemeClr val="bg1">
+                    <a:lumMod val="50000"/>
+                  </a:schemeClr>
+                </a:solidFill>
+              </a:rPr>
+              <a:t>ICG - 2023/2024</a:t>
+            </a:r>
           </a:p>
         </p:txBody>
       </p:sp>
@@ -4002,9 +5774,17 @@
 </p:sld>
 </file>
 
-<file path=ppt/slides/slide10.xml><?xml version="1.0" encoding="utf-8"?>
+<file path=ppt/slides/slide2.xml><?xml version="1.0" encoding="utf-8"?>
 <p:sld xmlns:a="http://schemas.openxmlformats.org/drawingml/2006/main" xmlns:r="http://schemas.openxmlformats.org/officeDocument/2006/relationships" xmlns:p="http://schemas.openxmlformats.org/presentationml/2006/main">
   <p:cSld>
+    <p:bg>
+      <p:bgPr>
+        <a:solidFill>
+          <a:schemeClr val="bg1"/>
+        </a:solidFill>
+        <a:effectLst/>
+      </p:bgPr>
+    </p:bg>
     <p:spTree>
       <p:nvGrpSpPr>
         <p:cNvPr id="1" name=""/>
@@ -4019,12 +5799,174 @@
           <a:chExt cx="0" cy="0"/>
         </a:xfrm>
       </p:grpSpPr>
+      <p:sp useBgFill="1">
+        <p:nvSpPr>
+          <p:cNvPr id="12" name="Slide Background">
+            <a:extLst>
+              <a:ext uri="{FF2B5EF4-FFF2-40B4-BE49-F238E27FC236}">
+                <a16:creationId xmlns:a16="http://schemas.microsoft.com/office/drawing/2014/main" id="{3ECBE1F1-D69B-4AFA-ABD5-8E41720EF6DE}"/>
+              </a:ext>
+              <a:ext uri="{C183D7F6-B498-43B3-948B-1728B52AA6E4}">
+                <adec:decorative xmlns:adec="http://schemas.microsoft.com/office/drawing/2017/decorative" val="1"/>
+              </a:ext>
+            </a:extLst>
+          </p:cNvPr>
+          <p:cNvSpPr>
+            <a:spLocks noGrp="1" noRot="1" noChangeAspect="1" noMove="1" noResize="1" noEditPoints="1" noAdjustHandles="1" noChangeArrowheads="1" noChangeShapeType="1" noTextEdit="1"/>
+          </p:cNvSpPr>
+          <p:nvPr>
+            <p:extLst>
+              <p:ext uri="{386F3935-93C4-4BCD-93E2-E3B085C9AB24}">
+                <p16:designElem xmlns:p16="http://schemas.microsoft.com/office/powerpoint/2015/main" val="1"/>
+              </p:ext>
+            </p:extLst>
+          </p:nvPr>
+        </p:nvSpPr>
+        <p:spPr>
+          <a:xfrm>
+            <a:off x="0" y="0"/>
+            <a:ext cx="12192000" cy="6858000"/>
+          </a:xfrm>
+          <a:prstGeom prst="rect">
+            <a:avLst/>
+          </a:prstGeom>
+          <a:ln>
+            <a:noFill/>
+          </a:ln>
+        </p:spPr>
+        <p:style>
+          <a:lnRef idx="2">
+            <a:schemeClr val="accent1">
+              <a:shade val="50000"/>
+            </a:schemeClr>
+          </a:lnRef>
+          <a:fillRef idx="1">
+            <a:schemeClr val="accent1"/>
+          </a:fillRef>
+          <a:effectRef idx="0">
+            <a:schemeClr val="accent1"/>
+          </a:effectRef>
+          <a:fontRef idx="minor">
+            <a:schemeClr val="lt1"/>
+          </a:fontRef>
+        </p:style>
+        <p:txBody>
+          <a:bodyPr rtlCol="0" anchor="ctr"/>
+          <a:lstStyle/>
+          <a:p>
+            <a:pPr algn="ctr"/>
+            <a:endParaRPr lang="en-US" dirty="0"/>
+          </a:p>
+        </p:txBody>
+      </p:sp>
+      <p:pic>
+        <p:nvPicPr>
+          <p:cNvPr id="8" name="Picture 7">
+            <a:extLst>
+              <a:ext uri="{FF2B5EF4-FFF2-40B4-BE49-F238E27FC236}">
+                <a16:creationId xmlns:a16="http://schemas.microsoft.com/office/drawing/2014/main" id="{553E8F7C-074D-8D9F-7FDA-ACA0EB2E6A9E}"/>
+              </a:ext>
+            </a:extLst>
+          </p:cNvPr>
+          <p:cNvPicPr>
+            <a:picLocks noChangeAspect="1"/>
+          </p:cNvPicPr>
+          <p:nvPr/>
+        </p:nvPicPr>
+        <p:blipFill rotWithShape="1">
+          <a:blip r:embed="rId2">
+            <a:extLst>
+              <a:ext uri="{28A0092B-C50C-407E-A947-70E740481C1C}">
+                <a14:useLocalDpi xmlns:a14="http://schemas.microsoft.com/office/drawing/2010/main" val="0"/>
+              </a:ext>
+            </a:extLst>
+          </a:blip>
+          <a:srcRect l="5564" r="5564"/>
+          <a:stretch/>
+        </p:blipFill>
+        <p:spPr>
+          <a:xfrm>
+            <a:off x="-1" y="-2"/>
+            <a:ext cx="5410198" cy="6858002"/>
+          </a:xfrm>
+          <a:prstGeom prst="rect">
+            <a:avLst/>
+          </a:prstGeom>
+        </p:spPr>
+      </p:pic>
+      <p:sp useBgFill="1">
+        <p:nvSpPr>
+          <p:cNvPr id="14" name="Rectangle 13">
+            <a:extLst>
+              <a:ext uri="{FF2B5EF4-FFF2-40B4-BE49-F238E27FC236}">
+                <a16:creationId xmlns:a16="http://schemas.microsoft.com/office/drawing/2014/main" id="{603A6265-E10C-4B85-9C20-E75FCAF9CC63}"/>
+              </a:ext>
+              <a:ext uri="{C183D7F6-B498-43B3-948B-1728B52AA6E4}">
+                <adec:decorative xmlns:adec="http://schemas.microsoft.com/office/drawing/2017/decorative" val="1"/>
+              </a:ext>
+            </a:extLst>
+          </p:cNvPr>
+          <p:cNvSpPr>
+            <a:spLocks noGrp="1" noRot="1" noChangeAspect="1" noMove="1" noResize="1" noEditPoints="1" noAdjustHandles="1" noChangeArrowheads="1" noChangeShapeType="1" noTextEdit="1"/>
+          </p:cNvSpPr>
+          <p:nvPr>
+            <p:extLst>
+              <p:ext uri="{386F3935-93C4-4BCD-93E2-E3B085C9AB24}">
+                <p16:designElem xmlns:p16="http://schemas.microsoft.com/office/powerpoint/2015/main" val="1"/>
+              </p:ext>
+            </p:extLst>
+          </p:nvPr>
+        </p:nvSpPr>
+        <p:spPr>
+          <a:xfrm>
+            <a:off x="5410197" y="-1"/>
+            <a:ext cx="6781802" cy="2286000"/>
+          </a:xfrm>
+          <a:prstGeom prst="rect">
+            <a:avLst/>
+          </a:prstGeom>
+          <a:ln>
+            <a:noFill/>
+          </a:ln>
+          <a:effectLst>
+            <a:outerShdw blurRad="355600" dist="152400" sx="95000" sy="95000" algn="t" rotWithShape="0">
+              <a:srgbClr val="000000">
+                <a:alpha val="29000"/>
+              </a:srgbClr>
+            </a:outerShdw>
+          </a:effectLst>
+        </p:spPr>
+        <p:style>
+          <a:lnRef idx="2">
+            <a:schemeClr val="accent1">
+              <a:shade val="50000"/>
+            </a:schemeClr>
+          </a:lnRef>
+          <a:fillRef idx="1">
+            <a:schemeClr val="accent1"/>
+          </a:fillRef>
+          <a:effectRef idx="0">
+            <a:schemeClr val="accent1"/>
+          </a:effectRef>
+          <a:fontRef idx="minor">
+            <a:schemeClr val="lt1"/>
+          </a:fontRef>
+        </p:style>
+        <p:txBody>
+          <a:bodyPr rtlCol="0" anchor="ctr"/>
+          <a:lstStyle/>
+          <a:p>
+            <a:pPr algn="ctr"/>
+            <a:endParaRPr lang="en-US" dirty="0"/>
+          </a:p>
+        </p:txBody>
+      </p:sp>
       <p:sp>
         <p:nvSpPr>
           <p:cNvPr id="2" name="Título 1">
             <a:extLst>
               <a:ext uri="{FF2B5EF4-FFF2-40B4-BE49-F238E27FC236}">
-                <a16:creationId xmlns:a16="http://schemas.microsoft.com/office/drawing/2014/main" id="{2D31232B-71A3-AC7C-39CB-459AD3EBF036}"/>
+                <a16:creationId xmlns:a16="http://schemas.microsoft.com/office/drawing/2014/main" id="{563673AD-ED13-D61E-386F-BDEF278C99A6}"/>
               </a:ext>
             </a:extLst>
           </p:cNvPr>
@@ -4035,16 +5977,22 @@
             <p:ph type="title"/>
           </p:nvPr>
         </p:nvSpPr>
-        <p:spPr/>
-        <p:txBody>
-          <a:bodyPr/>
-          <a:lstStyle/>
-          <a:p>
-            <a:r>
-              <a:rPr lang="pt-PT" dirty="0" err="1"/>
-              <a:t>References</a:t>
-            </a:r>
-            <a:endParaRPr lang="pt-PT" dirty="0"/>
+        <p:spPr>
+          <a:xfrm>
+            <a:off x="6115317" y="405685"/>
+            <a:ext cx="5464968" cy="1559301"/>
+          </a:xfrm>
+        </p:spPr>
+        <p:txBody>
+          <a:bodyPr>
+            <a:normAutofit/>
+          </a:bodyPr>
+          <a:lstStyle/>
+          <a:p>
+            <a:r>
+              <a:rPr lang="pt-PT" sz="4000" dirty="0"/>
+              <a:t>Main Idea</a:t>
+            </a:r>
           </a:p>
         </p:txBody>
       </p:sp>
@@ -4053,7 +6001,7 @@
           <p:cNvPr id="3" name="Marcador de Posição de Conteúdo 2">
             <a:extLst>
               <a:ext uri="{FF2B5EF4-FFF2-40B4-BE49-F238E27FC236}">
-                <a16:creationId xmlns:a16="http://schemas.microsoft.com/office/drawing/2014/main" id="{66C0E097-CB4A-4A39-1006-BCCC06BDE904}"/>
+                <a16:creationId xmlns:a16="http://schemas.microsoft.com/office/drawing/2014/main" id="{E24A2F5C-F60B-CFE4-C4B8-B078B376D440}"/>
               </a:ext>
             </a:extLst>
           </p:cNvPr>
@@ -4064,97 +6012,99 @@
             <p:ph idx="1"/>
           </p:nvPr>
         </p:nvSpPr>
-        <p:spPr/>
-        <p:txBody>
-          <a:bodyPr/>
-          <a:lstStyle/>
-          <a:p>
-            <a:r>
-              <a:rPr lang="pt-PT" dirty="0" err="1"/>
-              <a:t>Main</a:t>
-            </a:r>
-            <a:r>
-              <a:rPr lang="pt-PT" dirty="0"/>
-              <a:t> </a:t>
-            </a:r>
-            <a:r>
-              <a:rPr lang="pt-PT" dirty="0" err="1"/>
-              <a:t>references</a:t>
-            </a:r>
-            <a:r>
-              <a:rPr lang="pt-PT" dirty="0"/>
-              <a:t> </a:t>
-            </a:r>
-            <a:r>
-              <a:rPr lang="pt-PT" dirty="0" err="1"/>
-              <a:t>used</a:t>
-            </a:r>
-            <a:r>
-              <a:rPr lang="pt-PT" dirty="0"/>
-              <a:t> (</a:t>
-            </a:r>
-            <a:r>
-              <a:rPr lang="pt-PT" dirty="0" err="1"/>
-              <a:t>books</a:t>
-            </a:r>
-            <a:r>
-              <a:rPr lang="pt-PT"/>
-              <a:t>, tutorials</a:t>
-            </a:r>
-            <a:r>
-              <a:rPr lang="pt-PT" dirty="0"/>
-              <a:t>, sites, etc.)</a:t>
-            </a:r>
-          </a:p>
-          <a:p>
-            <a:r>
-              <a:rPr lang="pt-PT" dirty="0" err="1"/>
-              <a:t>Not</a:t>
-            </a:r>
-            <a:r>
-              <a:rPr lang="pt-PT" dirty="0"/>
-              <a:t> </a:t>
-            </a:r>
-            <a:r>
-              <a:rPr lang="pt-PT" dirty="0" err="1"/>
-              <a:t>just</a:t>
-            </a:r>
-            <a:r>
-              <a:rPr lang="pt-PT" dirty="0"/>
-              <a:t> </a:t>
-            </a:r>
-            <a:r>
-              <a:rPr lang="pt-PT" dirty="0" err="1"/>
-              <a:t>URLs</a:t>
-            </a:r>
-            <a:endParaRPr lang="pt-PT" dirty="0"/>
-          </a:p>
-        </p:txBody>
-      </p:sp>
-      <p:sp>
-        <p:nvSpPr>
-          <p:cNvPr id="4" name="Marcador de Posição da Data 3">
-            <a:extLst>
-              <a:ext uri="{FF2B5EF4-FFF2-40B4-BE49-F238E27FC236}">
-                <a16:creationId xmlns:a16="http://schemas.microsoft.com/office/drawing/2014/main" id="{E7ECCBBE-C215-B776-15D1-1104CF272226}"/>
-              </a:ext>
-            </a:extLst>
-          </p:cNvPr>
-          <p:cNvSpPr>
-            <a:spLocks noGrp="1"/>
-          </p:cNvSpPr>
-          <p:nvPr>
-            <p:ph type="dt" sz="half" idx="10"/>
-          </p:nvPr>
-        </p:nvSpPr>
-        <p:spPr/>
-        <p:txBody>
-          <a:bodyPr/>
-          <a:lstStyle/>
-          <a:p>
-            <a:r>
-              <a:rPr lang="pt-PT"/>
-              <a:t>ICG - 2021/2022 - Project 1</a:t>
+        <p:spPr>
+          <a:xfrm>
+            <a:off x="6115317" y="2743200"/>
+            <a:ext cx="5247340" cy="3496878"/>
+          </a:xfrm>
+        </p:spPr>
+        <p:txBody>
+          <a:bodyPr anchor="ctr">
+            <a:normAutofit lnSpcReduction="10000"/>
+          </a:bodyPr>
+          <a:lstStyle/>
+          <a:p>
+            <a:pPr algn="just">
+              <a:lnSpc>
+                <a:spcPct val="100000"/>
+              </a:lnSpc>
+              <a:buFont typeface="Symbol" panose="05050102010706020507" pitchFamily="18" charset="2"/>
+              <a:buChar char="-"/>
+            </a:pPr>
+            <a:r>
+              <a:rPr lang="en-US" sz="2000" b="0" i="0" u="none" strike="noStrike" baseline="0" dirty="0">
+                <a:solidFill>
+                  <a:srgbClr val="000000"/>
+                </a:solidFill>
+                <a:latin typeface="Calibri" panose="020F0502020204030204" pitchFamily="34" charset="0"/>
+              </a:rPr>
+              <a:t>Create a medieval environment and allow the user to explore it and fight against enemies withing the setting.</a:t>
+            </a:r>
+          </a:p>
+          <a:p>
+            <a:pPr algn="just">
+              <a:lnSpc>
+                <a:spcPct val="100000"/>
+              </a:lnSpc>
+              <a:buFont typeface="Symbol" panose="05050102010706020507" pitchFamily="18" charset="2"/>
+              <a:buChar char="-"/>
+            </a:pPr>
+            <a:endParaRPr lang="pt-PT" sz="2000" b="0" i="0" u="none" strike="noStrike" baseline="0" dirty="0">
+              <a:solidFill>
+                <a:srgbClr val="000000"/>
+              </a:solidFill>
+              <a:latin typeface="Calibri" panose="020F0502020204030204" pitchFamily="34" charset="0"/>
+            </a:endParaRPr>
+          </a:p>
+          <a:p>
+            <a:pPr algn="just">
+              <a:lnSpc>
+                <a:spcPct val="100000"/>
+              </a:lnSpc>
+              <a:buFont typeface="Symbol" panose="05050102010706020507" pitchFamily="18" charset="2"/>
+              <a:buChar char="-"/>
+            </a:pPr>
+            <a:r>
+              <a:rPr lang="en-US" sz="2000" b="0" i="0" u="none" strike="noStrike" baseline="0" dirty="0">
+                <a:solidFill>
+                  <a:srgbClr val="000000"/>
+                </a:solidFill>
+                <a:latin typeface="Calibri" panose="020F0502020204030204" pitchFamily="34" charset="0"/>
+              </a:rPr>
+              <a:t>It uses three.js and some Blender modules.</a:t>
+            </a:r>
+          </a:p>
+          <a:p>
+            <a:pPr algn="just">
+              <a:lnSpc>
+                <a:spcPct val="100000"/>
+              </a:lnSpc>
+              <a:buFont typeface="Symbol" panose="05050102010706020507" pitchFamily="18" charset="2"/>
+              <a:buChar char="-"/>
+            </a:pPr>
+            <a:endParaRPr lang="en-US" sz="2000" b="0" i="0" u="none" strike="noStrike" baseline="0" dirty="0">
+              <a:solidFill>
+                <a:srgbClr val="000000"/>
+              </a:solidFill>
+              <a:latin typeface="Calibri" panose="020F0502020204030204" pitchFamily="34" charset="0"/>
+            </a:endParaRPr>
+          </a:p>
+          <a:p>
+            <a:pPr algn="just">
+              <a:lnSpc>
+                <a:spcPct val="100000"/>
+              </a:lnSpc>
+              <a:buFont typeface="Symbol" panose="05050102010706020507" pitchFamily="18" charset="2"/>
+              <a:buChar char="-"/>
+            </a:pPr>
+            <a:r>
+              <a:rPr lang="en-US" sz="2000" b="0" i="0" u="none" strike="noStrike" baseline="0" dirty="0">
+                <a:solidFill>
+                  <a:srgbClr val="000000"/>
+                </a:solidFill>
+                <a:latin typeface="Calibri" panose="020F0502020204030204" pitchFamily="34" charset="0"/>
+              </a:rPr>
+              <a:t>The demo is available at joaogasparp.github.io and the code at https://github.com/joaogasparp/joaogasparp.github.io </a:t>
             </a:r>
           </a:p>
         </p:txBody>
@@ -4164,7 +6114,7 @@
           <p:cNvPr id="5" name="Marcador de Posição do Número do Diapositivo 4">
             <a:extLst>
               <a:ext uri="{FF2B5EF4-FFF2-40B4-BE49-F238E27FC236}">
-                <a16:creationId xmlns:a16="http://schemas.microsoft.com/office/drawing/2014/main" id="{FAA63990-17BD-B879-DD9C-8B239398B75F}"/>
+                <a16:creationId xmlns:a16="http://schemas.microsoft.com/office/drawing/2014/main" id="{7B81D6DC-8FED-F23F-1030-4B65AB9A598D}"/>
               </a:ext>
             </a:extLst>
           </p:cNvPr>
@@ -4175,534 +6125,50 @@
             <p:ph type="sldNum" sz="quarter" idx="12"/>
           </p:nvPr>
         </p:nvSpPr>
-        <p:spPr/>
-        <p:txBody>
-          <a:bodyPr/>
-          <a:lstStyle/>
-          <a:p>
+        <p:spPr>
+          <a:xfrm>
+            <a:off x="8732520" y="6356350"/>
+            <a:ext cx="3200400" cy="365125"/>
+          </a:xfrm>
+        </p:spPr>
+        <p:txBody>
+          <a:bodyPr>
+            <a:normAutofit/>
+          </a:bodyPr>
+          <a:lstStyle/>
+          <a:p>
+            <a:pPr>
+              <a:spcAft>
+                <a:spcPts val="600"/>
+              </a:spcAft>
+            </a:pPr>
             <a:fld id="{A275E76C-0B34-4617-92BE-2419D92E4442}" type="slidenum">
-              <a:rPr lang="pt-PT" smtClean="0"/>
-              <a:t>10</a:t>
-            </a:fld>
-            <a:endParaRPr lang="pt-PT"/>
-          </a:p>
-        </p:txBody>
-      </p:sp>
-    </p:spTree>
-    <p:extLst>
-      <p:ext uri="{BB962C8B-B14F-4D97-AF65-F5344CB8AC3E}">
-        <p14:creationId xmlns:p14="http://schemas.microsoft.com/office/powerpoint/2010/main" val="1501253385"/>
-      </p:ext>
-    </p:extLst>
-  </p:cSld>
-  <p:clrMapOvr>
-    <a:masterClrMapping/>
-  </p:clrMapOvr>
-</p:sld>
-</file>
-
-<file path=ppt/slides/slide2.xml><?xml version="1.0" encoding="utf-8"?>
-<p:sld xmlns:a="http://schemas.openxmlformats.org/drawingml/2006/main" xmlns:r="http://schemas.openxmlformats.org/officeDocument/2006/relationships" xmlns:p="http://schemas.openxmlformats.org/presentationml/2006/main">
-  <p:cSld>
-    <p:spTree>
-      <p:nvGrpSpPr>
-        <p:cNvPr id="1" name=""/>
-        <p:cNvGrpSpPr/>
-        <p:nvPr/>
-      </p:nvGrpSpPr>
-      <p:grpSpPr>
-        <a:xfrm>
-          <a:off x="0" y="0"/>
-          <a:ext cx="0" cy="0"/>
-          <a:chOff x="0" y="0"/>
-          <a:chExt cx="0" cy="0"/>
-        </a:xfrm>
-      </p:grpSpPr>
-      <p:sp>
-        <p:nvSpPr>
-          <p:cNvPr id="2" name="Título 1">
-            <a:extLst>
-              <a:ext uri="{FF2B5EF4-FFF2-40B4-BE49-F238E27FC236}">
-                <a16:creationId xmlns:a16="http://schemas.microsoft.com/office/drawing/2014/main" id="{563673AD-ED13-D61E-386F-BDEF278C99A6}"/>
-              </a:ext>
-            </a:extLst>
-          </p:cNvPr>
-          <p:cNvSpPr>
-            <a:spLocks noGrp="1"/>
-          </p:cNvSpPr>
-          <p:nvPr>
-            <p:ph type="title"/>
-          </p:nvPr>
-        </p:nvSpPr>
-        <p:spPr/>
-        <p:txBody>
-          <a:bodyPr/>
-          <a:lstStyle/>
-          <a:p>
-            <a:endParaRPr lang="pt-PT" dirty="0"/>
-          </a:p>
-        </p:txBody>
-      </p:sp>
-      <p:sp>
-        <p:nvSpPr>
-          <p:cNvPr id="3" name="Marcador de Posição de Conteúdo 2">
-            <a:extLst>
-              <a:ext uri="{FF2B5EF4-FFF2-40B4-BE49-F238E27FC236}">
-                <a16:creationId xmlns:a16="http://schemas.microsoft.com/office/drawing/2014/main" id="{E24A2F5C-F60B-CFE4-C4B8-B078B376D440}"/>
-              </a:ext>
-            </a:extLst>
-          </p:cNvPr>
-          <p:cNvSpPr>
-            <a:spLocks noGrp="1"/>
-          </p:cNvSpPr>
-          <p:nvPr>
-            <p:ph idx="1"/>
-          </p:nvPr>
-        </p:nvSpPr>
-        <p:spPr/>
-        <p:txBody>
-          <a:bodyPr/>
-          <a:lstStyle/>
-          <a:p>
-            <a:r>
-              <a:rPr lang="pt-PT" dirty="0" err="1"/>
-              <a:t>The</a:t>
-            </a:r>
-            <a:r>
-              <a:rPr lang="pt-PT" dirty="0"/>
-              <a:t> slides can </a:t>
-            </a:r>
-            <a:r>
-              <a:rPr lang="pt-PT" dirty="0" err="1"/>
-              <a:t>be</a:t>
-            </a:r>
-            <a:r>
-              <a:rPr lang="pt-PT" dirty="0"/>
-              <a:t> </a:t>
-            </a:r>
-            <a:r>
-              <a:rPr lang="pt-PT" dirty="0" err="1"/>
-              <a:t>done</a:t>
-            </a:r>
-            <a:r>
-              <a:rPr lang="pt-PT" dirty="0"/>
-              <a:t> in </a:t>
-            </a:r>
-            <a:r>
-              <a:rPr lang="pt-PT" dirty="0" err="1"/>
-              <a:t>English</a:t>
-            </a:r>
-            <a:r>
-              <a:rPr lang="pt-PT" dirty="0"/>
-              <a:t> </a:t>
-            </a:r>
-            <a:r>
-              <a:rPr lang="pt-PT" dirty="0" err="1"/>
-              <a:t>or</a:t>
-            </a:r>
-            <a:r>
-              <a:rPr lang="pt-PT" dirty="0"/>
-              <a:t> Portuguese; </a:t>
-            </a:r>
-            <a:r>
-              <a:rPr lang="pt-PT" dirty="0" err="1"/>
-              <a:t>the</a:t>
-            </a:r>
-            <a:r>
-              <a:rPr lang="pt-PT" dirty="0"/>
-              <a:t> </a:t>
-            </a:r>
-            <a:r>
-              <a:rPr lang="pt-PT" dirty="0" err="1"/>
-              <a:t>choice</a:t>
-            </a:r>
-            <a:r>
-              <a:rPr lang="pt-PT" dirty="0"/>
-              <a:t> </a:t>
-            </a:r>
-            <a:r>
-              <a:rPr lang="pt-PT" dirty="0" err="1"/>
-              <a:t>is</a:t>
-            </a:r>
-            <a:r>
-              <a:rPr lang="pt-PT" dirty="0"/>
-              <a:t> </a:t>
-            </a:r>
-            <a:r>
-              <a:rPr lang="pt-PT" dirty="0" err="1"/>
-              <a:t>yours</a:t>
-            </a:r>
-            <a:endParaRPr lang="pt-PT" dirty="0"/>
-          </a:p>
-          <a:p>
-            <a:r>
-              <a:rPr lang="pt-PT" dirty="0"/>
-              <a:t>Do </a:t>
-            </a:r>
-            <a:r>
-              <a:rPr lang="pt-PT" dirty="0" err="1"/>
-              <a:t>not</a:t>
-            </a:r>
-            <a:r>
-              <a:rPr lang="pt-PT" dirty="0"/>
-              <a:t> </a:t>
-            </a:r>
-            <a:r>
-              <a:rPr lang="pt-PT" dirty="0" err="1"/>
-              <a:t>write</a:t>
-            </a:r>
-            <a:r>
-              <a:rPr lang="pt-PT" dirty="0"/>
-              <a:t> </a:t>
-            </a:r>
-            <a:r>
-              <a:rPr lang="pt-PT" dirty="0" err="1"/>
-              <a:t>full</a:t>
-            </a:r>
-            <a:r>
-              <a:rPr lang="pt-PT" dirty="0"/>
-              <a:t> </a:t>
-            </a:r>
-            <a:r>
-              <a:rPr lang="pt-PT" dirty="0" err="1"/>
-              <a:t>sentences</a:t>
-            </a:r>
-            <a:r>
-              <a:rPr lang="pt-PT" dirty="0"/>
-              <a:t>, </a:t>
-            </a:r>
-            <a:r>
-              <a:rPr lang="pt-PT" dirty="0" err="1"/>
-              <a:t>just</a:t>
-            </a:r>
-            <a:r>
-              <a:rPr lang="pt-PT" dirty="0"/>
-              <a:t> </a:t>
-            </a:r>
-            <a:r>
-              <a:rPr lang="pt-PT" dirty="0" err="1"/>
-              <a:t>topics</a:t>
-            </a:r>
-            <a:endParaRPr lang="pt-PT" dirty="0"/>
-          </a:p>
-          <a:p>
-            <a:r>
-              <a:rPr lang="pt-PT" dirty="0" err="1"/>
-              <a:t>It</a:t>
-            </a:r>
-            <a:r>
-              <a:rPr lang="pt-PT" dirty="0"/>
-              <a:t> </a:t>
-            </a:r>
-            <a:r>
-              <a:rPr lang="pt-PT" dirty="0" err="1"/>
-              <a:t>is</a:t>
-            </a:r>
-            <a:r>
-              <a:rPr lang="pt-PT" dirty="0"/>
-              <a:t> a </a:t>
-            </a:r>
-            <a:r>
-              <a:rPr lang="pt-PT" dirty="0" err="1"/>
-              <a:t>Computer</a:t>
-            </a:r>
-            <a:r>
-              <a:rPr lang="pt-PT" dirty="0"/>
-              <a:t> </a:t>
-            </a:r>
-            <a:r>
-              <a:rPr lang="pt-PT" dirty="0" err="1"/>
-              <a:t>Graphics</a:t>
-            </a:r>
-            <a:r>
-              <a:rPr lang="pt-PT" dirty="0"/>
-              <a:t> </a:t>
-            </a:r>
-            <a:r>
-              <a:rPr lang="pt-PT" dirty="0" err="1"/>
-              <a:t>project</a:t>
-            </a:r>
-            <a:r>
-              <a:rPr lang="pt-PT" dirty="0"/>
-              <a:t>; </a:t>
-            </a:r>
-            <a:r>
-              <a:rPr lang="pt-PT" dirty="0" err="1"/>
-              <a:t>images</a:t>
-            </a:r>
-            <a:r>
-              <a:rPr lang="pt-PT" dirty="0"/>
-              <a:t> are </a:t>
-            </a:r>
-            <a:r>
-              <a:rPr lang="pt-PT" dirty="0" err="1"/>
-              <a:t>expected</a:t>
-            </a:r>
-            <a:r>
-              <a:rPr lang="pt-PT" dirty="0"/>
-              <a:t> in (</a:t>
-            </a:r>
-            <a:r>
-              <a:rPr lang="pt-PT" dirty="0" err="1"/>
-              <a:t>almost</a:t>
-            </a:r>
-            <a:r>
-              <a:rPr lang="pt-PT" dirty="0"/>
-              <a:t>) </a:t>
-            </a:r>
-            <a:r>
-              <a:rPr lang="pt-PT" dirty="0" err="1"/>
-              <a:t>every</a:t>
-            </a:r>
-            <a:r>
-              <a:rPr lang="pt-PT" dirty="0"/>
-              <a:t> slide</a:t>
-            </a:r>
-          </a:p>
-          <a:p>
-            <a:r>
-              <a:rPr lang="pt-PT" dirty="0" err="1"/>
-              <a:t>This</a:t>
-            </a:r>
-            <a:r>
-              <a:rPr lang="pt-PT" dirty="0"/>
-              <a:t> </a:t>
-            </a:r>
-            <a:r>
-              <a:rPr lang="pt-PT" dirty="0" err="1"/>
-              <a:t>is</a:t>
-            </a:r>
-            <a:r>
-              <a:rPr lang="pt-PT" dirty="0"/>
-              <a:t> </a:t>
-            </a:r>
-            <a:r>
-              <a:rPr lang="pt-PT" dirty="0" err="1"/>
-              <a:t>just</a:t>
-            </a:r>
-            <a:r>
-              <a:rPr lang="pt-PT" dirty="0"/>
-              <a:t> a </a:t>
-            </a:r>
-            <a:r>
-              <a:rPr lang="pt-PT" dirty="0" err="1"/>
-              <a:t>possible</a:t>
-            </a:r>
-            <a:r>
-              <a:rPr lang="pt-PT" dirty="0"/>
-              <a:t> </a:t>
-            </a:r>
-            <a:r>
-              <a:rPr lang="pt-PT" dirty="0" err="1"/>
-              <a:t>skeleton</a:t>
-            </a:r>
-            <a:r>
-              <a:rPr lang="pt-PT" dirty="0"/>
-              <a:t> for </a:t>
-            </a:r>
-            <a:r>
-              <a:rPr lang="pt-PT" dirty="0" err="1"/>
-              <a:t>your</a:t>
-            </a:r>
-            <a:r>
-              <a:rPr lang="pt-PT" dirty="0"/>
-              <a:t> slides; </a:t>
-            </a:r>
-            <a:r>
-              <a:rPr lang="pt-PT" dirty="0" err="1"/>
-              <a:t>add</a:t>
-            </a:r>
-            <a:r>
-              <a:rPr lang="pt-PT" dirty="0"/>
-              <a:t> more slides </a:t>
-            </a:r>
-            <a:r>
-              <a:rPr lang="pt-PT" dirty="0" err="1"/>
-              <a:t>when</a:t>
-            </a:r>
-            <a:r>
-              <a:rPr lang="pt-PT" dirty="0"/>
-              <a:t> </a:t>
-            </a:r>
-            <a:r>
-              <a:rPr lang="pt-PT" dirty="0" err="1"/>
-              <a:t>needed</a:t>
-            </a:r>
-            <a:r>
-              <a:rPr lang="pt-PT" dirty="0"/>
-              <a:t> – </a:t>
-            </a:r>
-            <a:r>
-              <a:rPr lang="pt-PT" dirty="0" err="1"/>
-              <a:t>but</a:t>
-            </a:r>
-            <a:r>
-              <a:rPr lang="pt-PT" dirty="0"/>
-              <a:t> </a:t>
-            </a:r>
-            <a:r>
-              <a:rPr lang="pt-PT" dirty="0" err="1"/>
-              <a:t>not</a:t>
-            </a:r>
-            <a:r>
-              <a:rPr lang="pt-PT" dirty="0"/>
-              <a:t> too </a:t>
-            </a:r>
-            <a:r>
-              <a:rPr lang="pt-PT" dirty="0" err="1"/>
-              <a:t>many</a:t>
-            </a:r>
-            <a:endParaRPr lang="pt-PT" dirty="0"/>
-          </a:p>
-          <a:p>
-            <a:endParaRPr lang="pt-PT" dirty="0"/>
-          </a:p>
-          <a:p>
-            <a:r>
-              <a:rPr lang="pt-PT" b="1" dirty="0">
+              <a:rPr lang="pt-PT">
                 <a:solidFill>
-                  <a:srgbClr val="FF0000"/>
+                  <a:schemeClr val="tx1"/>
                 </a:solidFill>
               </a:rPr>
-              <a:t>Total </a:t>
-            </a:r>
-            <a:r>
-              <a:rPr lang="pt-PT" b="1" dirty="0" err="1">
-                <a:solidFill>
-                  <a:srgbClr val="FF0000"/>
-                </a:solidFill>
-              </a:rPr>
-              <a:t>presentation</a:t>
-            </a:r>
-            <a:r>
-              <a:rPr lang="pt-PT" b="1" dirty="0">
-                <a:solidFill>
-                  <a:srgbClr val="FF0000"/>
-                </a:solidFill>
-              </a:rPr>
-              <a:t> time </a:t>
-            </a:r>
-            <a:r>
-              <a:rPr lang="pt-PT" b="1" dirty="0" err="1">
-                <a:solidFill>
-                  <a:srgbClr val="FF0000"/>
-                </a:solidFill>
-              </a:rPr>
-              <a:t>is</a:t>
-            </a:r>
-            <a:r>
-              <a:rPr lang="pt-PT" b="1" dirty="0">
-                <a:solidFill>
-                  <a:srgbClr val="FF0000"/>
-                </a:solidFill>
-              </a:rPr>
-              <a:t> 12 minutes, </a:t>
-            </a:r>
-            <a:r>
-              <a:rPr lang="pt-PT" b="1" dirty="0" err="1">
-                <a:solidFill>
-                  <a:srgbClr val="FF0000"/>
-                </a:solidFill>
-              </a:rPr>
-              <a:t>including</a:t>
-            </a:r>
-            <a:r>
-              <a:rPr lang="pt-PT" b="1" dirty="0">
-                <a:solidFill>
-                  <a:srgbClr val="FF0000"/>
-                </a:solidFill>
-              </a:rPr>
-              <a:t> a demo </a:t>
-            </a:r>
-            <a:r>
-              <a:rPr lang="pt-PT" b="1" dirty="0" err="1">
-                <a:solidFill>
-                  <a:srgbClr val="FF0000"/>
-                </a:solidFill>
-              </a:rPr>
-              <a:t>of</a:t>
-            </a:r>
-            <a:r>
-              <a:rPr lang="pt-PT" b="1" dirty="0">
-                <a:solidFill>
-                  <a:srgbClr val="FF0000"/>
-                </a:solidFill>
-              </a:rPr>
-              <a:t> </a:t>
-            </a:r>
-            <a:r>
-              <a:rPr lang="pt-PT" b="1" dirty="0" err="1">
-                <a:solidFill>
-                  <a:srgbClr val="FF0000"/>
-                </a:solidFill>
-              </a:rPr>
-              <a:t>your</a:t>
-            </a:r>
-            <a:r>
-              <a:rPr lang="pt-PT" b="1" dirty="0">
-                <a:solidFill>
-                  <a:srgbClr val="FF0000"/>
-                </a:solidFill>
-              </a:rPr>
-              <a:t> </a:t>
-            </a:r>
-            <a:r>
-              <a:rPr lang="pt-PT" b="1" dirty="0" err="1">
-                <a:solidFill>
-                  <a:srgbClr val="FF0000"/>
-                </a:solidFill>
-              </a:rPr>
-              <a:t>project</a:t>
-            </a:r>
-            <a:endParaRPr lang="pt-PT" b="1" dirty="0">
+              <a:pPr>
+                <a:spcAft>
+                  <a:spcPts val="600"/>
+                </a:spcAft>
+              </a:pPr>
+              <a:t>2</a:t>
+            </a:fld>
+            <a:endParaRPr lang="pt-PT" dirty="0">
               <a:solidFill>
-                <a:srgbClr val="FF0000"/>
+                <a:schemeClr val="tx1"/>
               </a:solidFill>
             </a:endParaRPr>
           </a:p>
-          <a:p>
-            <a:endParaRPr lang="pt-PT" dirty="0"/>
-          </a:p>
-          <a:p>
-            <a:endParaRPr lang="pt-PT" dirty="0"/>
-          </a:p>
-        </p:txBody>
-      </p:sp>
-      <p:sp>
-        <p:nvSpPr>
-          <p:cNvPr id="5" name="Marcador de Posição do Número do Diapositivo 4">
-            <a:extLst>
-              <a:ext uri="{FF2B5EF4-FFF2-40B4-BE49-F238E27FC236}">
-                <a16:creationId xmlns:a16="http://schemas.microsoft.com/office/drawing/2014/main" id="{7B81D6DC-8FED-F23F-1030-4B65AB9A598D}"/>
-              </a:ext>
-            </a:extLst>
-          </p:cNvPr>
-          <p:cNvSpPr>
-            <a:spLocks noGrp="1"/>
-          </p:cNvSpPr>
-          <p:nvPr>
-            <p:ph type="sldNum" sz="quarter" idx="12"/>
-          </p:nvPr>
-        </p:nvSpPr>
-        <p:spPr/>
-        <p:txBody>
-          <a:bodyPr/>
-          <a:lstStyle/>
-          <a:p>
-            <a:fld id="{A275E76C-0B34-4617-92BE-2419D92E4442}" type="slidenum">
-              <a:rPr lang="pt-PT" smtClean="0"/>
-              <a:t>2</a:t>
-            </a:fld>
-            <a:endParaRPr lang="pt-PT"/>
-          </a:p>
-        </p:txBody>
-      </p:sp>
-      <p:sp>
-        <p:nvSpPr>
-          <p:cNvPr id="6" name="Marcador de Posição da Data 3">
-            <a:extLst>
-              <a:ext uri="{FF2B5EF4-FFF2-40B4-BE49-F238E27FC236}">
-                <a16:creationId xmlns:a16="http://schemas.microsoft.com/office/drawing/2014/main" id="{5D06981F-3CC6-BEED-655A-47BEBF52B2ED}"/>
+        </p:txBody>
+      </p:sp>
+      <p:sp>
+        <p:nvSpPr>
+          <p:cNvPr id="7" name="Marcador de Posição da Data 3">
+            <a:extLst>
+              <a:ext uri="{FF2B5EF4-FFF2-40B4-BE49-F238E27FC236}">
+                <a16:creationId xmlns:a16="http://schemas.microsoft.com/office/drawing/2014/main" id="{9ED0A3A5-E52B-0C4A-51C2-A7D7BB976161}"/>
               </a:ext>
             </a:extLst>
           </p:cNvPr>
@@ -4715,17 +6181,28 @@
         </p:nvSpPr>
         <p:spPr>
           <a:xfrm>
-            <a:off x="838200" y="6356350"/>
+            <a:off x="243025" y="6356349"/>
             <a:ext cx="2743200" cy="365125"/>
           </a:xfrm>
         </p:spPr>
         <p:txBody>
-          <a:bodyPr/>
-          <a:lstStyle/>
-          <a:p>
-            <a:r>
-              <a:rPr lang="pt-PT" dirty="0"/>
-              <a:t>ICG - 2023/2024 - Project 1</a:t>
+          <a:bodyPr>
+            <a:normAutofit/>
+          </a:bodyPr>
+          <a:lstStyle/>
+          <a:p>
+            <a:pPr>
+              <a:spcAft>
+                <a:spcPts val="600"/>
+              </a:spcAft>
+            </a:pPr>
+            <a:r>
+              <a:rPr lang="pt-PT" dirty="0">
+                <a:solidFill>
+                  <a:schemeClr val="bg1"/>
+                </a:solidFill>
+              </a:rPr>
+              <a:t>ICG - 2023/2024</a:t>
             </a:r>
           </a:p>
         </p:txBody>
@@ -4746,6 +6223,14 @@
 <file path=ppt/slides/slide3.xml><?xml version="1.0" encoding="utf-8"?>
 <p:sld xmlns:a="http://schemas.openxmlformats.org/drawingml/2006/main" xmlns:r="http://schemas.openxmlformats.org/officeDocument/2006/relationships" xmlns:p="http://schemas.openxmlformats.org/presentationml/2006/main">
   <p:cSld>
+    <p:bg>
+      <p:bgPr>
+        <a:solidFill>
+          <a:schemeClr val="bg1"/>
+        </a:solidFill>
+        <a:effectLst/>
+      </p:bgPr>
+    </p:bg>
     <p:spTree>
       <p:nvGrpSpPr>
         <p:cNvPr id="1" name=""/>
@@ -4760,12 +6245,233 @@
           <a:chExt cx="0" cy="0"/>
         </a:xfrm>
       </p:grpSpPr>
+      <p:sp useBgFill="1">
+        <p:nvSpPr>
+          <p:cNvPr id="11" name="Slide Background">
+            <a:extLst>
+              <a:ext uri="{FF2B5EF4-FFF2-40B4-BE49-F238E27FC236}">
+                <a16:creationId xmlns:a16="http://schemas.microsoft.com/office/drawing/2014/main" id="{C0763A76-9F1C-4FC5-82B7-DD475DA461B2}"/>
+              </a:ext>
+              <a:ext uri="{C183D7F6-B498-43B3-948B-1728B52AA6E4}">
+                <adec:decorative xmlns:adec="http://schemas.microsoft.com/office/drawing/2017/decorative" val="1"/>
+              </a:ext>
+            </a:extLst>
+          </p:cNvPr>
+          <p:cNvSpPr>
+            <a:spLocks noGrp="1" noRot="1" noChangeAspect="1" noMove="1" noResize="1" noEditPoints="1" noAdjustHandles="1" noChangeArrowheads="1" noChangeShapeType="1" noTextEdit="1"/>
+          </p:cNvSpPr>
+          <p:nvPr>
+            <p:extLst>
+              <p:ext uri="{386F3935-93C4-4BCD-93E2-E3B085C9AB24}">
+                <p16:designElem xmlns:p16="http://schemas.microsoft.com/office/powerpoint/2015/main" val="1"/>
+              </p:ext>
+            </p:extLst>
+          </p:nvPr>
+        </p:nvSpPr>
+        <p:spPr bwMode="white">
+          <a:xfrm>
+            <a:off x="-1" y="0"/>
+            <a:ext cx="12191999" cy="6858000"/>
+          </a:xfrm>
+          <a:prstGeom prst="rect">
+            <a:avLst/>
+          </a:prstGeom>
+          <a:ln>
+            <a:noFill/>
+          </a:ln>
+        </p:spPr>
+        <p:style>
+          <a:lnRef idx="2">
+            <a:schemeClr val="accent1">
+              <a:shade val="50000"/>
+            </a:schemeClr>
+          </a:lnRef>
+          <a:fillRef idx="1">
+            <a:schemeClr val="accent1"/>
+          </a:fillRef>
+          <a:effectRef idx="0">
+            <a:schemeClr val="accent1"/>
+          </a:effectRef>
+          <a:fontRef idx="minor">
+            <a:schemeClr val="lt1"/>
+          </a:fontRef>
+        </p:style>
+        <p:txBody>
+          <a:bodyPr rtlCol="0" anchor="ctr"/>
+          <a:lstStyle>
+            <a:defPPr>
+              <a:defRPr lang="en-US"/>
+            </a:defPPr>
+            <a:lvl1pPr marL="0" algn="l" defTabSz="914400" rtl="0" eaLnBrk="1" latinLnBrk="0" hangingPunct="1">
+              <a:defRPr sz="1800" kern="1200">
+                <a:solidFill>
+                  <a:schemeClr val="lt1"/>
+                </a:solidFill>
+                <a:latin typeface="+mn-lt"/>
+                <a:ea typeface="+mn-ea"/>
+                <a:cs typeface="+mn-cs"/>
+              </a:defRPr>
+            </a:lvl1pPr>
+            <a:lvl2pPr marL="457200" algn="l" defTabSz="914400" rtl="0" eaLnBrk="1" latinLnBrk="0" hangingPunct="1">
+              <a:defRPr sz="1800" kern="1200">
+                <a:solidFill>
+                  <a:schemeClr val="lt1"/>
+                </a:solidFill>
+                <a:latin typeface="+mn-lt"/>
+                <a:ea typeface="+mn-ea"/>
+                <a:cs typeface="+mn-cs"/>
+              </a:defRPr>
+            </a:lvl2pPr>
+            <a:lvl3pPr marL="914400" algn="l" defTabSz="914400" rtl="0" eaLnBrk="1" latinLnBrk="0" hangingPunct="1">
+              <a:defRPr sz="1800" kern="1200">
+                <a:solidFill>
+                  <a:schemeClr val="lt1"/>
+                </a:solidFill>
+                <a:latin typeface="+mn-lt"/>
+                <a:ea typeface="+mn-ea"/>
+                <a:cs typeface="+mn-cs"/>
+              </a:defRPr>
+            </a:lvl3pPr>
+            <a:lvl4pPr marL="1371600" algn="l" defTabSz="914400" rtl="0" eaLnBrk="1" latinLnBrk="0" hangingPunct="1">
+              <a:defRPr sz="1800" kern="1200">
+                <a:solidFill>
+                  <a:schemeClr val="lt1"/>
+                </a:solidFill>
+                <a:latin typeface="+mn-lt"/>
+                <a:ea typeface="+mn-ea"/>
+                <a:cs typeface="+mn-cs"/>
+              </a:defRPr>
+            </a:lvl4pPr>
+            <a:lvl5pPr marL="1828800" algn="l" defTabSz="914400" rtl="0" eaLnBrk="1" latinLnBrk="0" hangingPunct="1">
+              <a:defRPr sz="1800" kern="1200">
+                <a:solidFill>
+                  <a:schemeClr val="lt1"/>
+                </a:solidFill>
+                <a:latin typeface="+mn-lt"/>
+                <a:ea typeface="+mn-ea"/>
+                <a:cs typeface="+mn-cs"/>
+              </a:defRPr>
+            </a:lvl5pPr>
+            <a:lvl6pPr marL="2286000" algn="l" defTabSz="914400" rtl="0" eaLnBrk="1" latinLnBrk="0" hangingPunct="1">
+              <a:defRPr sz="1800" kern="1200">
+                <a:solidFill>
+                  <a:schemeClr val="lt1"/>
+                </a:solidFill>
+                <a:latin typeface="+mn-lt"/>
+                <a:ea typeface="+mn-ea"/>
+                <a:cs typeface="+mn-cs"/>
+              </a:defRPr>
+            </a:lvl6pPr>
+            <a:lvl7pPr marL="2743200" algn="l" defTabSz="914400" rtl="0" eaLnBrk="1" latinLnBrk="0" hangingPunct="1">
+              <a:defRPr sz="1800" kern="1200">
+                <a:solidFill>
+                  <a:schemeClr val="lt1"/>
+                </a:solidFill>
+                <a:latin typeface="+mn-lt"/>
+                <a:ea typeface="+mn-ea"/>
+                <a:cs typeface="+mn-cs"/>
+              </a:defRPr>
+            </a:lvl7pPr>
+            <a:lvl8pPr marL="3200400" algn="l" defTabSz="914400" rtl="0" eaLnBrk="1" latinLnBrk="0" hangingPunct="1">
+              <a:defRPr sz="1800" kern="1200">
+                <a:solidFill>
+                  <a:schemeClr val="lt1"/>
+                </a:solidFill>
+                <a:latin typeface="+mn-lt"/>
+                <a:ea typeface="+mn-ea"/>
+                <a:cs typeface="+mn-cs"/>
+              </a:defRPr>
+            </a:lvl8pPr>
+            <a:lvl9pPr marL="3657600" algn="l" defTabSz="914400" rtl="0" eaLnBrk="1" latinLnBrk="0" hangingPunct="1">
+              <a:defRPr sz="1800" kern="1200">
+                <a:solidFill>
+                  <a:schemeClr val="lt1"/>
+                </a:solidFill>
+                <a:latin typeface="+mn-lt"/>
+                <a:ea typeface="+mn-ea"/>
+                <a:cs typeface="+mn-cs"/>
+              </a:defRPr>
+            </a:lvl9pPr>
+          </a:lstStyle>
+          <a:p>
+            <a:pPr algn="ctr"/>
+            <a:endParaRPr lang="en-US" dirty="0"/>
+          </a:p>
+        </p:txBody>
+      </p:sp>
+      <p:sp useBgFill="1">
+        <p:nvSpPr>
+          <p:cNvPr id="13" name="Rectangle 12">
+            <a:extLst>
+              <a:ext uri="{FF2B5EF4-FFF2-40B4-BE49-F238E27FC236}">
+                <a16:creationId xmlns:a16="http://schemas.microsoft.com/office/drawing/2014/main" id="{E81BF4F6-F2CF-4984-9D14-D6966D92F99F}"/>
+              </a:ext>
+              <a:ext uri="{C183D7F6-B498-43B3-948B-1728B52AA6E4}">
+                <adec:decorative xmlns:adec="http://schemas.microsoft.com/office/drawing/2017/decorative" val="1"/>
+              </a:ext>
+            </a:extLst>
+          </p:cNvPr>
+          <p:cNvSpPr>
+            <a:spLocks noGrp="1" noRot="1" noChangeAspect="1" noMove="1" noResize="1" noEditPoints="1" noAdjustHandles="1" noChangeArrowheads="1" noChangeShapeType="1" noTextEdit="1"/>
+          </p:cNvSpPr>
+          <p:nvPr>
+            <p:extLst>
+              <p:ext uri="{386F3935-93C4-4BCD-93E2-E3B085C9AB24}">
+                <p16:designElem xmlns:p16="http://schemas.microsoft.com/office/powerpoint/2015/main" val="1"/>
+              </p:ext>
+            </p:extLst>
+          </p:nvPr>
+        </p:nvSpPr>
+        <p:spPr>
+          <a:xfrm>
+            <a:off x="1" y="0"/>
+            <a:ext cx="8522446" cy="2285999"/>
+          </a:xfrm>
+          <a:prstGeom prst="rect">
+            <a:avLst/>
+          </a:prstGeom>
+          <a:ln>
+            <a:noFill/>
+          </a:ln>
+          <a:effectLst>
+            <a:outerShdw blurRad="596900" dist="304800" dir="7140000" sx="90000" sy="90000" algn="t" rotWithShape="0">
+              <a:srgbClr val="000000">
+                <a:alpha val="15000"/>
+              </a:srgbClr>
+            </a:outerShdw>
+          </a:effectLst>
+        </p:spPr>
+        <p:style>
+          <a:lnRef idx="2">
+            <a:schemeClr val="accent1">
+              <a:shade val="50000"/>
+            </a:schemeClr>
+          </a:lnRef>
+          <a:fillRef idx="1">
+            <a:schemeClr val="accent1"/>
+          </a:fillRef>
+          <a:effectRef idx="0">
+            <a:schemeClr val="accent1"/>
+          </a:effectRef>
+          <a:fontRef idx="minor">
+            <a:schemeClr val="lt1"/>
+          </a:fontRef>
+        </p:style>
+        <p:txBody>
+          <a:bodyPr rtlCol="0" anchor="ctr"/>
+          <a:lstStyle/>
+          <a:p>
+            <a:pPr algn="ctr"/>
+            <a:endParaRPr lang="en-US" dirty="0"/>
+          </a:p>
+        </p:txBody>
+      </p:sp>
       <p:sp>
         <p:nvSpPr>
           <p:cNvPr id="2" name="Título 1">
             <a:extLst>
               <a:ext uri="{FF2B5EF4-FFF2-40B4-BE49-F238E27FC236}">
-                <a16:creationId xmlns:a16="http://schemas.microsoft.com/office/drawing/2014/main" id="{A74DD990-9309-D707-B679-295DD784B8F8}"/>
+                <a16:creationId xmlns:a16="http://schemas.microsoft.com/office/drawing/2014/main" id="{44DB5274-431B-6EFB-56B1-B3309A117188}"/>
               </a:ext>
             </a:extLst>
           </p:cNvPr>
@@ -4776,24 +6482,22 @@
             <p:ph type="title"/>
           </p:nvPr>
         </p:nvSpPr>
-        <p:spPr/>
-        <p:txBody>
-          <a:bodyPr/>
-          <a:lstStyle/>
-          <a:p>
-            <a:r>
-              <a:rPr lang="pt-PT" dirty="0" err="1"/>
-              <a:t>Main</a:t>
-            </a:r>
-            <a:r>
-              <a:rPr lang="pt-PT" dirty="0"/>
-              <a:t> </a:t>
-            </a:r>
-            <a:r>
-              <a:rPr lang="pt-PT" dirty="0" err="1"/>
-              <a:t>ideas</a:t>
-            </a:r>
-            <a:endParaRPr lang="pt-PT" dirty="0"/>
+        <p:spPr>
+          <a:xfrm>
+            <a:off x="761803" y="350196"/>
+            <a:ext cx="4646904" cy="1624520"/>
+          </a:xfrm>
+        </p:spPr>
+        <p:txBody>
+          <a:bodyPr anchor="ctr">
+            <a:normAutofit/>
+          </a:bodyPr>
+          <a:lstStyle/>
+          <a:p>
+            <a:r>
+              <a:rPr lang="pt-PT" sz="4000" dirty="0"/>
+              <a:t>Models and the scene graph</a:t>
+            </a:r>
           </a:p>
         </p:txBody>
       </p:sp>
@@ -4802,7 +6506,7 @@
           <p:cNvPr id="3" name="Marcador de Posição de Conteúdo 2">
             <a:extLst>
               <a:ext uri="{FF2B5EF4-FFF2-40B4-BE49-F238E27FC236}">
-                <a16:creationId xmlns:a16="http://schemas.microsoft.com/office/drawing/2014/main" id="{69CEDF8A-2D7C-1EDC-03F2-EE94899FD802}"/>
+                <a16:creationId xmlns:a16="http://schemas.microsoft.com/office/drawing/2014/main" id="{340F0F31-346D-0EB3-59C5-A11D190BB3CE}"/>
               </a:ext>
             </a:extLst>
           </p:cNvPr>
@@ -4813,120 +6517,219 @@
             <p:ph idx="1"/>
           </p:nvPr>
         </p:nvSpPr>
-        <p:spPr/>
-        <p:txBody>
-          <a:bodyPr/>
-          <a:lstStyle/>
-          <a:p>
-            <a:r>
-              <a:rPr lang="pt-PT" dirty="0"/>
-              <a:t>Ilha fictícia;</a:t>
-            </a:r>
-          </a:p>
-          <a:p>
-            <a:endParaRPr lang="pt-PT" dirty="0"/>
-          </a:p>
-          <a:p>
-            <a:r>
-              <a:rPr lang="pt-PT" dirty="0"/>
-              <a:t>O utilizador poderá movimentar-se pela ilha encontrando desafios;</a:t>
-            </a:r>
-          </a:p>
-          <a:p>
-            <a:endParaRPr lang="pt-PT" dirty="0"/>
-          </a:p>
-          <a:p>
-            <a:r>
-              <a:rPr lang="pt-PT" dirty="0"/>
-              <a:t>Faz uso do </a:t>
-            </a:r>
-            <a:r>
-              <a:rPr lang="pt-PT" dirty="0" err="1"/>
-              <a:t>blender</a:t>
-            </a:r>
-            <a:r>
-              <a:rPr lang="pt-PT"/>
-              <a:t>;</a:t>
-            </a:r>
-            <a:endParaRPr lang="pt-PT" dirty="0"/>
-          </a:p>
-          <a:p>
-            <a:endParaRPr lang="pt-PT" dirty="0"/>
-          </a:p>
-          <a:p>
-            <a:r>
-              <a:rPr lang="pt-PT" dirty="0"/>
-              <a:t>URL – </a:t>
-            </a:r>
-            <a:r>
-              <a:rPr lang="pt-PT" dirty="0" err="1"/>
-              <a:t>where</a:t>
-            </a:r>
-            <a:r>
-              <a:rPr lang="pt-PT" dirty="0"/>
-              <a:t> </a:t>
-            </a:r>
-            <a:r>
-              <a:rPr lang="pt-PT" dirty="0" err="1"/>
-              <a:t>is</a:t>
-            </a:r>
-            <a:r>
-              <a:rPr lang="pt-PT" dirty="0"/>
-              <a:t> </a:t>
-            </a:r>
-            <a:r>
-              <a:rPr lang="pt-PT" dirty="0" err="1"/>
-              <a:t>your</a:t>
-            </a:r>
-            <a:r>
-              <a:rPr lang="pt-PT" dirty="0"/>
-              <a:t> </a:t>
-            </a:r>
-            <a:r>
-              <a:rPr lang="pt-PT" dirty="0" err="1"/>
-              <a:t>project</a:t>
-            </a:r>
-            <a:r>
-              <a:rPr lang="pt-PT" dirty="0"/>
-              <a:t>?</a:t>
-            </a:r>
-          </a:p>
-        </p:txBody>
-      </p:sp>
-      <p:sp>
-        <p:nvSpPr>
-          <p:cNvPr id="4" name="Marcador de Posição da Data 3">
-            <a:extLst>
-              <a:ext uri="{FF2B5EF4-FFF2-40B4-BE49-F238E27FC236}">
-                <a16:creationId xmlns:a16="http://schemas.microsoft.com/office/drawing/2014/main" id="{D0CCF110-5399-143F-71BC-991248911FFE}"/>
-              </a:ext>
-            </a:extLst>
-          </p:cNvPr>
-          <p:cNvSpPr>
-            <a:spLocks noGrp="1"/>
-          </p:cNvSpPr>
-          <p:nvPr>
-            <p:ph type="dt" sz="half" idx="10"/>
-          </p:nvPr>
-        </p:nvSpPr>
-        <p:spPr/>
-        <p:txBody>
-          <a:bodyPr/>
-          <a:lstStyle/>
-          <a:p>
-            <a:r>
-              <a:rPr lang="pt-PT"/>
-              <a:t>ICG - 2021/2022 - Project 1</a:t>
-            </a:r>
-          </a:p>
-        </p:txBody>
-      </p:sp>
+        <p:spPr>
+          <a:xfrm>
+            <a:off x="761802" y="2743200"/>
+            <a:ext cx="4646905" cy="3613149"/>
+          </a:xfrm>
+        </p:spPr>
+        <p:txBody>
+          <a:bodyPr anchor="ctr">
+            <a:noAutofit/>
+          </a:bodyPr>
+          <a:lstStyle/>
+          <a:p>
+            <a:pPr algn="just">
+              <a:lnSpc>
+                <a:spcPct val="100000"/>
+              </a:lnSpc>
+              <a:buFont typeface="Symbol" panose="05050102010706020507" pitchFamily="18" charset="2"/>
+              <a:buChar char="-"/>
+            </a:pPr>
+            <a:r>
+              <a:rPr lang="en-US" sz="1800" b="0" i="0" u="none" strike="noStrike" baseline="0" dirty="0">
+                <a:solidFill>
+                  <a:srgbClr val="000000"/>
+                </a:solidFill>
+                <a:latin typeface="Calibri" panose="020F0502020204030204" pitchFamily="34" charset="0"/>
+              </a:rPr>
+              <a:t>There are various models, made both using three.js (by me) and Blender, such as:</a:t>
+            </a:r>
+          </a:p>
+          <a:p>
+            <a:pPr lvl="1" algn="just">
+              <a:lnSpc>
+                <a:spcPct val="100000"/>
+              </a:lnSpc>
+              <a:buFont typeface="Symbol" panose="05050102010706020507" pitchFamily="18" charset="2"/>
+              <a:buChar char="-"/>
+            </a:pPr>
+            <a:r>
+              <a:rPr lang="en-US" sz="1800" b="0" i="0" u="none" strike="noStrike" baseline="0" dirty="0">
+                <a:solidFill>
+                  <a:srgbClr val="000000"/>
+                </a:solidFill>
+                <a:latin typeface="Calibri" panose="020F0502020204030204" pitchFamily="34" charset="0"/>
+              </a:rPr>
+              <a:t>Fog	(three.js)</a:t>
+            </a:r>
+          </a:p>
+          <a:p>
+            <a:pPr lvl="1" algn="just">
+              <a:lnSpc>
+                <a:spcPct val="100000"/>
+              </a:lnSpc>
+              <a:buFont typeface="Symbol" panose="05050102010706020507" pitchFamily="18" charset="2"/>
+              <a:buChar char="-"/>
+            </a:pPr>
+            <a:r>
+              <a:rPr lang="pt-PT" sz="1800" b="0" i="0" u="none" strike="noStrike" baseline="0" dirty="0">
+                <a:solidFill>
+                  <a:srgbClr val="000000"/>
+                </a:solidFill>
+                <a:latin typeface="Calibri" panose="020F0502020204030204" pitchFamily="34" charset="0"/>
+              </a:rPr>
+              <a:t>Sun	(three.js)</a:t>
+            </a:r>
+          </a:p>
+          <a:p>
+            <a:pPr lvl="1" algn="just">
+              <a:lnSpc>
+                <a:spcPct val="100000"/>
+              </a:lnSpc>
+              <a:buFont typeface="Symbol" panose="05050102010706020507" pitchFamily="18" charset="2"/>
+              <a:buChar char="-"/>
+            </a:pPr>
+            <a:r>
+              <a:rPr lang="pt-PT" sz="1800" b="0" i="0" u="none" strike="noStrike" baseline="0" dirty="0">
+                <a:solidFill>
+                  <a:srgbClr val="000000"/>
+                </a:solidFill>
+                <a:latin typeface="Calibri" panose="020F0502020204030204" pitchFamily="34" charset="0"/>
+              </a:rPr>
+              <a:t>Trees	(three.js and blender)</a:t>
+            </a:r>
+          </a:p>
+          <a:p>
+            <a:pPr lvl="1" algn="just">
+              <a:lnSpc>
+                <a:spcPct val="100000"/>
+              </a:lnSpc>
+              <a:buFont typeface="Symbol" panose="05050102010706020507" pitchFamily="18" charset="2"/>
+              <a:buChar char="-"/>
+            </a:pPr>
+            <a:r>
+              <a:rPr lang="pt-PT" sz="1800" b="0" i="0" u="none" strike="noStrike" baseline="0" dirty="0">
+                <a:solidFill>
+                  <a:srgbClr val="000000"/>
+                </a:solidFill>
+                <a:latin typeface="Calibri" panose="020F0502020204030204" pitchFamily="34" charset="0"/>
+              </a:rPr>
+              <a:t>Grass	(Blender)</a:t>
+            </a:r>
+          </a:p>
+          <a:p>
+            <a:pPr lvl="1" algn="just">
+              <a:lnSpc>
+                <a:spcPct val="100000"/>
+              </a:lnSpc>
+              <a:buFont typeface="Symbol" panose="05050102010706020507" pitchFamily="18" charset="2"/>
+              <a:buChar char="-"/>
+            </a:pPr>
+            <a:r>
+              <a:rPr lang="pt-PT" sz="1800" b="0" i="0" u="none" strike="noStrike" baseline="0" dirty="0">
+                <a:solidFill>
+                  <a:srgbClr val="000000"/>
+                </a:solidFill>
+                <a:latin typeface="Calibri" panose="020F0502020204030204" pitchFamily="34" charset="0"/>
+              </a:rPr>
+              <a:t>House	(Blender)</a:t>
+            </a:r>
+          </a:p>
+          <a:p>
+            <a:pPr algn="just">
+              <a:lnSpc>
+                <a:spcPct val="100000"/>
+              </a:lnSpc>
+              <a:buFont typeface="Symbol" panose="05050102010706020507" pitchFamily="18" charset="2"/>
+              <a:buChar char="-"/>
+            </a:pPr>
+            <a:endParaRPr lang="pt-PT" sz="2600" b="0" i="0" u="none" strike="noStrike" baseline="0" dirty="0">
+              <a:solidFill>
+                <a:srgbClr val="000000"/>
+              </a:solidFill>
+              <a:latin typeface="Calibri" panose="020F0502020204030204" pitchFamily="34" charset="0"/>
+            </a:endParaRPr>
+          </a:p>
+          <a:p>
+            <a:pPr algn="just">
+              <a:lnSpc>
+                <a:spcPct val="100000"/>
+              </a:lnSpc>
+              <a:buFont typeface="Symbol" panose="05050102010706020507" pitchFamily="18" charset="2"/>
+              <a:buChar char="-"/>
+            </a:pPr>
+            <a:r>
+              <a:rPr lang="pt-PT" sz="1800" b="0" i="0" u="none" strike="noStrike" baseline="0" dirty="0">
+                <a:solidFill>
+                  <a:srgbClr val="000000"/>
+                </a:solidFill>
+                <a:latin typeface="Calibri" panose="020F0502020204030204" pitchFamily="34" charset="0"/>
+              </a:rPr>
+              <a:t>Regarding illumination, there</a:t>
+            </a:r>
+            <a:r>
+              <a:rPr lang="pt-PT" sz="1800" dirty="0">
+                <a:solidFill>
+                  <a:srgbClr val="000000"/>
+                </a:solidFill>
+                <a:latin typeface="Calibri" panose="020F0502020204030204" pitchFamily="34" charset="0"/>
+              </a:rPr>
+              <a:t>’</a:t>
+            </a:r>
+            <a:r>
+              <a:rPr lang="pt-PT" sz="1800" b="0" i="0" u="none" strike="noStrike" baseline="0" dirty="0">
+                <a:solidFill>
+                  <a:srgbClr val="000000"/>
+                </a:solidFill>
+                <a:latin typeface="Calibri" panose="020F0502020204030204" pitchFamily="34" charset="0"/>
+              </a:rPr>
+              <a:t>s na Ambient Light and a Directional Light. </a:t>
+            </a:r>
+          </a:p>
+        </p:txBody>
+      </p:sp>
+      <p:pic>
+        <p:nvPicPr>
+          <p:cNvPr id="7" name="Picture 6">
+            <a:extLst>
+              <a:ext uri="{FF2B5EF4-FFF2-40B4-BE49-F238E27FC236}">
+                <a16:creationId xmlns:a16="http://schemas.microsoft.com/office/drawing/2014/main" id="{CC918716-95D2-CCED-CC13-030701CBDC63}"/>
+              </a:ext>
+            </a:extLst>
+          </p:cNvPr>
+          <p:cNvPicPr>
+            <a:picLocks noChangeAspect="1"/>
+          </p:cNvPicPr>
+          <p:nvPr/>
+        </p:nvPicPr>
+        <p:blipFill rotWithShape="1">
+          <a:blip r:embed="rId2">
+            <a:extLst>
+              <a:ext uri="{28A0092B-C50C-407E-A947-70E740481C1C}">
+                <a14:useLocalDpi xmlns:a14="http://schemas.microsoft.com/office/drawing/2010/main" val="0"/>
+              </a:ext>
+            </a:extLst>
+          </a:blip>
+          <a:srcRect l="15139" r="15139"/>
+          <a:stretch/>
+        </p:blipFill>
+        <p:spPr>
+          <a:xfrm>
+            <a:off x="6096000" y="1"/>
+            <a:ext cx="6102825" cy="6858000"/>
+          </a:xfrm>
+          <a:prstGeom prst="rect">
+            <a:avLst/>
+          </a:prstGeom>
+        </p:spPr>
+      </p:pic>
       <p:sp>
         <p:nvSpPr>
           <p:cNvPr id="5" name="Marcador de Posição do Número do Diapositivo 4">
             <a:extLst>
               <a:ext uri="{FF2B5EF4-FFF2-40B4-BE49-F238E27FC236}">
-                <a16:creationId xmlns:a16="http://schemas.microsoft.com/office/drawing/2014/main" id="{AF153F99-2DC2-5A29-B9D0-3A08D66689CF}"/>
+                <a16:creationId xmlns:a16="http://schemas.microsoft.com/office/drawing/2014/main" id="{8DBCDEA0-CDC7-BE53-B012-696C9B1C0AE7}"/>
               </a:ext>
             </a:extLst>
           </p:cNvPr>
@@ -4937,23 +6740,92 @@
             <p:ph type="sldNum" sz="quarter" idx="12"/>
           </p:nvPr>
         </p:nvSpPr>
-        <p:spPr/>
-        <p:txBody>
-          <a:bodyPr/>
-          <a:lstStyle/>
-          <a:p>
+        <p:spPr>
+          <a:xfrm>
+            <a:off x="8732520" y="6356350"/>
+            <a:ext cx="3200400" cy="365125"/>
+          </a:xfrm>
+        </p:spPr>
+        <p:txBody>
+          <a:bodyPr>
+            <a:normAutofit/>
+          </a:bodyPr>
+          <a:lstStyle/>
+          <a:p>
+            <a:pPr>
+              <a:spcAft>
+                <a:spcPts val="600"/>
+              </a:spcAft>
+            </a:pPr>
             <a:fld id="{A275E76C-0B34-4617-92BE-2419D92E4442}" type="slidenum">
-              <a:rPr lang="pt-PT" smtClean="0"/>
+              <a:rPr lang="pt-PT">
+                <a:solidFill>
+                  <a:srgbClr val="FFFFFF"/>
+                </a:solidFill>
+              </a:rPr>
+              <a:pPr>
+                <a:spcAft>
+                  <a:spcPts val="600"/>
+                </a:spcAft>
+              </a:pPr>
               <a:t>3</a:t>
             </a:fld>
-            <a:endParaRPr lang="pt-PT"/>
+            <a:endParaRPr lang="pt-PT" dirty="0">
+              <a:solidFill>
+                <a:srgbClr val="FFFFFF"/>
+              </a:solidFill>
+            </a:endParaRPr>
+          </a:p>
+        </p:txBody>
+      </p:sp>
+      <p:sp>
+        <p:nvSpPr>
+          <p:cNvPr id="6" name="Marcador de Posição da Data 3">
+            <a:extLst>
+              <a:ext uri="{FF2B5EF4-FFF2-40B4-BE49-F238E27FC236}">
+                <a16:creationId xmlns:a16="http://schemas.microsoft.com/office/drawing/2014/main" id="{9B218848-1FA0-DA85-A878-6DD1EFBE1598}"/>
+              </a:ext>
+            </a:extLst>
+          </p:cNvPr>
+          <p:cNvSpPr>
+            <a:spLocks noGrp="1"/>
+          </p:cNvSpPr>
+          <p:nvPr>
+            <p:ph type="dt" sz="half" idx="10"/>
+          </p:nvPr>
+        </p:nvSpPr>
+        <p:spPr>
+          <a:xfrm>
+            <a:off x="243025" y="6356349"/>
+            <a:ext cx="2743200" cy="365125"/>
+          </a:xfrm>
+        </p:spPr>
+        <p:txBody>
+          <a:bodyPr>
+            <a:normAutofit/>
+          </a:bodyPr>
+          <a:lstStyle/>
+          <a:p>
+            <a:pPr>
+              <a:spcAft>
+                <a:spcPts val="600"/>
+              </a:spcAft>
+            </a:pPr>
+            <a:r>
+              <a:rPr lang="pt-PT" dirty="0">
+                <a:solidFill>
+                  <a:schemeClr val="tx1"/>
+                </a:solidFill>
+              </a:rPr>
+              <a:t>ICG - 2023/2024</a:t>
+            </a:r>
           </a:p>
         </p:txBody>
       </p:sp>
     </p:spTree>
     <p:extLst>
       <p:ext uri="{BB962C8B-B14F-4D97-AF65-F5344CB8AC3E}">
-        <p14:creationId xmlns:p14="http://schemas.microsoft.com/office/powerpoint/2010/main" val="2453939418"/>
+        <p14:creationId xmlns:p14="http://schemas.microsoft.com/office/powerpoint/2010/main" val="1111987917"/>
       </p:ext>
     </p:extLst>
   </p:cSld>
@@ -4966,6 +6838,14 @@
 <file path=ppt/slides/slide4.xml><?xml version="1.0" encoding="utf-8"?>
 <p:sld xmlns:a="http://schemas.openxmlformats.org/drawingml/2006/main" xmlns:r="http://schemas.openxmlformats.org/officeDocument/2006/relationships" xmlns:p="http://schemas.openxmlformats.org/presentationml/2006/main">
   <p:cSld>
+    <p:bg>
+      <p:bgPr>
+        <a:solidFill>
+          <a:schemeClr val="bg1"/>
+        </a:solidFill>
+        <a:effectLst/>
+      </p:bgPr>
+    </p:bg>
     <p:spTree>
       <p:nvGrpSpPr>
         <p:cNvPr id="1" name=""/>
@@ -4980,12 +6860,174 @@
           <a:chExt cx="0" cy="0"/>
         </a:xfrm>
       </p:grpSpPr>
+      <p:sp useBgFill="1">
+        <p:nvSpPr>
+          <p:cNvPr id="11" name="Slide Background">
+            <a:extLst>
+              <a:ext uri="{FF2B5EF4-FFF2-40B4-BE49-F238E27FC236}">
+                <a16:creationId xmlns:a16="http://schemas.microsoft.com/office/drawing/2014/main" id="{B65C0385-5E30-4D2E-AF9F-4639659D34E9}"/>
+              </a:ext>
+              <a:ext uri="{C183D7F6-B498-43B3-948B-1728B52AA6E4}">
+                <adec:decorative xmlns:adec="http://schemas.microsoft.com/office/drawing/2017/decorative" val="1"/>
+              </a:ext>
+            </a:extLst>
+          </p:cNvPr>
+          <p:cNvSpPr>
+            <a:spLocks noGrp="1" noRot="1" noChangeAspect="1" noMove="1" noResize="1" noEditPoints="1" noAdjustHandles="1" noChangeArrowheads="1" noChangeShapeType="1" noTextEdit="1"/>
+          </p:cNvSpPr>
+          <p:nvPr>
+            <p:extLst>
+              <p:ext uri="{386F3935-93C4-4BCD-93E2-E3B085C9AB24}">
+                <p16:designElem xmlns:p16="http://schemas.microsoft.com/office/powerpoint/2015/main" val="1"/>
+              </p:ext>
+            </p:extLst>
+          </p:nvPr>
+        </p:nvSpPr>
+        <p:spPr>
+          <a:xfrm>
+            <a:off x="0" y="0"/>
+            <a:ext cx="12192000" cy="6858000"/>
+          </a:xfrm>
+          <a:prstGeom prst="rect">
+            <a:avLst/>
+          </a:prstGeom>
+          <a:ln>
+            <a:noFill/>
+          </a:ln>
+        </p:spPr>
+        <p:style>
+          <a:lnRef idx="2">
+            <a:schemeClr val="accent1">
+              <a:shade val="50000"/>
+            </a:schemeClr>
+          </a:lnRef>
+          <a:fillRef idx="1">
+            <a:schemeClr val="accent1"/>
+          </a:fillRef>
+          <a:effectRef idx="0">
+            <a:schemeClr val="accent1"/>
+          </a:effectRef>
+          <a:fontRef idx="minor">
+            <a:schemeClr val="lt1"/>
+          </a:fontRef>
+        </p:style>
+        <p:txBody>
+          <a:bodyPr rtlCol="0" anchor="ctr"/>
+          <a:lstStyle/>
+          <a:p>
+            <a:pPr algn="ctr"/>
+            <a:endParaRPr lang="en-US" dirty="0"/>
+          </a:p>
+        </p:txBody>
+      </p:sp>
+      <p:pic>
+        <p:nvPicPr>
+          <p:cNvPr id="7" name="Picture 6">
+            <a:extLst>
+              <a:ext uri="{FF2B5EF4-FFF2-40B4-BE49-F238E27FC236}">
+                <a16:creationId xmlns:a16="http://schemas.microsoft.com/office/drawing/2014/main" id="{796166FB-D679-52F5-022E-0B0D60A315F4}"/>
+              </a:ext>
+            </a:extLst>
+          </p:cNvPr>
+          <p:cNvPicPr>
+            <a:picLocks noChangeAspect="1"/>
+          </p:cNvPicPr>
+          <p:nvPr/>
+        </p:nvPicPr>
+        <p:blipFill rotWithShape="1">
+          <a:blip r:embed="rId3">
+            <a:extLst>
+              <a:ext uri="{28A0092B-C50C-407E-A947-70E740481C1C}">
+                <a14:useLocalDpi xmlns:a14="http://schemas.microsoft.com/office/drawing/2010/main" val="0"/>
+              </a:ext>
+            </a:extLst>
+          </a:blip>
+          <a:srcRect l="22123" r="22123"/>
+          <a:stretch/>
+        </p:blipFill>
+        <p:spPr>
+          <a:xfrm>
+            <a:off x="20" y="1729116"/>
+            <a:ext cx="6106195" cy="5128884"/>
+          </a:xfrm>
+          <a:prstGeom prst="rect">
+            <a:avLst/>
+          </a:prstGeom>
+        </p:spPr>
+      </p:pic>
+      <p:sp useBgFill="1">
+        <p:nvSpPr>
+          <p:cNvPr id="13" name="Rectangle 12">
+            <a:extLst>
+              <a:ext uri="{FF2B5EF4-FFF2-40B4-BE49-F238E27FC236}">
+                <a16:creationId xmlns:a16="http://schemas.microsoft.com/office/drawing/2014/main" id="{E335820B-3A29-42C5-AA8D-10ECA43CD985}"/>
+              </a:ext>
+              <a:ext uri="{C183D7F6-B498-43B3-948B-1728B52AA6E4}">
+                <adec:decorative xmlns:adec="http://schemas.microsoft.com/office/drawing/2017/decorative" val="1"/>
+              </a:ext>
+            </a:extLst>
+          </p:cNvPr>
+          <p:cNvSpPr>
+            <a:spLocks noGrp="1" noRot="1" noChangeAspect="1" noMove="1" noResize="1" noEditPoints="1" noAdjustHandles="1" noChangeArrowheads="1" noChangeShapeType="1" noTextEdit="1"/>
+          </p:cNvSpPr>
+          <p:nvPr>
+            <p:extLst>
+              <p:ext uri="{386F3935-93C4-4BCD-93E2-E3B085C9AB24}">
+                <p16:designElem xmlns:p16="http://schemas.microsoft.com/office/powerpoint/2015/main" val="1"/>
+              </p:ext>
+            </p:extLst>
+          </p:nvPr>
+        </p:nvSpPr>
+        <p:spPr>
+          <a:xfrm>
+            <a:off x="0" y="0"/>
+            <a:ext cx="12191999" cy="1729117"/>
+          </a:xfrm>
+          <a:prstGeom prst="rect">
+            <a:avLst/>
+          </a:prstGeom>
+          <a:ln>
+            <a:noFill/>
+          </a:ln>
+          <a:effectLst>
+            <a:outerShdw blurRad="368300" dist="101600" dir="5460000" sx="90000" sy="90000" algn="t" rotWithShape="0">
+              <a:srgbClr val="000000">
+                <a:alpha val="20000"/>
+              </a:srgbClr>
+            </a:outerShdw>
+          </a:effectLst>
+        </p:spPr>
+        <p:style>
+          <a:lnRef idx="2">
+            <a:schemeClr val="accent1">
+              <a:shade val="50000"/>
+            </a:schemeClr>
+          </a:lnRef>
+          <a:fillRef idx="1">
+            <a:schemeClr val="accent1"/>
+          </a:fillRef>
+          <a:effectRef idx="0">
+            <a:schemeClr val="accent1"/>
+          </a:effectRef>
+          <a:fontRef idx="minor">
+            <a:schemeClr val="lt1"/>
+          </a:fontRef>
+        </p:style>
+        <p:txBody>
+          <a:bodyPr rtlCol="0" anchor="ctr"/>
+          <a:lstStyle/>
+          <a:p>
+            <a:pPr algn="ctr"/>
+            <a:endParaRPr lang="en-US" dirty="0"/>
+          </a:p>
+        </p:txBody>
+      </p:sp>
       <p:sp>
         <p:nvSpPr>
           <p:cNvPr id="2" name="Título 1">
             <a:extLst>
               <a:ext uri="{FF2B5EF4-FFF2-40B4-BE49-F238E27FC236}">
-                <a16:creationId xmlns:a16="http://schemas.microsoft.com/office/drawing/2014/main" id="{44DB5274-431B-6EFB-56B1-B3309A117188}"/>
+                <a16:creationId xmlns:a16="http://schemas.microsoft.com/office/drawing/2014/main" id="{DC8B6D5C-15CE-B61B-84A3-E2BD3FF4A127}"/>
               </a:ext>
             </a:extLst>
           </p:cNvPr>
@@ -4996,48 +7038,22 @@
             <p:ph type="title"/>
           </p:nvPr>
         </p:nvSpPr>
-        <p:spPr/>
-        <p:txBody>
-          <a:bodyPr/>
-          <a:lstStyle/>
-          <a:p>
-            <a:r>
-              <a:rPr lang="pt-PT" dirty="0" err="1"/>
-              <a:t>Models</a:t>
-            </a:r>
-            <a:r>
-              <a:rPr lang="pt-PT" dirty="0"/>
-              <a:t> </a:t>
-            </a:r>
-            <a:r>
-              <a:rPr lang="pt-PT" dirty="0" err="1"/>
-              <a:t>and</a:t>
-            </a:r>
-            <a:r>
-              <a:rPr lang="pt-PT" dirty="0"/>
-              <a:t> </a:t>
-            </a:r>
-            <a:r>
-              <a:rPr lang="pt-PT" dirty="0" err="1"/>
-              <a:t>the</a:t>
-            </a:r>
-            <a:r>
-              <a:rPr lang="pt-PT" dirty="0"/>
-              <a:t> </a:t>
-            </a:r>
-            <a:r>
-              <a:rPr lang="pt-PT" dirty="0" err="1"/>
-              <a:t>scene</a:t>
-            </a:r>
-            <a:r>
-              <a:rPr lang="pt-PT" dirty="0"/>
-              <a:t> </a:t>
-            </a:r>
-            <a:r>
-              <a:rPr lang="pt-PT" dirty="0" err="1"/>
-              <a:t>graph</a:t>
-            </a:r>
-            <a:endParaRPr lang="pt-PT" dirty="0"/>
+        <p:spPr>
+          <a:xfrm>
+            <a:off x="761801" y="352766"/>
+            <a:ext cx="10591999" cy="1023584"/>
+          </a:xfrm>
+        </p:spPr>
+        <p:txBody>
+          <a:bodyPr>
+            <a:normAutofit/>
+          </a:bodyPr>
+          <a:lstStyle/>
+          <a:p>
+            <a:r>
+              <a:rPr lang="pt-PT" sz="4000" dirty="0"/>
+              <a:t>Animation</a:t>
+            </a:r>
           </a:p>
         </p:txBody>
       </p:sp>
@@ -5046,7 +7062,7 @@
           <p:cNvPr id="3" name="Marcador de Posição de Conteúdo 2">
             <a:extLst>
               <a:ext uri="{FF2B5EF4-FFF2-40B4-BE49-F238E27FC236}">
-                <a16:creationId xmlns:a16="http://schemas.microsoft.com/office/drawing/2014/main" id="{340F0F31-346D-0EB3-59C5-A11D190BB3CE}"/>
+                <a16:creationId xmlns:a16="http://schemas.microsoft.com/office/drawing/2014/main" id="{101CFC4D-8A21-E6F7-817A-F16C73908F00}"/>
               </a:ext>
             </a:extLst>
           </p:cNvPr>
@@ -5057,124 +7073,122 @@
             <p:ph idx="1"/>
           </p:nvPr>
         </p:nvSpPr>
-        <p:spPr/>
-        <p:txBody>
-          <a:bodyPr/>
-          <a:lstStyle/>
-          <a:p>
-            <a:r>
-              <a:rPr lang="pt-PT" dirty="0" err="1"/>
-              <a:t>What</a:t>
-            </a:r>
-            <a:r>
-              <a:rPr lang="pt-PT" dirty="0"/>
-              <a:t> </a:t>
-            </a:r>
-            <a:r>
-              <a:rPr lang="pt-PT" dirty="0" err="1"/>
-              <a:t>models</a:t>
-            </a:r>
-            <a:r>
-              <a:rPr lang="pt-PT" dirty="0"/>
-              <a:t> do </a:t>
-            </a:r>
-            <a:r>
-              <a:rPr lang="pt-PT" dirty="0" err="1"/>
-              <a:t>you</a:t>
-            </a:r>
-            <a:r>
-              <a:rPr lang="pt-PT" dirty="0"/>
-              <a:t> </a:t>
-            </a:r>
-            <a:r>
-              <a:rPr lang="pt-PT" dirty="0" err="1"/>
-              <a:t>have</a:t>
-            </a:r>
-            <a:r>
-              <a:rPr lang="pt-PT" dirty="0"/>
-              <a:t>?</a:t>
-            </a:r>
-          </a:p>
-          <a:p>
-            <a:r>
-              <a:rPr lang="pt-PT" dirty="0" err="1"/>
-              <a:t>How</a:t>
-            </a:r>
-            <a:r>
-              <a:rPr lang="pt-PT" dirty="0"/>
-              <a:t> </a:t>
-            </a:r>
-            <a:r>
-              <a:rPr lang="pt-PT" dirty="0" err="1"/>
-              <a:t>is</a:t>
-            </a:r>
-            <a:r>
-              <a:rPr lang="pt-PT" dirty="0"/>
-              <a:t> </a:t>
-            </a:r>
-            <a:r>
-              <a:rPr lang="pt-PT" dirty="0" err="1"/>
-              <a:t>the</a:t>
-            </a:r>
-            <a:r>
-              <a:rPr lang="pt-PT" dirty="0"/>
-              <a:t> </a:t>
-            </a:r>
-            <a:r>
-              <a:rPr lang="pt-PT" dirty="0" err="1"/>
-              <a:t>scene</a:t>
-            </a:r>
-            <a:r>
-              <a:rPr lang="pt-PT" dirty="0"/>
-              <a:t> </a:t>
-            </a:r>
-            <a:r>
-              <a:rPr lang="pt-PT" dirty="0" err="1"/>
-              <a:t>graph</a:t>
-            </a:r>
-            <a:r>
-              <a:rPr lang="pt-PT" dirty="0"/>
-              <a:t> </a:t>
-            </a:r>
-            <a:r>
-              <a:rPr lang="pt-PT" dirty="0" err="1"/>
-              <a:t>organized</a:t>
-            </a:r>
-            <a:r>
-              <a:rPr lang="pt-PT" dirty="0"/>
-              <a:t>?</a:t>
-            </a:r>
-          </a:p>
-          <a:p>
-            <a:endParaRPr lang="pt-PT" dirty="0"/>
-          </a:p>
-        </p:txBody>
-      </p:sp>
-      <p:sp>
-        <p:nvSpPr>
-          <p:cNvPr id="4" name="Marcador de Posição da Data 3">
-            <a:extLst>
-              <a:ext uri="{FF2B5EF4-FFF2-40B4-BE49-F238E27FC236}">
-                <a16:creationId xmlns:a16="http://schemas.microsoft.com/office/drawing/2014/main" id="{3735F962-797A-96FB-8054-4EA8F37D6D60}"/>
-              </a:ext>
-            </a:extLst>
-          </p:cNvPr>
-          <p:cNvSpPr>
-            <a:spLocks noGrp="1"/>
-          </p:cNvSpPr>
-          <p:nvPr>
-            <p:ph type="dt" sz="half" idx="10"/>
-          </p:nvPr>
-        </p:nvSpPr>
-        <p:spPr/>
-        <p:txBody>
-          <a:bodyPr/>
-          <a:lstStyle/>
-          <a:p>
-            <a:r>
-              <a:rPr lang="pt-PT"/>
-              <a:t>ICG - 2021/2022 - Project 1</a:t>
-            </a:r>
+        <p:spPr>
+          <a:xfrm>
+            <a:off x="6803408" y="2249766"/>
+            <a:ext cx="4550391" cy="4070303"/>
+          </a:xfrm>
+        </p:spPr>
+        <p:txBody>
+          <a:bodyPr anchor="ctr">
+            <a:normAutofit/>
+          </a:bodyPr>
+          <a:lstStyle/>
+          <a:p>
+            <a:pPr algn="just">
+              <a:lnSpc>
+                <a:spcPct val="100000"/>
+              </a:lnSpc>
+              <a:buFont typeface="Symbol" panose="05050102010706020507" pitchFamily="18" charset="2"/>
+              <a:buChar char="-"/>
+            </a:pPr>
+            <a:r>
+              <a:rPr lang="en-US" sz="2000" dirty="0"/>
+              <a:t>Forest Animation and 3D Objects.</a:t>
+            </a:r>
+          </a:p>
+          <a:p>
+            <a:pPr algn="just">
+              <a:lnSpc>
+                <a:spcPct val="100000"/>
+              </a:lnSpc>
+              <a:buFont typeface="Symbol" panose="05050102010706020507" pitchFamily="18" charset="2"/>
+              <a:buChar char="-"/>
+            </a:pPr>
+            <a:endParaRPr lang="en-US" sz="2000" dirty="0"/>
+          </a:p>
+          <a:p>
+            <a:pPr algn="just">
+              <a:lnSpc>
+                <a:spcPct val="100000"/>
+              </a:lnSpc>
+              <a:buFont typeface="Symbol" panose="05050102010706020507" pitchFamily="18" charset="2"/>
+              <a:buChar char="-"/>
+            </a:pPr>
+            <a:r>
+              <a:rPr lang="en-US" sz="2000" dirty="0"/>
+              <a:t>Player Movement.</a:t>
+            </a:r>
+          </a:p>
+          <a:p>
+            <a:pPr algn="just">
+              <a:lnSpc>
+                <a:spcPct val="100000"/>
+              </a:lnSpc>
+              <a:buFont typeface="Symbol" panose="05050102010706020507" pitchFamily="18" charset="2"/>
+              <a:buChar char="-"/>
+            </a:pPr>
+            <a:endParaRPr lang="en-US" sz="2000" dirty="0"/>
+          </a:p>
+          <a:p>
+            <a:pPr algn="just">
+              <a:lnSpc>
+                <a:spcPct val="100000"/>
+              </a:lnSpc>
+              <a:buFont typeface="Symbol" panose="05050102010706020507" pitchFamily="18" charset="2"/>
+              <a:buChar char="-"/>
+            </a:pPr>
+            <a:r>
+              <a:rPr lang="en-US" sz="2000" dirty="0"/>
+              <a:t>Ghost Movement.</a:t>
+            </a:r>
+          </a:p>
+          <a:p>
+            <a:pPr algn="just">
+              <a:lnSpc>
+                <a:spcPct val="100000"/>
+              </a:lnSpc>
+              <a:buFont typeface="Symbol" panose="05050102010706020507" pitchFamily="18" charset="2"/>
+              <a:buChar char="-"/>
+            </a:pPr>
+            <a:endParaRPr lang="en-US" sz="2000" dirty="0"/>
+          </a:p>
+          <a:p>
+            <a:pPr algn="just">
+              <a:lnSpc>
+                <a:spcPct val="100000"/>
+              </a:lnSpc>
+              <a:buFont typeface="Symbol" panose="05050102010706020507" pitchFamily="18" charset="2"/>
+              <a:buChar char="-"/>
+            </a:pPr>
+            <a:r>
+              <a:rPr lang="en-US" sz="2000" dirty="0"/>
+              <a:t>Bullet Shooting.</a:t>
+            </a:r>
+          </a:p>
+          <a:p>
+            <a:pPr algn="just">
+              <a:lnSpc>
+                <a:spcPct val="100000"/>
+              </a:lnSpc>
+              <a:buFont typeface="Symbol" panose="05050102010706020507" pitchFamily="18" charset="2"/>
+              <a:buChar char="-"/>
+            </a:pPr>
+            <a:endParaRPr lang="en-US" sz="2000" dirty="0"/>
+          </a:p>
+          <a:p>
+            <a:pPr algn="just">
+              <a:lnSpc>
+                <a:spcPct val="100000"/>
+              </a:lnSpc>
+              <a:buFont typeface="Symbol" panose="05050102010706020507" pitchFamily="18" charset="2"/>
+              <a:buChar char="-"/>
+            </a:pPr>
+            <a:r>
+              <a:rPr lang="en-US" sz="2000" dirty="0"/>
+              <a:t>Collisions and Life Update.</a:t>
+            </a:r>
+            <a:endParaRPr lang="pt-PT" sz="2000" dirty="0"/>
           </a:p>
         </p:txBody>
       </p:sp>
@@ -5183,7 +7197,7 @@
           <p:cNvPr id="5" name="Marcador de Posição do Número do Diapositivo 4">
             <a:extLst>
               <a:ext uri="{FF2B5EF4-FFF2-40B4-BE49-F238E27FC236}">
-                <a16:creationId xmlns:a16="http://schemas.microsoft.com/office/drawing/2014/main" id="{8DBCDEA0-CDC7-BE53-B012-696C9B1C0AE7}"/>
+                <a16:creationId xmlns:a16="http://schemas.microsoft.com/office/drawing/2014/main" id="{8DFE5CDA-5E21-71DD-F590-331350D021C5}"/>
               </a:ext>
             </a:extLst>
           </p:cNvPr>
@@ -5194,23 +7208,92 @@
             <p:ph type="sldNum" sz="quarter" idx="12"/>
           </p:nvPr>
         </p:nvSpPr>
-        <p:spPr/>
-        <p:txBody>
-          <a:bodyPr/>
-          <a:lstStyle/>
-          <a:p>
+        <p:spPr>
+          <a:xfrm>
+            <a:off x="10208240" y="6356350"/>
+            <a:ext cx="1724679" cy="365125"/>
+          </a:xfrm>
+        </p:spPr>
+        <p:txBody>
+          <a:bodyPr>
+            <a:normAutofit/>
+          </a:bodyPr>
+          <a:lstStyle/>
+          <a:p>
+            <a:pPr>
+              <a:spcAft>
+                <a:spcPts val="600"/>
+              </a:spcAft>
+            </a:pPr>
             <a:fld id="{A275E76C-0B34-4617-92BE-2419D92E4442}" type="slidenum">
-              <a:rPr lang="pt-PT" smtClean="0"/>
+              <a:rPr lang="pt-PT">
+                <a:solidFill>
+                  <a:schemeClr val="tx1"/>
+                </a:solidFill>
+              </a:rPr>
+              <a:pPr>
+                <a:spcAft>
+                  <a:spcPts val="600"/>
+                </a:spcAft>
+              </a:pPr>
               <a:t>4</a:t>
             </a:fld>
-            <a:endParaRPr lang="pt-PT"/>
+            <a:endParaRPr lang="pt-PT" dirty="0">
+              <a:solidFill>
+                <a:schemeClr val="tx1"/>
+              </a:solidFill>
+            </a:endParaRPr>
+          </a:p>
+        </p:txBody>
+      </p:sp>
+      <p:sp>
+        <p:nvSpPr>
+          <p:cNvPr id="6" name="Marcador de Posição da Data 3">
+            <a:extLst>
+              <a:ext uri="{FF2B5EF4-FFF2-40B4-BE49-F238E27FC236}">
+                <a16:creationId xmlns:a16="http://schemas.microsoft.com/office/drawing/2014/main" id="{DF4FE554-BEE3-8209-714A-28C16066FA19}"/>
+              </a:ext>
+            </a:extLst>
+          </p:cNvPr>
+          <p:cNvSpPr>
+            <a:spLocks noGrp="1"/>
+          </p:cNvSpPr>
+          <p:nvPr>
+            <p:ph type="dt" sz="half" idx="10"/>
+          </p:nvPr>
+        </p:nvSpPr>
+        <p:spPr>
+          <a:xfrm>
+            <a:off x="243025" y="6356349"/>
+            <a:ext cx="2743200" cy="365125"/>
+          </a:xfrm>
+        </p:spPr>
+        <p:txBody>
+          <a:bodyPr>
+            <a:normAutofit/>
+          </a:bodyPr>
+          <a:lstStyle/>
+          <a:p>
+            <a:pPr>
+              <a:spcAft>
+                <a:spcPts val="600"/>
+              </a:spcAft>
+            </a:pPr>
+            <a:r>
+              <a:rPr lang="pt-PT" dirty="0">
+                <a:solidFill>
+                  <a:schemeClr val="bg1"/>
+                </a:solidFill>
+              </a:rPr>
+              <a:t>ICG - 2023/2024</a:t>
+            </a:r>
           </a:p>
         </p:txBody>
       </p:sp>
     </p:spTree>
     <p:extLst>
       <p:ext uri="{BB962C8B-B14F-4D97-AF65-F5344CB8AC3E}">
-        <p14:creationId xmlns:p14="http://schemas.microsoft.com/office/powerpoint/2010/main" val="1111987917"/>
+        <p14:creationId xmlns:p14="http://schemas.microsoft.com/office/powerpoint/2010/main" val="1623836021"/>
       </p:ext>
     </p:extLst>
   </p:cSld>
@@ -5223,6 +7306,14 @@
 <file path=ppt/slides/slide5.xml><?xml version="1.0" encoding="utf-8"?>
 <p:sld xmlns:a="http://schemas.openxmlformats.org/drawingml/2006/main" xmlns:r="http://schemas.openxmlformats.org/officeDocument/2006/relationships" xmlns:p="http://schemas.openxmlformats.org/presentationml/2006/main">
   <p:cSld>
+    <p:bg>
+      <p:bgPr>
+        <a:solidFill>
+          <a:schemeClr val="bg1"/>
+        </a:solidFill>
+        <a:effectLst/>
+      </p:bgPr>
+    </p:bg>
     <p:spTree>
       <p:nvGrpSpPr>
         <p:cNvPr id="1" name=""/>
@@ -5237,12 +7328,233 @@
           <a:chExt cx="0" cy="0"/>
         </a:xfrm>
       </p:grpSpPr>
+      <p:sp useBgFill="1">
+        <p:nvSpPr>
+          <p:cNvPr id="22" name="Slide Background">
+            <a:extLst>
+              <a:ext uri="{FF2B5EF4-FFF2-40B4-BE49-F238E27FC236}">
+                <a16:creationId xmlns:a16="http://schemas.microsoft.com/office/drawing/2014/main" id="{C0763A76-9F1C-4FC5-82B7-DD475DA461B2}"/>
+              </a:ext>
+              <a:ext uri="{C183D7F6-B498-43B3-948B-1728B52AA6E4}">
+                <adec:decorative xmlns:adec="http://schemas.microsoft.com/office/drawing/2017/decorative" val="1"/>
+              </a:ext>
+            </a:extLst>
+          </p:cNvPr>
+          <p:cNvSpPr>
+            <a:spLocks noGrp="1" noRot="1" noChangeAspect="1" noMove="1" noResize="1" noEditPoints="1" noAdjustHandles="1" noChangeArrowheads="1" noChangeShapeType="1" noTextEdit="1"/>
+          </p:cNvSpPr>
+          <p:nvPr>
+            <p:extLst>
+              <p:ext uri="{386F3935-93C4-4BCD-93E2-E3B085C9AB24}">
+                <p16:designElem xmlns:p16="http://schemas.microsoft.com/office/powerpoint/2015/main" val="1"/>
+              </p:ext>
+            </p:extLst>
+          </p:nvPr>
+        </p:nvSpPr>
+        <p:spPr bwMode="white">
+          <a:xfrm>
+            <a:off x="-1" y="0"/>
+            <a:ext cx="12191999" cy="6858000"/>
+          </a:xfrm>
+          <a:prstGeom prst="rect">
+            <a:avLst/>
+          </a:prstGeom>
+          <a:ln>
+            <a:noFill/>
+          </a:ln>
+        </p:spPr>
+        <p:style>
+          <a:lnRef idx="2">
+            <a:schemeClr val="accent1">
+              <a:shade val="50000"/>
+            </a:schemeClr>
+          </a:lnRef>
+          <a:fillRef idx="1">
+            <a:schemeClr val="accent1"/>
+          </a:fillRef>
+          <a:effectRef idx="0">
+            <a:schemeClr val="accent1"/>
+          </a:effectRef>
+          <a:fontRef idx="minor">
+            <a:schemeClr val="lt1"/>
+          </a:fontRef>
+        </p:style>
+        <p:txBody>
+          <a:bodyPr rtlCol="0" anchor="ctr"/>
+          <a:lstStyle>
+            <a:defPPr>
+              <a:defRPr lang="en-US"/>
+            </a:defPPr>
+            <a:lvl1pPr marL="0" algn="l" defTabSz="914400" rtl="0" eaLnBrk="1" latinLnBrk="0" hangingPunct="1">
+              <a:defRPr sz="1800" kern="1200">
+                <a:solidFill>
+                  <a:schemeClr val="lt1"/>
+                </a:solidFill>
+                <a:latin typeface="+mn-lt"/>
+                <a:ea typeface="+mn-ea"/>
+                <a:cs typeface="+mn-cs"/>
+              </a:defRPr>
+            </a:lvl1pPr>
+            <a:lvl2pPr marL="457200" algn="l" defTabSz="914400" rtl="0" eaLnBrk="1" latinLnBrk="0" hangingPunct="1">
+              <a:defRPr sz="1800" kern="1200">
+                <a:solidFill>
+                  <a:schemeClr val="lt1"/>
+                </a:solidFill>
+                <a:latin typeface="+mn-lt"/>
+                <a:ea typeface="+mn-ea"/>
+                <a:cs typeface="+mn-cs"/>
+              </a:defRPr>
+            </a:lvl2pPr>
+            <a:lvl3pPr marL="914400" algn="l" defTabSz="914400" rtl="0" eaLnBrk="1" latinLnBrk="0" hangingPunct="1">
+              <a:defRPr sz="1800" kern="1200">
+                <a:solidFill>
+                  <a:schemeClr val="lt1"/>
+                </a:solidFill>
+                <a:latin typeface="+mn-lt"/>
+                <a:ea typeface="+mn-ea"/>
+                <a:cs typeface="+mn-cs"/>
+              </a:defRPr>
+            </a:lvl3pPr>
+            <a:lvl4pPr marL="1371600" algn="l" defTabSz="914400" rtl="0" eaLnBrk="1" latinLnBrk="0" hangingPunct="1">
+              <a:defRPr sz="1800" kern="1200">
+                <a:solidFill>
+                  <a:schemeClr val="lt1"/>
+                </a:solidFill>
+                <a:latin typeface="+mn-lt"/>
+                <a:ea typeface="+mn-ea"/>
+                <a:cs typeface="+mn-cs"/>
+              </a:defRPr>
+            </a:lvl4pPr>
+            <a:lvl5pPr marL="1828800" algn="l" defTabSz="914400" rtl="0" eaLnBrk="1" latinLnBrk="0" hangingPunct="1">
+              <a:defRPr sz="1800" kern="1200">
+                <a:solidFill>
+                  <a:schemeClr val="lt1"/>
+                </a:solidFill>
+                <a:latin typeface="+mn-lt"/>
+                <a:ea typeface="+mn-ea"/>
+                <a:cs typeface="+mn-cs"/>
+              </a:defRPr>
+            </a:lvl5pPr>
+            <a:lvl6pPr marL="2286000" algn="l" defTabSz="914400" rtl="0" eaLnBrk="1" latinLnBrk="0" hangingPunct="1">
+              <a:defRPr sz="1800" kern="1200">
+                <a:solidFill>
+                  <a:schemeClr val="lt1"/>
+                </a:solidFill>
+                <a:latin typeface="+mn-lt"/>
+                <a:ea typeface="+mn-ea"/>
+                <a:cs typeface="+mn-cs"/>
+              </a:defRPr>
+            </a:lvl6pPr>
+            <a:lvl7pPr marL="2743200" algn="l" defTabSz="914400" rtl="0" eaLnBrk="1" latinLnBrk="0" hangingPunct="1">
+              <a:defRPr sz="1800" kern="1200">
+                <a:solidFill>
+                  <a:schemeClr val="lt1"/>
+                </a:solidFill>
+                <a:latin typeface="+mn-lt"/>
+                <a:ea typeface="+mn-ea"/>
+                <a:cs typeface="+mn-cs"/>
+              </a:defRPr>
+            </a:lvl7pPr>
+            <a:lvl8pPr marL="3200400" algn="l" defTabSz="914400" rtl="0" eaLnBrk="1" latinLnBrk="0" hangingPunct="1">
+              <a:defRPr sz="1800" kern="1200">
+                <a:solidFill>
+                  <a:schemeClr val="lt1"/>
+                </a:solidFill>
+                <a:latin typeface="+mn-lt"/>
+                <a:ea typeface="+mn-ea"/>
+                <a:cs typeface="+mn-cs"/>
+              </a:defRPr>
+            </a:lvl8pPr>
+            <a:lvl9pPr marL="3657600" algn="l" defTabSz="914400" rtl="0" eaLnBrk="1" latinLnBrk="0" hangingPunct="1">
+              <a:defRPr sz="1800" kern="1200">
+                <a:solidFill>
+                  <a:schemeClr val="lt1"/>
+                </a:solidFill>
+                <a:latin typeface="+mn-lt"/>
+                <a:ea typeface="+mn-ea"/>
+                <a:cs typeface="+mn-cs"/>
+              </a:defRPr>
+            </a:lvl9pPr>
+          </a:lstStyle>
+          <a:p>
+            <a:pPr algn="ctr"/>
+            <a:endParaRPr lang="en-US" dirty="0"/>
+          </a:p>
+        </p:txBody>
+      </p:sp>
+      <p:sp useBgFill="1">
+        <p:nvSpPr>
+          <p:cNvPr id="24" name="Rectangle 23">
+            <a:extLst>
+              <a:ext uri="{FF2B5EF4-FFF2-40B4-BE49-F238E27FC236}">
+                <a16:creationId xmlns:a16="http://schemas.microsoft.com/office/drawing/2014/main" id="{E81BF4F6-F2CF-4984-9D14-D6966D92F99F}"/>
+              </a:ext>
+              <a:ext uri="{C183D7F6-B498-43B3-948B-1728B52AA6E4}">
+                <adec:decorative xmlns:adec="http://schemas.microsoft.com/office/drawing/2017/decorative" val="1"/>
+              </a:ext>
+            </a:extLst>
+          </p:cNvPr>
+          <p:cNvSpPr>
+            <a:spLocks noGrp="1" noRot="1" noChangeAspect="1" noMove="1" noResize="1" noEditPoints="1" noAdjustHandles="1" noChangeArrowheads="1" noChangeShapeType="1" noTextEdit="1"/>
+          </p:cNvSpPr>
+          <p:nvPr>
+            <p:extLst>
+              <p:ext uri="{386F3935-93C4-4BCD-93E2-E3B085C9AB24}">
+                <p16:designElem xmlns:p16="http://schemas.microsoft.com/office/powerpoint/2015/main" val="1"/>
+              </p:ext>
+            </p:extLst>
+          </p:nvPr>
+        </p:nvSpPr>
+        <p:spPr>
+          <a:xfrm>
+            <a:off x="1" y="0"/>
+            <a:ext cx="8522446" cy="2285999"/>
+          </a:xfrm>
+          <a:prstGeom prst="rect">
+            <a:avLst/>
+          </a:prstGeom>
+          <a:ln>
+            <a:noFill/>
+          </a:ln>
+          <a:effectLst>
+            <a:outerShdw blurRad="596900" dist="304800" dir="7140000" sx="90000" sy="90000" algn="t" rotWithShape="0">
+              <a:srgbClr val="000000">
+                <a:alpha val="15000"/>
+              </a:srgbClr>
+            </a:outerShdw>
+          </a:effectLst>
+        </p:spPr>
+        <p:style>
+          <a:lnRef idx="2">
+            <a:schemeClr val="accent1">
+              <a:shade val="50000"/>
+            </a:schemeClr>
+          </a:lnRef>
+          <a:fillRef idx="1">
+            <a:schemeClr val="accent1"/>
+          </a:fillRef>
+          <a:effectRef idx="0">
+            <a:schemeClr val="accent1"/>
+          </a:effectRef>
+          <a:fontRef idx="minor">
+            <a:schemeClr val="lt1"/>
+          </a:fontRef>
+        </p:style>
+        <p:txBody>
+          <a:bodyPr rtlCol="0" anchor="ctr"/>
+          <a:lstStyle/>
+          <a:p>
+            <a:pPr algn="ctr"/>
+            <a:endParaRPr lang="en-US" dirty="0"/>
+          </a:p>
+        </p:txBody>
+      </p:sp>
       <p:sp>
         <p:nvSpPr>
           <p:cNvPr id="2" name="Título 1">
             <a:extLst>
               <a:ext uri="{FF2B5EF4-FFF2-40B4-BE49-F238E27FC236}">
-                <a16:creationId xmlns:a16="http://schemas.microsoft.com/office/drawing/2014/main" id="{DC8B6D5C-15CE-B61B-84A3-E2BD3FF4A127}"/>
+                <a16:creationId xmlns:a16="http://schemas.microsoft.com/office/drawing/2014/main" id="{D4EAC386-2116-E6B4-0B03-45113820C92E}"/>
               </a:ext>
             </a:extLst>
           </p:cNvPr>
@@ -5253,16 +7565,22 @@
             <p:ph type="title"/>
           </p:nvPr>
         </p:nvSpPr>
-        <p:spPr/>
-        <p:txBody>
-          <a:bodyPr/>
-          <a:lstStyle/>
-          <a:p>
-            <a:r>
-              <a:rPr lang="pt-PT" dirty="0" err="1"/>
-              <a:t>Animation</a:t>
-            </a:r>
-            <a:endParaRPr lang="pt-PT" dirty="0"/>
+        <p:spPr>
+          <a:xfrm>
+            <a:off x="761803" y="350196"/>
+            <a:ext cx="4646904" cy="1624520"/>
+          </a:xfrm>
+        </p:spPr>
+        <p:txBody>
+          <a:bodyPr anchor="ctr">
+            <a:normAutofit/>
+          </a:bodyPr>
+          <a:lstStyle/>
+          <a:p>
+            <a:r>
+              <a:rPr lang="pt-PT" sz="4000" dirty="0"/>
+              <a:t>Illumination</a:t>
+            </a:r>
           </a:p>
         </p:txBody>
       </p:sp>
@@ -5271,7 +7589,7 @@
           <p:cNvPr id="3" name="Marcador de Posição de Conteúdo 2">
             <a:extLst>
               <a:ext uri="{FF2B5EF4-FFF2-40B4-BE49-F238E27FC236}">
-                <a16:creationId xmlns:a16="http://schemas.microsoft.com/office/drawing/2014/main" id="{101CFC4D-8A21-E6F7-817A-F16C73908F00}"/>
+                <a16:creationId xmlns:a16="http://schemas.microsoft.com/office/drawing/2014/main" id="{C63E7569-D78E-A980-42C5-E03FCBCB4FAE}"/>
               </a:ext>
             </a:extLst>
           </p:cNvPr>
@@ -5282,98 +7600,161 @@
             <p:ph idx="1"/>
           </p:nvPr>
         </p:nvSpPr>
-        <p:spPr/>
-        <p:txBody>
-          <a:bodyPr/>
-          <a:lstStyle/>
-          <a:p>
-            <a:r>
-              <a:rPr lang="pt-PT" dirty="0" err="1"/>
-              <a:t>Which</a:t>
-            </a:r>
-            <a:r>
-              <a:rPr lang="pt-PT" dirty="0"/>
-              <a:t> </a:t>
-            </a:r>
-            <a:r>
-              <a:rPr lang="pt-PT" dirty="0" err="1"/>
-              <a:t>animations</a:t>
-            </a:r>
-            <a:r>
-              <a:rPr lang="pt-PT" dirty="0"/>
-              <a:t> are </a:t>
-            </a:r>
-            <a:r>
-              <a:rPr lang="pt-PT" dirty="0" err="1"/>
-              <a:t>there</a:t>
-            </a:r>
-            <a:r>
-              <a:rPr lang="pt-PT" dirty="0"/>
-              <a:t>?</a:t>
-            </a:r>
-          </a:p>
-          <a:p>
-            <a:r>
-              <a:rPr lang="pt-PT" dirty="0" err="1"/>
-              <a:t>How</a:t>
-            </a:r>
-            <a:r>
-              <a:rPr lang="pt-PT" dirty="0"/>
-              <a:t> are </a:t>
-            </a:r>
-            <a:r>
-              <a:rPr lang="pt-PT" dirty="0" err="1"/>
-              <a:t>they</a:t>
-            </a:r>
-            <a:r>
-              <a:rPr lang="pt-PT" dirty="0"/>
-              <a:t> </a:t>
-            </a:r>
-            <a:r>
-              <a:rPr lang="pt-PT" dirty="0" err="1"/>
-              <a:t>carried</a:t>
-            </a:r>
-            <a:r>
-              <a:rPr lang="pt-PT" dirty="0"/>
-              <a:t> out?</a:t>
-            </a:r>
-          </a:p>
-        </p:txBody>
-      </p:sp>
-      <p:sp>
-        <p:nvSpPr>
-          <p:cNvPr id="4" name="Marcador de Posição da Data 3">
-            <a:extLst>
-              <a:ext uri="{FF2B5EF4-FFF2-40B4-BE49-F238E27FC236}">
-                <a16:creationId xmlns:a16="http://schemas.microsoft.com/office/drawing/2014/main" id="{84085DA4-8C08-D6E6-244C-6F9A02049D5E}"/>
-              </a:ext>
-            </a:extLst>
-          </p:cNvPr>
-          <p:cNvSpPr>
-            <a:spLocks noGrp="1"/>
-          </p:cNvSpPr>
-          <p:nvPr>
-            <p:ph type="dt" sz="half" idx="10"/>
-          </p:nvPr>
-        </p:nvSpPr>
-        <p:spPr/>
-        <p:txBody>
-          <a:bodyPr/>
-          <a:lstStyle/>
-          <a:p>
-            <a:r>
-              <a:rPr lang="pt-PT"/>
-              <a:t>ICG - 2021/2022 - Project 1</a:t>
-            </a:r>
-          </a:p>
-        </p:txBody>
-      </p:sp>
+        <p:spPr>
+          <a:xfrm>
+            <a:off x="761802" y="2743200"/>
+            <a:ext cx="4646905" cy="3613149"/>
+          </a:xfrm>
+        </p:spPr>
+        <p:txBody>
+          <a:bodyPr anchor="ctr">
+            <a:normAutofit/>
+          </a:bodyPr>
+          <a:lstStyle/>
+          <a:p>
+            <a:pPr algn="just">
+              <a:lnSpc>
+                <a:spcPct val="100000"/>
+              </a:lnSpc>
+              <a:buFont typeface="Symbol" panose="05050102010706020507" pitchFamily="18" charset="2"/>
+              <a:buChar char="-"/>
+            </a:pPr>
+            <a:r>
+              <a:rPr lang="pt-PT" sz="2000" dirty="0"/>
+              <a:t>Directional Light (represented by the moon):</a:t>
+            </a:r>
+          </a:p>
+          <a:p>
+            <a:pPr lvl="1" algn="just">
+              <a:lnSpc>
+                <a:spcPct val="100000"/>
+              </a:lnSpc>
+              <a:buFont typeface="Symbol" panose="05050102010706020507" pitchFamily="18" charset="2"/>
+              <a:buChar char="-"/>
+            </a:pPr>
+            <a:r>
+              <a:rPr lang="pt-PT" sz="2000" dirty="0"/>
+              <a:t>Color: White.</a:t>
+            </a:r>
+          </a:p>
+          <a:p>
+            <a:pPr lvl="1" algn="just">
+              <a:lnSpc>
+                <a:spcPct val="100000"/>
+              </a:lnSpc>
+              <a:buFont typeface="Symbol" panose="05050102010706020507" pitchFamily="18" charset="2"/>
+              <a:buChar char="-"/>
+            </a:pPr>
+            <a:r>
+              <a:rPr lang="pt-PT" sz="2000" dirty="0"/>
+              <a:t>Intensity: 1.</a:t>
+            </a:r>
+          </a:p>
+          <a:p>
+            <a:pPr lvl="1" algn="just">
+              <a:lnSpc>
+                <a:spcPct val="100000"/>
+              </a:lnSpc>
+              <a:buFont typeface="Symbol" panose="05050102010706020507" pitchFamily="18" charset="2"/>
+              <a:buChar char="-"/>
+            </a:pPr>
+            <a:r>
+              <a:rPr lang="pt-PT" sz="2000" dirty="0"/>
+              <a:t>Position: (0, 10, 0).</a:t>
+            </a:r>
+          </a:p>
+          <a:p>
+            <a:pPr algn="just">
+              <a:lnSpc>
+                <a:spcPct val="100000"/>
+              </a:lnSpc>
+              <a:buFont typeface="Symbol" panose="05050102010706020507" pitchFamily="18" charset="2"/>
+              <a:buChar char="-"/>
+            </a:pPr>
+            <a:endParaRPr lang="pt-PT" sz="2000" dirty="0"/>
+          </a:p>
+          <a:p>
+            <a:pPr algn="just">
+              <a:lnSpc>
+                <a:spcPct val="100000"/>
+              </a:lnSpc>
+              <a:buFont typeface="Symbol" panose="05050102010706020507" pitchFamily="18" charset="2"/>
+              <a:buChar char="-"/>
+            </a:pPr>
+            <a:r>
+              <a:rPr lang="pt-PT" sz="2000" dirty="0"/>
+              <a:t>Ambient Light:</a:t>
+            </a:r>
+          </a:p>
+          <a:p>
+            <a:pPr lvl="1" algn="just">
+              <a:lnSpc>
+                <a:spcPct val="100000"/>
+              </a:lnSpc>
+              <a:buFont typeface="Symbol" panose="05050102010706020507" pitchFamily="18" charset="2"/>
+              <a:buChar char="-"/>
+            </a:pPr>
+            <a:r>
+              <a:rPr lang="pt-PT" sz="2000" dirty="0"/>
+              <a:t>Color: White.</a:t>
+            </a:r>
+          </a:p>
+          <a:p>
+            <a:pPr lvl="1" algn="just">
+              <a:lnSpc>
+                <a:spcPct val="100000"/>
+              </a:lnSpc>
+              <a:buFont typeface="Symbol" panose="05050102010706020507" pitchFamily="18" charset="2"/>
+              <a:buChar char="-"/>
+            </a:pPr>
+            <a:r>
+              <a:rPr lang="pt-PT" sz="2000" dirty="0"/>
+              <a:t>Intensity: 0,2.</a:t>
+            </a:r>
+          </a:p>
+        </p:txBody>
+      </p:sp>
+      <p:pic>
+        <p:nvPicPr>
+          <p:cNvPr id="7" name="Picture 6">
+            <a:extLst>
+              <a:ext uri="{FF2B5EF4-FFF2-40B4-BE49-F238E27FC236}">
+                <a16:creationId xmlns:a16="http://schemas.microsoft.com/office/drawing/2014/main" id="{E4A09083-226A-4A96-D9E8-8941DA5EF78C}"/>
+              </a:ext>
+            </a:extLst>
+          </p:cNvPr>
+          <p:cNvPicPr>
+            <a:picLocks noChangeAspect="1"/>
+          </p:cNvPicPr>
+          <p:nvPr/>
+        </p:nvPicPr>
+        <p:blipFill rotWithShape="1">
+          <a:blip r:embed="rId3">
+            <a:extLst>
+              <a:ext uri="{28A0092B-C50C-407E-A947-70E740481C1C}">
+                <a14:useLocalDpi xmlns:a14="http://schemas.microsoft.com/office/drawing/2010/main" val="0"/>
+              </a:ext>
+            </a:extLst>
+          </a:blip>
+          <a:srcRect t="6" b="6"/>
+          <a:stretch/>
+        </p:blipFill>
+        <p:spPr>
+          <a:xfrm>
+            <a:off x="6099413" y="6"/>
+            <a:ext cx="6095999" cy="6857990"/>
+          </a:xfrm>
+          <a:prstGeom prst="rect">
+            <a:avLst/>
+          </a:prstGeom>
+        </p:spPr>
+      </p:pic>
       <p:sp>
         <p:nvSpPr>
           <p:cNvPr id="5" name="Marcador de Posição do Número do Diapositivo 4">
             <a:extLst>
               <a:ext uri="{FF2B5EF4-FFF2-40B4-BE49-F238E27FC236}">
-                <a16:creationId xmlns:a16="http://schemas.microsoft.com/office/drawing/2014/main" id="{8DFE5CDA-5E21-71DD-F590-331350D021C5}"/>
+                <a16:creationId xmlns:a16="http://schemas.microsoft.com/office/drawing/2014/main" id="{B8B4F806-50C1-2A3B-B7FF-66DE4B6A8F81}"/>
               </a:ext>
             </a:extLst>
           </p:cNvPr>
@@ -5384,23 +7765,92 @@
             <p:ph type="sldNum" sz="quarter" idx="12"/>
           </p:nvPr>
         </p:nvSpPr>
-        <p:spPr/>
-        <p:txBody>
-          <a:bodyPr/>
-          <a:lstStyle/>
-          <a:p>
+        <p:spPr>
+          <a:xfrm>
+            <a:off x="8732520" y="6356350"/>
+            <a:ext cx="3200400" cy="365125"/>
+          </a:xfrm>
+        </p:spPr>
+        <p:txBody>
+          <a:bodyPr>
+            <a:normAutofit/>
+          </a:bodyPr>
+          <a:lstStyle/>
+          <a:p>
+            <a:pPr>
+              <a:spcAft>
+                <a:spcPts val="600"/>
+              </a:spcAft>
+            </a:pPr>
             <a:fld id="{A275E76C-0B34-4617-92BE-2419D92E4442}" type="slidenum">
-              <a:rPr lang="pt-PT" smtClean="0"/>
+              <a:rPr lang="pt-PT">
+                <a:solidFill>
+                  <a:srgbClr val="FFFFFF"/>
+                </a:solidFill>
+              </a:rPr>
+              <a:pPr>
+                <a:spcAft>
+                  <a:spcPts val="600"/>
+                </a:spcAft>
+              </a:pPr>
               <a:t>5</a:t>
             </a:fld>
-            <a:endParaRPr lang="pt-PT"/>
+            <a:endParaRPr lang="pt-PT" dirty="0">
+              <a:solidFill>
+                <a:srgbClr val="FFFFFF"/>
+              </a:solidFill>
+            </a:endParaRPr>
+          </a:p>
+        </p:txBody>
+      </p:sp>
+      <p:sp>
+        <p:nvSpPr>
+          <p:cNvPr id="9" name="Marcador de Posição da Data 3">
+            <a:extLst>
+              <a:ext uri="{FF2B5EF4-FFF2-40B4-BE49-F238E27FC236}">
+                <a16:creationId xmlns:a16="http://schemas.microsoft.com/office/drawing/2014/main" id="{657D4DD8-B153-875E-387A-A6DA46DCA0A3}"/>
+              </a:ext>
+            </a:extLst>
+          </p:cNvPr>
+          <p:cNvSpPr>
+            <a:spLocks noGrp="1"/>
+          </p:cNvSpPr>
+          <p:nvPr>
+            <p:ph type="dt" sz="half" idx="10"/>
+          </p:nvPr>
+        </p:nvSpPr>
+        <p:spPr>
+          <a:xfrm>
+            <a:off x="243025" y="6356349"/>
+            <a:ext cx="2743200" cy="365125"/>
+          </a:xfrm>
+        </p:spPr>
+        <p:txBody>
+          <a:bodyPr>
+            <a:normAutofit/>
+          </a:bodyPr>
+          <a:lstStyle/>
+          <a:p>
+            <a:pPr>
+              <a:spcAft>
+                <a:spcPts val="600"/>
+              </a:spcAft>
+            </a:pPr>
+            <a:r>
+              <a:rPr lang="pt-PT" dirty="0">
+                <a:solidFill>
+                  <a:schemeClr val="tx1"/>
+                </a:solidFill>
+              </a:rPr>
+              <a:t>ICG - 2023/2024</a:t>
+            </a:r>
           </a:p>
         </p:txBody>
       </p:sp>
     </p:spTree>
     <p:extLst>
       <p:ext uri="{BB962C8B-B14F-4D97-AF65-F5344CB8AC3E}">
-        <p14:creationId xmlns:p14="http://schemas.microsoft.com/office/powerpoint/2010/main" val="1623836021"/>
+        <p14:creationId xmlns:p14="http://schemas.microsoft.com/office/powerpoint/2010/main" val="2569888114"/>
       </p:ext>
     </p:extLst>
   </p:cSld>
@@ -5413,6 +7863,14 @@
 <file path=ppt/slides/slide6.xml><?xml version="1.0" encoding="utf-8"?>
 <p:sld xmlns:a="http://schemas.openxmlformats.org/drawingml/2006/main" xmlns:r="http://schemas.openxmlformats.org/officeDocument/2006/relationships" xmlns:p="http://schemas.openxmlformats.org/presentationml/2006/main">
   <p:cSld>
+    <p:bg>
+      <p:bgPr>
+        <a:solidFill>
+          <a:schemeClr val="bg1"/>
+        </a:solidFill>
+        <a:effectLst/>
+      </p:bgPr>
+    </p:bg>
     <p:spTree>
       <p:nvGrpSpPr>
         <p:cNvPr id="1" name=""/>
@@ -5427,12 +7885,168 @@
           <a:chExt cx="0" cy="0"/>
         </a:xfrm>
       </p:grpSpPr>
+      <p:sp useBgFill="1">
+        <p:nvSpPr>
+          <p:cNvPr id="33" name="Slide Background">
+            <a:extLst>
+              <a:ext uri="{FF2B5EF4-FFF2-40B4-BE49-F238E27FC236}">
+                <a16:creationId xmlns:a16="http://schemas.microsoft.com/office/drawing/2014/main" id="{3ECBE1F1-D69B-4AFA-ABD5-8E41720EF6DE}"/>
+              </a:ext>
+              <a:ext uri="{C183D7F6-B498-43B3-948B-1728B52AA6E4}">
+                <adec:decorative xmlns:adec="http://schemas.microsoft.com/office/drawing/2017/decorative" val="1"/>
+              </a:ext>
+            </a:extLst>
+          </p:cNvPr>
+          <p:cNvSpPr>
+            <a:spLocks noGrp="1" noRot="1" noChangeAspect="1" noMove="1" noResize="1" noEditPoints="1" noAdjustHandles="1" noChangeArrowheads="1" noChangeShapeType="1" noTextEdit="1"/>
+          </p:cNvSpPr>
+          <p:nvPr>
+            <p:extLst>
+              <p:ext uri="{386F3935-93C4-4BCD-93E2-E3B085C9AB24}">
+                <p16:designElem xmlns:p16="http://schemas.microsoft.com/office/powerpoint/2015/main" val="1"/>
+              </p:ext>
+            </p:extLst>
+          </p:nvPr>
+        </p:nvSpPr>
+        <p:spPr>
+          <a:xfrm>
+            <a:off x="0" y="0"/>
+            <a:ext cx="12192000" cy="6858000"/>
+          </a:xfrm>
+          <a:prstGeom prst="rect">
+            <a:avLst/>
+          </a:prstGeom>
+          <a:ln>
+            <a:noFill/>
+          </a:ln>
+        </p:spPr>
+        <p:style>
+          <a:lnRef idx="2">
+            <a:schemeClr val="accent1">
+              <a:shade val="50000"/>
+            </a:schemeClr>
+          </a:lnRef>
+          <a:fillRef idx="1">
+            <a:schemeClr val="accent1"/>
+          </a:fillRef>
+          <a:effectRef idx="0">
+            <a:schemeClr val="accent1"/>
+          </a:effectRef>
+          <a:fontRef idx="minor">
+            <a:schemeClr val="lt1"/>
+          </a:fontRef>
+        </p:style>
+        <p:txBody>
+          <a:bodyPr rtlCol="0" anchor="ctr"/>
+          <a:lstStyle/>
+          <a:p>
+            <a:pPr algn="ctr"/>
+            <a:endParaRPr lang="en-US" dirty="0"/>
+          </a:p>
+        </p:txBody>
+      </p:sp>
+      <p:pic>
+        <p:nvPicPr>
+          <p:cNvPr id="20" name="Picture 6" descr="Hands on keyboard and mouse">
+            <a:extLst>
+              <a:ext uri="{FF2B5EF4-FFF2-40B4-BE49-F238E27FC236}">
+                <a16:creationId xmlns:a16="http://schemas.microsoft.com/office/drawing/2014/main" id="{F697300D-85D4-02BA-46CA-6D444AA9FB97}"/>
+              </a:ext>
+            </a:extLst>
+          </p:cNvPr>
+          <p:cNvPicPr>
+            <a:picLocks noChangeAspect="1"/>
+          </p:cNvPicPr>
+          <p:nvPr/>
+        </p:nvPicPr>
+        <p:blipFill rotWithShape="1">
+          <a:blip r:embed="rId2"/>
+          <a:srcRect l="31698" r="15643" b="-2"/>
+          <a:stretch/>
+        </p:blipFill>
+        <p:spPr>
+          <a:xfrm>
+            <a:off x="-1" y="-2"/>
+            <a:ext cx="5410198" cy="6858002"/>
+          </a:xfrm>
+          <a:prstGeom prst="rect">
+            <a:avLst/>
+          </a:prstGeom>
+        </p:spPr>
+      </p:pic>
+      <p:sp useBgFill="1">
+        <p:nvSpPr>
+          <p:cNvPr id="38" name="Rectangle 37">
+            <a:extLst>
+              <a:ext uri="{FF2B5EF4-FFF2-40B4-BE49-F238E27FC236}">
+                <a16:creationId xmlns:a16="http://schemas.microsoft.com/office/drawing/2014/main" id="{603A6265-E10C-4B85-9C20-E75FCAF9CC63}"/>
+              </a:ext>
+              <a:ext uri="{C183D7F6-B498-43B3-948B-1728B52AA6E4}">
+                <adec:decorative xmlns:adec="http://schemas.microsoft.com/office/drawing/2017/decorative" val="1"/>
+              </a:ext>
+            </a:extLst>
+          </p:cNvPr>
+          <p:cNvSpPr>
+            <a:spLocks noGrp="1" noRot="1" noChangeAspect="1" noMove="1" noResize="1" noEditPoints="1" noAdjustHandles="1" noChangeArrowheads="1" noChangeShapeType="1" noTextEdit="1"/>
+          </p:cNvSpPr>
+          <p:nvPr>
+            <p:extLst>
+              <p:ext uri="{386F3935-93C4-4BCD-93E2-E3B085C9AB24}">
+                <p16:designElem xmlns:p16="http://schemas.microsoft.com/office/powerpoint/2015/main" val="1"/>
+              </p:ext>
+            </p:extLst>
+          </p:nvPr>
+        </p:nvSpPr>
+        <p:spPr>
+          <a:xfrm>
+            <a:off x="5410197" y="-1"/>
+            <a:ext cx="6781802" cy="2286000"/>
+          </a:xfrm>
+          <a:prstGeom prst="rect">
+            <a:avLst/>
+          </a:prstGeom>
+          <a:ln>
+            <a:noFill/>
+          </a:ln>
+          <a:effectLst>
+            <a:outerShdw blurRad="355600" dist="152400" sx="95000" sy="95000" algn="t" rotWithShape="0">
+              <a:srgbClr val="000000">
+                <a:alpha val="29000"/>
+              </a:srgbClr>
+            </a:outerShdw>
+          </a:effectLst>
+        </p:spPr>
+        <p:style>
+          <a:lnRef idx="2">
+            <a:schemeClr val="accent1">
+              <a:shade val="50000"/>
+            </a:schemeClr>
+          </a:lnRef>
+          <a:fillRef idx="1">
+            <a:schemeClr val="accent1"/>
+          </a:fillRef>
+          <a:effectRef idx="0">
+            <a:schemeClr val="accent1"/>
+          </a:effectRef>
+          <a:fontRef idx="minor">
+            <a:schemeClr val="lt1"/>
+          </a:fontRef>
+        </p:style>
+        <p:txBody>
+          <a:bodyPr rtlCol="0" anchor="ctr"/>
+          <a:lstStyle/>
+          <a:p>
+            <a:pPr algn="ctr"/>
+            <a:endParaRPr lang="en-US" dirty="0"/>
+          </a:p>
+        </p:txBody>
+      </p:sp>
       <p:sp>
         <p:nvSpPr>
           <p:cNvPr id="2" name="Título 1">
             <a:extLst>
               <a:ext uri="{FF2B5EF4-FFF2-40B4-BE49-F238E27FC236}">
-                <a16:creationId xmlns:a16="http://schemas.microsoft.com/office/drawing/2014/main" id="{D4EAC386-2116-E6B4-0B03-45113820C92E}"/>
+                <a16:creationId xmlns:a16="http://schemas.microsoft.com/office/drawing/2014/main" id="{33446C54-F7AE-CA4F-E5CE-50948D8171E6}"/>
               </a:ext>
             </a:extLst>
           </p:cNvPr>
@@ -5443,16 +8057,22 @@
             <p:ph type="title"/>
           </p:nvPr>
         </p:nvSpPr>
-        <p:spPr/>
-        <p:txBody>
-          <a:bodyPr/>
-          <a:lstStyle/>
-          <a:p>
-            <a:r>
-              <a:rPr lang="pt-PT" dirty="0" err="1"/>
-              <a:t>Illumination</a:t>
-            </a:r>
-            <a:endParaRPr lang="pt-PT" dirty="0"/>
+        <p:spPr>
+          <a:xfrm>
+            <a:off x="6115317" y="405685"/>
+            <a:ext cx="5464968" cy="1559301"/>
+          </a:xfrm>
+        </p:spPr>
+        <p:txBody>
+          <a:bodyPr>
+            <a:normAutofit/>
+          </a:bodyPr>
+          <a:lstStyle/>
+          <a:p>
+            <a:r>
+              <a:rPr lang="pt-PT" sz="4000" dirty="0"/>
+              <a:t>User Interaction</a:t>
+            </a:r>
           </a:p>
         </p:txBody>
       </p:sp>
@@ -5461,7 +8081,7 @@
           <p:cNvPr id="3" name="Marcador de Posição de Conteúdo 2">
             <a:extLst>
               <a:ext uri="{FF2B5EF4-FFF2-40B4-BE49-F238E27FC236}">
-                <a16:creationId xmlns:a16="http://schemas.microsoft.com/office/drawing/2014/main" id="{C63E7569-D78E-A980-42C5-E03FCBCB4FAE}"/>
+                <a16:creationId xmlns:a16="http://schemas.microsoft.com/office/drawing/2014/main" id="{02672098-09A7-756F-7E43-F974D6424264}"/>
               </a:ext>
             </a:extLst>
           </p:cNvPr>
@@ -5472,46 +8092,61 @@
             <p:ph idx="1"/>
           </p:nvPr>
         </p:nvSpPr>
-        <p:spPr/>
-        <p:txBody>
-          <a:bodyPr/>
-          <a:lstStyle/>
-          <a:p>
-            <a:r>
-              <a:rPr lang="pt-PT" dirty="0" err="1"/>
-              <a:t>Which</a:t>
-            </a:r>
-            <a:r>
-              <a:rPr lang="pt-PT" dirty="0"/>
-              <a:t> light-</a:t>
-            </a:r>
-            <a:r>
-              <a:rPr lang="pt-PT" dirty="0" err="1"/>
-              <a:t>sources</a:t>
-            </a:r>
-            <a:r>
-              <a:rPr lang="pt-PT" dirty="0"/>
-              <a:t>?</a:t>
-            </a:r>
-          </a:p>
-          <a:p>
-            <a:r>
-              <a:rPr lang="pt-PT" dirty="0" err="1"/>
-              <a:t>Features</a:t>
-            </a:r>
-            <a:r>
-              <a:rPr lang="pt-PT" dirty="0"/>
-              <a:t>?</a:t>
-            </a:r>
-          </a:p>
-        </p:txBody>
-      </p:sp>
-      <p:sp>
-        <p:nvSpPr>
-          <p:cNvPr id="4" name="Marcador de Posição da Data 3">
-            <a:extLst>
-              <a:ext uri="{FF2B5EF4-FFF2-40B4-BE49-F238E27FC236}">
-                <a16:creationId xmlns:a16="http://schemas.microsoft.com/office/drawing/2014/main" id="{8FF36D00-7B5C-37A5-80A6-33841E343B24}"/>
+        <p:spPr>
+          <a:xfrm>
+            <a:off x="6115317" y="2743200"/>
+            <a:ext cx="5247340" cy="3496878"/>
+          </a:xfrm>
+        </p:spPr>
+        <p:txBody>
+          <a:bodyPr anchor="ctr">
+            <a:normAutofit/>
+          </a:bodyPr>
+          <a:lstStyle/>
+          <a:p>
+            <a:pPr algn="just">
+              <a:lnSpc>
+                <a:spcPct val="100000"/>
+              </a:lnSpc>
+              <a:buFont typeface="Symbol" panose="05050102010706020507" pitchFamily="18" charset="2"/>
+              <a:buChar char="-"/>
+            </a:pPr>
+            <a:r>
+              <a:rPr lang="en-US" sz="2000" dirty="0"/>
+              <a:t>With the mouse the user can shot bullets at the Ghost.</a:t>
+            </a:r>
+          </a:p>
+          <a:p>
+            <a:pPr algn="just">
+              <a:lnSpc>
+                <a:spcPct val="100000"/>
+              </a:lnSpc>
+              <a:buFont typeface="Symbol" panose="05050102010706020507" pitchFamily="18" charset="2"/>
+              <a:buChar char="-"/>
+            </a:pPr>
+            <a:endParaRPr lang="en-US" sz="2000" dirty="0"/>
+          </a:p>
+          <a:p>
+            <a:pPr algn="just">
+              <a:lnSpc>
+                <a:spcPct val="100000"/>
+              </a:lnSpc>
+              <a:buFont typeface="Symbol" panose="05050102010706020507" pitchFamily="18" charset="2"/>
+              <a:buChar char="-"/>
+            </a:pPr>
+            <a:r>
+              <a:rPr lang="en-US" sz="2000" dirty="0"/>
+              <a:t>Using the WASD keys in the keyboard and the SPACE bar the user can move around the map.</a:t>
+            </a:r>
+          </a:p>
+        </p:txBody>
+      </p:sp>
+      <p:sp>
+        <p:nvSpPr>
+          <p:cNvPr id="6" name="Marcador de Posição da Data 3">
+            <a:extLst>
+              <a:ext uri="{FF2B5EF4-FFF2-40B4-BE49-F238E27FC236}">
+                <a16:creationId xmlns:a16="http://schemas.microsoft.com/office/drawing/2014/main" id="{9DEC26D1-9B75-2C97-F0C4-7EEBEEAE11F9}"/>
               </a:ext>
             </a:extLst>
           </p:cNvPr>
@@ -5522,14 +8157,30 @@
             <p:ph type="dt" sz="half" idx="10"/>
           </p:nvPr>
         </p:nvSpPr>
-        <p:spPr/>
-        <p:txBody>
-          <a:bodyPr/>
-          <a:lstStyle/>
-          <a:p>
-            <a:r>
-              <a:rPr lang="pt-PT"/>
-              <a:t>ICG - 2021/2022 - Project 1</a:t>
+        <p:spPr>
+          <a:xfrm>
+            <a:off x="758952" y="6356350"/>
+            <a:ext cx="2743200" cy="365125"/>
+          </a:xfrm>
+        </p:spPr>
+        <p:txBody>
+          <a:bodyPr>
+            <a:normAutofit/>
+          </a:bodyPr>
+          <a:lstStyle/>
+          <a:p>
+            <a:pPr>
+              <a:spcAft>
+                <a:spcPts val="600"/>
+              </a:spcAft>
+            </a:pPr>
+            <a:r>
+              <a:rPr lang="pt-PT" dirty="0">
+                <a:solidFill>
+                  <a:srgbClr val="FFFFFF"/>
+                </a:solidFill>
+              </a:rPr>
+              <a:t>ICG - 2023/2024</a:t>
             </a:r>
           </a:p>
         </p:txBody>
@@ -5539,7 +8190,7 @@
           <p:cNvPr id="5" name="Marcador de Posição do Número do Diapositivo 4">
             <a:extLst>
               <a:ext uri="{FF2B5EF4-FFF2-40B4-BE49-F238E27FC236}">
-                <a16:creationId xmlns:a16="http://schemas.microsoft.com/office/drawing/2014/main" id="{B8B4F806-50C1-2A3B-B7FF-66DE4B6A8F81}"/>
+                <a16:creationId xmlns:a16="http://schemas.microsoft.com/office/drawing/2014/main" id="{C6690917-D9BF-558B-1172-6B72C41CE0A0}"/>
               </a:ext>
             </a:extLst>
           </p:cNvPr>
@@ -5550,23 +8201,48 @@
             <p:ph type="sldNum" sz="quarter" idx="12"/>
           </p:nvPr>
         </p:nvSpPr>
-        <p:spPr/>
-        <p:txBody>
-          <a:bodyPr/>
-          <a:lstStyle/>
-          <a:p>
+        <p:spPr>
+          <a:xfrm>
+            <a:off x="8732520" y="6356350"/>
+            <a:ext cx="3200400" cy="365125"/>
+          </a:xfrm>
+        </p:spPr>
+        <p:txBody>
+          <a:bodyPr>
+            <a:normAutofit/>
+          </a:bodyPr>
+          <a:lstStyle/>
+          <a:p>
+            <a:pPr>
+              <a:spcAft>
+                <a:spcPts val="600"/>
+              </a:spcAft>
+            </a:pPr>
             <a:fld id="{A275E76C-0B34-4617-92BE-2419D92E4442}" type="slidenum">
-              <a:rPr lang="pt-PT" smtClean="0"/>
+              <a:rPr lang="pt-PT">
+                <a:solidFill>
+                  <a:schemeClr val="tx1"/>
+                </a:solidFill>
+              </a:rPr>
+              <a:pPr>
+                <a:spcAft>
+                  <a:spcPts val="600"/>
+                </a:spcAft>
+              </a:pPr>
               <a:t>6</a:t>
             </a:fld>
-            <a:endParaRPr lang="pt-PT"/>
+            <a:endParaRPr lang="pt-PT" dirty="0">
+              <a:solidFill>
+                <a:schemeClr val="tx1"/>
+              </a:solidFill>
+            </a:endParaRPr>
           </a:p>
         </p:txBody>
       </p:sp>
     </p:spTree>
     <p:extLst>
       <p:ext uri="{BB962C8B-B14F-4D97-AF65-F5344CB8AC3E}">
-        <p14:creationId xmlns:p14="http://schemas.microsoft.com/office/powerpoint/2010/main" val="2569888114"/>
+        <p14:creationId xmlns:p14="http://schemas.microsoft.com/office/powerpoint/2010/main" val="567565778"/>
       </p:ext>
     </p:extLst>
   </p:cSld>
@@ -5579,6 +8255,14 @@
 <file path=ppt/slides/slide7.xml><?xml version="1.0" encoding="utf-8"?>
 <p:sld xmlns:a="http://schemas.openxmlformats.org/drawingml/2006/main" xmlns:r="http://schemas.openxmlformats.org/officeDocument/2006/relationships" xmlns:p="http://schemas.openxmlformats.org/presentationml/2006/main">
   <p:cSld>
+    <p:bg>
+      <p:bgPr>
+        <a:solidFill>
+          <a:schemeClr val="bg1"/>
+        </a:solidFill>
+        <a:effectLst/>
+      </p:bgPr>
+    </p:bg>
     <p:spTree>
       <p:nvGrpSpPr>
         <p:cNvPr id="1" name=""/>
@@ -5593,12 +8277,233 @@
           <a:chExt cx="0" cy="0"/>
         </a:xfrm>
       </p:grpSpPr>
+      <p:sp useBgFill="1">
+        <p:nvSpPr>
+          <p:cNvPr id="16" name="Slide Background">
+            <a:extLst>
+              <a:ext uri="{FF2B5EF4-FFF2-40B4-BE49-F238E27FC236}">
+                <a16:creationId xmlns:a16="http://schemas.microsoft.com/office/drawing/2014/main" id="{C0763A76-9F1C-4FC5-82B7-DD475DA461B2}"/>
+              </a:ext>
+              <a:ext uri="{C183D7F6-B498-43B3-948B-1728B52AA6E4}">
+                <adec:decorative xmlns:adec="http://schemas.microsoft.com/office/drawing/2017/decorative" val="1"/>
+              </a:ext>
+            </a:extLst>
+          </p:cNvPr>
+          <p:cNvSpPr>
+            <a:spLocks noGrp="1" noRot="1" noChangeAspect="1" noMove="1" noResize="1" noEditPoints="1" noAdjustHandles="1" noChangeArrowheads="1" noChangeShapeType="1" noTextEdit="1"/>
+          </p:cNvSpPr>
+          <p:nvPr>
+            <p:extLst>
+              <p:ext uri="{386F3935-93C4-4BCD-93E2-E3B085C9AB24}">
+                <p16:designElem xmlns:p16="http://schemas.microsoft.com/office/powerpoint/2015/main" val="1"/>
+              </p:ext>
+            </p:extLst>
+          </p:nvPr>
+        </p:nvSpPr>
+        <p:spPr bwMode="white">
+          <a:xfrm>
+            <a:off x="-1" y="0"/>
+            <a:ext cx="12191999" cy="6858000"/>
+          </a:xfrm>
+          <a:prstGeom prst="rect">
+            <a:avLst/>
+          </a:prstGeom>
+          <a:ln>
+            <a:noFill/>
+          </a:ln>
+        </p:spPr>
+        <p:style>
+          <a:lnRef idx="2">
+            <a:schemeClr val="accent1">
+              <a:shade val="50000"/>
+            </a:schemeClr>
+          </a:lnRef>
+          <a:fillRef idx="1">
+            <a:schemeClr val="accent1"/>
+          </a:fillRef>
+          <a:effectRef idx="0">
+            <a:schemeClr val="accent1"/>
+          </a:effectRef>
+          <a:fontRef idx="minor">
+            <a:schemeClr val="lt1"/>
+          </a:fontRef>
+        </p:style>
+        <p:txBody>
+          <a:bodyPr rtlCol="0" anchor="ctr"/>
+          <a:lstStyle>
+            <a:defPPr>
+              <a:defRPr lang="en-US"/>
+            </a:defPPr>
+            <a:lvl1pPr marL="0" algn="l" defTabSz="914400" rtl="0" eaLnBrk="1" latinLnBrk="0" hangingPunct="1">
+              <a:defRPr sz="1800" kern="1200">
+                <a:solidFill>
+                  <a:schemeClr val="lt1"/>
+                </a:solidFill>
+                <a:latin typeface="+mn-lt"/>
+                <a:ea typeface="+mn-ea"/>
+                <a:cs typeface="+mn-cs"/>
+              </a:defRPr>
+            </a:lvl1pPr>
+            <a:lvl2pPr marL="457200" algn="l" defTabSz="914400" rtl="0" eaLnBrk="1" latinLnBrk="0" hangingPunct="1">
+              <a:defRPr sz="1800" kern="1200">
+                <a:solidFill>
+                  <a:schemeClr val="lt1"/>
+                </a:solidFill>
+                <a:latin typeface="+mn-lt"/>
+                <a:ea typeface="+mn-ea"/>
+                <a:cs typeface="+mn-cs"/>
+              </a:defRPr>
+            </a:lvl2pPr>
+            <a:lvl3pPr marL="914400" algn="l" defTabSz="914400" rtl="0" eaLnBrk="1" latinLnBrk="0" hangingPunct="1">
+              <a:defRPr sz="1800" kern="1200">
+                <a:solidFill>
+                  <a:schemeClr val="lt1"/>
+                </a:solidFill>
+                <a:latin typeface="+mn-lt"/>
+                <a:ea typeface="+mn-ea"/>
+                <a:cs typeface="+mn-cs"/>
+              </a:defRPr>
+            </a:lvl3pPr>
+            <a:lvl4pPr marL="1371600" algn="l" defTabSz="914400" rtl="0" eaLnBrk="1" latinLnBrk="0" hangingPunct="1">
+              <a:defRPr sz="1800" kern="1200">
+                <a:solidFill>
+                  <a:schemeClr val="lt1"/>
+                </a:solidFill>
+                <a:latin typeface="+mn-lt"/>
+                <a:ea typeface="+mn-ea"/>
+                <a:cs typeface="+mn-cs"/>
+              </a:defRPr>
+            </a:lvl4pPr>
+            <a:lvl5pPr marL="1828800" algn="l" defTabSz="914400" rtl="0" eaLnBrk="1" latinLnBrk="0" hangingPunct="1">
+              <a:defRPr sz="1800" kern="1200">
+                <a:solidFill>
+                  <a:schemeClr val="lt1"/>
+                </a:solidFill>
+                <a:latin typeface="+mn-lt"/>
+                <a:ea typeface="+mn-ea"/>
+                <a:cs typeface="+mn-cs"/>
+              </a:defRPr>
+            </a:lvl5pPr>
+            <a:lvl6pPr marL="2286000" algn="l" defTabSz="914400" rtl="0" eaLnBrk="1" latinLnBrk="0" hangingPunct="1">
+              <a:defRPr sz="1800" kern="1200">
+                <a:solidFill>
+                  <a:schemeClr val="lt1"/>
+                </a:solidFill>
+                <a:latin typeface="+mn-lt"/>
+                <a:ea typeface="+mn-ea"/>
+                <a:cs typeface="+mn-cs"/>
+              </a:defRPr>
+            </a:lvl6pPr>
+            <a:lvl7pPr marL="2743200" algn="l" defTabSz="914400" rtl="0" eaLnBrk="1" latinLnBrk="0" hangingPunct="1">
+              <a:defRPr sz="1800" kern="1200">
+                <a:solidFill>
+                  <a:schemeClr val="lt1"/>
+                </a:solidFill>
+                <a:latin typeface="+mn-lt"/>
+                <a:ea typeface="+mn-ea"/>
+                <a:cs typeface="+mn-cs"/>
+              </a:defRPr>
+            </a:lvl7pPr>
+            <a:lvl8pPr marL="3200400" algn="l" defTabSz="914400" rtl="0" eaLnBrk="1" latinLnBrk="0" hangingPunct="1">
+              <a:defRPr sz="1800" kern="1200">
+                <a:solidFill>
+                  <a:schemeClr val="lt1"/>
+                </a:solidFill>
+                <a:latin typeface="+mn-lt"/>
+                <a:ea typeface="+mn-ea"/>
+                <a:cs typeface="+mn-cs"/>
+              </a:defRPr>
+            </a:lvl8pPr>
+            <a:lvl9pPr marL="3657600" algn="l" defTabSz="914400" rtl="0" eaLnBrk="1" latinLnBrk="0" hangingPunct="1">
+              <a:defRPr sz="1800" kern="1200">
+                <a:solidFill>
+                  <a:schemeClr val="lt1"/>
+                </a:solidFill>
+                <a:latin typeface="+mn-lt"/>
+                <a:ea typeface="+mn-ea"/>
+                <a:cs typeface="+mn-cs"/>
+              </a:defRPr>
+            </a:lvl9pPr>
+          </a:lstStyle>
+          <a:p>
+            <a:pPr algn="ctr"/>
+            <a:endParaRPr lang="en-US" dirty="0"/>
+          </a:p>
+        </p:txBody>
+      </p:sp>
+      <p:sp useBgFill="1">
+        <p:nvSpPr>
+          <p:cNvPr id="18" name="Rectangle 17">
+            <a:extLst>
+              <a:ext uri="{FF2B5EF4-FFF2-40B4-BE49-F238E27FC236}">
+                <a16:creationId xmlns:a16="http://schemas.microsoft.com/office/drawing/2014/main" id="{E81BF4F6-F2CF-4984-9D14-D6966D92F99F}"/>
+              </a:ext>
+              <a:ext uri="{C183D7F6-B498-43B3-948B-1728B52AA6E4}">
+                <adec:decorative xmlns:adec="http://schemas.microsoft.com/office/drawing/2017/decorative" val="1"/>
+              </a:ext>
+            </a:extLst>
+          </p:cNvPr>
+          <p:cNvSpPr>
+            <a:spLocks noGrp="1" noRot="1" noChangeAspect="1" noMove="1" noResize="1" noEditPoints="1" noAdjustHandles="1" noChangeArrowheads="1" noChangeShapeType="1" noTextEdit="1"/>
+          </p:cNvSpPr>
+          <p:nvPr>
+            <p:extLst>
+              <p:ext uri="{386F3935-93C4-4BCD-93E2-E3B085C9AB24}">
+                <p16:designElem xmlns:p16="http://schemas.microsoft.com/office/powerpoint/2015/main" val="1"/>
+              </p:ext>
+            </p:extLst>
+          </p:nvPr>
+        </p:nvSpPr>
+        <p:spPr>
+          <a:xfrm>
+            <a:off x="1" y="0"/>
+            <a:ext cx="8522446" cy="2285999"/>
+          </a:xfrm>
+          <a:prstGeom prst="rect">
+            <a:avLst/>
+          </a:prstGeom>
+          <a:ln>
+            <a:noFill/>
+          </a:ln>
+          <a:effectLst>
+            <a:outerShdw blurRad="596900" dist="304800" dir="7140000" sx="90000" sy="90000" algn="t" rotWithShape="0">
+              <a:srgbClr val="000000">
+                <a:alpha val="15000"/>
+              </a:srgbClr>
+            </a:outerShdw>
+          </a:effectLst>
+        </p:spPr>
+        <p:style>
+          <a:lnRef idx="2">
+            <a:schemeClr val="accent1">
+              <a:shade val="50000"/>
+            </a:schemeClr>
+          </a:lnRef>
+          <a:fillRef idx="1">
+            <a:schemeClr val="accent1"/>
+          </a:fillRef>
+          <a:effectRef idx="0">
+            <a:schemeClr val="accent1"/>
+          </a:effectRef>
+          <a:fontRef idx="minor">
+            <a:schemeClr val="lt1"/>
+          </a:fontRef>
+        </p:style>
+        <p:txBody>
+          <a:bodyPr rtlCol="0" anchor="ctr"/>
+          <a:lstStyle/>
+          <a:p>
+            <a:pPr algn="ctr"/>
+            <a:endParaRPr lang="en-US" dirty="0"/>
+          </a:p>
+        </p:txBody>
+      </p:sp>
       <p:sp>
         <p:nvSpPr>
           <p:cNvPr id="2" name="Título 1">
             <a:extLst>
               <a:ext uri="{FF2B5EF4-FFF2-40B4-BE49-F238E27FC236}">
-                <a16:creationId xmlns:a16="http://schemas.microsoft.com/office/drawing/2014/main" id="{33446C54-F7AE-CA4F-E5CE-50948D8171E6}"/>
+                <a16:creationId xmlns:a16="http://schemas.microsoft.com/office/drawing/2014/main" id="{42C9CCDD-7F42-FFCC-3807-54BD3E902B5B}"/>
               </a:ext>
             </a:extLst>
           </p:cNvPr>
@@ -5609,24 +8514,22 @@
             <p:ph type="title"/>
           </p:nvPr>
         </p:nvSpPr>
-        <p:spPr/>
-        <p:txBody>
-          <a:bodyPr/>
-          <a:lstStyle/>
-          <a:p>
-            <a:r>
-              <a:rPr lang="pt-PT" dirty="0" err="1"/>
-              <a:t>User</a:t>
-            </a:r>
-            <a:r>
-              <a:rPr lang="pt-PT" dirty="0"/>
-              <a:t> </a:t>
-            </a:r>
-            <a:r>
-              <a:rPr lang="pt-PT" dirty="0" err="1"/>
-              <a:t>Interaction</a:t>
-            </a:r>
-            <a:endParaRPr lang="pt-PT" dirty="0"/>
+        <p:spPr>
+          <a:xfrm>
+            <a:off x="761803" y="350196"/>
+            <a:ext cx="4646904" cy="1624520"/>
+          </a:xfrm>
+        </p:spPr>
+        <p:txBody>
+          <a:bodyPr anchor="ctr">
+            <a:normAutofit/>
+          </a:bodyPr>
+          <a:lstStyle/>
+          <a:p>
+            <a:r>
+              <a:rPr lang="pt-PT" sz="4000" dirty="0"/>
+              <a:t>Development</a:t>
+            </a:r>
           </a:p>
         </p:txBody>
       </p:sp>
@@ -5635,7 +8538,7 @@
           <p:cNvPr id="3" name="Marcador de Posição de Conteúdo 2">
             <a:extLst>
               <a:ext uri="{FF2B5EF4-FFF2-40B4-BE49-F238E27FC236}">
-                <a16:creationId xmlns:a16="http://schemas.microsoft.com/office/drawing/2014/main" id="{02672098-09A7-756F-7E43-F974D6424264}"/>
+                <a16:creationId xmlns:a16="http://schemas.microsoft.com/office/drawing/2014/main" id="{C25F349C-DF7A-76B3-539A-D9AC348B7850}"/>
               </a:ext>
             </a:extLst>
           </p:cNvPr>
@@ -5646,86 +8549,113 @@
             <p:ph idx="1"/>
           </p:nvPr>
         </p:nvSpPr>
-        <p:spPr/>
-        <p:txBody>
-          <a:bodyPr/>
-          <a:lstStyle/>
-          <a:p>
-            <a:r>
-              <a:rPr lang="pt-PT" dirty="0" err="1"/>
-              <a:t>What</a:t>
-            </a:r>
-            <a:r>
-              <a:rPr lang="pt-PT" dirty="0"/>
-              <a:t> can </a:t>
-            </a:r>
-            <a:r>
-              <a:rPr lang="pt-PT" dirty="0" err="1"/>
-              <a:t>be</a:t>
-            </a:r>
-            <a:r>
-              <a:rPr lang="pt-PT" dirty="0"/>
-              <a:t> </a:t>
-            </a:r>
-            <a:r>
-              <a:rPr lang="pt-PT" dirty="0" err="1"/>
-              <a:t>done</a:t>
-            </a:r>
-            <a:r>
-              <a:rPr lang="pt-PT" dirty="0"/>
-              <a:t> </a:t>
-            </a:r>
-            <a:r>
-              <a:rPr lang="pt-PT" dirty="0" err="1"/>
-              <a:t>with</a:t>
-            </a:r>
-            <a:r>
-              <a:rPr lang="pt-PT" dirty="0"/>
-              <a:t> </a:t>
-            </a:r>
-            <a:r>
-              <a:rPr lang="pt-PT" dirty="0" err="1"/>
-              <a:t>the</a:t>
-            </a:r>
-            <a:r>
-              <a:rPr lang="pt-PT" dirty="0"/>
-              <a:t> mouse?</a:t>
-            </a:r>
-          </a:p>
-          <a:p>
-            <a:r>
-              <a:rPr lang="pt-PT" dirty="0" err="1"/>
-              <a:t>With</a:t>
-            </a:r>
-            <a:r>
-              <a:rPr lang="pt-PT" dirty="0"/>
-              <a:t> </a:t>
-            </a:r>
-            <a:r>
-              <a:rPr lang="pt-PT" dirty="0" err="1"/>
-              <a:t>the</a:t>
-            </a:r>
-            <a:r>
-              <a:rPr lang="pt-PT" dirty="0"/>
-              <a:t> </a:t>
-            </a:r>
-            <a:r>
-              <a:rPr lang="pt-PT" dirty="0" err="1"/>
-              <a:t>keyboard</a:t>
-            </a:r>
-            <a:r>
-              <a:rPr lang="pt-PT" dirty="0"/>
-              <a:t>?</a:t>
-            </a:r>
-          </a:p>
-        </p:txBody>
-      </p:sp>
-      <p:sp>
-        <p:nvSpPr>
-          <p:cNvPr id="4" name="Marcador de Posição da Data 3">
-            <a:extLst>
-              <a:ext uri="{FF2B5EF4-FFF2-40B4-BE49-F238E27FC236}">
-                <a16:creationId xmlns:a16="http://schemas.microsoft.com/office/drawing/2014/main" id="{64CC3025-9489-A6D4-FC95-F988DA8BBC1E}"/>
+        <p:spPr>
+          <a:xfrm>
+            <a:off x="761802" y="2743200"/>
+            <a:ext cx="4646905" cy="3613149"/>
+          </a:xfrm>
+        </p:spPr>
+        <p:txBody>
+          <a:bodyPr anchor="ctr">
+            <a:normAutofit/>
+          </a:bodyPr>
+          <a:lstStyle/>
+          <a:p>
+            <a:pPr algn="just">
+              <a:lnSpc>
+                <a:spcPct val="100000"/>
+              </a:lnSpc>
+              <a:buFont typeface="Symbol" panose="05050102010706020507" pitchFamily="18" charset="2"/>
+              <a:buChar char="-"/>
+            </a:pPr>
+            <a:r>
+              <a:rPr lang="en-US" sz="2000" dirty="0"/>
+              <a:t>The code is organized into different sections to facilitate understanding and maintenance.</a:t>
+            </a:r>
+          </a:p>
+          <a:p>
+            <a:pPr algn="just">
+              <a:lnSpc>
+                <a:spcPct val="100000"/>
+              </a:lnSpc>
+              <a:buFont typeface="Symbol" panose="05050102010706020507" pitchFamily="18" charset="2"/>
+              <a:buChar char="-"/>
+            </a:pPr>
+            <a:r>
+              <a:rPr lang="en-US" sz="2000" dirty="0"/>
+              <a:t>Collisions and Event Detection.</a:t>
+            </a:r>
+          </a:p>
+          <a:p>
+            <a:pPr algn="just">
+              <a:lnSpc>
+                <a:spcPct val="100000"/>
+              </a:lnSpc>
+              <a:buFont typeface="Symbol" panose="05050102010706020507" pitchFamily="18" charset="2"/>
+              <a:buChar char="-"/>
+            </a:pPr>
+            <a:r>
+              <a:rPr lang="en-US" sz="2000" dirty="0"/>
+              <a:t>Position and Rotation Update.</a:t>
+            </a:r>
+          </a:p>
+          <a:p>
+            <a:pPr algn="just">
+              <a:lnSpc>
+                <a:spcPct val="100000"/>
+              </a:lnSpc>
+              <a:buFont typeface="Symbol" panose="05050102010706020507" pitchFamily="18" charset="2"/>
+              <a:buChar char="-"/>
+            </a:pPr>
+            <a:endParaRPr lang="en-US" sz="2000" dirty="0"/>
+          </a:p>
+          <a:p>
+            <a:pPr algn="just">
+              <a:lnSpc>
+                <a:spcPct val="100000"/>
+              </a:lnSpc>
+              <a:buFont typeface="Symbol" panose="05050102010706020507" pitchFamily="18" charset="2"/>
+              <a:buChar char="-"/>
+            </a:pPr>
+            <a:r>
+              <a:rPr lang="pt-PT" sz="2000" dirty="0"/>
+              <a:t>Difficulties:</a:t>
+            </a:r>
+          </a:p>
+          <a:p>
+            <a:pPr lvl="1" algn="just">
+              <a:lnSpc>
+                <a:spcPct val="100000"/>
+              </a:lnSpc>
+              <a:buFont typeface="Symbol" panose="05050102010706020507" pitchFamily="18" charset="2"/>
+              <a:buChar char="-"/>
+            </a:pPr>
+            <a:r>
+              <a:rPr lang="pt-PT" sz="2000" dirty="0"/>
+              <a:t>Collision Management</a:t>
+            </a:r>
+          </a:p>
+          <a:p>
+            <a:pPr lvl="1" algn="just">
+              <a:lnSpc>
+                <a:spcPct val="100000"/>
+              </a:lnSpc>
+              <a:buFont typeface="Symbol" panose="05050102010706020507" pitchFamily="18" charset="2"/>
+              <a:buChar char="-"/>
+            </a:pPr>
+            <a:r>
+              <a:rPr lang="pt-PT" sz="2000" dirty="0"/>
+              <a:t>Performance Optimization</a:t>
+            </a:r>
+          </a:p>
+        </p:txBody>
+      </p:sp>
+      <p:sp>
+        <p:nvSpPr>
+          <p:cNvPr id="6" name="Marcador de Posição da Data 3">
+            <a:extLst>
+              <a:ext uri="{FF2B5EF4-FFF2-40B4-BE49-F238E27FC236}">
+                <a16:creationId xmlns:a16="http://schemas.microsoft.com/office/drawing/2014/main" id="{9ED20EE6-852D-1387-4E9C-0E925B78142B}"/>
               </a:ext>
             </a:extLst>
           </p:cNvPr>
@@ -5736,24 +8666,69 @@
             <p:ph type="dt" sz="half" idx="10"/>
           </p:nvPr>
         </p:nvSpPr>
-        <p:spPr/>
-        <p:txBody>
-          <a:bodyPr/>
-          <a:lstStyle/>
-          <a:p>
-            <a:r>
-              <a:rPr lang="pt-PT"/>
-              <a:t>ICG - 2021/2022 - Project 1</a:t>
-            </a:r>
-          </a:p>
-        </p:txBody>
-      </p:sp>
+        <p:spPr>
+          <a:xfrm>
+            <a:off x="761802" y="6356350"/>
+            <a:ext cx="2819598" cy="365125"/>
+          </a:xfrm>
+        </p:spPr>
+        <p:txBody>
+          <a:bodyPr>
+            <a:normAutofit/>
+          </a:bodyPr>
+          <a:lstStyle/>
+          <a:p>
+            <a:pPr>
+              <a:spcAft>
+                <a:spcPts val="600"/>
+              </a:spcAft>
+            </a:pPr>
+            <a:r>
+              <a:rPr lang="pt-PT" dirty="0">
+                <a:solidFill>
+                  <a:schemeClr val="tx1"/>
+                </a:solidFill>
+              </a:rPr>
+              <a:t>ICG - 2023/2024</a:t>
+            </a:r>
+          </a:p>
+        </p:txBody>
+      </p:sp>
+      <p:pic>
+        <p:nvPicPr>
+          <p:cNvPr id="7" name="Picture 6" descr="Computer script on a screen">
+            <a:extLst>
+              <a:ext uri="{FF2B5EF4-FFF2-40B4-BE49-F238E27FC236}">
+                <a16:creationId xmlns:a16="http://schemas.microsoft.com/office/drawing/2014/main" id="{DDF14196-F223-ADCE-F3CC-8573A5AB48A0}"/>
+              </a:ext>
+            </a:extLst>
+          </p:cNvPr>
+          <p:cNvPicPr>
+            <a:picLocks noChangeAspect="1"/>
+          </p:cNvPicPr>
+          <p:nvPr/>
+        </p:nvPicPr>
+        <p:blipFill rotWithShape="1">
+          <a:blip r:embed="rId2"/>
+          <a:srcRect l="87" r="40512" b="-2"/>
+          <a:stretch/>
+        </p:blipFill>
+        <p:spPr>
+          <a:xfrm>
+            <a:off x="6096000" y="1"/>
+            <a:ext cx="6102825" cy="6858000"/>
+          </a:xfrm>
+          <a:prstGeom prst="rect">
+            <a:avLst/>
+          </a:prstGeom>
+        </p:spPr>
+      </p:pic>
       <p:sp>
         <p:nvSpPr>
           <p:cNvPr id="5" name="Marcador de Posição do Número do Diapositivo 4">
             <a:extLst>
               <a:ext uri="{FF2B5EF4-FFF2-40B4-BE49-F238E27FC236}">
-                <a16:creationId xmlns:a16="http://schemas.microsoft.com/office/drawing/2014/main" id="{C6690917-D9BF-558B-1172-6B72C41CE0A0}"/>
+                <a16:creationId xmlns:a16="http://schemas.microsoft.com/office/drawing/2014/main" id="{1D3DFBEB-7750-F056-BE82-8158E725F8BE}"/>
               </a:ext>
             </a:extLst>
           </p:cNvPr>
@@ -5764,23 +8739,48 @@
             <p:ph type="sldNum" sz="quarter" idx="12"/>
           </p:nvPr>
         </p:nvSpPr>
-        <p:spPr/>
-        <p:txBody>
-          <a:bodyPr/>
-          <a:lstStyle/>
-          <a:p>
+        <p:spPr>
+          <a:xfrm>
+            <a:off x="8732520" y="6356350"/>
+            <a:ext cx="3200400" cy="365125"/>
+          </a:xfrm>
+        </p:spPr>
+        <p:txBody>
+          <a:bodyPr>
+            <a:normAutofit/>
+          </a:bodyPr>
+          <a:lstStyle/>
+          <a:p>
+            <a:pPr>
+              <a:spcAft>
+                <a:spcPts val="600"/>
+              </a:spcAft>
+            </a:pPr>
             <a:fld id="{A275E76C-0B34-4617-92BE-2419D92E4442}" type="slidenum">
-              <a:rPr lang="pt-PT" smtClean="0"/>
+              <a:rPr lang="pt-PT">
+                <a:solidFill>
+                  <a:srgbClr val="FFFFFF"/>
+                </a:solidFill>
+              </a:rPr>
+              <a:pPr>
+                <a:spcAft>
+                  <a:spcPts val="600"/>
+                </a:spcAft>
+              </a:pPr>
               <a:t>7</a:t>
             </a:fld>
-            <a:endParaRPr lang="pt-PT"/>
+            <a:endParaRPr lang="pt-PT" dirty="0">
+              <a:solidFill>
+                <a:srgbClr val="FFFFFF"/>
+              </a:solidFill>
+            </a:endParaRPr>
           </a:p>
         </p:txBody>
       </p:sp>
     </p:spTree>
     <p:extLst>
       <p:ext uri="{BB962C8B-B14F-4D97-AF65-F5344CB8AC3E}">
-        <p14:creationId xmlns:p14="http://schemas.microsoft.com/office/powerpoint/2010/main" val="567565778"/>
+        <p14:creationId xmlns:p14="http://schemas.microsoft.com/office/powerpoint/2010/main" val="2832385390"/>
       </p:ext>
     </p:extLst>
   </p:cSld>
@@ -5793,6 +8793,14 @@
 <file path=ppt/slides/slide8.xml><?xml version="1.0" encoding="utf-8"?>
 <p:sld xmlns:a="http://schemas.openxmlformats.org/drawingml/2006/main" xmlns:r="http://schemas.openxmlformats.org/officeDocument/2006/relationships" xmlns:p="http://schemas.openxmlformats.org/presentationml/2006/main">
   <p:cSld>
+    <p:bg>
+      <p:bgPr>
+        <a:solidFill>
+          <a:schemeClr val="bg1"/>
+        </a:solidFill>
+        <a:effectLst/>
+      </p:bgPr>
+    </p:bg>
     <p:spTree>
       <p:nvGrpSpPr>
         <p:cNvPr id="1" name=""/>
@@ -5807,12 +8815,168 @@
           <a:chExt cx="0" cy="0"/>
         </a:xfrm>
       </p:grpSpPr>
+      <p:sp useBgFill="1">
+        <p:nvSpPr>
+          <p:cNvPr id="11" name="Slide Background">
+            <a:extLst>
+              <a:ext uri="{FF2B5EF4-FFF2-40B4-BE49-F238E27FC236}">
+                <a16:creationId xmlns:a16="http://schemas.microsoft.com/office/drawing/2014/main" id="{3ECBE1F1-D69B-4AFA-ABD5-8E41720EF6DE}"/>
+              </a:ext>
+              <a:ext uri="{C183D7F6-B498-43B3-948B-1728B52AA6E4}">
+                <adec:decorative xmlns:adec="http://schemas.microsoft.com/office/drawing/2017/decorative" val="1"/>
+              </a:ext>
+            </a:extLst>
+          </p:cNvPr>
+          <p:cNvSpPr>
+            <a:spLocks noGrp="1" noRot="1" noChangeAspect="1" noMove="1" noResize="1" noEditPoints="1" noAdjustHandles="1" noChangeArrowheads="1" noChangeShapeType="1" noTextEdit="1"/>
+          </p:cNvSpPr>
+          <p:nvPr>
+            <p:extLst>
+              <p:ext uri="{386F3935-93C4-4BCD-93E2-E3B085C9AB24}">
+                <p16:designElem xmlns:p16="http://schemas.microsoft.com/office/powerpoint/2015/main" val="1"/>
+              </p:ext>
+            </p:extLst>
+          </p:nvPr>
+        </p:nvSpPr>
+        <p:spPr>
+          <a:xfrm>
+            <a:off x="0" y="0"/>
+            <a:ext cx="12192000" cy="6858000"/>
+          </a:xfrm>
+          <a:prstGeom prst="rect">
+            <a:avLst/>
+          </a:prstGeom>
+          <a:ln>
+            <a:noFill/>
+          </a:ln>
+        </p:spPr>
+        <p:style>
+          <a:lnRef idx="2">
+            <a:schemeClr val="accent1">
+              <a:shade val="50000"/>
+            </a:schemeClr>
+          </a:lnRef>
+          <a:fillRef idx="1">
+            <a:schemeClr val="accent1"/>
+          </a:fillRef>
+          <a:effectRef idx="0">
+            <a:schemeClr val="accent1"/>
+          </a:effectRef>
+          <a:fontRef idx="minor">
+            <a:schemeClr val="lt1"/>
+          </a:fontRef>
+        </p:style>
+        <p:txBody>
+          <a:bodyPr rtlCol="0" anchor="ctr"/>
+          <a:lstStyle/>
+          <a:p>
+            <a:pPr algn="ctr"/>
+            <a:endParaRPr lang="en-US" dirty="0"/>
+          </a:p>
+        </p:txBody>
+      </p:sp>
+      <p:pic>
+        <p:nvPicPr>
+          <p:cNvPr id="7" name="Picture 6" descr="Light bulb on yellow background with sketched light beams and cord">
+            <a:extLst>
+              <a:ext uri="{FF2B5EF4-FFF2-40B4-BE49-F238E27FC236}">
+                <a16:creationId xmlns:a16="http://schemas.microsoft.com/office/drawing/2014/main" id="{1D6FD1B4-CA86-95E3-721F-84754E4148ED}"/>
+              </a:ext>
+            </a:extLst>
+          </p:cNvPr>
+          <p:cNvPicPr>
+            <a:picLocks noChangeAspect="1"/>
+          </p:cNvPicPr>
+          <p:nvPr/>
+        </p:nvPicPr>
+        <p:blipFill rotWithShape="1">
+          <a:blip r:embed="rId2"/>
+          <a:srcRect l="47871" r="3613"/>
+          <a:stretch/>
+        </p:blipFill>
+        <p:spPr>
+          <a:xfrm>
+            <a:off x="-1" y="-2"/>
+            <a:ext cx="5410198" cy="6858002"/>
+          </a:xfrm>
+          <a:prstGeom prst="rect">
+            <a:avLst/>
+          </a:prstGeom>
+        </p:spPr>
+      </p:pic>
+      <p:sp useBgFill="1">
+        <p:nvSpPr>
+          <p:cNvPr id="13" name="Rectangle 12">
+            <a:extLst>
+              <a:ext uri="{FF2B5EF4-FFF2-40B4-BE49-F238E27FC236}">
+                <a16:creationId xmlns:a16="http://schemas.microsoft.com/office/drawing/2014/main" id="{603A6265-E10C-4B85-9C20-E75FCAF9CC63}"/>
+              </a:ext>
+              <a:ext uri="{C183D7F6-B498-43B3-948B-1728B52AA6E4}">
+                <adec:decorative xmlns:adec="http://schemas.microsoft.com/office/drawing/2017/decorative" val="1"/>
+              </a:ext>
+            </a:extLst>
+          </p:cNvPr>
+          <p:cNvSpPr>
+            <a:spLocks noGrp="1" noRot="1" noChangeAspect="1" noMove="1" noResize="1" noEditPoints="1" noAdjustHandles="1" noChangeArrowheads="1" noChangeShapeType="1" noTextEdit="1"/>
+          </p:cNvSpPr>
+          <p:nvPr>
+            <p:extLst>
+              <p:ext uri="{386F3935-93C4-4BCD-93E2-E3B085C9AB24}">
+                <p16:designElem xmlns:p16="http://schemas.microsoft.com/office/powerpoint/2015/main" val="1"/>
+              </p:ext>
+            </p:extLst>
+          </p:nvPr>
+        </p:nvSpPr>
+        <p:spPr>
+          <a:xfrm>
+            <a:off x="5410197" y="-1"/>
+            <a:ext cx="6781802" cy="2286000"/>
+          </a:xfrm>
+          <a:prstGeom prst="rect">
+            <a:avLst/>
+          </a:prstGeom>
+          <a:ln>
+            <a:noFill/>
+          </a:ln>
+          <a:effectLst>
+            <a:outerShdw blurRad="355600" dist="152400" sx="95000" sy="95000" algn="t" rotWithShape="0">
+              <a:srgbClr val="000000">
+                <a:alpha val="29000"/>
+              </a:srgbClr>
+            </a:outerShdw>
+          </a:effectLst>
+        </p:spPr>
+        <p:style>
+          <a:lnRef idx="2">
+            <a:schemeClr val="accent1">
+              <a:shade val="50000"/>
+            </a:schemeClr>
+          </a:lnRef>
+          <a:fillRef idx="1">
+            <a:schemeClr val="accent1"/>
+          </a:fillRef>
+          <a:effectRef idx="0">
+            <a:schemeClr val="accent1"/>
+          </a:effectRef>
+          <a:fontRef idx="minor">
+            <a:schemeClr val="lt1"/>
+          </a:fontRef>
+        </p:style>
+        <p:txBody>
+          <a:bodyPr rtlCol="0" anchor="ctr"/>
+          <a:lstStyle/>
+          <a:p>
+            <a:pPr algn="ctr"/>
+            <a:endParaRPr lang="en-US" dirty="0"/>
+          </a:p>
+        </p:txBody>
+      </p:sp>
       <p:sp>
         <p:nvSpPr>
           <p:cNvPr id="2" name="Título 1">
             <a:extLst>
               <a:ext uri="{FF2B5EF4-FFF2-40B4-BE49-F238E27FC236}">
-                <a16:creationId xmlns:a16="http://schemas.microsoft.com/office/drawing/2014/main" id="{42C9CCDD-7F42-FFCC-3807-54BD3E902B5B}"/>
+                <a16:creationId xmlns:a16="http://schemas.microsoft.com/office/drawing/2014/main" id="{06EE0CD9-859B-FFDC-7F6F-65A1864810C7}"/>
               </a:ext>
             </a:extLst>
           </p:cNvPr>
@@ -5823,16 +8987,22 @@
             <p:ph type="title"/>
           </p:nvPr>
         </p:nvSpPr>
-        <p:spPr/>
-        <p:txBody>
-          <a:bodyPr/>
-          <a:lstStyle/>
-          <a:p>
-            <a:r>
-              <a:rPr lang="pt-PT" dirty="0" err="1"/>
-              <a:t>Development</a:t>
-            </a:r>
-            <a:endParaRPr lang="pt-PT" dirty="0"/>
+        <p:spPr>
+          <a:xfrm>
+            <a:off x="6115317" y="405685"/>
+            <a:ext cx="5464968" cy="1559301"/>
+          </a:xfrm>
+        </p:spPr>
+        <p:txBody>
+          <a:bodyPr>
+            <a:normAutofit/>
+          </a:bodyPr>
+          <a:lstStyle/>
+          <a:p>
+            <a:r>
+              <a:rPr lang="pt-PT" sz="4000" dirty="0"/>
+              <a:t>Conclusions</a:t>
+            </a:r>
           </a:p>
         </p:txBody>
       </p:sp>
@@ -5841,7 +9011,7 @@
           <p:cNvPr id="3" name="Marcador de Posição de Conteúdo 2">
             <a:extLst>
               <a:ext uri="{FF2B5EF4-FFF2-40B4-BE49-F238E27FC236}">
-                <a16:creationId xmlns:a16="http://schemas.microsoft.com/office/drawing/2014/main" id="{C25F349C-DF7A-76B3-539A-D9AC348B7850}"/>
+                <a16:creationId xmlns:a16="http://schemas.microsoft.com/office/drawing/2014/main" id="{63326C6E-5F1E-0E8D-F642-983D87164C61}"/>
               </a:ext>
             </a:extLst>
           </p:cNvPr>
@@ -5852,165 +9022,30 @@
             <p:ph idx="1"/>
           </p:nvPr>
         </p:nvSpPr>
-        <p:spPr/>
-        <p:txBody>
-          <a:bodyPr/>
-          <a:lstStyle/>
-          <a:p>
-            <a:r>
-              <a:rPr lang="pt-PT" dirty="0" err="1"/>
-              <a:t>Code</a:t>
-            </a:r>
-            <a:r>
-              <a:rPr lang="pt-PT" dirty="0"/>
-              <a:t> </a:t>
-            </a:r>
-            <a:r>
-              <a:rPr lang="pt-PT" dirty="0" err="1"/>
-              <a:t>organization</a:t>
-            </a:r>
-            <a:endParaRPr lang="pt-PT" dirty="0"/>
-          </a:p>
-          <a:p>
-            <a:r>
-              <a:rPr lang="pt-PT" dirty="0" err="1"/>
-              <a:t>Implementation</a:t>
-            </a:r>
-            <a:r>
-              <a:rPr lang="pt-PT" dirty="0"/>
-              <a:t> </a:t>
-            </a:r>
-            <a:r>
-              <a:rPr lang="pt-PT" dirty="0" err="1"/>
-              <a:t>details</a:t>
-            </a:r>
-            <a:r>
-              <a:rPr lang="pt-PT" dirty="0"/>
-              <a:t>, </a:t>
-            </a:r>
-            <a:r>
-              <a:rPr lang="pt-PT" dirty="0" err="1"/>
-              <a:t>if</a:t>
-            </a:r>
-            <a:r>
-              <a:rPr lang="pt-PT" dirty="0"/>
-              <a:t> </a:t>
-            </a:r>
-            <a:r>
-              <a:rPr lang="pt-PT" dirty="0" err="1"/>
-              <a:t>important</a:t>
-            </a:r>
-            <a:r>
-              <a:rPr lang="pt-PT" dirty="0"/>
-              <a:t> </a:t>
-            </a:r>
-            <a:r>
-              <a:rPr lang="pt-PT" dirty="0" err="1"/>
-              <a:t>and</a:t>
-            </a:r>
-            <a:r>
-              <a:rPr lang="pt-PT" dirty="0"/>
-              <a:t> </a:t>
-            </a:r>
-            <a:r>
-              <a:rPr lang="pt-PT" dirty="0" err="1"/>
-              <a:t>different</a:t>
-            </a:r>
-            <a:r>
-              <a:rPr lang="pt-PT" dirty="0"/>
-              <a:t> </a:t>
-            </a:r>
-            <a:r>
-              <a:rPr lang="pt-PT" dirty="0" err="1"/>
-              <a:t>from</a:t>
-            </a:r>
-            <a:r>
-              <a:rPr lang="pt-PT" dirty="0"/>
-              <a:t> </a:t>
-            </a:r>
-            <a:r>
-              <a:rPr lang="pt-PT" dirty="0" err="1"/>
-              <a:t>what</a:t>
-            </a:r>
-            <a:r>
-              <a:rPr lang="pt-PT" dirty="0"/>
-              <a:t> </a:t>
-            </a:r>
-            <a:r>
-              <a:rPr lang="pt-PT" dirty="0" err="1"/>
-              <a:t>we</a:t>
-            </a:r>
-            <a:r>
-              <a:rPr lang="pt-PT" dirty="0"/>
-              <a:t> </a:t>
-            </a:r>
-            <a:r>
-              <a:rPr lang="pt-PT" dirty="0" err="1"/>
-              <a:t>have</a:t>
-            </a:r>
-            <a:r>
-              <a:rPr lang="pt-PT" dirty="0"/>
-              <a:t> </a:t>
-            </a:r>
-            <a:r>
-              <a:rPr lang="pt-PT" dirty="0" err="1"/>
-              <a:t>been</a:t>
-            </a:r>
-            <a:r>
-              <a:rPr lang="pt-PT" dirty="0"/>
-              <a:t> </a:t>
-            </a:r>
-            <a:r>
-              <a:rPr lang="pt-PT" dirty="0" err="1"/>
-              <a:t>doing</a:t>
-            </a:r>
-            <a:endParaRPr lang="pt-PT" dirty="0"/>
-          </a:p>
-          <a:p>
-            <a:endParaRPr lang="pt-PT" dirty="0"/>
-          </a:p>
-          <a:p>
-            <a:r>
-              <a:rPr lang="pt-PT" dirty="0" err="1"/>
-              <a:t>Problems</a:t>
-            </a:r>
-            <a:r>
-              <a:rPr lang="pt-PT" dirty="0"/>
-              <a:t> / </a:t>
-            </a:r>
-            <a:r>
-              <a:rPr lang="pt-PT" dirty="0" err="1"/>
-              <a:t>difficulties</a:t>
-            </a:r>
-            <a:endParaRPr lang="pt-PT" dirty="0"/>
-          </a:p>
-        </p:txBody>
-      </p:sp>
-      <p:sp>
-        <p:nvSpPr>
-          <p:cNvPr id="4" name="Marcador de Posição da Data 3">
-            <a:extLst>
-              <a:ext uri="{FF2B5EF4-FFF2-40B4-BE49-F238E27FC236}">
-                <a16:creationId xmlns:a16="http://schemas.microsoft.com/office/drawing/2014/main" id="{279D06DA-5B84-415C-8F61-C7847742AAB1}"/>
-              </a:ext>
-            </a:extLst>
-          </p:cNvPr>
-          <p:cNvSpPr>
-            <a:spLocks noGrp="1"/>
-          </p:cNvSpPr>
-          <p:nvPr>
-            <p:ph type="dt" sz="half" idx="10"/>
-          </p:nvPr>
-        </p:nvSpPr>
-        <p:spPr/>
-        <p:txBody>
-          <a:bodyPr/>
-          <a:lstStyle/>
-          <a:p>
-            <a:r>
-              <a:rPr lang="pt-PT"/>
-              <a:t>ICG - 2021/2022 - Project 1</a:t>
-            </a:r>
+        <p:spPr>
+          <a:xfrm>
+            <a:off x="6115317" y="2743200"/>
+            <a:ext cx="5247340" cy="3496878"/>
+          </a:xfrm>
+        </p:spPr>
+        <p:txBody>
+          <a:bodyPr anchor="ctr">
+            <a:normAutofit/>
+          </a:bodyPr>
+          <a:lstStyle/>
+          <a:p>
+            <a:pPr algn="just">
+              <a:lnSpc>
+                <a:spcPct val="100000"/>
+              </a:lnSpc>
+              <a:buFont typeface="Symbol" panose="05050102010706020507" pitchFamily="18" charset="2"/>
+              <a:buChar char="-"/>
+            </a:pPr>
+            <a:r>
+              <a:rPr lang="en-US" sz="2000" dirty="0"/>
+              <a:t>In conclusion, all goals were successfully achieved, albeit with some challenges encountered along the way and various project ideas considered throughout the development process.</a:t>
+            </a:r>
+            <a:endParaRPr lang="pt-PT" sz="2000" dirty="0"/>
           </a:p>
         </p:txBody>
       </p:sp>
@@ -6019,7 +9054,7 @@
           <p:cNvPr id="5" name="Marcador de Posição do Número do Diapositivo 4">
             <a:extLst>
               <a:ext uri="{FF2B5EF4-FFF2-40B4-BE49-F238E27FC236}">
-                <a16:creationId xmlns:a16="http://schemas.microsoft.com/office/drawing/2014/main" id="{1D3DFBEB-7750-F056-BE82-8158E725F8BE}"/>
+                <a16:creationId xmlns:a16="http://schemas.microsoft.com/office/drawing/2014/main" id="{09584837-1C74-DD42-E69B-D85B02C81CBA}"/>
               </a:ext>
             </a:extLst>
           </p:cNvPr>
@@ -6030,23 +9065,92 @@
             <p:ph type="sldNum" sz="quarter" idx="12"/>
           </p:nvPr>
         </p:nvSpPr>
-        <p:spPr/>
-        <p:txBody>
-          <a:bodyPr/>
-          <a:lstStyle/>
-          <a:p>
+        <p:spPr>
+          <a:xfrm>
+            <a:off x="8732520" y="6356350"/>
+            <a:ext cx="3200400" cy="365125"/>
+          </a:xfrm>
+        </p:spPr>
+        <p:txBody>
+          <a:bodyPr>
+            <a:normAutofit/>
+          </a:bodyPr>
+          <a:lstStyle/>
+          <a:p>
+            <a:pPr>
+              <a:spcAft>
+                <a:spcPts val="600"/>
+              </a:spcAft>
+            </a:pPr>
             <a:fld id="{A275E76C-0B34-4617-92BE-2419D92E4442}" type="slidenum">
-              <a:rPr lang="pt-PT" smtClean="0"/>
+              <a:rPr lang="pt-PT">
+                <a:solidFill>
+                  <a:schemeClr val="tx1"/>
+                </a:solidFill>
+              </a:rPr>
+              <a:pPr>
+                <a:spcAft>
+                  <a:spcPts val="600"/>
+                </a:spcAft>
+              </a:pPr>
               <a:t>8</a:t>
             </a:fld>
-            <a:endParaRPr lang="pt-PT"/>
+            <a:endParaRPr lang="pt-PT" dirty="0">
+              <a:solidFill>
+                <a:schemeClr val="tx1"/>
+              </a:solidFill>
+            </a:endParaRPr>
+          </a:p>
+        </p:txBody>
+      </p:sp>
+      <p:sp>
+        <p:nvSpPr>
+          <p:cNvPr id="6" name="Marcador de Posição da Data 3">
+            <a:extLst>
+              <a:ext uri="{FF2B5EF4-FFF2-40B4-BE49-F238E27FC236}">
+                <a16:creationId xmlns:a16="http://schemas.microsoft.com/office/drawing/2014/main" id="{029FED57-33C5-855C-4776-592884EB5D56}"/>
+              </a:ext>
+            </a:extLst>
+          </p:cNvPr>
+          <p:cNvSpPr>
+            <a:spLocks noGrp="1"/>
+          </p:cNvSpPr>
+          <p:nvPr>
+            <p:ph type="dt" sz="half" idx="10"/>
+          </p:nvPr>
+        </p:nvSpPr>
+        <p:spPr>
+          <a:xfrm>
+            <a:off x="243025" y="6356349"/>
+            <a:ext cx="2743200" cy="365125"/>
+          </a:xfrm>
+        </p:spPr>
+        <p:txBody>
+          <a:bodyPr>
+            <a:normAutofit/>
+          </a:bodyPr>
+          <a:lstStyle/>
+          <a:p>
+            <a:pPr>
+              <a:spcAft>
+                <a:spcPts val="600"/>
+              </a:spcAft>
+            </a:pPr>
+            <a:r>
+              <a:rPr lang="pt-PT" dirty="0">
+                <a:solidFill>
+                  <a:schemeClr val="bg1"/>
+                </a:solidFill>
+              </a:rPr>
+              <a:t>ICG - 2023/2024</a:t>
+            </a:r>
           </a:p>
         </p:txBody>
       </p:sp>
     </p:spTree>
     <p:extLst>
       <p:ext uri="{BB962C8B-B14F-4D97-AF65-F5344CB8AC3E}">
-        <p14:creationId xmlns:p14="http://schemas.microsoft.com/office/powerpoint/2010/main" val="2832385390"/>
+        <p14:creationId xmlns:p14="http://schemas.microsoft.com/office/powerpoint/2010/main" val="3173771447"/>
       </p:ext>
     </p:extLst>
   </p:cSld>
@@ -6059,6 +9163,14 @@
 <file path=ppt/slides/slide9.xml><?xml version="1.0" encoding="utf-8"?>
 <p:sld xmlns:a="http://schemas.openxmlformats.org/drawingml/2006/main" xmlns:r="http://schemas.openxmlformats.org/officeDocument/2006/relationships" xmlns:p="http://schemas.openxmlformats.org/presentationml/2006/main">
   <p:cSld>
+    <p:bg>
+      <p:bgPr>
+        <a:solidFill>
+          <a:schemeClr val="bg1"/>
+        </a:solidFill>
+        <a:effectLst/>
+      </p:bgPr>
+    </p:bg>
     <p:spTree>
       <p:nvGrpSpPr>
         <p:cNvPr id="1" name=""/>
@@ -6073,12 +9185,79 @@
           <a:chExt cx="0" cy="0"/>
         </a:xfrm>
       </p:grpSpPr>
+      <p:sp useBgFill="1">
+        <p:nvSpPr>
+          <p:cNvPr id="10" name="Rectangle 9">
+            <a:extLst>
+              <a:ext uri="{FF2B5EF4-FFF2-40B4-BE49-F238E27FC236}">
+                <a16:creationId xmlns:a16="http://schemas.microsoft.com/office/drawing/2014/main" id="{EEBFA4C8-C301-60A7-C96E-E85360F5DFB4}"/>
+              </a:ext>
+              <a:ext uri="{C183D7F6-B498-43B3-948B-1728B52AA6E4}">
+                <adec:decorative xmlns:adec="http://schemas.microsoft.com/office/drawing/2017/decorative" val="1"/>
+              </a:ext>
+            </a:extLst>
+          </p:cNvPr>
+          <p:cNvSpPr>
+            <a:spLocks noGrp="1" noRot="1" noChangeAspect="1" noMove="1" noResize="1" noEditPoints="1" noAdjustHandles="1" noChangeArrowheads="1" noChangeShapeType="1" noTextEdit="1"/>
+          </p:cNvSpPr>
+          <p:nvPr>
+            <p:extLst>
+              <p:ext uri="{386F3935-93C4-4BCD-93E2-E3B085C9AB24}">
+                <p16:designElem xmlns:p16="http://schemas.microsoft.com/office/powerpoint/2015/main" val="1"/>
+              </p:ext>
+            </p:extLst>
+          </p:nvPr>
+        </p:nvSpPr>
+        <p:spPr>
+          <a:xfrm>
+            <a:off x="0" y="0"/>
+            <a:ext cx="12191999" cy="1729117"/>
+          </a:xfrm>
+          <a:prstGeom prst="rect">
+            <a:avLst/>
+          </a:prstGeom>
+          <a:ln>
+            <a:noFill/>
+          </a:ln>
+          <a:effectLst>
+            <a:outerShdw blurRad="368300" dist="101600" dir="5460000" sx="90000" sy="90000" algn="t" rotWithShape="0">
+              <a:srgbClr val="000000">
+                <a:alpha val="20000"/>
+              </a:srgbClr>
+            </a:outerShdw>
+          </a:effectLst>
+        </p:spPr>
+        <p:style>
+          <a:lnRef idx="2">
+            <a:schemeClr val="accent1">
+              <a:shade val="50000"/>
+            </a:schemeClr>
+          </a:lnRef>
+          <a:fillRef idx="1">
+            <a:schemeClr val="accent1"/>
+          </a:fillRef>
+          <a:effectRef idx="0">
+            <a:schemeClr val="accent1"/>
+          </a:effectRef>
+          <a:fontRef idx="minor">
+            <a:schemeClr val="lt1"/>
+          </a:fontRef>
+        </p:style>
+        <p:txBody>
+          <a:bodyPr rtlCol="0" anchor="ctr"/>
+          <a:lstStyle/>
+          <a:p>
+            <a:pPr algn="ctr"/>
+            <a:endParaRPr lang="en-US" dirty="0"/>
+          </a:p>
+        </p:txBody>
+      </p:sp>
       <p:sp>
         <p:nvSpPr>
           <p:cNvPr id="2" name="Título 1">
             <a:extLst>
               <a:ext uri="{FF2B5EF4-FFF2-40B4-BE49-F238E27FC236}">
-                <a16:creationId xmlns:a16="http://schemas.microsoft.com/office/drawing/2014/main" id="{06EE0CD9-859B-FFDC-7F6F-65A1864810C7}"/>
+                <a16:creationId xmlns:a16="http://schemas.microsoft.com/office/drawing/2014/main" id="{2E9F1C5F-BD9A-6944-1470-43BD4692C181}"/>
               </a:ext>
             </a:extLst>
           </p:cNvPr>
@@ -6089,16 +9268,22 @@
             <p:ph type="title"/>
           </p:nvPr>
         </p:nvSpPr>
-        <p:spPr/>
-        <p:txBody>
-          <a:bodyPr/>
-          <a:lstStyle/>
-          <a:p>
-            <a:r>
-              <a:rPr lang="pt-PT" dirty="0" err="1"/>
-              <a:t>Conclusions</a:t>
-            </a:r>
-            <a:endParaRPr lang="pt-PT" dirty="0"/>
+        <p:spPr>
+          <a:xfrm>
+            <a:off x="761801" y="283714"/>
+            <a:ext cx="9906799" cy="1161688"/>
+          </a:xfrm>
+        </p:spPr>
+        <p:txBody>
+          <a:bodyPr anchor="ctr">
+            <a:normAutofit/>
+          </a:bodyPr>
+          <a:lstStyle/>
+          <a:p>
+            <a:r>
+              <a:rPr lang="pt-PT" sz="4000" dirty="0"/>
+              <a:t>References</a:t>
+            </a:r>
           </a:p>
         </p:txBody>
       </p:sp>
@@ -6107,7 +9292,7 @@
           <p:cNvPr id="3" name="Marcador de Posição de Conteúdo 2">
             <a:extLst>
               <a:ext uri="{FF2B5EF4-FFF2-40B4-BE49-F238E27FC236}">
-                <a16:creationId xmlns:a16="http://schemas.microsoft.com/office/drawing/2014/main" id="{63326C6E-5F1E-0E8D-F642-983D87164C61}"/>
+                <a16:creationId xmlns:a16="http://schemas.microsoft.com/office/drawing/2014/main" id="{192A18D7-40DF-B571-AC86-94A7727F42DB}"/>
               </a:ext>
             </a:extLst>
           </p:cNvPr>
@@ -6118,12 +9303,133 @@
             <p:ph idx="1"/>
           </p:nvPr>
         </p:nvSpPr>
-        <p:spPr/>
-        <p:txBody>
-          <a:bodyPr/>
-          <a:lstStyle/>
-          <a:p>
-            <a:endParaRPr lang="pt-PT"/>
+        <p:spPr>
+          <a:xfrm>
+            <a:off x="2231923" y="2217761"/>
+            <a:ext cx="7724236" cy="4034116"/>
+          </a:xfrm>
+        </p:spPr>
+        <p:txBody>
+          <a:bodyPr anchor="ctr">
+            <a:normAutofit fontScale="77500" lnSpcReduction="20000"/>
+          </a:bodyPr>
+          <a:lstStyle/>
+          <a:p>
+            <a:pPr>
+              <a:lnSpc>
+                <a:spcPct val="110000"/>
+              </a:lnSpc>
+              <a:buFont typeface="Symbol" panose="05050102010706020507" pitchFamily="18" charset="2"/>
+              <a:buChar char="-"/>
+            </a:pPr>
+            <a:r>
+              <a:rPr lang="pt-PT" sz="2400" b="0" i="0" u="none" strike="noStrike" baseline="0" dirty="0">
+                <a:solidFill>
+                  <a:srgbClr val="000000"/>
+                </a:solidFill>
+                <a:latin typeface="Calibri" panose="020F0502020204030204" pitchFamily="34" charset="0"/>
+              </a:rPr>
+              <a:t>Sketchfab. (n.d.-b). Sketchfab. https://sketchfab.com/search?features=downloadable&amp;type=models</a:t>
+            </a:r>
+          </a:p>
+          <a:p>
+            <a:pPr>
+              <a:lnSpc>
+                <a:spcPct val="110000"/>
+              </a:lnSpc>
+              <a:buFont typeface="Symbol" panose="05050102010706020507" pitchFamily="18" charset="2"/>
+              <a:buChar char="-"/>
+            </a:pPr>
+            <a:endParaRPr lang="pt-PT" sz="2400" b="0" i="0" u="none" strike="noStrike" baseline="0" dirty="0">
+              <a:solidFill>
+                <a:srgbClr val="000000"/>
+              </a:solidFill>
+              <a:latin typeface="Calibri" panose="020F0502020204030204" pitchFamily="34" charset="0"/>
+            </a:endParaRPr>
+          </a:p>
+          <a:p>
+            <a:pPr>
+              <a:lnSpc>
+                <a:spcPct val="110000"/>
+              </a:lnSpc>
+              <a:buFont typeface="Symbol" panose="05050102010706020507" pitchFamily="18" charset="2"/>
+              <a:buChar char="-"/>
+            </a:pPr>
+            <a:r>
+              <a:rPr lang="en-US" sz="2400" b="0" i="0" u="none" strike="noStrike" baseline="0" dirty="0">
+                <a:solidFill>
+                  <a:srgbClr val="000000"/>
+                </a:solidFill>
+                <a:latin typeface="Calibri" panose="020F0502020204030204" pitchFamily="34" charset="0"/>
+              </a:rPr>
+              <a:t>“Make a Grass in 45 Seconds-Blender 2024.” Www.youtube.com, www.youtube.com/watch?v=xX72ZuCOVVE&amp;ab_channel=BlenderTips. Accessed 10 Apr. 2024.</a:t>
+            </a:r>
+          </a:p>
+          <a:p>
+            <a:pPr>
+              <a:lnSpc>
+                <a:spcPct val="110000"/>
+              </a:lnSpc>
+              <a:buFont typeface="Symbol" panose="05050102010706020507" pitchFamily="18" charset="2"/>
+              <a:buChar char="-"/>
+            </a:pPr>
+            <a:endParaRPr lang="en-US" sz="2400" b="0" i="0" u="none" strike="noStrike" baseline="0" dirty="0">
+              <a:solidFill>
+                <a:srgbClr val="000000"/>
+              </a:solidFill>
+              <a:latin typeface="Calibri" panose="020F0502020204030204" pitchFamily="34" charset="0"/>
+            </a:endParaRPr>
+          </a:p>
+          <a:p>
+            <a:pPr>
+              <a:lnSpc>
+                <a:spcPct val="110000"/>
+              </a:lnSpc>
+              <a:buFont typeface="Symbol" panose="05050102010706020507" pitchFamily="18" charset="2"/>
+              <a:buChar char="-"/>
+            </a:pPr>
+            <a:r>
+              <a:rPr lang="en-US" sz="2400" b="0" i="0" u="none" strike="noStrike" baseline="0" dirty="0">
+                <a:solidFill>
+                  <a:srgbClr val="000000"/>
+                </a:solidFill>
+                <a:latin typeface="Calibri" panose="020F0502020204030204" pitchFamily="34" charset="0"/>
+              </a:rPr>
+              <a:t>Fog – three.js docs. https://threejs.org/docs/#api/en/scenes/Fog</a:t>
+            </a:r>
+          </a:p>
+          <a:p>
+            <a:pPr>
+              <a:lnSpc>
+                <a:spcPct val="110000"/>
+              </a:lnSpc>
+              <a:buFont typeface="Symbol" panose="05050102010706020507" pitchFamily="18" charset="2"/>
+              <a:buChar char="-"/>
+            </a:pPr>
+            <a:endParaRPr lang="en-US" sz="2400" b="0" i="0" u="none" strike="noStrike" baseline="0" dirty="0">
+              <a:solidFill>
+                <a:srgbClr val="000000"/>
+              </a:solidFill>
+              <a:latin typeface="Calibri" panose="020F0502020204030204" pitchFamily="34" charset="0"/>
+            </a:endParaRPr>
+          </a:p>
+          <a:p>
+            <a:pPr>
+              <a:lnSpc>
+                <a:spcPct val="110000"/>
+              </a:lnSpc>
+              <a:buFont typeface="Symbol" panose="05050102010706020507" pitchFamily="18" charset="2"/>
+              <a:buChar char="-"/>
+            </a:pPr>
+            <a:r>
+              <a:rPr lang="en-US" sz="2400" b="0" i="0" u="none" strike="noStrike" baseline="0" dirty="0">
+                <a:solidFill>
+                  <a:srgbClr val="000000"/>
+                </a:solidFill>
+                <a:latin typeface="Calibri" panose="020F0502020204030204" pitchFamily="34" charset="0"/>
+              </a:rPr>
+              <a:t>Loading 3D models – three.js docs. https://threejs.org/docs/#manual/en/introduction/Loading-3D-models</a:t>
+            </a:r>
           </a:p>
         </p:txBody>
       </p:sp>
@@ -6132,7 +9438,7 @@
           <p:cNvPr id="4" name="Marcador de Posição da Data 3">
             <a:extLst>
               <a:ext uri="{FF2B5EF4-FFF2-40B4-BE49-F238E27FC236}">
-                <a16:creationId xmlns:a16="http://schemas.microsoft.com/office/drawing/2014/main" id="{F1EA4CEC-2557-52C3-FD71-204BDA1E6BAF}"/>
+                <a16:creationId xmlns:a16="http://schemas.microsoft.com/office/drawing/2014/main" id="{8EEE3120-0213-4797-7B33-01179BA1C6C9}"/>
               </a:ext>
             </a:extLst>
           </p:cNvPr>
@@ -6143,14 +9449,30 @@
             <p:ph type="dt" sz="half" idx="10"/>
           </p:nvPr>
         </p:nvSpPr>
-        <p:spPr/>
-        <p:txBody>
-          <a:bodyPr/>
-          <a:lstStyle/>
-          <a:p>
-            <a:r>
-              <a:rPr lang="pt-PT"/>
-              <a:t>ICG - 2021/2022 - Project 1</a:t>
+        <p:spPr>
+          <a:xfrm>
+            <a:off x="243025" y="6356349"/>
+            <a:ext cx="2743200" cy="365125"/>
+          </a:xfrm>
+        </p:spPr>
+        <p:txBody>
+          <a:bodyPr>
+            <a:normAutofit/>
+          </a:bodyPr>
+          <a:lstStyle/>
+          <a:p>
+            <a:pPr>
+              <a:spcAft>
+                <a:spcPts val="600"/>
+              </a:spcAft>
+            </a:pPr>
+            <a:r>
+              <a:rPr lang="pt-PT" dirty="0">
+                <a:solidFill>
+                  <a:schemeClr val="tx1"/>
+                </a:solidFill>
+              </a:rPr>
+              <a:t>ICG - 2023/2024</a:t>
             </a:r>
           </a:p>
         </p:txBody>
@@ -6160,7 +9482,7 @@
           <p:cNvPr id="5" name="Marcador de Posição do Número do Diapositivo 4">
             <a:extLst>
               <a:ext uri="{FF2B5EF4-FFF2-40B4-BE49-F238E27FC236}">
-                <a16:creationId xmlns:a16="http://schemas.microsoft.com/office/drawing/2014/main" id="{09584837-1C74-DD42-E69B-D85B02C81CBA}"/>
+                <a16:creationId xmlns:a16="http://schemas.microsoft.com/office/drawing/2014/main" id="{BE4B7072-FBFB-97F0-E61C-8E5F249DF43A}"/>
               </a:ext>
             </a:extLst>
           </p:cNvPr>
@@ -6171,23 +9493,48 @@
             <p:ph type="sldNum" sz="quarter" idx="12"/>
           </p:nvPr>
         </p:nvSpPr>
-        <p:spPr/>
-        <p:txBody>
-          <a:bodyPr/>
-          <a:lstStyle/>
-          <a:p>
+        <p:spPr>
+          <a:xfrm>
+            <a:off x="8732520" y="6356350"/>
+            <a:ext cx="3216455" cy="365125"/>
+          </a:xfrm>
+        </p:spPr>
+        <p:txBody>
+          <a:bodyPr>
+            <a:normAutofit/>
+          </a:bodyPr>
+          <a:lstStyle/>
+          <a:p>
+            <a:pPr>
+              <a:spcAft>
+                <a:spcPts val="600"/>
+              </a:spcAft>
+            </a:pPr>
             <a:fld id="{A275E76C-0B34-4617-92BE-2419D92E4442}" type="slidenum">
-              <a:rPr lang="pt-PT" smtClean="0"/>
+              <a:rPr lang="pt-PT">
+                <a:solidFill>
+                  <a:schemeClr val="tx1"/>
+                </a:solidFill>
+              </a:rPr>
+              <a:pPr>
+                <a:spcAft>
+                  <a:spcPts val="600"/>
+                </a:spcAft>
+              </a:pPr>
               <a:t>9</a:t>
             </a:fld>
-            <a:endParaRPr lang="pt-PT"/>
+            <a:endParaRPr lang="pt-PT" dirty="0">
+              <a:solidFill>
+                <a:schemeClr val="tx1"/>
+              </a:solidFill>
+            </a:endParaRPr>
           </a:p>
         </p:txBody>
       </p:sp>
     </p:spTree>
     <p:extLst>
       <p:ext uri="{BB962C8B-B14F-4D97-AF65-F5344CB8AC3E}">
-        <p14:creationId xmlns:p14="http://schemas.microsoft.com/office/powerpoint/2010/main" val="3173771447"/>
+        <p14:creationId xmlns:p14="http://schemas.microsoft.com/office/powerpoint/2010/main" val="1925614804"/>
       </p:ext>
     </p:extLst>
   </p:cSld>

--- a/docs/icg_final.pptx
+++ b/docs/icg_final.pptx
@@ -5,7 +5,7 @@
     <p:sldMasterId id="2147483648" r:id="rId1"/>
   </p:sldMasterIdLst>
   <p:notesMasterIdLst>
-    <p:notesMasterId r:id="rId11"/>
+    <p:notesMasterId r:id="rId12"/>
   </p:notesMasterIdLst>
   <p:sldIdLst>
     <p:sldId id="256" r:id="rId2"/>
@@ -13,10 +13,11 @@
     <p:sldId id="259" r:id="rId4"/>
     <p:sldId id="260" r:id="rId5"/>
     <p:sldId id="261" r:id="rId6"/>
-    <p:sldId id="262" r:id="rId7"/>
-    <p:sldId id="263" r:id="rId8"/>
-    <p:sldId id="264" r:id="rId9"/>
-    <p:sldId id="265" r:id="rId10"/>
+    <p:sldId id="266" r:id="rId7"/>
+    <p:sldId id="262" r:id="rId8"/>
+    <p:sldId id="263" r:id="rId9"/>
+    <p:sldId id="264" r:id="rId10"/>
+    <p:sldId id="265" r:id="rId11"/>
   </p:sldIdLst>
   <p:sldSz cx="12192000" cy="6858000"/>
   <p:notesSz cx="6858000" cy="9144000"/>
@@ -126,7 +127,7 @@
 <file path=ppt/revisionInfo.xml><?xml version="1.0" encoding="utf-8"?>
 <p1510:revInfo xmlns:a="http://schemas.openxmlformats.org/drawingml/2006/main" xmlns:r="http://schemas.openxmlformats.org/officeDocument/2006/relationships" xmlns:p1510="http://schemas.microsoft.com/office/powerpoint/2015/10/main">
   <p1510:revLst>
-    <p1510:client id="{5F5A64CD-14DA-4429-AD0D-339DD7191AF6}" v="53" dt="2024-06-02T22:13:07.837"/>
+    <p1510:client id="{5F5A64CD-14DA-4429-AD0D-339DD7191AF6}" v="56" dt="2024-06-03T00:06:34.567"/>
   </p1510:revLst>
 </p1510:revInfo>
 </file>
@@ -136,7 +137,7 @@
   <pc:docChgLst>
     <pc:chgData name="João Gaspar" userId="7dec15aa-df9c-4e56-83fb-de5e1da84347" providerId="ADAL" clId="{5F5A64CD-14DA-4429-AD0D-339DD7191AF6}"/>
     <pc:docChg chg="undo custSel addSld delSld modSld">
-      <pc:chgData name="João Gaspar" userId="7dec15aa-df9c-4e56-83fb-de5e1da84347" providerId="ADAL" clId="{5F5A64CD-14DA-4429-AD0D-339DD7191AF6}" dt="2024-06-02T22:14:27.270" v="716" actId="27636"/>
+      <pc:chgData name="João Gaspar" userId="7dec15aa-df9c-4e56-83fb-de5e1da84347" providerId="ADAL" clId="{5F5A64CD-14DA-4429-AD0D-339DD7191AF6}" dt="2024-06-03T00:06:20.294" v="740" actId="20577"/>
       <pc:docMkLst>
         <pc:docMk/>
       </pc:docMkLst>
@@ -655,13 +656,13 @@
         </pc:picChg>
       </pc:sldChg>
       <pc:sldChg chg="addSp delSp modSp mod setBg">
-        <pc:chgData name="João Gaspar" userId="7dec15aa-df9c-4e56-83fb-de5e1da84347" providerId="ADAL" clId="{5F5A64CD-14DA-4429-AD0D-339DD7191AF6}" dt="2024-06-02T22:14:02.941" v="709" actId="2710"/>
+        <pc:chgData name="João Gaspar" userId="7dec15aa-df9c-4e56-83fb-de5e1da84347" providerId="ADAL" clId="{5F5A64CD-14DA-4429-AD0D-339DD7191AF6}" dt="2024-06-03T00:04:16.774" v="729" actId="26606"/>
         <pc:sldMkLst>
           <pc:docMk/>
           <pc:sldMk cId="567565778" sldId="262"/>
         </pc:sldMkLst>
         <pc:spChg chg="mod">
-          <ac:chgData name="João Gaspar" userId="7dec15aa-df9c-4e56-83fb-de5e1da84347" providerId="ADAL" clId="{5F5A64CD-14DA-4429-AD0D-339DD7191AF6}" dt="2024-06-02T22:04:52.283" v="684" actId="26606"/>
+          <ac:chgData name="João Gaspar" userId="7dec15aa-df9c-4e56-83fb-de5e1da84347" providerId="ADAL" clId="{5F5A64CD-14DA-4429-AD0D-339DD7191AF6}" dt="2024-06-03T00:04:16.774" v="729" actId="26606"/>
           <ac:spMkLst>
             <pc:docMk/>
             <pc:sldMk cId="567565778" sldId="262"/>
@@ -669,7 +670,7 @@
           </ac:spMkLst>
         </pc:spChg>
         <pc:spChg chg="mod">
-          <ac:chgData name="João Gaspar" userId="7dec15aa-df9c-4e56-83fb-de5e1da84347" providerId="ADAL" clId="{5F5A64CD-14DA-4429-AD0D-339DD7191AF6}" dt="2024-06-02T22:14:02.941" v="709" actId="2710"/>
+          <ac:chgData name="João Gaspar" userId="7dec15aa-df9c-4e56-83fb-de5e1da84347" providerId="ADAL" clId="{5F5A64CD-14DA-4429-AD0D-339DD7191AF6}" dt="2024-06-03T00:04:16.774" v="729" actId="26606"/>
           <ac:spMkLst>
             <pc:docMk/>
             <pc:sldMk cId="567565778" sldId="262"/>
@@ -685,7 +686,7 @@
           </ac:spMkLst>
         </pc:spChg>
         <pc:spChg chg="mod ord">
-          <ac:chgData name="João Gaspar" userId="7dec15aa-df9c-4e56-83fb-de5e1da84347" providerId="ADAL" clId="{5F5A64CD-14DA-4429-AD0D-339DD7191AF6}" dt="2024-06-02T22:04:52.283" v="684" actId="26606"/>
+          <ac:chgData name="João Gaspar" userId="7dec15aa-df9c-4e56-83fb-de5e1da84347" providerId="ADAL" clId="{5F5A64CD-14DA-4429-AD0D-339DD7191AF6}" dt="2024-06-03T00:04:16.774" v="729" actId="26606"/>
           <ac:spMkLst>
             <pc:docMk/>
             <pc:sldMk cId="567565778" sldId="262"/>
@@ -693,7 +694,7 @@
           </ac:spMkLst>
         </pc:spChg>
         <pc:spChg chg="add mod">
-          <ac:chgData name="João Gaspar" userId="7dec15aa-df9c-4e56-83fb-de5e1da84347" providerId="ADAL" clId="{5F5A64CD-14DA-4429-AD0D-339DD7191AF6}" dt="2024-06-02T22:04:52.283" v="684" actId="26606"/>
+          <ac:chgData name="João Gaspar" userId="7dec15aa-df9c-4e56-83fb-de5e1da84347" providerId="ADAL" clId="{5F5A64CD-14DA-4429-AD0D-339DD7191AF6}" dt="2024-06-03T00:04:16.774" v="729" actId="26606"/>
           <ac:spMkLst>
             <pc:docMk/>
             <pc:sldMk cId="567565778" sldId="262"/>
@@ -788,8 +789,8 @@
             <ac:spMk id="32" creationId="{B65C0385-5E30-4D2E-AF9F-4639659D34E9}"/>
           </ac:spMkLst>
         </pc:spChg>
-        <pc:spChg chg="add">
-          <ac:chgData name="João Gaspar" userId="7dec15aa-df9c-4e56-83fb-de5e1da84347" providerId="ADAL" clId="{5F5A64CD-14DA-4429-AD0D-339DD7191AF6}" dt="2024-06-02T22:04:52.283" v="684" actId="26606"/>
+        <pc:spChg chg="add del">
+          <ac:chgData name="João Gaspar" userId="7dec15aa-df9c-4e56-83fb-de5e1da84347" providerId="ADAL" clId="{5F5A64CD-14DA-4429-AD0D-339DD7191AF6}" dt="2024-06-03T00:04:16.774" v="729" actId="26606"/>
           <ac:spMkLst>
             <pc:docMk/>
             <pc:sldMk cId="567565778" sldId="262"/>
@@ -804,12 +805,36 @@
             <ac:spMk id="34" creationId="{E335820B-3A29-42C5-AA8D-10ECA43CD985}"/>
           </ac:spMkLst>
         </pc:spChg>
-        <pc:spChg chg="add">
-          <ac:chgData name="João Gaspar" userId="7dec15aa-df9c-4e56-83fb-de5e1da84347" providerId="ADAL" clId="{5F5A64CD-14DA-4429-AD0D-339DD7191AF6}" dt="2024-06-02T22:04:52.283" v="684" actId="26606"/>
+        <pc:spChg chg="add del">
+          <ac:chgData name="João Gaspar" userId="7dec15aa-df9c-4e56-83fb-de5e1da84347" providerId="ADAL" clId="{5F5A64CD-14DA-4429-AD0D-339DD7191AF6}" dt="2024-06-03T00:04:16.774" v="729" actId="26606"/>
           <ac:spMkLst>
             <pc:docMk/>
             <pc:sldMk cId="567565778" sldId="262"/>
             <ac:spMk id="38" creationId="{603A6265-E10C-4B85-9C20-E75FCAF9CC63}"/>
+          </ac:spMkLst>
+        </pc:spChg>
+        <pc:spChg chg="add">
+          <ac:chgData name="João Gaspar" userId="7dec15aa-df9c-4e56-83fb-de5e1da84347" providerId="ADAL" clId="{5F5A64CD-14DA-4429-AD0D-339DD7191AF6}" dt="2024-06-03T00:04:16.774" v="729" actId="26606"/>
+          <ac:spMkLst>
+            <pc:docMk/>
+            <pc:sldMk cId="567565778" sldId="262"/>
+            <ac:spMk id="43" creationId="{9F7D5CDA-D291-4307-BF55-1381FED29634}"/>
+          </ac:spMkLst>
+        </pc:spChg>
+        <pc:spChg chg="add">
+          <ac:chgData name="João Gaspar" userId="7dec15aa-df9c-4e56-83fb-de5e1da84347" providerId="ADAL" clId="{5F5A64CD-14DA-4429-AD0D-339DD7191AF6}" dt="2024-06-03T00:04:16.774" v="729" actId="26606"/>
+          <ac:spMkLst>
+            <pc:docMk/>
+            <pc:sldMk cId="567565778" sldId="262"/>
+            <ac:spMk id="45" creationId="{59B296B9-C5A5-4E4F-9B60-C907B5F1466C}"/>
+          </ac:spMkLst>
+        </pc:spChg>
+        <pc:spChg chg="add">
+          <ac:chgData name="João Gaspar" userId="7dec15aa-df9c-4e56-83fb-de5e1da84347" providerId="ADAL" clId="{5F5A64CD-14DA-4429-AD0D-339DD7191AF6}" dt="2024-06-03T00:04:16.774" v="729" actId="26606"/>
+          <ac:spMkLst>
+            <pc:docMk/>
+            <pc:sldMk cId="567565778" sldId="262"/>
+            <ac:spMk id="47" creationId="{D0300FD3-5AF1-6305-15FA-9078072672E2}"/>
           </ac:spMkLst>
         </pc:spChg>
         <pc:grpChg chg="add del">
@@ -829,7 +854,7 @@
           </ac:picMkLst>
         </pc:picChg>
         <pc:picChg chg="add mod ord">
-          <ac:chgData name="João Gaspar" userId="7dec15aa-df9c-4e56-83fb-de5e1da84347" providerId="ADAL" clId="{5F5A64CD-14DA-4429-AD0D-339DD7191AF6}" dt="2024-06-02T22:04:52.283" v="684" actId="26606"/>
+          <ac:chgData name="João Gaspar" userId="7dec15aa-df9c-4e56-83fb-de5e1da84347" providerId="ADAL" clId="{5F5A64CD-14DA-4429-AD0D-339DD7191AF6}" dt="2024-06-03T00:04:16.774" v="729" actId="26606"/>
           <ac:picMkLst>
             <pc:docMk/>
             <pc:sldMk cId="567565778" sldId="262"/>
@@ -838,13 +863,13 @@
         </pc:picChg>
       </pc:sldChg>
       <pc:sldChg chg="addSp delSp modSp mod setBg">
-        <pc:chgData name="João Gaspar" userId="7dec15aa-df9c-4e56-83fb-de5e1da84347" providerId="ADAL" clId="{5F5A64CD-14DA-4429-AD0D-339DD7191AF6}" dt="2024-06-02T22:13:59.117" v="708" actId="2710"/>
+        <pc:chgData name="João Gaspar" userId="7dec15aa-df9c-4e56-83fb-de5e1da84347" providerId="ADAL" clId="{5F5A64CD-14DA-4429-AD0D-339DD7191AF6}" dt="2024-06-03T00:04:41.883" v="733" actId="26606"/>
         <pc:sldMkLst>
           <pc:docMk/>
           <pc:sldMk cId="2832385390" sldId="263"/>
         </pc:sldMkLst>
-        <pc:spChg chg="mod">
-          <ac:chgData name="João Gaspar" userId="7dec15aa-df9c-4e56-83fb-de5e1da84347" providerId="ADAL" clId="{5F5A64CD-14DA-4429-AD0D-339DD7191AF6}" dt="2024-06-02T22:04:44.303" v="683" actId="26606"/>
+        <pc:spChg chg="mod ord">
+          <ac:chgData name="João Gaspar" userId="7dec15aa-df9c-4e56-83fb-de5e1da84347" providerId="ADAL" clId="{5F5A64CD-14DA-4429-AD0D-339DD7191AF6}" dt="2024-06-03T00:04:41.883" v="733" actId="26606"/>
           <ac:spMkLst>
             <pc:docMk/>
             <pc:sldMk cId="2832385390" sldId="263"/>
@@ -852,7 +877,7 @@
           </ac:spMkLst>
         </pc:spChg>
         <pc:spChg chg="mod">
-          <ac:chgData name="João Gaspar" userId="7dec15aa-df9c-4e56-83fb-de5e1da84347" providerId="ADAL" clId="{5F5A64CD-14DA-4429-AD0D-339DD7191AF6}" dt="2024-06-02T22:13:59.117" v="708" actId="2710"/>
+          <ac:chgData name="João Gaspar" userId="7dec15aa-df9c-4e56-83fb-de5e1da84347" providerId="ADAL" clId="{5F5A64CD-14DA-4429-AD0D-339DD7191AF6}" dt="2024-06-03T00:04:41.883" v="733" actId="26606"/>
           <ac:spMkLst>
             <pc:docMk/>
             <pc:sldMk cId="2832385390" sldId="263"/>
@@ -868,7 +893,7 @@
           </ac:spMkLst>
         </pc:spChg>
         <pc:spChg chg="mod">
-          <ac:chgData name="João Gaspar" userId="7dec15aa-df9c-4e56-83fb-de5e1da84347" providerId="ADAL" clId="{5F5A64CD-14DA-4429-AD0D-339DD7191AF6}" dt="2024-06-02T22:04:44.303" v="683" actId="26606"/>
+          <ac:chgData name="João Gaspar" userId="7dec15aa-df9c-4e56-83fb-de5e1da84347" providerId="ADAL" clId="{5F5A64CD-14DA-4429-AD0D-339DD7191AF6}" dt="2024-06-03T00:04:41.883" v="733" actId="26606"/>
           <ac:spMkLst>
             <pc:docMk/>
             <pc:sldMk cId="2832385390" sldId="263"/>
@@ -876,7 +901,7 @@
           </ac:spMkLst>
         </pc:spChg>
         <pc:spChg chg="add mod ord">
-          <ac:chgData name="João Gaspar" userId="7dec15aa-df9c-4e56-83fb-de5e1da84347" providerId="ADAL" clId="{5F5A64CD-14DA-4429-AD0D-339DD7191AF6}" dt="2024-06-02T22:04:44.303" v="683" actId="26606"/>
+          <ac:chgData name="João Gaspar" userId="7dec15aa-df9c-4e56-83fb-de5e1da84347" providerId="ADAL" clId="{5F5A64CD-14DA-4429-AD0D-339DD7191AF6}" dt="2024-06-03T00:04:37.172" v="732" actId="26606"/>
           <ac:spMkLst>
             <pc:docMk/>
             <pc:sldMk cId="2832385390" sldId="263"/>
@@ -891,24 +916,80 @@
             <ac:spMk id="11" creationId="{9F7D5CDA-D291-4307-BF55-1381FED29634}"/>
           </ac:spMkLst>
         </pc:spChg>
-        <pc:spChg chg="add">
-          <ac:chgData name="João Gaspar" userId="7dec15aa-df9c-4e56-83fb-de5e1da84347" providerId="ADAL" clId="{5F5A64CD-14DA-4429-AD0D-339DD7191AF6}" dt="2024-06-02T22:04:44.303" v="683" actId="26606"/>
+        <pc:spChg chg="add del">
+          <ac:chgData name="João Gaspar" userId="7dec15aa-df9c-4e56-83fb-de5e1da84347" providerId="ADAL" clId="{5F5A64CD-14DA-4429-AD0D-339DD7191AF6}" dt="2024-06-03T00:04:24.244" v="730" actId="26606"/>
           <ac:spMkLst>
             <pc:docMk/>
             <pc:sldMk cId="2832385390" sldId="263"/>
             <ac:spMk id="16" creationId="{C0763A76-9F1C-4FC5-82B7-DD475DA461B2}"/>
           </ac:spMkLst>
         </pc:spChg>
-        <pc:spChg chg="add">
-          <ac:chgData name="João Gaspar" userId="7dec15aa-df9c-4e56-83fb-de5e1da84347" providerId="ADAL" clId="{5F5A64CD-14DA-4429-AD0D-339DD7191AF6}" dt="2024-06-02T22:04:44.303" v="683" actId="26606"/>
+        <pc:spChg chg="add del">
+          <ac:chgData name="João Gaspar" userId="7dec15aa-df9c-4e56-83fb-de5e1da84347" providerId="ADAL" clId="{5F5A64CD-14DA-4429-AD0D-339DD7191AF6}" dt="2024-06-03T00:04:24.244" v="730" actId="26606"/>
           <ac:spMkLst>
             <pc:docMk/>
             <pc:sldMk cId="2832385390" sldId="263"/>
             <ac:spMk id="18" creationId="{E81BF4F6-F2CF-4984-9D14-D6966D92F99F}"/>
           </ac:spMkLst>
         </pc:spChg>
-        <pc:picChg chg="add mod">
-          <ac:chgData name="João Gaspar" userId="7dec15aa-df9c-4e56-83fb-de5e1da84347" providerId="ADAL" clId="{5F5A64CD-14DA-4429-AD0D-339DD7191AF6}" dt="2024-06-02T22:04:44.303" v="683" actId="26606"/>
+        <pc:spChg chg="add del">
+          <ac:chgData name="João Gaspar" userId="7dec15aa-df9c-4e56-83fb-de5e1da84347" providerId="ADAL" clId="{5F5A64CD-14DA-4429-AD0D-339DD7191AF6}" dt="2024-06-03T00:04:37.172" v="732" actId="26606"/>
+          <ac:spMkLst>
+            <pc:docMk/>
+            <pc:sldMk cId="2832385390" sldId="263"/>
+            <ac:spMk id="23" creationId="{9F7D5CDA-D291-4307-BF55-1381FED29634}"/>
+          </ac:spMkLst>
+        </pc:spChg>
+        <pc:spChg chg="add del">
+          <ac:chgData name="João Gaspar" userId="7dec15aa-df9c-4e56-83fb-de5e1da84347" providerId="ADAL" clId="{5F5A64CD-14DA-4429-AD0D-339DD7191AF6}" dt="2024-06-03T00:04:37.172" v="732" actId="26606"/>
+          <ac:spMkLst>
+            <pc:docMk/>
+            <pc:sldMk cId="2832385390" sldId="263"/>
+            <ac:spMk id="25" creationId="{59B296B9-C5A5-4E4F-9B60-C907B5F1466C}"/>
+          </ac:spMkLst>
+        </pc:spChg>
+        <pc:spChg chg="add del">
+          <ac:chgData name="João Gaspar" userId="7dec15aa-df9c-4e56-83fb-de5e1da84347" providerId="ADAL" clId="{5F5A64CD-14DA-4429-AD0D-339DD7191AF6}" dt="2024-06-03T00:04:37.172" v="732" actId="26606"/>
+          <ac:spMkLst>
+            <pc:docMk/>
+            <pc:sldMk cId="2832385390" sldId="263"/>
+            <ac:spMk id="27" creationId="{D0300FD3-5AF1-6305-15FA-9078072672E2}"/>
+          </ac:spMkLst>
+        </pc:spChg>
+        <pc:spChg chg="add del">
+          <ac:chgData name="João Gaspar" userId="7dec15aa-df9c-4e56-83fb-de5e1da84347" providerId="ADAL" clId="{5F5A64CD-14DA-4429-AD0D-339DD7191AF6}" dt="2024-06-03T00:04:41.883" v="733" actId="26606"/>
+          <ac:spMkLst>
+            <pc:docMk/>
+            <pc:sldMk cId="2832385390" sldId="263"/>
+            <ac:spMk id="32" creationId="{B210AC1D-4063-4C6E-9528-FA9C4C0C18E6}"/>
+          </ac:spMkLst>
+        </pc:spChg>
+        <pc:spChg chg="add del">
+          <ac:chgData name="João Gaspar" userId="7dec15aa-df9c-4e56-83fb-de5e1da84347" providerId="ADAL" clId="{5F5A64CD-14DA-4429-AD0D-339DD7191AF6}" dt="2024-06-03T00:04:41.883" v="733" actId="26606"/>
+          <ac:spMkLst>
+            <pc:docMk/>
+            <pc:sldMk cId="2832385390" sldId="263"/>
+            <ac:spMk id="34" creationId="{02F8C595-E68C-4306-AED8-DC7826A0A506}"/>
+          </ac:spMkLst>
+        </pc:spChg>
+        <pc:spChg chg="add">
+          <ac:chgData name="João Gaspar" userId="7dec15aa-df9c-4e56-83fb-de5e1da84347" providerId="ADAL" clId="{5F5A64CD-14DA-4429-AD0D-339DD7191AF6}" dt="2024-06-03T00:04:41.883" v="733" actId="26606"/>
+          <ac:spMkLst>
+            <pc:docMk/>
+            <pc:sldMk cId="2832385390" sldId="263"/>
+            <ac:spMk id="39" creationId="{3ECBE1F1-D69B-4AFA-ABD5-8E41720EF6DE}"/>
+          </ac:spMkLst>
+        </pc:spChg>
+        <pc:spChg chg="add">
+          <ac:chgData name="João Gaspar" userId="7dec15aa-df9c-4e56-83fb-de5e1da84347" providerId="ADAL" clId="{5F5A64CD-14DA-4429-AD0D-339DD7191AF6}" dt="2024-06-03T00:04:41.883" v="733" actId="26606"/>
+          <ac:spMkLst>
+            <pc:docMk/>
+            <pc:sldMk cId="2832385390" sldId="263"/>
+            <ac:spMk id="41" creationId="{603A6265-E10C-4B85-9C20-E75FCAF9CC63}"/>
+          </ac:spMkLst>
+        </pc:spChg>
+        <pc:picChg chg="add mod ord">
+          <ac:chgData name="João Gaspar" userId="7dec15aa-df9c-4e56-83fb-de5e1da84347" providerId="ADAL" clId="{5F5A64CD-14DA-4429-AD0D-339DD7191AF6}" dt="2024-06-03T00:04:41.883" v="733" actId="26606"/>
           <ac:picMkLst>
             <pc:docMk/>
             <pc:sldMk cId="2832385390" sldId="263"/>
@@ -917,13 +998,13 @@
         </pc:picChg>
       </pc:sldChg>
       <pc:sldChg chg="addSp delSp modSp mod setBg">
-        <pc:chgData name="João Gaspar" userId="7dec15aa-df9c-4e56-83fb-de5e1da84347" providerId="ADAL" clId="{5F5A64CD-14DA-4429-AD0D-339DD7191AF6}" dt="2024-06-02T22:13:49.960" v="707" actId="2710"/>
+        <pc:chgData name="João Gaspar" userId="7dec15aa-df9c-4e56-83fb-de5e1da84347" providerId="ADAL" clId="{5F5A64CD-14DA-4429-AD0D-339DD7191AF6}" dt="2024-06-03T00:04:34.765" v="731" actId="26606"/>
         <pc:sldMkLst>
           <pc:docMk/>
           <pc:sldMk cId="3173771447" sldId="264"/>
         </pc:sldMkLst>
         <pc:spChg chg="mod">
-          <ac:chgData name="João Gaspar" userId="7dec15aa-df9c-4e56-83fb-de5e1da84347" providerId="ADAL" clId="{5F5A64CD-14DA-4429-AD0D-339DD7191AF6}" dt="2024-06-02T20:46:56.222" v="38" actId="26606"/>
+          <ac:chgData name="João Gaspar" userId="7dec15aa-df9c-4e56-83fb-de5e1da84347" providerId="ADAL" clId="{5F5A64CD-14DA-4429-AD0D-339DD7191AF6}" dt="2024-06-03T00:04:34.765" v="731" actId="26606"/>
           <ac:spMkLst>
             <pc:docMk/>
             <pc:sldMk cId="3173771447" sldId="264"/>
@@ -931,7 +1012,7 @@
           </ac:spMkLst>
         </pc:spChg>
         <pc:spChg chg="mod">
-          <ac:chgData name="João Gaspar" userId="7dec15aa-df9c-4e56-83fb-de5e1da84347" providerId="ADAL" clId="{5F5A64CD-14DA-4429-AD0D-339DD7191AF6}" dt="2024-06-02T22:13:49.960" v="707" actId="2710"/>
+          <ac:chgData name="João Gaspar" userId="7dec15aa-df9c-4e56-83fb-de5e1da84347" providerId="ADAL" clId="{5F5A64CD-14DA-4429-AD0D-339DD7191AF6}" dt="2024-06-03T00:04:34.765" v="731" actId="26606"/>
           <ac:spMkLst>
             <pc:docMk/>
             <pc:sldMk cId="3173771447" sldId="264"/>
@@ -946,8 +1027,8 @@
             <ac:spMk id="4" creationId="{F1EA4CEC-2557-52C3-FD71-204BDA1E6BAF}"/>
           </ac:spMkLst>
         </pc:spChg>
-        <pc:spChg chg="mod">
-          <ac:chgData name="João Gaspar" userId="7dec15aa-df9c-4e56-83fb-de5e1da84347" providerId="ADAL" clId="{5F5A64CD-14DA-4429-AD0D-339DD7191AF6}" dt="2024-06-02T20:46:56.222" v="38" actId="26606"/>
+        <pc:spChg chg="mod ord">
+          <ac:chgData name="João Gaspar" userId="7dec15aa-df9c-4e56-83fb-de5e1da84347" providerId="ADAL" clId="{5F5A64CD-14DA-4429-AD0D-339DD7191AF6}" dt="2024-06-03T00:04:34.765" v="731" actId="26606"/>
           <ac:spMkLst>
             <pc:docMk/>
             <pc:sldMk cId="3173771447" sldId="264"/>
@@ -955,31 +1036,55 @@
           </ac:spMkLst>
         </pc:spChg>
         <pc:spChg chg="add mod">
-          <ac:chgData name="João Gaspar" userId="7dec15aa-df9c-4e56-83fb-de5e1da84347" providerId="ADAL" clId="{5F5A64CD-14DA-4429-AD0D-339DD7191AF6}" dt="2024-06-02T21:57:42.187" v="338" actId="207"/>
+          <ac:chgData name="João Gaspar" userId="7dec15aa-df9c-4e56-83fb-de5e1da84347" providerId="ADAL" clId="{5F5A64CD-14DA-4429-AD0D-339DD7191AF6}" dt="2024-06-03T00:04:34.765" v="731" actId="26606"/>
           <ac:spMkLst>
             <pc:docMk/>
             <pc:sldMk cId="3173771447" sldId="264"/>
             <ac:spMk id="6" creationId="{029FED57-33C5-855C-4776-592884EB5D56}"/>
           </ac:spMkLst>
         </pc:spChg>
-        <pc:spChg chg="add">
-          <ac:chgData name="João Gaspar" userId="7dec15aa-df9c-4e56-83fb-de5e1da84347" providerId="ADAL" clId="{5F5A64CD-14DA-4429-AD0D-339DD7191AF6}" dt="2024-06-02T20:46:56.222" v="38" actId="26606"/>
+        <pc:spChg chg="add del">
+          <ac:chgData name="João Gaspar" userId="7dec15aa-df9c-4e56-83fb-de5e1da84347" providerId="ADAL" clId="{5F5A64CD-14DA-4429-AD0D-339DD7191AF6}" dt="2024-06-03T00:04:34.765" v="731" actId="26606"/>
           <ac:spMkLst>
             <pc:docMk/>
             <pc:sldMk cId="3173771447" sldId="264"/>
             <ac:spMk id="11" creationId="{3ECBE1F1-D69B-4AFA-ABD5-8E41720EF6DE}"/>
           </ac:spMkLst>
         </pc:spChg>
-        <pc:spChg chg="add">
-          <ac:chgData name="João Gaspar" userId="7dec15aa-df9c-4e56-83fb-de5e1da84347" providerId="ADAL" clId="{5F5A64CD-14DA-4429-AD0D-339DD7191AF6}" dt="2024-06-02T20:46:56.222" v="38" actId="26606"/>
+        <pc:spChg chg="add del">
+          <ac:chgData name="João Gaspar" userId="7dec15aa-df9c-4e56-83fb-de5e1da84347" providerId="ADAL" clId="{5F5A64CD-14DA-4429-AD0D-339DD7191AF6}" dt="2024-06-03T00:04:34.765" v="731" actId="26606"/>
           <ac:spMkLst>
             <pc:docMk/>
             <pc:sldMk cId="3173771447" sldId="264"/>
             <ac:spMk id="13" creationId="{603A6265-E10C-4B85-9C20-E75FCAF9CC63}"/>
           </ac:spMkLst>
         </pc:spChg>
-        <pc:picChg chg="add">
-          <ac:chgData name="João Gaspar" userId="7dec15aa-df9c-4e56-83fb-de5e1da84347" providerId="ADAL" clId="{5F5A64CD-14DA-4429-AD0D-339DD7191AF6}" dt="2024-06-02T20:46:56.222" v="38" actId="26606"/>
+        <pc:spChg chg="add">
+          <ac:chgData name="João Gaspar" userId="7dec15aa-df9c-4e56-83fb-de5e1da84347" providerId="ADAL" clId="{5F5A64CD-14DA-4429-AD0D-339DD7191AF6}" dt="2024-06-03T00:04:34.765" v="731" actId="26606"/>
+          <ac:spMkLst>
+            <pc:docMk/>
+            <pc:sldMk cId="3173771447" sldId="264"/>
+            <ac:spMk id="18" creationId="{9F7D5CDA-D291-4307-BF55-1381FED29634}"/>
+          </ac:spMkLst>
+        </pc:spChg>
+        <pc:spChg chg="add">
+          <ac:chgData name="João Gaspar" userId="7dec15aa-df9c-4e56-83fb-de5e1da84347" providerId="ADAL" clId="{5F5A64CD-14DA-4429-AD0D-339DD7191AF6}" dt="2024-06-03T00:04:34.765" v="731" actId="26606"/>
+          <ac:spMkLst>
+            <pc:docMk/>
+            <pc:sldMk cId="3173771447" sldId="264"/>
+            <ac:spMk id="20" creationId="{59B296B9-C5A5-4E4F-9B60-C907B5F1466C}"/>
+          </ac:spMkLst>
+        </pc:spChg>
+        <pc:spChg chg="add">
+          <ac:chgData name="João Gaspar" userId="7dec15aa-df9c-4e56-83fb-de5e1da84347" providerId="ADAL" clId="{5F5A64CD-14DA-4429-AD0D-339DD7191AF6}" dt="2024-06-03T00:04:34.765" v="731" actId="26606"/>
+          <ac:spMkLst>
+            <pc:docMk/>
+            <pc:sldMk cId="3173771447" sldId="264"/>
+            <ac:spMk id="22" creationId="{D0300FD3-5AF1-6305-15FA-9078072672E2}"/>
+          </ac:spMkLst>
+        </pc:spChg>
+        <pc:picChg chg="add mod">
+          <ac:chgData name="João Gaspar" userId="7dec15aa-df9c-4e56-83fb-de5e1da84347" providerId="ADAL" clId="{5F5A64CD-14DA-4429-AD0D-339DD7191AF6}" dt="2024-06-03T00:04:34.765" v="731" actId="26606"/>
           <ac:picMkLst>
             <pc:docMk/>
             <pc:sldMk cId="3173771447" sldId="264"/>
@@ -1104,6 +1209,133 @@
             <ac:spMk id="10" creationId="{EEBFA4C8-C301-60A7-C96E-E85360F5DFB4}"/>
           </ac:spMkLst>
         </pc:spChg>
+      </pc:sldChg>
+      <pc:sldChg chg="addSp delSp modSp add mod setBg delDesignElem">
+        <pc:chgData name="João Gaspar" userId="7dec15aa-df9c-4e56-83fb-de5e1da84347" providerId="ADAL" clId="{5F5A64CD-14DA-4429-AD0D-339DD7191AF6}" dt="2024-06-03T00:06:20.294" v="740" actId="20577"/>
+        <pc:sldMkLst>
+          <pc:docMk/>
+          <pc:sldMk cId="3112891430" sldId="266"/>
+        </pc:sldMkLst>
+        <pc:spChg chg="mod">
+          <ac:chgData name="João Gaspar" userId="7dec15aa-df9c-4e56-83fb-de5e1da84347" providerId="ADAL" clId="{5F5A64CD-14DA-4429-AD0D-339DD7191AF6}" dt="2024-06-03T00:04:11.145" v="728" actId="26606"/>
+          <ac:spMkLst>
+            <pc:docMk/>
+            <pc:sldMk cId="3112891430" sldId="266"/>
+            <ac:spMk id="2" creationId="{D4EAC386-2116-E6B4-0B03-45113820C92E}"/>
+          </ac:spMkLst>
+        </pc:spChg>
+        <pc:spChg chg="mod">
+          <ac:chgData name="João Gaspar" userId="7dec15aa-df9c-4e56-83fb-de5e1da84347" providerId="ADAL" clId="{5F5A64CD-14DA-4429-AD0D-339DD7191AF6}" dt="2024-06-03T00:06:20.294" v="740" actId="20577"/>
+          <ac:spMkLst>
+            <pc:docMk/>
+            <pc:sldMk cId="3112891430" sldId="266"/>
+            <ac:spMk id="3" creationId="{C63E7569-D78E-A980-42C5-E03FCBCB4FAE}"/>
+          </ac:spMkLst>
+        </pc:spChg>
+        <pc:spChg chg="add mod">
+          <ac:chgData name="João Gaspar" userId="7dec15aa-df9c-4e56-83fb-de5e1da84347" providerId="ADAL" clId="{5F5A64CD-14DA-4429-AD0D-339DD7191AF6}" dt="2024-06-03T00:04:54.470" v="735"/>
+          <ac:spMkLst>
+            <pc:docMk/>
+            <pc:sldMk cId="3112891430" sldId="266"/>
+            <ac:spMk id="4" creationId="{30981E7F-39BF-F46F-2F37-EC0640A89C9A}"/>
+          </ac:spMkLst>
+        </pc:spChg>
+        <pc:spChg chg="mod ord">
+          <ac:chgData name="João Gaspar" userId="7dec15aa-df9c-4e56-83fb-de5e1da84347" providerId="ADAL" clId="{5F5A64CD-14DA-4429-AD0D-339DD7191AF6}" dt="2024-06-03T00:04:11.145" v="728" actId="26606"/>
+          <ac:spMkLst>
+            <pc:docMk/>
+            <pc:sldMk cId="3112891430" sldId="266"/>
+            <ac:spMk id="5" creationId="{B8B4F806-50C1-2A3B-B7FF-66DE4B6A8F81}"/>
+          </ac:spMkLst>
+        </pc:spChg>
+        <pc:spChg chg="del mod">
+          <ac:chgData name="João Gaspar" userId="7dec15aa-df9c-4e56-83fb-de5e1da84347" providerId="ADAL" clId="{5F5A64CD-14DA-4429-AD0D-339DD7191AF6}" dt="2024-06-03T00:04:54.190" v="734" actId="478"/>
+          <ac:spMkLst>
+            <pc:docMk/>
+            <pc:sldMk cId="3112891430" sldId="266"/>
+            <ac:spMk id="9" creationId="{657D4DD8-B153-875E-387A-A6DA46DCA0A3}"/>
+          </ac:spMkLst>
+        </pc:spChg>
+        <pc:spChg chg="add del">
+          <ac:chgData name="João Gaspar" userId="7dec15aa-df9c-4e56-83fb-de5e1da84347" providerId="ADAL" clId="{5F5A64CD-14DA-4429-AD0D-339DD7191AF6}" dt="2024-06-03T00:04:08.029" v="727" actId="26606"/>
+          <ac:spMkLst>
+            <pc:docMk/>
+            <pc:sldMk cId="3112891430" sldId="266"/>
+            <ac:spMk id="15" creationId="{9F7D5CDA-D291-4307-BF55-1381FED29634}"/>
+          </ac:spMkLst>
+        </pc:spChg>
+        <pc:spChg chg="add del">
+          <ac:chgData name="João Gaspar" userId="7dec15aa-df9c-4e56-83fb-de5e1da84347" providerId="ADAL" clId="{5F5A64CD-14DA-4429-AD0D-339DD7191AF6}" dt="2024-06-03T00:04:11.145" v="728" actId="26606"/>
+          <ac:spMkLst>
+            <pc:docMk/>
+            <pc:sldMk cId="3112891430" sldId="266"/>
+            <ac:spMk id="17" creationId="{59B296B9-C5A5-4E4F-9B60-C907B5F1466C}"/>
+          </ac:spMkLst>
+        </pc:spChg>
+        <pc:spChg chg="add del">
+          <ac:chgData name="João Gaspar" userId="7dec15aa-df9c-4e56-83fb-de5e1da84347" providerId="ADAL" clId="{5F5A64CD-14DA-4429-AD0D-339DD7191AF6}" dt="2024-06-03T00:04:11.145" v="728" actId="26606"/>
+          <ac:spMkLst>
+            <pc:docMk/>
+            <pc:sldMk cId="3112891430" sldId="266"/>
+            <ac:spMk id="18" creationId="{D0300FD3-5AF1-6305-15FA-9078072672E2}"/>
+          </ac:spMkLst>
+        </pc:spChg>
+        <pc:spChg chg="add del">
+          <ac:chgData name="João Gaspar" userId="7dec15aa-df9c-4e56-83fb-de5e1da84347" providerId="ADAL" clId="{5F5A64CD-14DA-4429-AD0D-339DD7191AF6}" dt="2024-06-03T00:04:11.145" v="728" actId="26606"/>
+          <ac:spMkLst>
+            <pc:docMk/>
+            <pc:sldMk cId="3112891430" sldId="266"/>
+            <ac:spMk id="20" creationId="{9F7D5CDA-D291-4307-BF55-1381FED29634}"/>
+          </ac:spMkLst>
+        </pc:spChg>
+        <pc:spChg chg="del">
+          <ac:chgData name="João Gaspar" userId="7dec15aa-df9c-4e56-83fb-de5e1da84347" providerId="ADAL" clId="{5F5A64CD-14DA-4429-AD0D-339DD7191AF6}" dt="2024-06-03T00:03:50.736" v="718"/>
+          <ac:spMkLst>
+            <pc:docMk/>
+            <pc:sldMk cId="3112891430" sldId="266"/>
+            <ac:spMk id="22" creationId="{C0763A76-9F1C-4FC5-82B7-DD475DA461B2}"/>
+          </ac:spMkLst>
+        </pc:spChg>
+        <pc:spChg chg="del">
+          <ac:chgData name="João Gaspar" userId="7dec15aa-df9c-4e56-83fb-de5e1da84347" providerId="ADAL" clId="{5F5A64CD-14DA-4429-AD0D-339DD7191AF6}" dt="2024-06-03T00:03:50.736" v="718"/>
+          <ac:spMkLst>
+            <pc:docMk/>
+            <pc:sldMk cId="3112891430" sldId="266"/>
+            <ac:spMk id="24" creationId="{E81BF4F6-F2CF-4984-9D14-D6966D92F99F}"/>
+          </ac:spMkLst>
+        </pc:spChg>
+        <pc:spChg chg="add">
+          <ac:chgData name="João Gaspar" userId="7dec15aa-df9c-4e56-83fb-de5e1da84347" providerId="ADAL" clId="{5F5A64CD-14DA-4429-AD0D-339DD7191AF6}" dt="2024-06-03T00:04:11.145" v="728" actId="26606"/>
+          <ac:spMkLst>
+            <pc:docMk/>
+            <pc:sldMk cId="3112891430" sldId="266"/>
+            <ac:spMk id="25" creationId="{3ECBE1F1-D69B-4AFA-ABD5-8E41720EF6DE}"/>
+          </ac:spMkLst>
+        </pc:spChg>
+        <pc:spChg chg="add">
+          <ac:chgData name="João Gaspar" userId="7dec15aa-df9c-4e56-83fb-de5e1da84347" providerId="ADAL" clId="{5F5A64CD-14DA-4429-AD0D-339DD7191AF6}" dt="2024-06-03T00:04:11.145" v="728" actId="26606"/>
+          <ac:spMkLst>
+            <pc:docMk/>
+            <pc:sldMk cId="3112891430" sldId="266"/>
+            <ac:spMk id="27" creationId="{603A6265-E10C-4B85-9C20-E75FCAF9CC63}"/>
+          </ac:spMkLst>
+        </pc:spChg>
+        <pc:picChg chg="del">
+          <ac:chgData name="João Gaspar" userId="7dec15aa-df9c-4e56-83fb-de5e1da84347" providerId="ADAL" clId="{5F5A64CD-14DA-4429-AD0D-339DD7191AF6}" dt="2024-06-03T00:03:52.621" v="719" actId="478"/>
+          <ac:picMkLst>
+            <pc:docMk/>
+            <pc:sldMk cId="3112891430" sldId="266"/>
+            <ac:picMk id="7" creationId="{E4A09083-226A-4A96-D9E8-8941DA5EF78C}"/>
+          </ac:picMkLst>
+        </pc:picChg>
+        <pc:picChg chg="add mod ord">
+          <ac:chgData name="João Gaspar" userId="7dec15aa-df9c-4e56-83fb-de5e1da84347" providerId="ADAL" clId="{5F5A64CD-14DA-4429-AD0D-339DD7191AF6}" dt="2024-06-03T00:04:11.145" v="728" actId="26606"/>
+          <ac:picMkLst>
+            <pc:docMk/>
+            <pc:sldMk cId="3112891430" sldId="266"/>
+            <ac:picMk id="11" creationId="{169B76FD-E307-05CB-A02C-6E5ECE1AB16E}"/>
+          </ac:picMkLst>
+        </pc:picChg>
       </pc:sldChg>
     </pc:docChg>
   </pc:docChgLst>
@@ -1366,7 +1598,7 @@
           <a:p>
             <a:fld id="{AB38FD77-722C-49E2-AEB2-4580223DE7D4}" type="datetimeFigureOut">
               <a:rPr lang="pt-PT" smtClean="0"/>
-              <a:t>02/06/2024</a:t>
+              <a:t>03/06/2024</a:t>
             </a:fld>
             <a:endParaRPr lang="pt-PT" dirty="0"/>
           </a:p>
@@ -2044,6 +2276,90 @@
     <p:extLst>
       <p:ext uri="{BB962C8B-B14F-4D97-AF65-F5344CB8AC3E}">
         <p14:creationId xmlns:p14="http://schemas.microsoft.com/office/powerpoint/2010/main" val="988820243"/>
+      </p:ext>
+    </p:extLst>
+  </p:cSld>
+  <p:clrMapOvr>
+    <a:masterClrMapping/>
+  </p:clrMapOvr>
+</p:notes>
+</file>
+
+<file path=ppt/notesSlides/notesSlide3.xml><?xml version="1.0" encoding="utf-8"?>
+<p:notes xmlns:a="http://schemas.openxmlformats.org/drawingml/2006/main" xmlns:r="http://schemas.openxmlformats.org/officeDocument/2006/relationships" xmlns:p="http://schemas.openxmlformats.org/presentationml/2006/main">
+  <p:cSld>
+    <p:spTree>
+      <p:nvGrpSpPr>
+        <p:cNvPr id="1" name=""/>
+        <p:cNvGrpSpPr/>
+        <p:nvPr/>
+      </p:nvGrpSpPr>
+      <p:grpSpPr>
+        <a:xfrm>
+          <a:off x="0" y="0"/>
+          <a:ext cx="0" cy="0"/>
+          <a:chOff x="0" y="0"/>
+          <a:chExt cx="0" cy="0"/>
+        </a:xfrm>
+      </p:grpSpPr>
+      <p:sp>
+        <p:nvSpPr>
+          <p:cNvPr id="2" name="Marcador de Posição da Imagem do Diapositivo 1"/>
+          <p:cNvSpPr>
+            <a:spLocks noGrp="1" noRot="1" noChangeAspect="1"/>
+          </p:cNvSpPr>
+          <p:nvPr>
+            <p:ph type="sldImg"/>
+          </p:nvPr>
+        </p:nvSpPr>
+        <p:spPr/>
+      </p:sp>
+      <p:sp>
+        <p:nvSpPr>
+          <p:cNvPr id="3" name="Marcador de Posição de Notas 2"/>
+          <p:cNvSpPr>
+            <a:spLocks noGrp="1"/>
+          </p:cNvSpPr>
+          <p:nvPr>
+            <p:ph type="body" idx="1"/>
+          </p:nvPr>
+        </p:nvSpPr>
+        <p:spPr/>
+        <p:txBody>
+          <a:bodyPr/>
+          <a:lstStyle/>
+          <a:p>
+            <a:endParaRPr lang="pt-PT" dirty="0"/>
+          </a:p>
+        </p:txBody>
+      </p:sp>
+      <p:sp>
+        <p:nvSpPr>
+          <p:cNvPr id="4" name="Marcador de Posição do Número do Diapositivo 3"/>
+          <p:cNvSpPr>
+            <a:spLocks noGrp="1"/>
+          </p:cNvSpPr>
+          <p:nvPr>
+            <p:ph type="sldNum" sz="quarter" idx="5"/>
+          </p:nvPr>
+        </p:nvSpPr>
+        <p:spPr/>
+        <p:txBody>
+          <a:bodyPr/>
+          <a:lstStyle/>
+          <a:p>
+            <a:fld id="{5C0AF832-54E1-4B1C-8983-BE7858CA31D0}" type="slidenum">
+              <a:rPr lang="pt-PT" smtClean="0"/>
+              <a:t>6</a:t>
+            </a:fld>
+            <a:endParaRPr lang="pt-PT" dirty="0"/>
+          </a:p>
+        </p:txBody>
+      </p:sp>
+    </p:spTree>
+    <p:extLst>
+      <p:ext uri="{BB962C8B-B14F-4D97-AF65-F5344CB8AC3E}">
+        <p14:creationId xmlns:p14="http://schemas.microsoft.com/office/powerpoint/2010/main" val="2953448570"/>
       </p:ext>
     </p:extLst>
   </p:cSld>
@@ -5774,6 +6090,390 @@
 </p:sld>
 </file>
 
+<file path=ppt/slides/slide10.xml><?xml version="1.0" encoding="utf-8"?>
+<p:sld xmlns:a="http://schemas.openxmlformats.org/drawingml/2006/main" xmlns:r="http://schemas.openxmlformats.org/officeDocument/2006/relationships" xmlns:p="http://schemas.openxmlformats.org/presentationml/2006/main">
+  <p:cSld>
+    <p:bg>
+      <p:bgPr>
+        <a:solidFill>
+          <a:schemeClr val="bg1"/>
+        </a:solidFill>
+        <a:effectLst/>
+      </p:bgPr>
+    </p:bg>
+    <p:spTree>
+      <p:nvGrpSpPr>
+        <p:cNvPr id="1" name=""/>
+        <p:cNvGrpSpPr/>
+        <p:nvPr/>
+      </p:nvGrpSpPr>
+      <p:grpSpPr>
+        <a:xfrm>
+          <a:off x="0" y="0"/>
+          <a:ext cx="0" cy="0"/>
+          <a:chOff x="0" y="0"/>
+          <a:chExt cx="0" cy="0"/>
+        </a:xfrm>
+      </p:grpSpPr>
+      <p:sp useBgFill="1">
+        <p:nvSpPr>
+          <p:cNvPr id="10" name="Rectangle 9">
+            <a:extLst>
+              <a:ext uri="{FF2B5EF4-FFF2-40B4-BE49-F238E27FC236}">
+                <a16:creationId xmlns:a16="http://schemas.microsoft.com/office/drawing/2014/main" id="{EEBFA4C8-C301-60A7-C96E-E85360F5DFB4}"/>
+              </a:ext>
+              <a:ext uri="{C183D7F6-B498-43B3-948B-1728B52AA6E4}">
+                <adec:decorative xmlns:adec="http://schemas.microsoft.com/office/drawing/2017/decorative" val="1"/>
+              </a:ext>
+            </a:extLst>
+          </p:cNvPr>
+          <p:cNvSpPr>
+            <a:spLocks noGrp="1" noRot="1" noChangeAspect="1" noMove="1" noResize="1" noEditPoints="1" noAdjustHandles="1" noChangeArrowheads="1" noChangeShapeType="1" noTextEdit="1"/>
+          </p:cNvSpPr>
+          <p:nvPr>
+            <p:extLst>
+              <p:ext uri="{386F3935-93C4-4BCD-93E2-E3B085C9AB24}">
+                <p16:designElem xmlns:p16="http://schemas.microsoft.com/office/powerpoint/2015/main" val="1"/>
+              </p:ext>
+            </p:extLst>
+          </p:nvPr>
+        </p:nvSpPr>
+        <p:spPr>
+          <a:xfrm>
+            <a:off x="0" y="0"/>
+            <a:ext cx="12191999" cy="1729117"/>
+          </a:xfrm>
+          <a:prstGeom prst="rect">
+            <a:avLst/>
+          </a:prstGeom>
+          <a:ln>
+            <a:noFill/>
+          </a:ln>
+          <a:effectLst>
+            <a:outerShdw blurRad="368300" dist="101600" dir="5460000" sx="90000" sy="90000" algn="t" rotWithShape="0">
+              <a:srgbClr val="000000">
+                <a:alpha val="20000"/>
+              </a:srgbClr>
+            </a:outerShdw>
+          </a:effectLst>
+        </p:spPr>
+        <p:style>
+          <a:lnRef idx="2">
+            <a:schemeClr val="accent1">
+              <a:shade val="50000"/>
+            </a:schemeClr>
+          </a:lnRef>
+          <a:fillRef idx="1">
+            <a:schemeClr val="accent1"/>
+          </a:fillRef>
+          <a:effectRef idx="0">
+            <a:schemeClr val="accent1"/>
+          </a:effectRef>
+          <a:fontRef idx="minor">
+            <a:schemeClr val="lt1"/>
+          </a:fontRef>
+        </p:style>
+        <p:txBody>
+          <a:bodyPr rtlCol="0" anchor="ctr"/>
+          <a:lstStyle/>
+          <a:p>
+            <a:pPr algn="ctr"/>
+            <a:endParaRPr lang="en-US" dirty="0"/>
+          </a:p>
+        </p:txBody>
+      </p:sp>
+      <p:sp>
+        <p:nvSpPr>
+          <p:cNvPr id="2" name="Título 1">
+            <a:extLst>
+              <a:ext uri="{FF2B5EF4-FFF2-40B4-BE49-F238E27FC236}">
+                <a16:creationId xmlns:a16="http://schemas.microsoft.com/office/drawing/2014/main" id="{2E9F1C5F-BD9A-6944-1470-43BD4692C181}"/>
+              </a:ext>
+            </a:extLst>
+          </p:cNvPr>
+          <p:cNvSpPr>
+            <a:spLocks noGrp="1"/>
+          </p:cNvSpPr>
+          <p:nvPr>
+            <p:ph type="title"/>
+          </p:nvPr>
+        </p:nvSpPr>
+        <p:spPr>
+          <a:xfrm>
+            <a:off x="761801" y="283714"/>
+            <a:ext cx="9906799" cy="1161688"/>
+          </a:xfrm>
+        </p:spPr>
+        <p:txBody>
+          <a:bodyPr anchor="ctr">
+            <a:normAutofit/>
+          </a:bodyPr>
+          <a:lstStyle/>
+          <a:p>
+            <a:r>
+              <a:rPr lang="pt-PT" sz="4000" dirty="0"/>
+              <a:t>References</a:t>
+            </a:r>
+          </a:p>
+        </p:txBody>
+      </p:sp>
+      <p:sp>
+        <p:nvSpPr>
+          <p:cNvPr id="3" name="Marcador de Posição de Conteúdo 2">
+            <a:extLst>
+              <a:ext uri="{FF2B5EF4-FFF2-40B4-BE49-F238E27FC236}">
+                <a16:creationId xmlns:a16="http://schemas.microsoft.com/office/drawing/2014/main" id="{192A18D7-40DF-B571-AC86-94A7727F42DB}"/>
+              </a:ext>
+            </a:extLst>
+          </p:cNvPr>
+          <p:cNvSpPr>
+            <a:spLocks noGrp="1"/>
+          </p:cNvSpPr>
+          <p:nvPr>
+            <p:ph idx="1"/>
+          </p:nvPr>
+        </p:nvSpPr>
+        <p:spPr>
+          <a:xfrm>
+            <a:off x="2231923" y="2217761"/>
+            <a:ext cx="7724236" cy="4034116"/>
+          </a:xfrm>
+        </p:spPr>
+        <p:txBody>
+          <a:bodyPr anchor="ctr">
+            <a:normAutofit fontScale="77500" lnSpcReduction="20000"/>
+          </a:bodyPr>
+          <a:lstStyle/>
+          <a:p>
+            <a:pPr>
+              <a:lnSpc>
+                <a:spcPct val="110000"/>
+              </a:lnSpc>
+              <a:buFont typeface="Symbol" panose="05050102010706020507" pitchFamily="18" charset="2"/>
+              <a:buChar char="-"/>
+            </a:pPr>
+            <a:r>
+              <a:rPr lang="pt-PT" sz="2400" b="0" i="0" u="none" strike="noStrike" baseline="0" dirty="0">
+                <a:solidFill>
+                  <a:srgbClr val="000000"/>
+                </a:solidFill>
+                <a:latin typeface="Calibri" panose="020F0502020204030204" pitchFamily="34" charset="0"/>
+              </a:rPr>
+              <a:t>Sketchfab. (n.d.-b). Sketchfab. https://sketchfab.com/search?features=downloadable&amp;type=models</a:t>
+            </a:r>
+          </a:p>
+          <a:p>
+            <a:pPr>
+              <a:lnSpc>
+                <a:spcPct val="110000"/>
+              </a:lnSpc>
+              <a:buFont typeface="Symbol" panose="05050102010706020507" pitchFamily="18" charset="2"/>
+              <a:buChar char="-"/>
+            </a:pPr>
+            <a:endParaRPr lang="pt-PT" sz="2400" b="0" i="0" u="none" strike="noStrike" baseline="0" dirty="0">
+              <a:solidFill>
+                <a:srgbClr val="000000"/>
+              </a:solidFill>
+              <a:latin typeface="Calibri" panose="020F0502020204030204" pitchFamily="34" charset="0"/>
+            </a:endParaRPr>
+          </a:p>
+          <a:p>
+            <a:pPr>
+              <a:lnSpc>
+                <a:spcPct val="110000"/>
+              </a:lnSpc>
+              <a:buFont typeface="Symbol" panose="05050102010706020507" pitchFamily="18" charset="2"/>
+              <a:buChar char="-"/>
+            </a:pPr>
+            <a:r>
+              <a:rPr lang="en-US" sz="2400" b="0" i="0" u="none" strike="noStrike" baseline="0" dirty="0">
+                <a:solidFill>
+                  <a:srgbClr val="000000"/>
+                </a:solidFill>
+                <a:latin typeface="Calibri" panose="020F0502020204030204" pitchFamily="34" charset="0"/>
+              </a:rPr>
+              <a:t>“Make a Grass in 45 Seconds-Blender 2024.” Www.youtube.com, www.youtube.com/watch?v=xX72ZuCOVVE&amp;ab_channel=BlenderTips. Accessed 10 Apr. 2024.</a:t>
+            </a:r>
+          </a:p>
+          <a:p>
+            <a:pPr>
+              <a:lnSpc>
+                <a:spcPct val="110000"/>
+              </a:lnSpc>
+              <a:buFont typeface="Symbol" panose="05050102010706020507" pitchFamily="18" charset="2"/>
+              <a:buChar char="-"/>
+            </a:pPr>
+            <a:endParaRPr lang="en-US" sz="2400" b="0" i="0" u="none" strike="noStrike" baseline="0" dirty="0">
+              <a:solidFill>
+                <a:srgbClr val="000000"/>
+              </a:solidFill>
+              <a:latin typeface="Calibri" panose="020F0502020204030204" pitchFamily="34" charset="0"/>
+            </a:endParaRPr>
+          </a:p>
+          <a:p>
+            <a:pPr>
+              <a:lnSpc>
+                <a:spcPct val="110000"/>
+              </a:lnSpc>
+              <a:buFont typeface="Symbol" panose="05050102010706020507" pitchFamily="18" charset="2"/>
+              <a:buChar char="-"/>
+            </a:pPr>
+            <a:r>
+              <a:rPr lang="en-US" sz="2400" b="0" i="0" u="none" strike="noStrike" baseline="0" dirty="0">
+                <a:solidFill>
+                  <a:srgbClr val="000000"/>
+                </a:solidFill>
+                <a:latin typeface="Calibri" panose="020F0502020204030204" pitchFamily="34" charset="0"/>
+              </a:rPr>
+              <a:t>Fog – three.js docs. https://threejs.org/docs/#api/en/scenes/Fog</a:t>
+            </a:r>
+          </a:p>
+          <a:p>
+            <a:pPr>
+              <a:lnSpc>
+                <a:spcPct val="110000"/>
+              </a:lnSpc>
+              <a:buFont typeface="Symbol" panose="05050102010706020507" pitchFamily="18" charset="2"/>
+              <a:buChar char="-"/>
+            </a:pPr>
+            <a:endParaRPr lang="en-US" sz="2400" b="0" i="0" u="none" strike="noStrike" baseline="0" dirty="0">
+              <a:solidFill>
+                <a:srgbClr val="000000"/>
+              </a:solidFill>
+              <a:latin typeface="Calibri" panose="020F0502020204030204" pitchFamily="34" charset="0"/>
+            </a:endParaRPr>
+          </a:p>
+          <a:p>
+            <a:pPr>
+              <a:lnSpc>
+                <a:spcPct val="110000"/>
+              </a:lnSpc>
+              <a:buFont typeface="Symbol" panose="05050102010706020507" pitchFamily="18" charset="2"/>
+              <a:buChar char="-"/>
+            </a:pPr>
+            <a:r>
+              <a:rPr lang="en-US" sz="2400" b="0" i="0" u="none" strike="noStrike" baseline="0" dirty="0">
+                <a:solidFill>
+                  <a:srgbClr val="000000"/>
+                </a:solidFill>
+                <a:latin typeface="Calibri" panose="020F0502020204030204" pitchFamily="34" charset="0"/>
+              </a:rPr>
+              <a:t>Loading 3D models – three.js docs. https://threejs.org/docs/#manual/en/introduction/Loading-3D-models</a:t>
+            </a:r>
+          </a:p>
+        </p:txBody>
+      </p:sp>
+      <p:sp>
+        <p:nvSpPr>
+          <p:cNvPr id="4" name="Marcador de Posição da Data 3">
+            <a:extLst>
+              <a:ext uri="{FF2B5EF4-FFF2-40B4-BE49-F238E27FC236}">
+                <a16:creationId xmlns:a16="http://schemas.microsoft.com/office/drawing/2014/main" id="{8EEE3120-0213-4797-7B33-01179BA1C6C9}"/>
+              </a:ext>
+            </a:extLst>
+          </p:cNvPr>
+          <p:cNvSpPr>
+            <a:spLocks noGrp="1"/>
+          </p:cNvSpPr>
+          <p:nvPr>
+            <p:ph type="dt" sz="half" idx="10"/>
+          </p:nvPr>
+        </p:nvSpPr>
+        <p:spPr>
+          <a:xfrm>
+            <a:off x="243025" y="6356349"/>
+            <a:ext cx="2743200" cy="365125"/>
+          </a:xfrm>
+        </p:spPr>
+        <p:txBody>
+          <a:bodyPr>
+            <a:normAutofit/>
+          </a:bodyPr>
+          <a:lstStyle/>
+          <a:p>
+            <a:pPr>
+              <a:spcAft>
+                <a:spcPts val="600"/>
+              </a:spcAft>
+            </a:pPr>
+            <a:r>
+              <a:rPr lang="pt-PT" dirty="0">
+                <a:solidFill>
+                  <a:schemeClr val="tx1"/>
+                </a:solidFill>
+              </a:rPr>
+              <a:t>ICG - 2023/2024</a:t>
+            </a:r>
+          </a:p>
+        </p:txBody>
+      </p:sp>
+      <p:sp>
+        <p:nvSpPr>
+          <p:cNvPr id="5" name="Marcador de Posição do Número do Diapositivo 4">
+            <a:extLst>
+              <a:ext uri="{FF2B5EF4-FFF2-40B4-BE49-F238E27FC236}">
+                <a16:creationId xmlns:a16="http://schemas.microsoft.com/office/drawing/2014/main" id="{BE4B7072-FBFB-97F0-E61C-8E5F249DF43A}"/>
+              </a:ext>
+            </a:extLst>
+          </p:cNvPr>
+          <p:cNvSpPr>
+            <a:spLocks noGrp="1"/>
+          </p:cNvSpPr>
+          <p:nvPr>
+            <p:ph type="sldNum" sz="quarter" idx="12"/>
+          </p:nvPr>
+        </p:nvSpPr>
+        <p:spPr>
+          <a:xfrm>
+            <a:off x="8732520" y="6356350"/>
+            <a:ext cx="3216455" cy="365125"/>
+          </a:xfrm>
+        </p:spPr>
+        <p:txBody>
+          <a:bodyPr>
+            <a:normAutofit/>
+          </a:bodyPr>
+          <a:lstStyle/>
+          <a:p>
+            <a:pPr>
+              <a:spcAft>
+                <a:spcPts val="600"/>
+              </a:spcAft>
+            </a:pPr>
+            <a:fld id="{A275E76C-0B34-4617-92BE-2419D92E4442}" type="slidenum">
+              <a:rPr lang="pt-PT">
+                <a:solidFill>
+                  <a:schemeClr val="tx1"/>
+                </a:solidFill>
+              </a:rPr>
+              <a:pPr>
+                <a:spcAft>
+                  <a:spcPts val="600"/>
+                </a:spcAft>
+              </a:pPr>
+              <a:t>10</a:t>
+            </a:fld>
+            <a:endParaRPr lang="pt-PT" dirty="0">
+              <a:solidFill>
+                <a:schemeClr val="tx1"/>
+              </a:solidFill>
+            </a:endParaRPr>
+          </a:p>
+        </p:txBody>
+      </p:sp>
+    </p:spTree>
+    <p:extLst>
+      <p:ext uri="{BB962C8B-B14F-4D97-AF65-F5344CB8AC3E}">
+        <p14:creationId xmlns:p14="http://schemas.microsoft.com/office/powerpoint/2010/main" val="1925614804"/>
+      </p:ext>
+    </p:extLst>
+  </p:cSld>
+  <p:clrMapOvr>
+    <a:masterClrMapping/>
+  </p:clrMapOvr>
+</p:sld>
+</file>
+
 <file path=ppt/slides/slide2.xml><?xml version="1.0" encoding="utf-8"?>
 <p:sld xmlns:a="http://schemas.openxmlformats.org/drawingml/2006/main" xmlns:r="http://schemas.openxmlformats.org/officeDocument/2006/relationships" xmlns:p="http://schemas.openxmlformats.org/presentationml/2006/main">
   <p:cSld>
@@ -7887,7 +8587,7 @@
       </p:grpSpPr>
       <p:sp useBgFill="1">
         <p:nvSpPr>
-          <p:cNvPr id="33" name="Slide Background">
+          <p:cNvPr id="25" name="Slide Background">
             <a:extLst>
               <a:ext uri="{FF2B5EF4-FFF2-40B4-BE49-F238E27FC236}">
                 <a16:creationId xmlns:a16="http://schemas.microsoft.com/office/drawing/2014/main" id="{3ECBE1F1-D69B-4AFA-ABD5-8E41720EF6DE}"/>
@@ -7941,16 +8641,16 @@
           <a:lstStyle/>
           <a:p>
             <a:pPr algn="ctr"/>
-            <a:endParaRPr lang="en-US" dirty="0"/>
+            <a:endParaRPr lang="en-US"/>
           </a:p>
         </p:txBody>
       </p:sp>
       <p:pic>
         <p:nvPicPr>
-          <p:cNvPr id="20" name="Picture 6" descr="Hands on keyboard and mouse">
-            <a:extLst>
-              <a:ext uri="{FF2B5EF4-FFF2-40B4-BE49-F238E27FC236}">
-                <a16:creationId xmlns:a16="http://schemas.microsoft.com/office/drawing/2014/main" id="{F697300D-85D4-02BA-46CA-6D444AA9FB97}"/>
+          <p:cNvPr id="11" name="Picture 10" descr="Floating white spheres in 3D">
+            <a:extLst>
+              <a:ext uri="{FF2B5EF4-FFF2-40B4-BE49-F238E27FC236}">
+                <a16:creationId xmlns:a16="http://schemas.microsoft.com/office/drawing/2014/main" id="{169B76FD-E307-05CB-A02C-6E5ECE1AB16E}"/>
               </a:ext>
             </a:extLst>
           </p:cNvPr>
@@ -7960,8 +8660,8 @@
           <p:nvPr/>
         </p:nvPicPr>
         <p:blipFill rotWithShape="1">
-          <a:blip r:embed="rId2"/>
-          <a:srcRect l="31698" r="15643" b="-2"/>
+          <a:blip r:embed="rId3"/>
+          <a:srcRect l="27286" r="20055" b="-2"/>
           <a:stretch/>
         </p:blipFill>
         <p:spPr>
@@ -7976,7 +8676,7 @@
       </p:pic>
       <p:sp useBgFill="1">
         <p:nvSpPr>
-          <p:cNvPr id="38" name="Rectangle 37">
+          <p:cNvPr id="27" name="Rectangle 26">
             <a:extLst>
               <a:ext uri="{FF2B5EF4-FFF2-40B4-BE49-F238E27FC236}">
                 <a16:creationId xmlns:a16="http://schemas.microsoft.com/office/drawing/2014/main" id="{603A6265-E10C-4B85-9C20-E75FCAF9CC63}"/>
@@ -8037,7 +8737,7 @@
           <a:lstStyle/>
           <a:p>
             <a:pPr algn="ctr"/>
-            <a:endParaRPr lang="en-US" dirty="0"/>
+            <a:endParaRPr lang="en-US"/>
           </a:p>
         </p:txBody>
       </p:sp>
@@ -8046,7 +8746,7 @@
           <p:cNvPr id="2" name="Título 1">
             <a:extLst>
               <a:ext uri="{FF2B5EF4-FFF2-40B4-BE49-F238E27FC236}">
-                <a16:creationId xmlns:a16="http://schemas.microsoft.com/office/drawing/2014/main" id="{33446C54-F7AE-CA4F-E5CE-50948D8171E6}"/>
+                <a16:creationId xmlns:a16="http://schemas.microsoft.com/office/drawing/2014/main" id="{D4EAC386-2116-E6B4-0B03-45113820C92E}"/>
               </a:ext>
             </a:extLst>
           </p:cNvPr>
@@ -8071,7 +8771,7 @@
           <a:p>
             <a:r>
               <a:rPr lang="pt-PT" sz="4000" dirty="0"/>
-              <a:t>User Interaction</a:t>
+              <a:t>Sounds</a:t>
             </a:r>
           </a:p>
         </p:txBody>
@@ -8081,7 +8781,7 @@
           <p:cNvPr id="3" name="Marcador de Posição de Conteúdo 2">
             <a:extLst>
               <a:ext uri="{FF2B5EF4-FFF2-40B4-BE49-F238E27FC236}">
-                <a16:creationId xmlns:a16="http://schemas.microsoft.com/office/drawing/2014/main" id="{02672098-09A7-756F-7E43-F974D6424264}"/>
+                <a16:creationId xmlns:a16="http://schemas.microsoft.com/office/drawing/2014/main" id="{C63E7569-D78E-A980-42C5-E03FCBCB4FAE}"/>
               </a:ext>
             </a:extLst>
           </p:cNvPr>
@@ -8104,84 +8804,32 @@
           </a:bodyPr>
           <a:lstStyle/>
           <a:p>
-            <a:pPr algn="just">
-              <a:lnSpc>
-                <a:spcPct val="100000"/>
-              </a:lnSpc>
+            <a:pPr>
               <a:buFont typeface="Symbol" panose="05050102010706020507" pitchFamily="18" charset="2"/>
               <a:buChar char="-"/>
             </a:pPr>
             <a:r>
               <a:rPr lang="en-US" sz="2000" dirty="0"/>
-              <a:t>With the mouse the user can shot bullets at the Ghost.</a:t>
-            </a:r>
-          </a:p>
-          <a:p>
-            <a:pPr algn="just">
-              <a:lnSpc>
-                <a:spcPct val="100000"/>
-              </a:lnSpc>
+              <a:t>Ambient sound produced by the ghost and related to its distance to the player.</a:t>
+            </a:r>
+          </a:p>
+          <a:p>
+            <a:pPr>
               <a:buFont typeface="Symbol" panose="05050102010706020507" pitchFamily="18" charset="2"/>
               <a:buChar char="-"/>
             </a:pPr>
             <a:endParaRPr lang="en-US" sz="2000" dirty="0"/>
           </a:p>
           <a:p>
-            <a:pPr algn="just">
-              <a:lnSpc>
-                <a:spcPct val="100000"/>
-              </a:lnSpc>
+            <a:pPr>
               <a:buFont typeface="Symbol" panose="05050102010706020507" pitchFamily="18" charset="2"/>
               <a:buChar char="-"/>
             </a:pPr>
             <a:r>
               <a:rPr lang="en-US" sz="2000" dirty="0"/>
-              <a:t>Using the WASD keys in the keyboard and the SPACE bar the user can move around the map.</a:t>
-            </a:r>
-          </a:p>
-        </p:txBody>
-      </p:sp>
-      <p:sp>
-        <p:nvSpPr>
-          <p:cNvPr id="6" name="Marcador de Posição da Data 3">
-            <a:extLst>
-              <a:ext uri="{FF2B5EF4-FFF2-40B4-BE49-F238E27FC236}">
-                <a16:creationId xmlns:a16="http://schemas.microsoft.com/office/drawing/2014/main" id="{9DEC26D1-9B75-2C97-F0C4-7EEBEEAE11F9}"/>
-              </a:ext>
-            </a:extLst>
-          </p:cNvPr>
-          <p:cNvSpPr>
-            <a:spLocks noGrp="1"/>
-          </p:cNvSpPr>
-          <p:nvPr>
-            <p:ph type="dt" sz="half" idx="10"/>
-          </p:nvPr>
-        </p:nvSpPr>
-        <p:spPr>
-          <a:xfrm>
-            <a:off x="758952" y="6356350"/>
-            <a:ext cx="2743200" cy="365125"/>
-          </a:xfrm>
-        </p:spPr>
-        <p:txBody>
-          <a:bodyPr>
-            <a:normAutofit/>
-          </a:bodyPr>
-          <a:lstStyle/>
-          <a:p>
-            <a:pPr>
-              <a:spcAft>
-                <a:spcPts val="600"/>
-              </a:spcAft>
-            </a:pPr>
-            <a:r>
-              <a:rPr lang="pt-PT" dirty="0">
-                <a:solidFill>
-                  <a:srgbClr val="FFFFFF"/>
-                </a:solidFill>
-              </a:rPr>
-              <a:t>ICG - 2023/2024</a:t>
-            </a:r>
+              <a:t>Sound from the gunshots.</a:t>
+            </a:r>
+            <a:endParaRPr lang="pt-PT" sz="2000" dirty="0"/>
           </a:p>
         </p:txBody>
       </p:sp>
@@ -8190,7 +8838,7 @@
           <p:cNvPr id="5" name="Marcador de Posição do Número do Diapositivo 4">
             <a:extLst>
               <a:ext uri="{FF2B5EF4-FFF2-40B4-BE49-F238E27FC236}">
-                <a16:creationId xmlns:a16="http://schemas.microsoft.com/office/drawing/2014/main" id="{C6690917-D9BF-558B-1172-6B72C41CE0A0}"/>
+                <a16:creationId xmlns:a16="http://schemas.microsoft.com/office/drawing/2014/main" id="{B8B4F806-50C1-2A3B-B7FF-66DE4B6A8F81}"/>
               </a:ext>
             </a:extLst>
           </p:cNvPr>
@@ -8231,7 +8879,7 @@
               </a:pPr>
               <a:t>6</a:t>
             </a:fld>
-            <a:endParaRPr lang="pt-PT" dirty="0">
+            <a:endParaRPr lang="pt-PT">
               <a:solidFill>
                 <a:schemeClr val="tx1"/>
               </a:solidFill>
@@ -8239,10 +8887,54 @@
           </a:p>
         </p:txBody>
       </p:sp>
+      <p:sp>
+        <p:nvSpPr>
+          <p:cNvPr id="4" name="Marcador de Posição da Data 3">
+            <a:extLst>
+              <a:ext uri="{FF2B5EF4-FFF2-40B4-BE49-F238E27FC236}">
+                <a16:creationId xmlns:a16="http://schemas.microsoft.com/office/drawing/2014/main" id="{30981E7F-39BF-F46F-2F37-EC0640A89C9A}"/>
+              </a:ext>
+            </a:extLst>
+          </p:cNvPr>
+          <p:cNvSpPr>
+            <a:spLocks noGrp="1"/>
+          </p:cNvSpPr>
+          <p:nvPr>
+            <p:ph type="dt" sz="half" idx="10"/>
+          </p:nvPr>
+        </p:nvSpPr>
+        <p:spPr>
+          <a:xfrm>
+            <a:off x="243025" y="6356349"/>
+            <a:ext cx="2743200" cy="365125"/>
+          </a:xfrm>
+        </p:spPr>
+        <p:txBody>
+          <a:bodyPr>
+            <a:normAutofit/>
+          </a:bodyPr>
+          <a:lstStyle/>
+          <a:p>
+            <a:pPr>
+              <a:spcAft>
+                <a:spcPts val="600"/>
+              </a:spcAft>
+            </a:pPr>
+            <a:r>
+              <a:rPr lang="pt-PT" dirty="0">
+                <a:solidFill>
+                  <a:schemeClr val="tx1"/>
+                </a:solidFill>
+              </a:rPr>
+              <a:t>ICG - 2023/2024</a:t>
+            </a:r>
+          </a:p>
+        </p:txBody>
+      </p:sp>
     </p:spTree>
     <p:extLst>
       <p:ext uri="{BB962C8B-B14F-4D97-AF65-F5344CB8AC3E}">
-        <p14:creationId xmlns:p14="http://schemas.microsoft.com/office/powerpoint/2010/main" val="567565778"/>
+        <p14:creationId xmlns:p14="http://schemas.microsoft.com/office/powerpoint/2010/main" val="3112891430"/>
       </p:ext>
     </p:extLst>
   </p:cSld>
@@ -8279,10 +8971,10 @@
       </p:grpSpPr>
       <p:sp useBgFill="1">
         <p:nvSpPr>
-          <p:cNvPr id="16" name="Slide Background">
-            <a:extLst>
-              <a:ext uri="{FF2B5EF4-FFF2-40B4-BE49-F238E27FC236}">
-                <a16:creationId xmlns:a16="http://schemas.microsoft.com/office/drawing/2014/main" id="{C0763A76-9F1C-4FC5-82B7-DD475DA461B2}"/>
+          <p:cNvPr id="43" name="Slide Background">
+            <a:extLst>
+              <a:ext uri="{FF2B5EF4-FFF2-40B4-BE49-F238E27FC236}">
+                <a16:creationId xmlns:a16="http://schemas.microsoft.com/office/drawing/2014/main" id="{9F7D5CDA-D291-4307-BF55-1381FED29634}"/>
               </a:ext>
               <a:ext uri="{C183D7F6-B498-43B3-948B-1728B52AA6E4}">
                 <adec:decorative xmlns:adec="http://schemas.microsoft.com/office/drawing/2017/decorative" val="1"/>
@@ -8300,10 +8992,10 @@
             </p:extLst>
           </p:nvPr>
         </p:nvSpPr>
-        <p:spPr bwMode="white">
+        <p:spPr>
           <a:xfrm>
-            <a:off x="-1" y="0"/>
-            <a:ext cx="12191999" cy="6858000"/>
+            <a:off x="0" y="0"/>
+            <a:ext cx="12192000" cy="6858000"/>
           </a:xfrm>
           <a:prstGeom prst="rect">
             <a:avLst/>
@@ -8330,113 +9022,48 @@
         </p:style>
         <p:txBody>
           <a:bodyPr rtlCol="0" anchor="ctr"/>
-          <a:lstStyle>
-            <a:defPPr>
-              <a:defRPr lang="en-US"/>
-            </a:defPPr>
-            <a:lvl1pPr marL="0" algn="l" defTabSz="914400" rtl="0" eaLnBrk="1" latinLnBrk="0" hangingPunct="1">
-              <a:defRPr sz="1800" kern="1200">
-                <a:solidFill>
-                  <a:schemeClr val="lt1"/>
-                </a:solidFill>
-                <a:latin typeface="+mn-lt"/>
-                <a:ea typeface="+mn-ea"/>
-                <a:cs typeface="+mn-cs"/>
-              </a:defRPr>
-            </a:lvl1pPr>
-            <a:lvl2pPr marL="457200" algn="l" defTabSz="914400" rtl="0" eaLnBrk="1" latinLnBrk="0" hangingPunct="1">
-              <a:defRPr sz="1800" kern="1200">
-                <a:solidFill>
-                  <a:schemeClr val="lt1"/>
-                </a:solidFill>
-                <a:latin typeface="+mn-lt"/>
-                <a:ea typeface="+mn-ea"/>
-                <a:cs typeface="+mn-cs"/>
-              </a:defRPr>
-            </a:lvl2pPr>
-            <a:lvl3pPr marL="914400" algn="l" defTabSz="914400" rtl="0" eaLnBrk="1" latinLnBrk="0" hangingPunct="1">
-              <a:defRPr sz="1800" kern="1200">
-                <a:solidFill>
-                  <a:schemeClr val="lt1"/>
-                </a:solidFill>
-                <a:latin typeface="+mn-lt"/>
-                <a:ea typeface="+mn-ea"/>
-                <a:cs typeface="+mn-cs"/>
-              </a:defRPr>
-            </a:lvl3pPr>
-            <a:lvl4pPr marL="1371600" algn="l" defTabSz="914400" rtl="0" eaLnBrk="1" latinLnBrk="0" hangingPunct="1">
-              <a:defRPr sz="1800" kern="1200">
-                <a:solidFill>
-                  <a:schemeClr val="lt1"/>
-                </a:solidFill>
-                <a:latin typeface="+mn-lt"/>
-                <a:ea typeface="+mn-ea"/>
-                <a:cs typeface="+mn-cs"/>
-              </a:defRPr>
-            </a:lvl4pPr>
-            <a:lvl5pPr marL="1828800" algn="l" defTabSz="914400" rtl="0" eaLnBrk="1" latinLnBrk="0" hangingPunct="1">
-              <a:defRPr sz="1800" kern="1200">
-                <a:solidFill>
-                  <a:schemeClr val="lt1"/>
-                </a:solidFill>
-                <a:latin typeface="+mn-lt"/>
-                <a:ea typeface="+mn-ea"/>
-                <a:cs typeface="+mn-cs"/>
-              </a:defRPr>
-            </a:lvl5pPr>
-            <a:lvl6pPr marL="2286000" algn="l" defTabSz="914400" rtl="0" eaLnBrk="1" latinLnBrk="0" hangingPunct="1">
-              <a:defRPr sz="1800" kern="1200">
-                <a:solidFill>
-                  <a:schemeClr val="lt1"/>
-                </a:solidFill>
-                <a:latin typeface="+mn-lt"/>
-                <a:ea typeface="+mn-ea"/>
-                <a:cs typeface="+mn-cs"/>
-              </a:defRPr>
-            </a:lvl6pPr>
-            <a:lvl7pPr marL="2743200" algn="l" defTabSz="914400" rtl="0" eaLnBrk="1" latinLnBrk="0" hangingPunct="1">
-              <a:defRPr sz="1800" kern="1200">
-                <a:solidFill>
-                  <a:schemeClr val="lt1"/>
-                </a:solidFill>
-                <a:latin typeface="+mn-lt"/>
-                <a:ea typeface="+mn-ea"/>
-                <a:cs typeface="+mn-cs"/>
-              </a:defRPr>
-            </a:lvl7pPr>
-            <a:lvl8pPr marL="3200400" algn="l" defTabSz="914400" rtl="0" eaLnBrk="1" latinLnBrk="0" hangingPunct="1">
-              <a:defRPr sz="1800" kern="1200">
-                <a:solidFill>
-                  <a:schemeClr val="lt1"/>
-                </a:solidFill>
-                <a:latin typeface="+mn-lt"/>
-                <a:ea typeface="+mn-ea"/>
-                <a:cs typeface="+mn-cs"/>
-              </a:defRPr>
-            </a:lvl8pPr>
-            <a:lvl9pPr marL="3657600" algn="l" defTabSz="914400" rtl="0" eaLnBrk="1" latinLnBrk="0" hangingPunct="1">
-              <a:defRPr sz="1800" kern="1200">
-                <a:solidFill>
-                  <a:schemeClr val="lt1"/>
-                </a:solidFill>
-                <a:latin typeface="+mn-lt"/>
-                <a:ea typeface="+mn-ea"/>
-                <a:cs typeface="+mn-cs"/>
-              </a:defRPr>
-            </a:lvl9pPr>
-          </a:lstStyle>
+          <a:lstStyle/>
           <a:p>
             <a:pPr algn="ctr"/>
-            <a:endParaRPr lang="en-US" dirty="0"/>
-          </a:p>
-        </p:txBody>
-      </p:sp>
+            <a:endParaRPr lang="en-US"/>
+          </a:p>
+        </p:txBody>
+      </p:sp>
+      <p:pic>
+        <p:nvPicPr>
+          <p:cNvPr id="20" name="Picture 6" descr="Hands on keyboard and mouse">
+            <a:extLst>
+              <a:ext uri="{FF2B5EF4-FFF2-40B4-BE49-F238E27FC236}">
+                <a16:creationId xmlns:a16="http://schemas.microsoft.com/office/drawing/2014/main" id="{F697300D-85D4-02BA-46CA-6D444AA9FB97}"/>
+              </a:ext>
+            </a:extLst>
+          </p:cNvPr>
+          <p:cNvPicPr>
+            <a:picLocks noChangeAspect="1"/>
+          </p:cNvPicPr>
+          <p:nvPr/>
+        </p:nvPicPr>
+        <p:blipFill rotWithShape="1">
+          <a:blip r:embed="rId2"/>
+          <a:srcRect l="28395" r="12339" b="-1"/>
+          <a:stretch/>
+        </p:blipFill>
+        <p:spPr>
+          <a:xfrm>
+            <a:off x="6103027" y="10"/>
+            <a:ext cx="6088971" cy="6857990"/>
+          </a:xfrm>
+          <a:prstGeom prst="rect">
+            <a:avLst/>
+          </a:prstGeom>
+        </p:spPr>
+      </p:pic>
       <p:sp useBgFill="1">
         <p:nvSpPr>
-          <p:cNvPr id="18" name="Rectangle 17">
-            <a:extLst>
-              <a:ext uri="{FF2B5EF4-FFF2-40B4-BE49-F238E27FC236}">
-                <a16:creationId xmlns:a16="http://schemas.microsoft.com/office/drawing/2014/main" id="{E81BF4F6-F2CF-4984-9D14-D6966D92F99F}"/>
+          <p:cNvPr id="45" name="Rectangle 44">
+            <a:extLst>
+              <a:ext uri="{FF2B5EF4-FFF2-40B4-BE49-F238E27FC236}">
+                <a16:creationId xmlns:a16="http://schemas.microsoft.com/office/drawing/2014/main" id="{59B296B9-C5A5-4E4F-9B60-C907B5F1466C}"/>
               </a:ext>
               <a:ext uri="{C183D7F6-B498-43B3-948B-1728B52AA6E4}">
                 <adec:decorative xmlns:adec="http://schemas.microsoft.com/office/drawing/2017/decorative" val="1"/>
@@ -8456,8 +9083,8 @@
         </p:nvSpPr>
         <p:spPr>
           <a:xfrm>
-            <a:off x="1" y="0"/>
-            <a:ext cx="8522446" cy="2285999"/>
+            <a:off x="0" y="0"/>
+            <a:ext cx="6103025" cy="6858000"/>
           </a:xfrm>
           <a:prstGeom prst="rect">
             <a:avLst/>
@@ -8466,9 +9093,9 @@
             <a:noFill/>
           </a:ln>
           <a:effectLst>
-            <a:outerShdw blurRad="596900" dist="304800" dir="7140000" sx="90000" sy="90000" algn="t" rotWithShape="0">
+            <a:outerShdw blurRad="889000" dist="406400" dir="21540000" sx="90000" sy="90000" algn="t" rotWithShape="0">
               <a:srgbClr val="000000">
-                <a:alpha val="15000"/>
+                <a:alpha val="20000"/>
               </a:srgbClr>
             </a:outerShdw>
           </a:effectLst>
@@ -8494,30 +9121,97 @@
           <a:lstStyle/>
           <a:p>
             <a:pPr algn="ctr"/>
-            <a:endParaRPr lang="en-US" dirty="0"/>
-          </a:p>
-        </p:txBody>
-      </p:sp>
-      <p:sp>
-        <p:nvSpPr>
-          <p:cNvPr id="2" name="Título 1">
-            <a:extLst>
-              <a:ext uri="{FF2B5EF4-FFF2-40B4-BE49-F238E27FC236}">
-                <a16:creationId xmlns:a16="http://schemas.microsoft.com/office/drawing/2014/main" id="{42C9CCDD-7F42-FFCC-3807-54BD3E902B5B}"/>
-              </a:ext>
-            </a:extLst>
-          </p:cNvPr>
-          <p:cNvSpPr>
-            <a:spLocks noGrp="1"/>
-          </p:cNvSpPr>
-          <p:nvPr>
-            <p:ph type="title"/>
+            <a:endParaRPr lang="en-US"/>
+          </a:p>
+        </p:txBody>
+      </p:sp>
+      <p:sp useBgFill="1">
+        <p:nvSpPr>
+          <p:cNvPr id="47" name="Rectangle 46">
+            <a:extLst>
+              <a:ext uri="{FF2B5EF4-FFF2-40B4-BE49-F238E27FC236}">
+                <a16:creationId xmlns:a16="http://schemas.microsoft.com/office/drawing/2014/main" id="{D0300FD3-5AF1-6305-15FA-9078072672E2}"/>
+              </a:ext>
+              <a:ext uri="{C183D7F6-B498-43B3-948B-1728B52AA6E4}">
+                <adec:decorative xmlns:adec="http://schemas.microsoft.com/office/drawing/2017/decorative" val="1"/>
+              </a:ext>
+            </a:extLst>
+          </p:cNvPr>
+          <p:cNvSpPr>
+            <a:spLocks noGrp="1" noRot="1" noChangeAspect="1" noMove="1" noResize="1" noEditPoints="1" noAdjustHandles="1" noChangeArrowheads="1" noChangeShapeType="1" noTextEdit="1"/>
+          </p:cNvSpPr>
+          <p:nvPr>
+            <p:extLst>
+              <p:ext uri="{386F3935-93C4-4BCD-93E2-E3B085C9AB24}">
+                <p16:designElem xmlns:p16="http://schemas.microsoft.com/office/powerpoint/2015/main" val="1"/>
+              </p:ext>
+            </p:extLst>
           </p:nvPr>
         </p:nvSpPr>
         <p:spPr>
           <a:xfrm>
-            <a:off x="761803" y="350196"/>
-            <a:ext cx="4646904" cy="1624520"/>
+            <a:off x="0" y="0"/>
+            <a:ext cx="6103025" cy="2285995"/>
+          </a:xfrm>
+          <a:prstGeom prst="rect">
+            <a:avLst/>
+          </a:prstGeom>
+          <a:ln>
+            <a:noFill/>
+          </a:ln>
+          <a:effectLst>
+            <a:outerShdw blurRad="254000" dist="127000" dir="5460000" sx="92000" sy="92000" algn="t" rotWithShape="0">
+              <a:srgbClr val="000000">
+                <a:alpha val="30000"/>
+              </a:srgbClr>
+            </a:outerShdw>
+          </a:effectLst>
+        </p:spPr>
+        <p:style>
+          <a:lnRef idx="2">
+            <a:schemeClr val="accent1">
+              <a:shade val="50000"/>
+            </a:schemeClr>
+          </a:lnRef>
+          <a:fillRef idx="1">
+            <a:schemeClr val="accent1"/>
+          </a:fillRef>
+          <a:effectRef idx="0">
+            <a:schemeClr val="accent1"/>
+          </a:effectRef>
+          <a:fontRef idx="minor">
+            <a:schemeClr val="lt1"/>
+          </a:fontRef>
+        </p:style>
+        <p:txBody>
+          <a:bodyPr rtlCol="0" anchor="ctr"/>
+          <a:lstStyle/>
+          <a:p>
+            <a:pPr algn="ctr"/>
+            <a:endParaRPr lang="en-US"/>
+          </a:p>
+        </p:txBody>
+      </p:sp>
+      <p:sp>
+        <p:nvSpPr>
+          <p:cNvPr id="2" name="Título 1">
+            <a:extLst>
+              <a:ext uri="{FF2B5EF4-FFF2-40B4-BE49-F238E27FC236}">
+                <a16:creationId xmlns:a16="http://schemas.microsoft.com/office/drawing/2014/main" id="{33446C54-F7AE-CA4F-E5CE-50948D8171E6}"/>
+              </a:ext>
+            </a:extLst>
+          </p:cNvPr>
+          <p:cNvSpPr>
+            <a:spLocks noGrp="1"/>
+          </p:cNvSpPr>
+          <p:nvPr>
+            <p:ph type="title"/>
+          </p:nvPr>
+        </p:nvSpPr>
+        <p:spPr>
+          <a:xfrm>
+            <a:off x="761801" y="328512"/>
+            <a:ext cx="4778387" cy="1628970"/>
           </a:xfrm>
         </p:spPr>
         <p:txBody>
@@ -8528,7 +9222,7 @@
           <a:p>
             <a:r>
               <a:rPr lang="pt-PT" sz="4000" dirty="0"/>
-              <a:t>Development</a:t>
+              <a:t>User Interaction</a:t>
             </a:r>
           </a:p>
         </p:txBody>
@@ -8538,7 +9232,7 @@
           <p:cNvPr id="3" name="Marcador de Posição de Conteúdo 2">
             <a:extLst>
               <a:ext uri="{FF2B5EF4-FFF2-40B4-BE49-F238E27FC236}">
-                <a16:creationId xmlns:a16="http://schemas.microsoft.com/office/drawing/2014/main" id="{C25F349C-DF7A-76B3-539A-D9AC348B7850}"/>
+                <a16:creationId xmlns:a16="http://schemas.microsoft.com/office/drawing/2014/main" id="{02672098-09A7-756F-7E43-F974D6424264}"/>
               </a:ext>
             </a:extLst>
           </p:cNvPr>
@@ -8551,8 +9245,8 @@
         </p:nvSpPr>
         <p:spPr>
           <a:xfrm>
-            <a:off x="761802" y="2743200"/>
-            <a:ext cx="4646905" cy="3613149"/>
+            <a:off x="761801" y="2884929"/>
+            <a:ext cx="4659756" cy="3374137"/>
           </a:xfrm>
         </p:spPr>
         <p:txBody>
@@ -8561,92 +9255,33 @@
           </a:bodyPr>
           <a:lstStyle/>
           <a:p>
-            <a:pPr algn="just">
-              <a:lnSpc>
-                <a:spcPct val="100000"/>
-              </a:lnSpc>
+            <a:pPr>
               <a:buFont typeface="Symbol" panose="05050102010706020507" pitchFamily="18" charset="2"/>
               <a:buChar char="-"/>
             </a:pPr>
             <a:r>
               <a:rPr lang="en-US" sz="2000" dirty="0"/>
-              <a:t>The code is organized into different sections to facilitate understanding and maintenance.</a:t>
-            </a:r>
-          </a:p>
-          <a:p>
-            <a:pPr algn="just">
-              <a:lnSpc>
-                <a:spcPct val="100000"/>
-              </a:lnSpc>
+              <a:t>With the mouse the user can shot bullets at the Ghost.</a:t>
+            </a:r>
+            <a:endParaRPr lang="en-US" sz="2000"/>
+          </a:p>
+          <a:p>
+            <a:pPr>
               <a:buFont typeface="Symbol" panose="05050102010706020507" pitchFamily="18" charset="2"/>
               <a:buChar char="-"/>
             </a:pPr>
-            <a:r>
-              <a:rPr lang="en-US" sz="2000" dirty="0"/>
-              <a:t>Collisions and Event Detection.</a:t>
-            </a:r>
-          </a:p>
-          <a:p>
-            <a:pPr algn="just">
-              <a:lnSpc>
-                <a:spcPct val="100000"/>
-              </a:lnSpc>
+            <a:endParaRPr lang="en-US" sz="2000"/>
+          </a:p>
+          <a:p>
+            <a:pPr>
               <a:buFont typeface="Symbol" panose="05050102010706020507" pitchFamily="18" charset="2"/>
               <a:buChar char="-"/>
             </a:pPr>
             <a:r>
               <a:rPr lang="en-US" sz="2000" dirty="0"/>
-              <a:t>Position and Rotation Update.</a:t>
-            </a:r>
-          </a:p>
-          <a:p>
-            <a:pPr algn="just">
-              <a:lnSpc>
-                <a:spcPct val="100000"/>
-              </a:lnSpc>
-              <a:buFont typeface="Symbol" panose="05050102010706020507" pitchFamily="18" charset="2"/>
-              <a:buChar char="-"/>
-            </a:pPr>
-            <a:endParaRPr lang="en-US" sz="2000" dirty="0"/>
-          </a:p>
-          <a:p>
-            <a:pPr algn="just">
-              <a:lnSpc>
-                <a:spcPct val="100000"/>
-              </a:lnSpc>
-              <a:buFont typeface="Symbol" panose="05050102010706020507" pitchFamily="18" charset="2"/>
-              <a:buChar char="-"/>
-            </a:pPr>
-            <a:r>
-              <a:rPr lang="pt-PT" sz="2000" dirty="0"/>
-              <a:t>Difficulties:</a:t>
-            </a:r>
-          </a:p>
-          <a:p>
-            <a:pPr lvl="1" algn="just">
-              <a:lnSpc>
-                <a:spcPct val="100000"/>
-              </a:lnSpc>
-              <a:buFont typeface="Symbol" panose="05050102010706020507" pitchFamily="18" charset="2"/>
-              <a:buChar char="-"/>
-            </a:pPr>
-            <a:r>
-              <a:rPr lang="pt-PT" sz="2000" dirty="0"/>
-              <a:t>Collision Management</a:t>
-            </a:r>
-          </a:p>
-          <a:p>
-            <a:pPr lvl="1" algn="just">
-              <a:lnSpc>
-                <a:spcPct val="100000"/>
-              </a:lnSpc>
-              <a:buFont typeface="Symbol" panose="05050102010706020507" pitchFamily="18" charset="2"/>
-              <a:buChar char="-"/>
-            </a:pPr>
-            <a:r>
-              <a:rPr lang="pt-PT" sz="2000" dirty="0"/>
-              <a:t>Performance Optimization</a:t>
-            </a:r>
+              <a:t>Using the WASD keys in the keyboard and the SPACE bar the user can move around the map.</a:t>
+            </a:r>
+            <a:endParaRPr lang="en-US" sz="2000"/>
           </a:p>
         </p:txBody>
       </p:sp>
@@ -8655,7 +9290,7 @@
           <p:cNvPr id="6" name="Marcador de Posição da Data 3">
             <a:extLst>
               <a:ext uri="{FF2B5EF4-FFF2-40B4-BE49-F238E27FC236}">
-                <a16:creationId xmlns:a16="http://schemas.microsoft.com/office/drawing/2014/main" id="{9ED20EE6-852D-1387-4E9C-0E925B78142B}"/>
+                <a16:creationId xmlns:a16="http://schemas.microsoft.com/office/drawing/2014/main" id="{9DEC26D1-9B75-2C97-F0C4-7EEBEEAE11F9}"/>
               </a:ext>
             </a:extLst>
           </p:cNvPr>
@@ -8668,8 +9303,8 @@
         </p:nvSpPr>
         <p:spPr>
           <a:xfrm>
-            <a:off x="761802" y="6356350"/>
-            <a:ext cx="2819598" cy="365125"/>
+            <a:off x="761801" y="6356350"/>
+            <a:ext cx="2743200" cy="365125"/>
           </a:xfrm>
         </p:spPr>
         <p:txBody>
@@ -8684,7 +9319,7 @@
               </a:spcAft>
             </a:pPr>
             <a:r>
-              <a:rPr lang="pt-PT" dirty="0">
+              <a:rPr lang="pt-PT">
                 <a:solidFill>
                   <a:schemeClr val="tx1"/>
                 </a:solidFill>
@@ -8694,55 +9329,26 @@
           </a:p>
         </p:txBody>
       </p:sp>
-      <p:pic>
-        <p:nvPicPr>
-          <p:cNvPr id="7" name="Picture 6" descr="Computer script on a screen">
-            <a:extLst>
-              <a:ext uri="{FF2B5EF4-FFF2-40B4-BE49-F238E27FC236}">
-                <a16:creationId xmlns:a16="http://schemas.microsoft.com/office/drawing/2014/main" id="{DDF14196-F223-ADCE-F3CC-8573A5AB48A0}"/>
-              </a:ext>
-            </a:extLst>
-          </p:cNvPr>
-          <p:cNvPicPr>
-            <a:picLocks noChangeAspect="1"/>
-          </p:cNvPicPr>
-          <p:nvPr/>
-        </p:nvPicPr>
-        <p:blipFill rotWithShape="1">
-          <a:blip r:embed="rId2"/>
-          <a:srcRect l="87" r="40512" b="-2"/>
-          <a:stretch/>
-        </p:blipFill>
+      <p:sp>
+        <p:nvSpPr>
+          <p:cNvPr id="5" name="Marcador de Posição do Número do Diapositivo 4">
+            <a:extLst>
+              <a:ext uri="{FF2B5EF4-FFF2-40B4-BE49-F238E27FC236}">
+                <a16:creationId xmlns:a16="http://schemas.microsoft.com/office/drawing/2014/main" id="{C6690917-D9BF-558B-1172-6B72C41CE0A0}"/>
+              </a:ext>
+            </a:extLst>
+          </p:cNvPr>
+          <p:cNvSpPr>
+            <a:spLocks noGrp="1"/>
+          </p:cNvSpPr>
+          <p:nvPr>
+            <p:ph type="sldNum" sz="quarter" idx="12"/>
+          </p:nvPr>
+        </p:nvSpPr>
         <p:spPr>
           <a:xfrm>
-            <a:off x="6096000" y="1"/>
-            <a:ext cx="6102825" cy="6858000"/>
-          </a:xfrm>
-          <a:prstGeom prst="rect">
-            <a:avLst/>
-          </a:prstGeom>
-        </p:spPr>
-      </p:pic>
-      <p:sp>
-        <p:nvSpPr>
-          <p:cNvPr id="5" name="Marcador de Posição do Número do Diapositivo 4">
-            <a:extLst>
-              <a:ext uri="{FF2B5EF4-FFF2-40B4-BE49-F238E27FC236}">
-                <a16:creationId xmlns:a16="http://schemas.microsoft.com/office/drawing/2014/main" id="{1D3DFBEB-7750-F056-BE82-8158E725F8BE}"/>
-              </a:ext>
-            </a:extLst>
-          </p:cNvPr>
-          <p:cNvSpPr>
-            <a:spLocks noGrp="1"/>
-          </p:cNvSpPr>
-          <p:nvPr>
-            <p:ph type="sldNum" sz="quarter" idx="12"/>
-          </p:nvPr>
-        </p:nvSpPr>
-        <p:spPr>
-          <a:xfrm>
-            <a:off x="8732520" y="6356350"/>
-            <a:ext cx="3200400" cy="365125"/>
+            <a:off x="10515600" y="6356350"/>
+            <a:ext cx="1462825" cy="365125"/>
           </a:xfrm>
         </p:spPr>
         <p:txBody>
@@ -8769,7 +9375,7 @@
               </a:pPr>
               <a:t>7</a:t>
             </a:fld>
-            <a:endParaRPr lang="pt-PT" dirty="0">
+            <a:endParaRPr lang="pt-PT">
               <a:solidFill>
                 <a:srgbClr val="FFFFFF"/>
               </a:solidFill>
@@ -8780,7 +9386,7 @@
     </p:spTree>
     <p:extLst>
       <p:ext uri="{BB962C8B-B14F-4D97-AF65-F5344CB8AC3E}">
-        <p14:creationId xmlns:p14="http://schemas.microsoft.com/office/powerpoint/2010/main" val="2832385390"/>
+        <p14:creationId xmlns:p14="http://schemas.microsoft.com/office/powerpoint/2010/main" val="567565778"/>
       </p:ext>
     </p:extLst>
   </p:cSld>
@@ -8817,7 +9423,7 @@
       </p:grpSpPr>
       <p:sp useBgFill="1">
         <p:nvSpPr>
-          <p:cNvPr id="11" name="Slide Background">
+          <p:cNvPr id="39" name="Slide Background">
             <a:extLst>
               <a:ext uri="{FF2B5EF4-FFF2-40B4-BE49-F238E27FC236}">
                 <a16:creationId xmlns:a16="http://schemas.microsoft.com/office/drawing/2014/main" id="{3ECBE1F1-D69B-4AFA-ABD5-8E41720EF6DE}"/>
@@ -8871,16 +9477,16 @@
           <a:lstStyle/>
           <a:p>
             <a:pPr algn="ctr"/>
-            <a:endParaRPr lang="en-US" dirty="0"/>
+            <a:endParaRPr lang="en-US"/>
           </a:p>
         </p:txBody>
       </p:sp>
       <p:pic>
         <p:nvPicPr>
-          <p:cNvPr id="7" name="Picture 6" descr="Light bulb on yellow background with sketched light beams and cord">
-            <a:extLst>
-              <a:ext uri="{FF2B5EF4-FFF2-40B4-BE49-F238E27FC236}">
-                <a16:creationId xmlns:a16="http://schemas.microsoft.com/office/drawing/2014/main" id="{1D6FD1B4-CA86-95E3-721F-84754E4148ED}"/>
+          <p:cNvPr id="7" name="Picture 6" descr="Computer script on a screen">
+            <a:extLst>
+              <a:ext uri="{FF2B5EF4-FFF2-40B4-BE49-F238E27FC236}">
+                <a16:creationId xmlns:a16="http://schemas.microsoft.com/office/drawing/2014/main" id="{DDF14196-F223-ADCE-F3CC-8573A5AB48A0}"/>
               </a:ext>
             </a:extLst>
           </p:cNvPr>
@@ -8891,7 +9497,7 @@
         </p:nvPicPr>
         <p:blipFill rotWithShape="1">
           <a:blip r:embed="rId2"/>
-          <a:srcRect l="47871" r="3613"/>
+          <a:srcRect l="3458" r="43883" b="-2"/>
           <a:stretch/>
         </p:blipFill>
         <p:spPr>
@@ -8906,7 +9512,7 @@
       </p:pic>
       <p:sp useBgFill="1">
         <p:nvSpPr>
-          <p:cNvPr id="13" name="Rectangle 12">
+          <p:cNvPr id="41" name="Rectangle 40">
             <a:extLst>
               <a:ext uri="{FF2B5EF4-FFF2-40B4-BE49-F238E27FC236}">
                 <a16:creationId xmlns:a16="http://schemas.microsoft.com/office/drawing/2014/main" id="{603A6265-E10C-4B85-9C20-E75FCAF9CC63}"/>
@@ -8967,7 +9573,7 @@
           <a:lstStyle/>
           <a:p>
             <a:pPr algn="ctr"/>
-            <a:endParaRPr lang="en-US" dirty="0"/>
+            <a:endParaRPr lang="en-US"/>
           </a:p>
         </p:txBody>
       </p:sp>
@@ -8976,7 +9582,7 @@
           <p:cNvPr id="2" name="Título 1">
             <a:extLst>
               <a:ext uri="{FF2B5EF4-FFF2-40B4-BE49-F238E27FC236}">
-                <a16:creationId xmlns:a16="http://schemas.microsoft.com/office/drawing/2014/main" id="{06EE0CD9-859B-FFDC-7F6F-65A1864810C7}"/>
+                <a16:creationId xmlns:a16="http://schemas.microsoft.com/office/drawing/2014/main" id="{42C9CCDD-7F42-FFCC-3807-54BD3E902B5B}"/>
               </a:ext>
             </a:extLst>
           </p:cNvPr>
@@ -9001,7 +9607,7 @@
           <a:p>
             <a:r>
               <a:rPr lang="pt-PT" sz="4000" dirty="0"/>
-              <a:t>Conclusions</a:t>
+              <a:t>Development</a:t>
             </a:r>
           </a:p>
         </p:txBody>
@@ -9011,7 +9617,7 @@
           <p:cNvPr id="3" name="Marcador de Posição de Conteúdo 2">
             <a:extLst>
               <a:ext uri="{FF2B5EF4-FFF2-40B4-BE49-F238E27FC236}">
-                <a16:creationId xmlns:a16="http://schemas.microsoft.com/office/drawing/2014/main" id="{63326C6E-5F1E-0E8D-F642-983D87164C61}"/>
+                <a16:creationId xmlns:a16="http://schemas.microsoft.com/office/drawing/2014/main" id="{C25F349C-DF7A-76B3-539A-D9AC348B7850}"/>
               </a:ext>
             </a:extLst>
           </p:cNvPr>
@@ -9034,18 +9640,121 @@
           </a:bodyPr>
           <a:lstStyle/>
           <a:p>
-            <a:pPr algn="just">
-              <a:lnSpc>
-                <a:spcPct val="100000"/>
-              </a:lnSpc>
+            <a:pPr>
               <a:buFont typeface="Symbol" panose="05050102010706020507" pitchFamily="18" charset="2"/>
               <a:buChar char="-"/>
             </a:pPr>
             <a:r>
               <a:rPr lang="en-US" sz="2000" dirty="0"/>
-              <a:t>In conclusion, all goals were successfully achieved, albeit with some challenges encountered along the way and various project ideas considered throughout the development process.</a:t>
-            </a:r>
-            <a:endParaRPr lang="pt-PT" sz="2000" dirty="0"/>
+              <a:t>The code is organized into different sections to facilitate understanding and maintenance.</a:t>
+            </a:r>
+            <a:endParaRPr lang="en-US" sz="2000"/>
+          </a:p>
+          <a:p>
+            <a:pPr>
+              <a:buFont typeface="Symbol" panose="05050102010706020507" pitchFamily="18" charset="2"/>
+              <a:buChar char="-"/>
+            </a:pPr>
+            <a:r>
+              <a:rPr lang="en-US" sz="2000" dirty="0"/>
+              <a:t>Collisions and Event Detection.</a:t>
+            </a:r>
+            <a:endParaRPr lang="en-US" sz="2000"/>
+          </a:p>
+          <a:p>
+            <a:pPr>
+              <a:buFont typeface="Symbol" panose="05050102010706020507" pitchFamily="18" charset="2"/>
+              <a:buChar char="-"/>
+            </a:pPr>
+            <a:r>
+              <a:rPr lang="en-US" sz="2000" dirty="0"/>
+              <a:t>Position and Rotation Update.</a:t>
+            </a:r>
+            <a:endParaRPr lang="en-US" sz="2000"/>
+          </a:p>
+          <a:p>
+            <a:pPr>
+              <a:buFont typeface="Symbol" panose="05050102010706020507" pitchFamily="18" charset="2"/>
+              <a:buChar char="-"/>
+            </a:pPr>
+            <a:endParaRPr lang="en-US" sz="2000"/>
+          </a:p>
+          <a:p>
+            <a:pPr>
+              <a:buFont typeface="Symbol" panose="05050102010706020507" pitchFamily="18" charset="2"/>
+              <a:buChar char="-"/>
+            </a:pPr>
+            <a:r>
+              <a:rPr lang="pt-PT" sz="2000" dirty="0"/>
+              <a:t>Difficulties:</a:t>
+            </a:r>
+            <a:endParaRPr lang="pt-PT" sz="2000"/>
+          </a:p>
+          <a:p>
+            <a:pPr lvl="1">
+              <a:buFont typeface="Symbol" panose="05050102010706020507" pitchFamily="18" charset="2"/>
+              <a:buChar char="-"/>
+            </a:pPr>
+            <a:r>
+              <a:rPr lang="pt-PT" sz="2000" dirty="0"/>
+              <a:t>Collision Management</a:t>
+            </a:r>
+            <a:endParaRPr lang="pt-PT" sz="2000"/>
+          </a:p>
+          <a:p>
+            <a:pPr lvl="1">
+              <a:buFont typeface="Symbol" panose="05050102010706020507" pitchFamily="18" charset="2"/>
+              <a:buChar char="-"/>
+            </a:pPr>
+            <a:r>
+              <a:rPr lang="pt-PT" sz="2000" dirty="0"/>
+              <a:t>Performance Optimization</a:t>
+            </a:r>
+            <a:endParaRPr lang="pt-PT" sz="2000"/>
+          </a:p>
+        </p:txBody>
+      </p:sp>
+      <p:sp>
+        <p:nvSpPr>
+          <p:cNvPr id="6" name="Marcador de Posição da Data 3">
+            <a:extLst>
+              <a:ext uri="{FF2B5EF4-FFF2-40B4-BE49-F238E27FC236}">
+                <a16:creationId xmlns:a16="http://schemas.microsoft.com/office/drawing/2014/main" id="{9ED20EE6-852D-1387-4E9C-0E925B78142B}"/>
+              </a:ext>
+            </a:extLst>
+          </p:cNvPr>
+          <p:cNvSpPr>
+            <a:spLocks noGrp="1"/>
+          </p:cNvSpPr>
+          <p:nvPr>
+            <p:ph type="dt" sz="half" idx="10"/>
+          </p:nvPr>
+        </p:nvSpPr>
+        <p:spPr>
+          <a:xfrm>
+            <a:off x="758952" y="6356350"/>
+            <a:ext cx="2743200" cy="365125"/>
+          </a:xfrm>
+        </p:spPr>
+        <p:txBody>
+          <a:bodyPr>
+            <a:normAutofit/>
+          </a:bodyPr>
+          <a:lstStyle/>
+          <a:p>
+            <a:pPr>
+              <a:spcAft>
+                <a:spcPts val="600"/>
+              </a:spcAft>
+            </a:pPr>
+            <a:r>
+              <a:rPr lang="pt-PT">
+                <a:solidFill>
+                  <a:srgbClr val="FFFFFF"/>
+                </a:solidFill>
+              </a:rPr>
+              <a:t>ICG - 2023/2024</a:t>
+            </a:r>
           </a:p>
         </p:txBody>
       </p:sp>
@@ -9054,7 +9763,7 @@
           <p:cNvPr id="5" name="Marcador de Posição do Número do Diapositivo 4">
             <a:extLst>
               <a:ext uri="{FF2B5EF4-FFF2-40B4-BE49-F238E27FC236}">
-                <a16:creationId xmlns:a16="http://schemas.microsoft.com/office/drawing/2014/main" id="{09584837-1C74-DD42-E69B-D85B02C81CBA}"/>
+                <a16:creationId xmlns:a16="http://schemas.microsoft.com/office/drawing/2014/main" id="{1D3DFBEB-7750-F056-BE82-8158E725F8BE}"/>
               </a:ext>
             </a:extLst>
           </p:cNvPr>
@@ -9095,7 +9804,7 @@
               </a:pPr>
               <a:t>8</a:t>
             </a:fld>
-            <a:endParaRPr lang="pt-PT" dirty="0">
+            <a:endParaRPr lang="pt-PT">
               <a:solidFill>
                 <a:schemeClr val="tx1"/>
               </a:solidFill>
@@ -9103,54 +9812,10 @@
           </a:p>
         </p:txBody>
       </p:sp>
-      <p:sp>
-        <p:nvSpPr>
-          <p:cNvPr id="6" name="Marcador de Posição da Data 3">
-            <a:extLst>
-              <a:ext uri="{FF2B5EF4-FFF2-40B4-BE49-F238E27FC236}">
-                <a16:creationId xmlns:a16="http://schemas.microsoft.com/office/drawing/2014/main" id="{029FED57-33C5-855C-4776-592884EB5D56}"/>
-              </a:ext>
-            </a:extLst>
-          </p:cNvPr>
-          <p:cNvSpPr>
-            <a:spLocks noGrp="1"/>
-          </p:cNvSpPr>
-          <p:nvPr>
-            <p:ph type="dt" sz="half" idx="10"/>
-          </p:nvPr>
-        </p:nvSpPr>
-        <p:spPr>
-          <a:xfrm>
-            <a:off x="243025" y="6356349"/>
-            <a:ext cx="2743200" cy="365125"/>
-          </a:xfrm>
-        </p:spPr>
-        <p:txBody>
-          <a:bodyPr>
-            <a:normAutofit/>
-          </a:bodyPr>
-          <a:lstStyle/>
-          <a:p>
-            <a:pPr>
-              <a:spcAft>
-                <a:spcPts val="600"/>
-              </a:spcAft>
-            </a:pPr>
-            <a:r>
-              <a:rPr lang="pt-PT" dirty="0">
-                <a:solidFill>
-                  <a:schemeClr val="bg1"/>
-                </a:solidFill>
-              </a:rPr>
-              <a:t>ICG - 2023/2024</a:t>
-            </a:r>
-          </a:p>
-        </p:txBody>
-      </p:sp>
     </p:spTree>
     <p:extLst>
       <p:ext uri="{BB962C8B-B14F-4D97-AF65-F5344CB8AC3E}">
-        <p14:creationId xmlns:p14="http://schemas.microsoft.com/office/powerpoint/2010/main" val="3173771447"/>
+        <p14:creationId xmlns:p14="http://schemas.microsoft.com/office/powerpoint/2010/main" val="2832385390"/>
       </p:ext>
     </p:extLst>
   </p:cSld>
@@ -9187,10 +9852,10 @@
       </p:grpSpPr>
       <p:sp useBgFill="1">
         <p:nvSpPr>
-          <p:cNvPr id="10" name="Rectangle 9">
-            <a:extLst>
-              <a:ext uri="{FF2B5EF4-FFF2-40B4-BE49-F238E27FC236}">
-                <a16:creationId xmlns:a16="http://schemas.microsoft.com/office/drawing/2014/main" id="{EEBFA4C8-C301-60A7-C96E-E85360F5DFB4}"/>
+          <p:cNvPr id="18" name="Slide Background">
+            <a:extLst>
+              <a:ext uri="{FF2B5EF4-FFF2-40B4-BE49-F238E27FC236}">
+                <a16:creationId xmlns:a16="http://schemas.microsoft.com/office/drawing/2014/main" id="{9F7D5CDA-D291-4307-BF55-1381FED29634}"/>
               </a:ext>
               <a:ext uri="{C183D7F6-B498-43B3-948B-1728B52AA6E4}">
                 <adec:decorative xmlns:adec="http://schemas.microsoft.com/office/drawing/2017/decorative" val="1"/>
@@ -9211,7 +9876,96 @@
         <p:spPr>
           <a:xfrm>
             <a:off x="0" y="0"/>
-            <a:ext cx="12191999" cy="1729117"/>
+            <a:ext cx="12192000" cy="6858000"/>
+          </a:xfrm>
+          <a:prstGeom prst="rect">
+            <a:avLst/>
+          </a:prstGeom>
+          <a:ln>
+            <a:noFill/>
+          </a:ln>
+        </p:spPr>
+        <p:style>
+          <a:lnRef idx="2">
+            <a:schemeClr val="accent1">
+              <a:shade val="50000"/>
+            </a:schemeClr>
+          </a:lnRef>
+          <a:fillRef idx="1">
+            <a:schemeClr val="accent1"/>
+          </a:fillRef>
+          <a:effectRef idx="0">
+            <a:schemeClr val="accent1"/>
+          </a:effectRef>
+          <a:fontRef idx="minor">
+            <a:schemeClr val="lt1"/>
+          </a:fontRef>
+        </p:style>
+        <p:txBody>
+          <a:bodyPr rtlCol="0" anchor="ctr"/>
+          <a:lstStyle/>
+          <a:p>
+            <a:pPr algn="ctr"/>
+            <a:endParaRPr lang="en-US"/>
+          </a:p>
+        </p:txBody>
+      </p:sp>
+      <p:pic>
+        <p:nvPicPr>
+          <p:cNvPr id="7" name="Picture 6" descr="Light bulb on yellow background with sketched light beams and cord">
+            <a:extLst>
+              <a:ext uri="{FF2B5EF4-FFF2-40B4-BE49-F238E27FC236}">
+                <a16:creationId xmlns:a16="http://schemas.microsoft.com/office/drawing/2014/main" id="{1D6FD1B4-CA86-95E3-721F-84754E4148ED}"/>
+              </a:ext>
+            </a:extLst>
+          </p:cNvPr>
+          <p:cNvPicPr>
+            <a:picLocks noChangeAspect="1"/>
+          </p:cNvPicPr>
+          <p:nvPr/>
+        </p:nvPicPr>
+        <p:blipFill rotWithShape="1">
+          <a:blip r:embed="rId2"/>
+          <a:srcRect l="45124" r="273"/>
+          <a:stretch/>
+        </p:blipFill>
+        <p:spPr>
+          <a:xfrm>
+            <a:off x="6103027" y="10"/>
+            <a:ext cx="6088971" cy="6857990"/>
+          </a:xfrm>
+          <a:prstGeom prst="rect">
+            <a:avLst/>
+          </a:prstGeom>
+        </p:spPr>
+      </p:pic>
+      <p:sp useBgFill="1">
+        <p:nvSpPr>
+          <p:cNvPr id="20" name="Rectangle 19">
+            <a:extLst>
+              <a:ext uri="{FF2B5EF4-FFF2-40B4-BE49-F238E27FC236}">
+                <a16:creationId xmlns:a16="http://schemas.microsoft.com/office/drawing/2014/main" id="{59B296B9-C5A5-4E4F-9B60-C907B5F1466C}"/>
+              </a:ext>
+              <a:ext uri="{C183D7F6-B498-43B3-948B-1728B52AA6E4}">
+                <adec:decorative xmlns:adec="http://schemas.microsoft.com/office/drawing/2017/decorative" val="1"/>
+              </a:ext>
+            </a:extLst>
+          </p:cNvPr>
+          <p:cNvSpPr>
+            <a:spLocks noGrp="1" noRot="1" noChangeAspect="1" noMove="1" noResize="1" noEditPoints="1" noAdjustHandles="1" noChangeArrowheads="1" noChangeShapeType="1" noTextEdit="1"/>
+          </p:cNvSpPr>
+          <p:nvPr>
+            <p:extLst>
+              <p:ext uri="{386F3935-93C4-4BCD-93E2-E3B085C9AB24}">
+                <p16:designElem xmlns:p16="http://schemas.microsoft.com/office/powerpoint/2015/main" val="1"/>
+              </p:ext>
+            </p:extLst>
+          </p:nvPr>
+        </p:nvSpPr>
+        <p:spPr>
+          <a:xfrm>
+            <a:off x="0" y="0"/>
+            <a:ext cx="6103025" cy="6858000"/>
           </a:xfrm>
           <a:prstGeom prst="rect">
             <a:avLst/>
@@ -9220,7 +9974,7 @@
             <a:noFill/>
           </a:ln>
           <a:effectLst>
-            <a:outerShdw blurRad="368300" dist="101600" dir="5460000" sx="90000" sy="90000" algn="t" rotWithShape="0">
+            <a:outerShdw blurRad="889000" dist="406400" dir="21540000" sx="90000" sy="90000" algn="t" rotWithShape="0">
               <a:srgbClr val="000000">
                 <a:alpha val="20000"/>
               </a:srgbClr>
@@ -9248,30 +10002,97 @@
           <a:lstStyle/>
           <a:p>
             <a:pPr algn="ctr"/>
-            <a:endParaRPr lang="en-US" dirty="0"/>
-          </a:p>
-        </p:txBody>
-      </p:sp>
-      <p:sp>
-        <p:nvSpPr>
-          <p:cNvPr id="2" name="Título 1">
-            <a:extLst>
-              <a:ext uri="{FF2B5EF4-FFF2-40B4-BE49-F238E27FC236}">
-                <a16:creationId xmlns:a16="http://schemas.microsoft.com/office/drawing/2014/main" id="{2E9F1C5F-BD9A-6944-1470-43BD4692C181}"/>
-              </a:ext>
-            </a:extLst>
-          </p:cNvPr>
-          <p:cNvSpPr>
-            <a:spLocks noGrp="1"/>
-          </p:cNvSpPr>
-          <p:nvPr>
-            <p:ph type="title"/>
+            <a:endParaRPr lang="en-US"/>
+          </a:p>
+        </p:txBody>
+      </p:sp>
+      <p:sp useBgFill="1">
+        <p:nvSpPr>
+          <p:cNvPr id="22" name="Rectangle 21">
+            <a:extLst>
+              <a:ext uri="{FF2B5EF4-FFF2-40B4-BE49-F238E27FC236}">
+                <a16:creationId xmlns:a16="http://schemas.microsoft.com/office/drawing/2014/main" id="{D0300FD3-5AF1-6305-15FA-9078072672E2}"/>
+              </a:ext>
+              <a:ext uri="{C183D7F6-B498-43B3-948B-1728B52AA6E4}">
+                <adec:decorative xmlns:adec="http://schemas.microsoft.com/office/drawing/2017/decorative" val="1"/>
+              </a:ext>
+            </a:extLst>
+          </p:cNvPr>
+          <p:cNvSpPr>
+            <a:spLocks noGrp="1" noRot="1" noChangeAspect="1" noMove="1" noResize="1" noEditPoints="1" noAdjustHandles="1" noChangeArrowheads="1" noChangeShapeType="1" noTextEdit="1"/>
+          </p:cNvSpPr>
+          <p:nvPr>
+            <p:extLst>
+              <p:ext uri="{386F3935-93C4-4BCD-93E2-E3B085C9AB24}">
+                <p16:designElem xmlns:p16="http://schemas.microsoft.com/office/powerpoint/2015/main" val="1"/>
+              </p:ext>
+            </p:extLst>
           </p:nvPr>
         </p:nvSpPr>
         <p:spPr>
           <a:xfrm>
-            <a:off x="761801" y="283714"/>
-            <a:ext cx="9906799" cy="1161688"/>
+            <a:off x="0" y="0"/>
+            <a:ext cx="6103025" cy="2285995"/>
+          </a:xfrm>
+          <a:prstGeom prst="rect">
+            <a:avLst/>
+          </a:prstGeom>
+          <a:ln>
+            <a:noFill/>
+          </a:ln>
+          <a:effectLst>
+            <a:outerShdw blurRad="254000" dist="127000" dir="5460000" sx="92000" sy="92000" algn="t" rotWithShape="0">
+              <a:srgbClr val="000000">
+                <a:alpha val="30000"/>
+              </a:srgbClr>
+            </a:outerShdw>
+          </a:effectLst>
+        </p:spPr>
+        <p:style>
+          <a:lnRef idx="2">
+            <a:schemeClr val="accent1">
+              <a:shade val="50000"/>
+            </a:schemeClr>
+          </a:lnRef>
+          <a:fillRef idx="1">
+            <a:schemeClr val="accent1"/>
+          </a:fillRef>
+          <a:effectRef idx="0">
+            <a:schemeClr val="accent1"/>
+          </a:effectRef>
+          <a:fontRef idx="minor">
+            <a:schemeClr val="lt1"/>
+          </a:fontRef>
+        </p:style>
+        <p:txBody>
+          <a:bodyPr rtlCol="0" anchor="ctr"/>
+          <a:lstStyle/>
+          <a:p>
+            <a:pPr algn="ctr"/>
+            <a:endParaRPr lang="en-US"/>
+          </a:p>
+        </p:txBody>
+      </p:sp>
+      <p:sp>
+        <p:nvSpPr>
+          <p:cNvPr id="2" name="Título 1">
+            <a:extLst>
+              <a:ext uri="{FF2B5EF4-FFF2-40B4-BE49-F238E27FC236}">
+                <a16:creationId xmlns:a16="http://schemas.microsoft.com/office/drawing/2014/main" id="{06EE0CD9-859B-FFDC-7F6F-65A1864810C7}"/>
+              </a:ext>
+            </a:extLst>
+          </p:cNvPr>
+          <p:cNvSpPr>
+            <a:spLocks noGrp="1"/>
+          </p:cNvSpPr>
+          <p:nvPr>
+            <p:ph type="title"/>
+          </p:nvPr>
+        </p:nvSpPr>
+        <p:spPr>
+          <a:xfrm>
+            <a:off x="761801" y="328512"/>
+            <a:ext cx="4778387" cy="1628970"/>
           </a:xfrm>
         </p:spPr>
         <p:txBody>
@@ -9282,7 +10103,7 @@
           <a:p>
             <a:r>
               <a:rPr lang="pt-PT" sz="4000" dirty="0"/>
-              <a:t>References</a:t>
+              <a:t>Conclusions</a:t>
             </a:r>
           </a:p>
         </p:txBody>
@@ -9292,7 +10113,7 @@
           <p:cNvPr id="3" name="Marcador de Posição de Conteúdo 2">
             <a:extLst>
               <a:ext uri="{FF2B5EF4-FFF2-40B4-BE49-F238E27FC236}">
-                <a16:creationId xmlns:a16="http://schemas.microsoft.com/office/drawing/2014/main" id="{192A18D7-40DF-B571-AC86-94A7727F42DB}"/>
+                <a16:creationId xmlns:a16="http://schemas.microsoft.com/office/drawing/2014/main" id="{63326C6E-5F1E-0E8D-F642-983D87164C61}"/>
               </a:ext>
             </a:extLst>
           </p:cNvPr>
@@ -9305,140 +10126,34 @@
         </p:nvSpPr>
         <p:spPr>
           <a:xfrm>
-            <a:off x="2231923" y="2217761"/>
-            <a:ext cx="7724236" cy="4034116"/>
+            <a:off x="761801" y="2884929"/>
+            <a:ext cx="4659756" cy="3374137"/>
           </a:xfrm>
         </p:spPr>
         <p:txBody>
           <a:bodyPr anchor="ctr">
-            <a:normAutofit fontScale="77500" lnSpcReduction="20000"/>
+            <a:normAutofit/>
           </a:bodyPr>
           <a:lstStyle/>
           <a:p>
             <a:pPr>
-              <a:lnSpc>
-                <a:spcPct val="110000"/>
-              </a:lnSpc>
               <a:buFont typeface="Symbol" panose="05050102010706020507" pitchFamily="18" charset="2"/>
               <a:buChar char="-"/>
             </a:pPr>
             <a:r>
-              <a:rPr lang="pt-PT" sz="2400" b="0" i="0" u="none" strike="noStrike" baseline="0" dirty="0">
-                <a:solidFill>
-                  <a:srgbClr val="000000"/>
-                </a:solidFill>
-                <a:latin typeface="Calibri" panose="020F0502020204030204" pitchFamily="34" charset="0"/>
-              </a:rPr>
-              <a:t>Sketchfab. (n.d.-b). Sketchfab. https://sketchfab.com/search?features=downloadable&amp;type=models</a:t>
-            </a:r>
-          </a:p>
-          <a:p>
-            <a:pPr>
-              <a:lnSpc>
-                <a:spcPct val="110000"/>
-              </a:lnSpc>
-              <a:buFont typeface="Symbol" panose="05050102010706020507" pitchFamily="18" charset="2"/>
-              <a:buChar char="-"/>
-            </a:pPr>
-            <a:endParaRPr lang="pt-PT" sz="2400" b="0" i="0" u="none" strike="noStrike" baseline="0" dirty="0">
-              <a:solidFill>
-                <a:srgbClr val="000000"/>
-              </a:solidFill>
-              <a:latin typeface="Calibri" panose="020F0502020204030204" pitchFamily="34" charset="0"/>
-            </a:endParaRPr>
-          </a:p>
-          <a:p>
-            <a:pPr>
-              <a:lnSpc>
-                <a:spcPct val="110000"/>
-              </a:lnSpc>
-              <a:buFont typeface="Symbol" panose="05050102010706020507" pitchFamily="18" charset="2"/>
-              <a:buChar char="-"/>
-            </a:pPr>
-            <a:r>
-              <a:rPr lang="en-US" sz="2400" b="0" i="0" u="none" strike="noStrike" baseline="0" dirty="0">
-                <a:solidFill>
-                  <a:srgbClr val="000000"/>
-                </a:solidFill>
-                <a:latin typeface="Calibri" panose="020F0502020204030204" pitchFamily="34" charset="0"/>
-              </a:rPr>
-              <a:t>“Make a Grass in 45 Seconds-Blender 2024.” Www.youtube.com, www.youtube.com/watch?v=xX72ZuCOVVE&amp;ab_channel=BlenderTips. Accessed 10 Apr. 2024.</a:t>
-            </a:r>
-          </a:p>
-          <a:p>
-            <a:pPr>
-              <a:lnSpc>
-                <a:spcPct val="110000"/>
-              </a:lnSpc>
-              <a:buFont typeface="Symbol" panose="05050102010706020507" pitchFamily="18" charset="2"/>
-              <a:buChar char="-"/>
-            </a:pPr>
-            <a:endParaRPr lang="en-US" sz="2400" b="0" i="0" u="none" strike="noStrike" baseline="0" dirty="0">
-              <a:solidFill>
-                <a:srgbClr val="000000"/>
-              </a:solidFill>
-              <a:latin typeface="Calibri" panose="020F0502020204030204" pitchFamily="34" charset="0"/>
-            </a:endParaRPr>
-          </a:p>
-          <a:p>
-            <a:pPr>
-              <a:lnSpc>
-                <a:spcPct val="110000"/>
-              </a:lnSpc>
-              <a:buFont typeface="Symbol" panose="05050102010706020507" pitchFamily="18" charset="2"/>
-              <a:buChar char="-"/>
-            </a:pPr>
-            <a:r>
-              <a:rPr lang="en-US" sz="2400" b="0" i="0" u="none" strike="noStrike" baseline="0" dirty="0">
-                <a:solidFill>
-                  <a:srgbClr val="000000"/>
-                </a:solidFill>
-                <a:latin typeface="Calibri" panose="020F0502020204030204" pitchFamily="34" charset="0"/>
-              </a:rPr>
-              <a:t>Fog – three.js docs. https://threejs.org/docs/#api/en/scenes/Fog</a:t>
-            </a:r>
-          </a:p>
-          <a:p>
-            <a:pPr>
-              <a:lnSpc>
-                <a:spcPct val="110000"/>
-              </a:lnSpc>
-              <a:buFont typeface="Symbol" panose="05050102010706020507" pitchFamily="18" charset="2"/>
-              <a:buChar char="-"/>
-            </a:pPr>
-            <a:endParaRPr lang="en-US" sz="2400" b="0" i="0" u="none" strike="noStrike" baseline="0" dirty="0">
-              <a:solidFill>
-                <a:srgbClr val="000000"/>
-              </a:solidFill>
-              <a:latin typeface="Calibri" panose="020F0502020204030204" pitchFamily="34" charset="0"/>
-            </a:endParaRPr>
-          </a:p>
-          <a:p>
-            <a:pPr>
-              <a:lnSpc>
-                <a:spcPct val="110000"/>
-              </a:lnSpc>
-              <a:buFont typeface="Symbol" panose="05050102010706020507" pitchFamily="18" charset="2"/>
-              <a:buChar char="-"/>
-            </a:pPr>
-            <a:r>
-              <a:rPr lang="en-US" sz="2400" b="0" i="0" u="none" strike="noStrike" baseline="0" dirty="0">
-                <a:solidFill>
-                  <a:srgbClr val="000000"/>
-                </a:solidFill>
-                <a:latin typeface="Calibri" panose="020F0502020204030204" pitchFamily="34" charset="0"/>
-              </a:rPr>
-              <a:t>Loading 3D models – three.js docs. https://threejs.org/docs/#manual/en/introduction/Loading-3D-models</a:t>
-            </a:r>
-          </a:p>
-        </p:txBody>
-      </p:sp>
-      <p:sp>
-        <p:nvSpPr>
-          <p:cNvPr id="4" name="Marcador de Posição da Data 3">
-            <a:extLst>
-              <a:ext uri="{FF2B5EF4-FFF2-40B4-BE49-F238E27FC236}">
-                <a16:creationId xmlns:a16="http://schemas.microsoft.com/office/drawing/2014/main" id="{8EEE3120-0213-4797-7B33-01179BA1C6C9}"/>
+              <a:rPr lang="en-US" sz="2000" dirty="0"/>
+              <a:t>In conclusion, all goals were successfully achieved, albeit with some challenges encountered along the way and various project ideas considered throughout the development process.</a:t>
+            </a:r>
+            <a:endParaRPr lang="pt-PT" sz="2000"/>
+          </a:p>
+        </p:txBody>
+      </p:sp>
+      <p:sp>
+        <p:nvSpPr>
+          <p:cNvPr id="6" name="Marcador de Posição da Data 3">
+            <a:extLst>
+              <a:ext uri="{FF2B5EF4-FFF2-40B4-BE49-F238E27FC236}">
+                <a16:creationId xmlns:a16="http://schemas.microsoft.com/office/drawing/2014/main" id="{029FED57-33C5-855C-4776-592884EB5D56}"/>
               </a:ext>
             </a:extLst>
           </p:cNvPr>
@@ -9451,7 +10166,7 @@
         </p:nvSpPr>
         <p:spPr>
           <a:xfrm>
-            <a:off x="243025" y="6356349"/>
+            <a:off x="761801" y="6356350"/>
             <a:ext cx="2743200" cy="365125"/>
           </a:xfrm>
         </p:spPr>
@@ -9467,7 +10182,7 @@
               </a:spcAft>
             </a:pPr>
             <a:r>
-              <a:rPr lang="pt-PT" dirty="0">
+              <a:rPr lang="pt-PT">
                 <a:solidFill>
                   <a:schemeClr val="tx1"/>
                 </a:solidFill>
@@ -9482,7 +10197,7 @@
           <p:cNvPr id="5" name="Marcador de Posição do Número do Diapositivo 4">
             <a:extLst>
               <a:ext uri="{FF2B5EF4-FFF2-40B4-BE49-F238E27FC236}">
-                <a16:creationId xmlns:a16="http://schemas.microsoft.com/office/drawing/2014/main" id="{BE4B7072-FBFB-97F0-E61C-8E5F249DF43A}"/>
+                <a16:creationId xmlns:a16="http://schemas.microsoft.com/office/drawing/2014/main" id="{09584837-1C74-DD42-E69B-D85B02C81CBA}"/>
               </a:ext>
             </a:extLst>
           </p:cNvPr>
@@ -9495,8 +10210,8 @@
         </p:nvSpPr>
         <p:spPr>
           <a:xfrm>
-            <a:off x="8732520" y="6356350"/>
-            <a:ext cx="3216455" cy="365125"/>
+            <a:off x="10515600" y="6356350"/>
+            <a:ext cx="1462825" cy="365125"/>
           </a:xfrm>
         </p:spPr>
         <p:txBody>
@@ -9513,7 +10228,7 @@
             <a:fld id="{A275E76C-0B34-4617-92BE-2419D92E4442}" type="slidenum">
               <a:rPr lang="pt-PT">
                 <a:solidFill>
-                  <a:schemeClr val="tx1"/>
+                  <a:srgbClr val="FFFFFF"/>
                 </a:solidFill>
               </a:rPr>
               <a:pPr>
@@ -9523,9 +10238,9 @@
               </a:pPr>
               <a:t>9</a:t>
             </a:fld>
-            <a:endParaRPr lang="pt-PT" dirty="0">
+            <a:endParaRPr lang="pt-PT">
               <a:solidFill>
-                <a:schemeClr val="tx1"/>
+                <a:srgbClr val="FFFFFF"/>
               </a:solidFill>
             </a:endParaRPr>
           </a:p>
@@ -9534,7 +10249,7 @@
     </p:spTree>
     <p:extLst>
       <p:ext uri="{BB962C8B-B14F-4D97-AF65-F5344CB8AC3E}">
-        <p14:creationId xmlns:p14="http://schemas.microsoft.com/office/powerpoint/2010/main" val="1925614804"/>
+        <p14:creationId xmlns:p14="http://schemas.microsoft.com/office/powerpoint/2010/main" val="3173771447"/>
       </p:ext>
     </p:extLst>
   </p:cSld>

--- a/docs/icg_final.pptx
+++ b/docs/icg_final.pptx
@@ -5,19 +5,20 @@
     <p:sldMasterId id="2147483648" r:id="rId1"/>
   </p:sldMasterIdLst>
   <p:notesMasterIdLst>
-    <p:notesMasterId r:id="rId12"/>
+    <p:notesMasterId r:id="rId13"/>
   </p:notesMasterIdLst>
   <p:sldIdLst>
     <p:sldId id="256" r:id="rId2"/>
     <p:sldId id="257" r:id="rId3"/>
-    <p:sldId id="259" r:id="rId4"/>
-    <p:sldId id="260" r:id="rId5"/>
-    <p:sldId id="261" r:id="rId6"/>
-    <p:sldId id="266" r:id="rId7"/>
-    <p:sldId id="262" r:id="rId8"/>
-    <p:sldId id="263" r:id="rId9"/>
-    <p:sldId id="264" r:id="rId10"/>
-    <p:sldId id="265" r:id="rId11"/>
+    <p:sldId id="267" r:id="rId4"/>
+    <p:sldId id="259" r:id="rId5"/>
+    <p:sldId id="260" r:id="rId6"/>
+    <p:sldId id="261" r:id="rId7"/>
+    <p:sldId id="266" r:id="rId8"/>
+    <p:sldId id="262" r:id="rId9"/>
+    <p:sldId id="263" r:id="rId10"/>
+    <p:sldId id="264" r:id="rId11"/>
+    <p:sldId id="265" r:id="rId12"/>
   </p:sldIdLst>
   <p:sldSz cx="12192000" cy="6858000"/>
   <p:notesSz cx="6858000" cy="9144000"/>
@@ -127,7 +128,7 @@
 <file path=ppt/revisionInfo.xml><?xml version="1.0" encoding="utf-8"?>
 <p1510:revInfo xmlns:a="http://schemas.openxmlformats.org/drawingml/2006/main" xmlns:r="http://schemas.openxmlformats.org/officeDocument/2006/relationships" xmlns:p1510="http://schemas.microsoft.com/office/powerpoint/2015/10/main">
   <p1510:revLst>
-    <p1510:client id="{5F5A64CD-14DA-4429-AD0D-339DD7191AF6}" v="56" dt="2024-06-03T00:06:34.567"/>
+    <p1510:client id="{5F5A64CD-14DA-4429-AD0D-339DD7191AF6}" v="77" dt="2024-06-03T18:09:39.107"/>
   </p1510:revLst>
 </p1510:revInfo>
 </file>
@@ -137,7 +138,7 @@
   <pc:docChgLst>
     <pc:chgData name="João Gaspar" userId="7dec15aa-df9c-4e56-83fb-de5e1da84347" providerId="ADAL" clId="{5F5A64CD-14DA-4429-AD0D-339DD7191AF6}"/>
     <pc:docChg chg="undo custSel addSld delSld modSld">
-      <pc:chgData name="João Gaspar" userId="7dec15aa-df9c-4e56-83fb-de5e1da84347" providerId="ADAL" clId="{5F5A64CD-14DA-4429-AD0D-339DD7191AF6}" dt="2024-06-03T00:06:20.294" v="740" actId="20577"/>
+      <pc:chgData name="João Gaspar" userId="7dec15aa-df9c-4e56-83fb-de5e1da84347" providerId="ADAL" clId="{5F5A64CD-14DA-4429-AD0D-339DD7191AF6}" dt="2024-06-03T18:10:00.324" v="1049" actId="6549"/>
       <pc:docMkLst>
         <pc:docMk/>
       </pc:docMkLst>
@@ -245,7 +246,7 @@
         </pc:picChg>
       </pc:sldChg>
       <pc:sldChg chg="addSp delSp modSp mod setBg">
-        <pc:chgData name="João Gaspar" userId="7dec15aa-df9c-4e56-83fb-de5e1da84347" providerId="ADAL" clId="{5F5A64CD-14DA-4429-AD0D-339DD7191AF6}" dt="2024-06-02T22:14:20.945" v="714" actId="27636"/>
+        <pc:chgData name="João Gaspar" userId="7dec15aa-df9c-4e56-83fb-de5e1da84347" providerId="ADAL" clId="{5F5A64CD-14DA-4429-AD0D-339DD7191AF6}" dt="2024-06-03T18:03:49.831" v="909" actId="313"/>
         <pc:sldMkLst>
           <pc:docMk/>
           <pc:sldMk cId="3190298846" sldId="257"/>
@@ -259,7 +260,7 @@
           </ac:spMkLst>
         </pc:spChg>
         <pc:spChg chg="mod">
-          <ac:chgData name="João Gaspar" userId="7dec15aa-df9c-4e56-83fb-de5e1da84347" providerId="ADAL" clId="{5F5A64CD-14DA-4429-AD0D-339DD7191AF6}" dt="2024-06-02T22:14:20.945" v="714" actId="27636"/>
+          <ac:chgData name="João Gaspar" userId="7dec15aa-df9c-4e56-83fb-de5e1da84347" providerId="ADAL" clId="{5F5A64CD-14DA-4429-AD0D-339DD7191AF6}" dt="2024-06-03T18:03:49.831" v="909" actId="313"/>
           <ac:spMkLst>
             <pc:docMk/>
             <pc:sldMk cId="3190298846" sldId="257"/>
@@ -387,13 +388,13 @@
         </pc:picChg>
       </pc:sldChg>
       <pc:sldChg chg="addSp delSp modSp mod setBg">
-        <pc:chgData name="João Gaspar" userId="7dec15aa-df9c-4e56-83fb-de5e1da84347" providerId="ADAL" clId="{5F5A64CD-14DA-4429-AD0D-339DD7191AF6}" dt="2024-06-02T22:14:17.003" v="712" actId="2710"/>
+        <pc:chgData name="João Gaspar" userId="7dec15aa-df9c-4e56-83fb-de5e1da84347" providerId="ADAL" clId="{5F5A64CD-14DA-4429-AD0D-339DD7191AF6}" dt="2024-06-03T18:09:14.001" v="1047" actId="20577"/>
         <pc:sldMkLst>
           <pc:docMk/>
           <pc:sldMk cId="1111987917" sldId="259"/>
         </pc:sldMkLst>
         <pc:spChg chg="mod">
-          <ac:chgData name="João Gaspar" userId="7dec15aa-df9c-4e56-83fb-de5e1da84347" providerId="ADAL" clId="{5F5A64CD-14DA-4429-AD0D-339DD7191AF6}" dt="2024-06-02T20:45:36.183" v="31" actId="26606"/>
+          <ac:chgData name="João Gaspar" userId="7dec15aa-df9c-4e56-83fb-de5e1da84347" providerId="ADAL" clId="{5F5A64CD-14DA-4429-AD0D-339DD7191AF6}" dt="2024-06-03T18:00:42.847" v="874" actId="26606"/>
           <ac:spMkLst>
             <pc:docMk/>
             <pc:sldMk cId="1111987917" sldId="259"/>
@@ -401,7 +402,7 @@
           </ac:spMkLst>
         </pc:spChg>
         <pc:spChg chg="mod">
-          <ac:chgData name="João Gaspar" userId="7dec15aa-df9c-4e56-83fb-de5e1da84347" providerId="ADAL" clId="{5F5A64CD-14DA-4429-AD0D-339DD7191AF6}" dt="2024-06-02T22:14:17.003" v="712" actId="2710"/>
+          <ac:chgData name="João Gaspar" userId="7dec15aa-df9c-4e56-83fb-de5e1da84347" providerId="ADAL" clId="{5F5A64CD-14DA-4429-AD0D-339DD7191AF6}" dt="2024-06-03T18:09:14.001" v="1047" actId="20577"/>
           <ac:spMkLst>
             <pc:docMk/>
             <pc:sldMk cId="1111987917" sldId="259"/>
@@ -416,16 +417,24 @@
             <ac:spMk id="4" creationId="{3735F962-797A-96FB-8054-4EA8F37D6D60}"/>
           </ac:spMkLst>
         </pc:spChg>
-        <pc:spChg chg="mod">
-          <ac:chgData name="João Gaspar" userId="7dec15aa-df9c-4e56-83fb-de5e1da84347" providerId="ADAL" clId="{5F5A64CD-14DA-4429-AD0D-339DD7191AF6}" dt="2024-06-02T20:45:36.183" v="31" actId="26606"/>
+        <pc:spChg chg="add del mod">
+          <ac:chgData name="João Gaspar" userId="7dec15aa-df9c-4e56-83fb-de5e1da84347" providerId="ADAL" clId="{5F5A64CD-14DA-4429-AD0D-339DD7191AF6}" dt="2024-06-03T18:02:18.877" v="899" actId="478"/>
+          <ac:spMkLst>
+            <pc:docMk/>
+            <pc:sldMk cId="1111987917" sldId="259"/>
+            <ac:spMk id="4" creationId="{A3D8D970-C4FE-EF13-ED97-263FE9257126}"/>
+          </ac:spMkLst>
+        </pc:spChg>
+        <pc:spChg chg="mod ord">
+          <ac:chgData name="João Gaspar" userId="7dec15aa-df9c-4e56-83fb-de5e1da84347" providerId="ADAL" clId="{5F5A64CD-14DA-4429-AD0D-339DD7191AF6}" dt="2024-06-03T18:00:42.847" v="874" actId="26606"/>
           <ac:spMkLst>
             <pc:docMk/>
             <pc:sldMk cId="1111987917" sldId="259"/>
             <ac:spMk id="5" creationId="{8DBCDEA0-CDC7-BE53-B012-696C9B1C0AE7}"/>
           </ac:spMkLst>
         </pc:spChg>
-        <pc:spChg chg="add mod">
-          <ac:chgData name="João Gaspar" userId="7dec15aa-df9c-4e56-83fb-de5e1da84347" providerId="ADAL" clId="{5F5A64CD-14DA-4429-AD0D-339DD7191AF6}" dt="2024-06-02T21:57:03.677" v="328"/>
+        <pc:spChg chg="add del mod">
+          <ac:chgData name="João Gaspar" userId="7dec15aa-df9c-4e56-83fb-de5e1da84347" providerId="ADAL" clId="{5F5A64CD-14DA-4429-AD0D-339DD7191AF6}" dt="2024-06-03T18:02:21.594" v="900" actId="478"/>
           <ac:spMkLst>
             <pc:docMk/>
             <pc:sldMk cId="1111987917" sldId="259"/>
@@ -440,24 +449,48 @@
             <ac:spMk id="8" creationId="{13C58D86-47D6-7146-2673-EBE67B2E5A8B}"/>
           </ac:spMkLst>
         </pc:spChg>
-        <pc:spChg chg="add">
-          <ac:chgData name="João Gaspar" userId="7dec15aa-df9c-4e56-83fb-de5e1da84347" providerId="ADAL" clId="{5F5A64CD-14DA-4429-AD0D-339DD7191AF6}" dt="2024-06-02T20:45:36.183" v="31" actId="26606"/>
+        <pc:spChg chg="add mod">
+          <ac:chgData name="João Gaspar" userId="7dec15aa-df9c-4e56-83fb-de5e1da84347" providerId="ADAL" clId="{5F5A64CD-14DA-4429-AD0D-339DD7191AF6}" dt="2024-06-03T18:02:23.037" v="902" actId="207"/>
+          <ac:spMkLst>
+            <pc:docMk/>
+            <pc:sldMk cId="1111987917" sldId="259"/>
+            <ac:spMk id="8" creationId="{327F84F4-82C2-3984-87FC-EF67BADFA131}"/>
+          </ac:spMkLst>
+        </pc:spChg>
+        <pc:spChg chg="add del">
+          <ac:chgData name="João Gaspar" userId="7dec15aa-df9c-4e56-83fb-de5e1da84347" providerId="ADAL" clId="{5F5A64CD-14DA-4429-AD0D-339DD7191AF6}" dt="2024-06-03T18:00:42.847" v="874" actId="26606"/>
           <ac:spMkLst>
             <pc:docMk/>
             <pc:sldMk cId="1111987917" sldId="259"/>
             <ac:spMk id="11" creationId="{C0763A76-9F1C-4FC5-82B7-DD475DA461B2}"/>
           </ac:spMkLst>
         </pc:spChg>
-        <pc:spChg chg="add">
-          <ac:chgData name="João Gaspar" userId="7dec15aa-df9c-4e56-83fb-de5e1da84347" providerId="ADAL" clId="{5F5A64CD-14DA-4429-AD0D-339DD7191AF6}" dt="2024-06-02T20:45:36.183" v="31" actId="26606"/>
+        <pc:spChg chg="add del">
+          <ac:chgData name="João Gaspar" userId="7dec15aa-df9c-4e56-83fb-de5e1da84347" providerId="ADAL" clId="{5F5A64CD-14DA-4429-AD0D-339DD7191AF6}" dt="2024-06-03T18:00:42.847" v="874" actId="26606"/>
           <ac:spMkLst>
             <pc:docMk/>
             <pc:sldMk cId="1111987917" sldId="259"/>
             <ac:spMk id="13" creationId="{E81BF4F6-F2CF-4984-9D14-D6966D92F99F}"/>
           </ac:spMkLst>
         </pc:spChg>
-        <pc:picChg chg="add mod">
-          <ac:chgData name="João Gaspar" userId="7dec15aa-df9c-4e56-83fb-de5e1da84347" providerId="ADAL" clId="{5F5A64CD-14DA-4429-AD0D-339DD7191AF6}" dt="2024-06-02T21:54:24.970" v="285" actId="14826"/>
+        <pc:spChg chg="add">
+          <ac:chgData name="João Gaspar" userId="7dec15aa-df9c-4e56-83fb-de5e1da84347" providerId="ADAL" clId="{5F5A64CD-14DA-4429-AD0D-339DD7191AF6}" dt="2024-06-03T18:00:42.847" v="874" actId="26606"/>
+          <ac:spMkLst>
+            <pc:docMk/>
+            <pc:sldMk cId="1111987917" sldId="259"/>
+            <ac:spMk id="18" creationId="{3ECBE1F1-D69B-4AFA-ABD5-8E41720EF6DE}"/>
+          </ac:spMkLst>
+        </pc:spChg>
+        <pc:spChg chg="add">
+          <ac:chgData name="João Gaspar" userId="7dec15aa-df9c-4e56-83fb-de5e1da84347" providerId="ADAL" clId="{5F5A64CD-14DA-4429-AD0D-339DD7191AF6}" dt="2024-06-03T18:00:42.847" v="874" actId="26606"/>
+          <ac:spMkLst>
+            <pc:docMk/>
+            <pc:sldMk cId="1111987917" sldId="259"/>
+            <ac:spMk id="20" creationId="{603A6265-E10C-4B85-9C20-E75FCAF9CC63}"/>
+          </ac:spMkLst>
+        </pc:spChg>
+        <pc:picChg chg="add mod ord">
+          <ac:chgData name="João Gaspar" userId="7dec15aa-df9c-4e56-83fb-de5e1da84347" providerId="ADAL" clId="{5F5A64CD-14DA-4429-AD0D-339DD7191AF6}" dt="2024-06-03T18:00:42.847" v="874" actId="26606"/>
           <ac:picMkLst>
             <pc:docMk/>
             <pc:sldMk cId="1111987917" sldId="259"/>
@@ -466,13 +499,13 @@
         </pc:picChg>
       </pc:sldChg>
       <pc:sldChg chg="addSp delSp modSp mod setBg modNotesTx">
-        <pc:chgData name="João Gaspar" userId="7dec15aa-df9c-4e56-83fb-de5e1da84347" providerId="ADAL" clId="{5F5A64CD-14DA-4429-AD0D-339DD7191AF6}" dt="2024-06-02T22:14:13.101" v="711" actId="2710"/>
+        <pc:chgData name="João Gaspar" userId="7dec15aa-df9c-4e56-83fb-de5e1da84347" providerId="ADAL" clId="{5F5A64CD-14DA-4429-AD0D-339DD7191AF6}" dt="2024-06-03T18:10:00.324" v="1049" actId="6549"/>
         <pc:sldMkLst>
           <pc:docMk/>
           <pc:sldMk cId="1623836021" sldId="260"/>
         </pc:sldMkLst>
         <pc:spChg chg="mod">
-          <ac:chgData name="João Gaspar" userId="7dec15aa-df9c-4e56-83fb-de5e1da84347" providerId="ADAL" clId="{5F5A64CD-14DA-4429-AD0D-339DD7191AF6}" dt="2024-06-02T20:45:42.415" v="32" actId="26606"/>
+          <ac:chgData name="João Gaspar" userId="7dec15aa-df9c-4e56-83fb-de5e1da84347" providerId="ADAL" clId="{5F5A64CD-14DA-4429-AD0D-339DD7191AF6}" dt="2024-06-03T18:00:53.077" v="875" actId="26606"/>
           <ac:spMkLst>
             <pc:docMk/>
             <pc:sldMk cId="1623836021" sldId="260"/>
@@ -480,7 +513,7 @@
           </ac:spMkLst>
         </pc:spChg>
         <pc:spChg chg="mod">
-          <ac:chgData name="João Gaspar" userId="7dec15aa-df9c-4e56-83fb-de5e1da84347" providerId="ADAL" clId="{5F5A64CD-14DA-4429-AD0D-339DD7191AF6}" dt="2024-06-02T22:14:13.101" v="711" actId="2710"/>
+          <ac:chgData name="João Gaspar" userId="7dec15aa-df9c-4e56-83fb-de5e1da84347" providerId="ADAL" clId="{5F5A64CD-14DA-4429-AD0D-339DD7191AF6}" dt="2024-06-03T18:10:00.324" v="1049" actId="6549"/>
           <ac:spMkLst>
             <pc:docMk/>
             <pc:sldMk cId="1623836021" sldId="260"/>
@@ -495,40 +528,64 @@
             <ac:spMk id="4" creationId="{84085DA4-8C08-D6E6-244C-6F9A02049D5E}"/>
           </ac:spMkLst>
         </pc:spChg>
-        <pc:spChg chg="mod">
-          <ac:chgData name="João Gaspar" userId="7dec15aa-df9c-4e56-83fb-de5e1da84347" providerId="ADAL" clId="{5F5A64CD-14DA-4429-AD0D-339DD7191AF6}" dt="2024-06-02T20:45:42.415" v="32" actId="26606"/>
+        <pc:spChg chg="add mod">
+          <ac:chgData name="João Gaspar" userId="7dec15aa-df9c-4e56-83fb-de5e1da84347" providerId="ADAL" clId="{5F5A64CD-14DA-4429-AD0D-339DD7191AF6}" dt="2024-06-03T18:02:14.150" v="897"/>
+          <ac:spMkLst>
+            <pc:docMk/>
+            <pc:sldMk cId="1623836021" sldId="260"/>
+            <ac:spMk id="4" creationId="{95F20C55-06AA-FAE7-43B6-E40D48588D79}"/>
+          </ac:spMkLst>
+        </pc:spChg>
+        <pc:spChg chg="mod ord">
+          <ac:chgData name="João Gaspar" userId="7dec15aa-df9c-4e56-83fb-de5e1da84347" providerId="ADAL" clId="{5F5A64CD-14DA-4429-AD0D-339DD7191AF6}" dt="2024-06-03T18:00:53.077" v="875" actId="26606"/>
           <ac:spMkLst>
             <pc:docMk/>
             <pc:sldMk cId="1623836021" sldId="260"/>
             <ac:spMk id="5" creationId="{8DFE5CDA-5E21-71DD-F590-331350D021C5}"/>
           </ac:spMkLst>
         </pc:spChg>
-        <pc:spChg chg="add mod">
-          <ac:chgData name="João Gaspar" userId="7dec15aa-df9c-4e56-83fb-de5e1da84347" providerId="ADAL" clId="{5F5A64CD-14DA-4429-AD0D-339DD7191AF6}" dt="2024-06-02T21:57:34.029" v="337" actId="207"/>
+        <pc:spChg chg="add del mod">
+          <ac:chgData name="João Gaspar" userId="7dec15aa-df9c-4e56-83fb-de5e1da84347" providerId="ADAL" clId="{5F5A64CD-14DA-4429-AD0D-339DD7191AF6}" dt="2024-06-03T18:02:13.847" v="896" actId="478"/>
           <ac:spMkLst>
             <pc:docMk/>
             <pc:sldMk cId="1623836021" sldId="260"/>
             <ac:spMk id="6" creationId="{DF4FE554-BEE3-8209-714A-28C16066FA19}"/>
           </ac:spMkLst>
         </pc:spChg>
-        <pc:spChg chg="add">
-          <ac:chgData name="João Gaspar" userId="7dec15aa-df9c-4e56-83fb-de5e1da84347" providerId="ADAL" clId="{5F5A64CD-14DA-4429-AD0D-339DD7191AF6}" dt="2024-06-02T20:45:42.415" v="32" actId="26606"/>
+        <pc:spChg chg="add del">
+          <ac:chgData name="João Gaspar" userId="7dec15aa-df9c-4e56-83fb-de5e1da84347" providerId="ADAL" clId="{5F5A64CD-14DA-4429-AD0D-339DD7191AF6}" dt="2024-06-03T18:00:53.077" v="875" actId="26606"/>
           <ac:spMkLst>
             <pc:docMk/>
             <pc:sldMk cId="1623836021" sldId="260"/>
             <ac:spMk id="11" creationId="{B65C0385-5E30-4D2E-AF9F-4639659D34E9}"/>
           </ac:spMkLst>
         </pc:spChg>
-        <pc:spChg chg="add">
-          <ac:chgData name="João Gaspar" userId="7dec15aa-df9c-4e56-83fb-de5e1da84347" providerId="ADAL" clId="{5F5A64CD-14DA-4429-AD0D-339DD7191AF6}" dt="2024-06-02T20:45:42.415" v="32" actId="26606"/>
+        <pc:spChg chg="add del">
+          <ac:chgData name="João Gaspar" userId="7dec15aa-df9c-4e56-83fb-de5e1da84347" providerId="ADAL" clId="{5F5A64CD-14DA-4429-AD0D-339DD7191AF6}" dt="2024-06-03T18:00:53.077" v="875" actId="26606"/>
           <ac:spMkLst>
             <pc:docMk/>
             <pc:sldMk cId="1623836021" sldId="260"/>
             <ac:spMk id="13" creationId="{E335820B-3A29-42C5-AA8D-10ECA43CD985}"/>
           </ac:spMkLst>
         </pc:spChg>
-        <pc:picChg chg="add mod">
-          <ac:chgData name="João Gaspar" userId="7dec15aa-df9c-4e56-83fb-de5e1da84347" providerId="ADAL" clId="{5F5A64CD-14DA-4429-AD0D-339DD7191AF6}" dt="2024-06-02T21:53:50.346" v="284" actId="14100"/>
+        <pc:spChg chg="add">
+          <ac:chgData name="João Gaspar" userId="7dec15aa-df9c-4e56-83fb-de5e1da84347" providerId="ADAL" clId="{5F5A64CD-14DA-4429-AD0D-339DD7191AF6}" dt="2024-06-03T18:00:53.077" v="875" actId="26606"/>
+          <ac:spMkLst>
+            <pc:docMk/>
+            <pc:sldMk cId="1623836021" sldId="260"/>
+            <ac:spMk id="18" creationId="{C0763A76-9F1C-4FC5-82B7-DD475DA461B2}"/>
+          </ac:spMkLst>
+        </pc:spChg>
+        <pc:spChg chg="add">
+          <ac:chgData name="João Gaspar" userId="7dec15aa-df9c-4e56-83fb-de5e1da84347" providerId="ADAL" clId="{5F5A64CD-14DA-4429-AD0D-339DD7191AF6}" dt="2024-06-03T18:00:53.077" v="875" actId="26606"/>
+          <ac:spMkLst>
+            <pc:docMk/>
+            <pc:sldMk cId="1623836021" sldId="260"/>
+            <ac:spMk id="20" creationId="{E81BF4F6-F2CF-4984-9D14-D6966D92F99F}"/>
+          </ac:spMkLst>
+        </pc:spChg>
+        <pc:picChg chg="add mod ord modCrop">
+          <ac:chgData name="João Gaspar" userId="7dec15aa-df9c-4e56-83fb-de5e1da84347" providerId="ADAL" clId="{5F5A64CD-14DA-4429-AD0D-339DD7191AF6}" dt="2024-06-03T18:01:03.159" v="876" actId="18131"/>
           <ac:picMkLst>
             <pc:docMk/>
             <pc:sldMk cId="1623836021" sldId="260"/>
@@ -537,13 +594,13 @@
         </pc:picChg>
       </pc:sldChg>
       <pc:sldChg chg="addSp delSp modSp mod setBg">
-        <pc:chgData name="João Gaspar" userId="7dec15aa-df9c-4e56-83fb-de5e1da84347" providerId="ADAL" clId="{5F5A64CD-14DA-4429-AD0D-339DD7191AF6}" dt="2024-06-02T22:14:09.296" v="710" actId="2710"/>
+        <pc:chgData name="João Gaspar" userId="7dec15aa-df9c-4e56-83fb-de5e1da84347" providerId="ADAL" clId="{5F5A64CD-14DA-4429-AD0D-339DD7191AF6}" dt="2024-06-03T18:02:09.466" v="895" actId="207"/>
         <pc:sldMkLst>
           <pc:docMk/>
           <pc:sldMk cId="2569888114" sldId="261"/>
         </pc:sldMkLst>
         <pc:spChg chg="mod">
-          <ac:chgData name="João Gaspar" userId="7dec15aa-df9c-4e56-83fb-de5e1da84347" providerId="ADAL" clId="{5F5A64CD-14DA-4429-AD0D-339DD7191AF6}" dt="2024-06-02T21:43:09.006" v="252" actId="26606"/>
+          <ac:chgData name="João Gaspar" userId="7dec15aa-df9c-4e56-83fb-de5e1da84347" providerId="ADAL" clId="{5F5A64CD-14DA-4429-AD0D-339DD7191AF6}" dt="2024-06-03T18:01:12.471" v="877" actId="26606"/>
           <ac:spMkLst>
             <pc:docMk/>
             <pc:sldMk cId="2569888114" sldId="261"/>
@@ -551,7 +608,7 @@
           </ac:spMkLst>
         </pc:spChg>
         <pc:spChg chg="mod">
-          <ac:chgData name="João Gaspar" userId="7dec15aa-df9c-4e56-83fb-de5e1da84347" providerId="ADAL" clId="{5F5A64CD-14DA-4429-AD0D-339DD7191AF6}" dt="2024-06-02T22:14:09.296" v="710" actId="2710"/>
+          <ac:chgData name="João Gaspar" userId="7dec15aa-df9c-4e56-83fb-de5e1da84347" providerId="ADAL" clId="{5F5A64CD-14DA-4429-AD0D-339DD7191AF6}" dt="2024-06-03T18:01:12.471" v="877" actId="26606"/>
           <ac:spMkLst>
             <pc:docMk/>
             <pc:sldMk cId="2569888114" sldId="261"/>
@@ -566,16 +623,24 @@
             <ac:spMk id="4" creationId="{8FF36D00-7B5C-37A5-80A6-33841E343B24}"/>
           </ac:spMkLst>
         </pc:spChg>
-        <pc:spChg chg="mod">
-          <ac:chgData name="João Gaspar" userId="7dec15aa-df9c-4e56-83fb-de5e1da84347" providerId="ADAL" clId="{5F5A64CD-14DA-4429-AD0D-339DD7191AF6}" dt="2024-06-02T21:43:09.006" v="252" actId="26606"/>
+        <pc:spChg chg="add mod">
+          <ac:chgData name="João Gaspar" userId="7dec15aa-df9c-4e56-83fb-de5e1da84347" providerId="ADAL" clId="{5F5A64CD-14DA-4429-AD0D-339DD7191AF6}" dt="2024-06-03T18:02:09.466" v="895" actId="207"/>
+          <ac:spMkLst>
+            <pc:docMk/>
+            <pc:sldMk cId="2569888114" sldId="261"/>
+            <ac:spMk id="4" creationId="{D4A8DDB6-AD54-8BC4-9622-FA4D441DF2EB}"/>
+          </ac:spMkLst>
+        </pc:spChg>
+        <pc:spChg chg="mod ord">
+          <ac:chgData name="João Gaspar" userId="7dec15aa-df9c-4e56-83fb-de5e1da84347" providerId="ADAL" clId="{5F5A64CD-14DA-4429-AD0D-339DD7191AF6}" dt="2024-06-03T18:01:12.471" v="877" actId="26606"/>
           <ac:spMkLst>
             <pc:docMk/>
             <pc:sldMk cId="2569888114" sldId="261"/>
             <ac:spMk id="5" creationId="{B8B4F806-50C1-2A3B-B7FF-66DE4B6A8F81}"/>
           </ac:spMkLst>
         </pc:spChg>
-        <pc:spChg chg="add mod">
-          <ac:chgData name="João Gaspar" userId="7dec15aa-df9c-4e56-83fb-de5e1da84347" providerId="ADAL" clId="{5F5A64CD-14DA-4429-AD0D-339DD7191AF6}" dt="2024-06-02T21:56:56.020" v="324"/>
+        <pc:spChg chg="add del mod">
+          <ac:chgData name="João Gaspar" userId="7dec15aa-df9c-4e56-83fb-de5e1da84347" providerId="ADAL" clId="{5F5A64CD-14DA-4429-AD0D-339DD7191AF6}" dt="2024-06-03T18:02:07.954" v="893" actId="478"/>
           <ac:spMkLst>
             <pc:docMk/>
             <pc:sldMk cId="2569888114" sldId="261"/>
@@ -614,20 +679,36 @@
             <ac:spMk id="17" creationId="{8D6EA299-0840-6DEA-E670-C49AEBC87E89}"/>
           </ac:spMkLst>
         </pc:spChg>
-        <pc:spChg chg="add">
-          <ac:chgData name="João Gaspar" userId="7dec15aa-df9c-4e56-83fb-de5e1da84347" providerId="ADAL" clId="{5F5A64CD-14DA-4429-AD0D-339DD7191AF6}" dt="2024-06-02T21:43:09.006" v="252" actId="26606"/>
+        <pc:spChg chg="add del">
+          <ac:chgData name="João Gaspar" userId="7dec15aa-df9c-4e56-83fb-de5e1da84347" providerId="ADAL" clId="{5F5A64CD-14DA-4429-AD0D-339DD7191AF6}" dt="2024-06-03T18:01:12.471" v="877" actId="26606"/>
           <ac:spMkLst>
             <pc:docMk/>
             <pc:sldMk cId="2569888114" sldId="261"/>
             <ac:spMk id="22" creationId="{C0763A76-9F1C-4FC5-82B7-DD475DA461B2}"/>
           </ac:spMkLst>
         </pc:spChg>
-        <pc:spChg chg="add">
-          <ac:chgData name="João Gaspar" userId="7dec15aa-df9c-4e56-83fb-de5e1da84347" providerId="ADAL" clId="{5F5A64CD-14DA-4429-AD0D-339DD7191AF6}" dt="2024-06-02T21:43:09.006" v="252" actId="26606"/>
+        <pc:spChg chg="add del">
+          <ac:chgData name="João Gaspar" userId="7dec15aa-df9c-4e56-83fb-de5e1da84347" providerId="ADAL" clId="{5F5A64CD-14DA-4429-AD0D-339DD7191AF6}" dt="2024-06-03T18:01:12.471" v="877" actId="26606"/>
           <ac:spMkLst>
             <pc:docMk/>
             <pc:sldMk cId="2569888114" sldId="261"/>
             <ac:spMk id="24" creationId="{E81BF4F6-F2CF-4984-9D14-D6966D92F99F}"/>
+          </ac:spMkLst>
+        </pc:spChg>
+        <pc:spChg chg="add">
+          <ac:chgData name="João Gaspar" userId="7dec15aa-df9c-4e56-83fb-de5e1da84347" providerId="ADAL" clId="{5F5A64CD-14DA-4429-AD0D-339DD7191AF6}" dt="2024-06-03T18:01:12.471" v="877" actId="26606"/>
+          <ac:spMkLst>
+            <pc:docMk/>
+            <pc:sldMk cId="2569888114" sldId="261"/>
+            <ac:spMk id="29" creationId="{3ECBE1F1-D69B-4AFA-ABD5-8E41720EF6DE}"/>
+          </ac:spMkLst>
+        </pc:spChg>
+        <pc:spChg chg="add">
+          <ac:chgData name="João Gaspar" userId="7dec15aa-df9c-4e56-83fb-de5e1da84347" providerId="ADAL" clId="{5F5A64CD-14DA-4429-AD0D-339DD7191AF6}" dt="2024-06-03T18:01:12.471" v="877" actId="26606"/>
+          <ac:spMkLst>
+            <pc:docMk/>
+            <pc:sldMk cId="2569888114" sldId="261"/>
+            <ac:spMk id="31" creationId="{603A6265-E10C-4B85-9C20-E75FCAF9CC63}"/>
           </ac:spMkLst>
         </pc:spChg>
         <pc:picChg chg="add mod">
@@ -638,8 +719,8 @@
             <ac:picMk id="6" creationId="{86CA146D-8624-719A-01F3-F6D87063F06C}"/>
           </ac:picMkLst>
         </pc:picChg>
-        <pc:picChg chg="add del mod">
-          <ac:chgData name="João Gaspar" userId="7dec15aa-df9c-4e56-83fb-de5e1da84347" providerId="ADAL" clId="{5F5A64CD-14DA-4429-AD0D-339DD7191AF6}" dt="2024-06-02T21:43:17.412" v="255" actId="14826"/>
+        <pc:picChg chg="add del mod ord modCrop">
+          <ac:chgData name="João Gaspar" userId="7dec15aa-df9c-4e56-83fb-de5e1da84347" providerId="ADAL" clId="{5F5A64CD-14DA-4429-AD0D-339DD7191AF6}" dt="2024-06-03T18:01:19.026" v="878" actId="18131"/>
           <ac:picMkLst>
             <pc:docMk/>
             <pc:sldMk cId="2569888114" sldId="261"/>
@@ -656,13 +737,13 @@
         </pc:picChg>
       </pc:sldChg>
       <pc:sldChg chg="addSp delSp modSp mod setBg">
-        <pc:chgData name="João Gaspar" userId="7dec15aa-df9c-4e56-83fb-de5e1da84347" providerId="ADAL" clId="{5F5A64CD-14DA-4429-AD0D-339DD7191AF6}" dt="2024-06-03T00:04:16.774" v="729" actId="26606"/>
+        <pc:chgData name="João Gaspar" userId="7dec15aa-df9c-4e56-83fb-de5e1da84347" providerId="ADAL" clId="{5F5A64CD-14DA-4429-AD0D-339DD7191AF6}" dt="2024-06-03T18:01:59.875" v="890" actId="207"/>
         <pc:sldMkLst>
           <pc:docMk/>
           <pc:sldMk cId="567565778" sldId="262"/>
         </pc:sldMkLst>
         <pc:spChg chg="mod">
-          <ac:chgData name="João Gaspar" userId="7dec15aa-df9c-4e56-83fb-de5e1da84347" providerId="ADAL" clId="{5F5A64CD-14DA-4429-AD0D-339DD7191AF6}" dt="2024-06-03T00:04:16.774" v="729" actId="26606"/>
+          <ac:chgData name="João Gaspar" userId="7dec15aa-df9c-4e56-83fb-de5e1da84347" providerId="ADAL" clId="{5F5A64CD-14DA-4429-AD0D-339DD7191AF6}" dt="2024-06-03T18:01:29.952" v="880" actId="26606"/>
           <ac:spMkLst>
             <pc:docMk/>
             <pc:sldMk cId="567565778" sldId="262"/>
@@ -670,7 +751,7 @@
           </ac:spMkLst>
         </pc:spChg>
         <pc:spChg chg="mod">
-          <ac:chgData name="João Gaspar" userId="7dec15aa-df9c-4e56-83fb-de5e1da84347" providerId="ADAL" clId="{5F5A64CD-14DA-4429-AD0D-339DD7191AF6}" dt="2024-06-03T00:04:16.774" v="729" actId="26606"/>
+          <ac:chgData name="João Gaspar" userId="7dec15aa-df9c-4e56-83fb-de5e1da84347" providerId="ADAL" clId="{5F5A64CD-14DA-4429-AD0D-339DD7191AF6}" dt="2024-06-03T18:01:29.952" v="880" actId="26606"/>
           <ac:spMkLst>
             <pc:docMk/>
             <pc:sldMk cId="567565778" sldId="262"/>
@@ -685,8 +766,16 @@
             <ac:spMk id="4" creationId="{64CC3025-9489-A6D4-FC95-F988DA8BBC1E}"/>
           </ac:spMkLst>
         </pc:spChg>
+        <pc:spChg chg="add del mod">
+          <ac:chgData name="João Gaspar" userId="7dec15aa-df9c-4e56-83fb-de5e1da84347" providerId="ADAL" clId="{5F5A64CD-14DA-4429-AD0D-339DD7191AF6}" dt="2024-06-03T18:01:58.343" v="888" actId="478"/>
+          <ac:spMkLst>
+            <pc:docMk/>
+            <pc:sldMk cId="567565778" sldId="262"/>
+            <ac:spMk id="4" creationId="{B8E765DA-DAF5-5E13-1090-BCA53E06B16F}"/>
+          </ac:spMkLst>
+        </pc:spChg>
         <pc:spChg chg="mod ord">
-          <ac:chgData name="João Gaspar" userId="7dec15aa-df9c-4e56-83fb-de5e1da84347" providerId="ADAL" clId="{5F5A64CD-14DA-4429-AD0D-339DD7191AF6}" dt="2024-06-03T00:04:16.774" v="729" actId="26606"/>
+          <ac:chgData name="João Gaspar" userId="7dec15aa-df9c-4e56-83fb-de5e1da84347" providerId="ADAL" clId="{5F5A64CD-14DA-4429-AD0D-339DD7191AF6}" dt="2024-06-03T18:01:29.952" v="880" actId="26606"/>
           <ac:spMkLst>
             <pc:docMk/>
             <pc:sldMk cId="567565778" sldId="262"/>
@@ -694,7 +783,15 @@
           </ac:spMkLst>
         </pc:spChg>
         <pc:spChg chg="add mod">
-          <ac:chgData name="João Gaspar" userId="7dec15aa-df9c-4e56-83fb-de5e1da84347" providerId="ADAL" clId="{5F5A64CD-14DA-4429-AD0D-339DD7191AF6}" dt="2024-06-03T00:04:16.774" v="729" actId="26606"/>
+          <ac:chgData name="João Gaspar" userId="7dec15aa-df9c-4e56-83fb-de5e1da84347" providerId="ADAL" clId="{5F5A64CD-14DA-4429-AD0D-339DD7191AF6}" dt="2024-06-03T18:01:59.875" v="890" actId="207"/>
+          <ac:spMkLst>
+            <pc:docMk/>
+            <pc:sldMk cId="567565778" sldId="262"/>
+            <ac:spMk id="6" creationId="{61A9A774-DBB4-4C5D-4446-6F384C9E3FA2}"/>
+          </ac:spMkLst>
+        </pc:spChg>
+        <pc:spChg chg="add del mod">
+          <ac:chgData name="João Gaspar" userId="7dec15aa-df9c-4e56-83fb-de5e1da84347" providerId="ADAL" clId="{5F5A64CD-14DA-4429-AD0D-339DD7191AF6}" dt="2024-06-03T17:56:13.939" v="835" actId="478"/>
           <ac:spMkLst>
             <pc:docMk/>
             <pc:sldMk cId="567565778" sldId="262"/>
@@ -813,28 +910,60 @@
             <ac:spMk id="38" creationId="{603A6265-E10C-4B85-9C20-E75FCAF9CC63}"/>
           </ac:spMkLst>
         </pc:spChg>
-        <pc:spChg chg="add">
-          <ac:chgData name="João Gaspar" userId="7dec15aa-df9c-4e56-83fb-de5e1da84347" providerId="ADAL" clId="{5F5A64CD-14DA-4429-AD0D-339DD7191AF6}" dt="2024-06-03T00:04:16.774" v="729" actId="26606"/>
+        <pc:spChg chg="add del">
+          <ac:chgData name="João Gaspar" userId="7dec15aa-df9c-4e56-83fb-de5e1da84347" providerId="ADAL" clId="{5F5A64CD-14DA-4429-AD0D-339DD7191AF6}" dt="2024-06-03T17:54:46.054" v="815" actId="26606"/>
           <ac:spMkLst>
             <pc:docMk/>
             <pc:sldMk cId="567565778" sldId="262"/>
             <ac:spMk id="43" creationId="{9F7D5CDA-D291-4307-BF55-1381FED29634}"/>
           </ac:spMkLst>
         </pc:spChg>
-        <pc:spChg chg="add">
-          <ac:chgData name="João Gaspar" userId="7dec15aa-df9c-4e56-83fb-de5e1da84347" providerId="ADAL" clId="{5F5A64CD-14DA-4429-AD0D-339DD7191AF6}" dt="2024-06-03T00:04:16.774" v="729" actId="26606"/>
+        <pc:spChg chg="add del">
+          <ac:chgData name="João Gaspar" userId="7dec15aa-df9c-4e56-83fb-de5e1da84347" providerId="ADAL" clId="{5F5A64CD-14DA-4429-AD0D-339DD7191AF6}" dt="2024-06-03T17:54:46.054" v="815" actId="26606"/>
           <ac:spMkLst>
             <pc:docMk/>
             <pc:sldMk cId="567565778" sldId="262"/>
             <ac:spMk id="45" creationId="{59B296B9-C5A5-4E4F-9B60-C907B5F1466C}"/>
           </ac:spMkLst>
         </pc:spChg>
-        <pc:spChg chg="add">
-          <ac:chgData name="João Gaspar" userId="7dec15aa-df9c-4e56-83fb-de5e1da84347" providerId="ADAL" clId="{5F5A64CD-14DA-4429-AD0D-339DD7191AF6}" dt="2024-06-03T00:04:16.774" v="729" actId="26606"/>
+        <pc:spChg chg="add del">
+          <ac:chgData name="João Gaspar" userId="7dec15aa-df9c-4e56-83fb-de5e1da84347" providerId="ADAL" clId="{5F5A64CD-14DA-4429-AD0D-339DD7191AF6}" dt="2024-06-03T17:54:46.054" v="815" actId="26606"/>
           <ac:spMkLst>
             <pc:docMk/>
             <pc:sldMk cId="567565778" sldId="262"/>
             <ac:spMk id="47" creationId="{D0300FD3-5AF1-6305-15FA-9078072672E2}"/>
+          </ac:spMkLst>
+        </pc:spChg>
+        <pc:spChg chg="add del">
+          <ac:chgData name="João Gaspar" userId="7dec15aa-df9c-4e56-83fb-de5e1da84347" providerId="ADAL" clId="{5F5A64CD-14DA-4429-AD0D-339DD7191AF6}" dt="2024-06-03T18:01:29.952" v="880" actId="26606"/>
+          <ac:spMkLst>
+            <pc:docMk/>
+            <pc:sldMk cId="567565778" sldId="262"/>
+            <ac:spMk id="53" creationId="{C0763A76-9F1C-4FC5-82B7-DD475DA461B2}"/>
+          </ac:spMkLst>
+        </pc:spChg>
+        <pc:spChg chg="add del">
+          <ac:chgData name="João Gaspar" userId="7dec15aa-df9c-4e56-83fb-de5e1da84347" providerId="ADAL" clId="{5F5A64CD-14DA-4429-AD0D-339DD7191AF6}" dt="2024-06-03T18:01:29.952" v="880" actId="26606"/>
+          <ac:spMkLst>
+            <pc:docMk/>
+            <pc:sldMk cId="567565778" sldId="262"/>
+            <ac:spMk id="55" creationId="{E81BF4F6-F2CF-4984-9D14-D6966D92F99F}"/>
+          </ac:spMkLst>
+        </pc:spChg>
+        <pc:spChg chg="add">
+          <ac:chgData name="João Gaspar" userId="7dec15aa-df9c-4e56-83fb-de5e1da84347" providerId="ADAL" clId="{5F5A64CD-14DA-4429-AD0D-339DD7191AF6}" dt="2024-06-03T18:01:29.952" v="880" actId="26606"/>
+          <ac:spMkLst>
+            <pc:docMk/>
+            <pc:sldMk cId="567565778" sldId="262"/>
+            <ac:spMk id="60" creationId="{3ECBE1F1-D69B-4AFA-ABD5-8E41720EF6DE}"/>
+          </ac:spMkLst>
+        </pc:spChg>
+        <pc:spChg chg="add">
+          <ac:chgData name="João Gaspar" userId="7dec15aa-df9c-4e56-83fb-de5e1da84347" providerId="ADAL" clId="{5F5A64CD-14DA-4429-AD0D-339DD7191AF6}" dt="2024-06-03T18:01:29.952" v="880" actId="26606"/>
+          <ac:spMkLst>
+            <pc:docMk/>
+            <pc:sldMk cId="567565778" sldId="262"/>
+            <ac:spMk id="62" creationId="{603A6265-E10C-4B85-9C20-E75FCAF9CC63}"/>
           </ac:spMkLst>
         </pc:spChg>
         <pc:grpChg chg="add del">
@@ -853,23 +982,31 @@
             <ac:picMk id="7" creationId="{4215EBE2-516F-9B43-6570-51512D8A57AD}"/>
           </ac:picMkLst>
         </pc:picChg>
-        <pc:picChg chg="add mod ord">
-          <ac:chgData name="João Gaspar" userId="7dec15aa-df9c-4e56-83fb-de5e1da84347" providerId="ADAL" clId="{5F5A64CD-14DA-4429-AD0D-339DD7191AF6}" dt="2024-06-03T00:04:16.774" v="729" actId="26606"/>
+        <pc:picChg chg="add del mod ord">
+          <ac:chgData name="João Gaspar" userId="7dec15aa-df9c-4e56-83fb-de5e1da84347" providerId="ADAL" clId="{5F5A64CD-14DA-4429-AD0D-339DD7191AF6}" dt="2024-06-03T17:54:42.463" v="814" actId="478"/>
           <ac:picMkLst>
             <pc:docMk/>
             <pc:sldMk cId="567565778" sldId="262"/>
             <ac:picMk id="20" creationId="{F697300D-85D4-02BA-46CA-6D444AA9FB97}"/>
           </ac:picMkLst>
         </pc:picChg>
+        <pc:picChg chg="add mod ord">
+          <ac:chgData name="João Gaspar" userId="7dec15aa-df9c-4e56-83fb-de5e1da84347" providerId="ADAL" clId="{5F5A64CD-14DA-4429-AD0D-339DD7191AF6}" dt="2024-06-03T18:01:29.952" v="880" actId="26606"/>
+          <ac:picMkLst>
+            <pc:docMk/>
+            <pc:sldMk cId="567565778" sldId="262"/>
+            <ac:picMk id="49" creationId="{C60495D6-445A-356A-D02C-CEE2ABEBF902}"/>
+          </ac:picMkLst>
+        </pc:picChg>
       </pc:sldChg>
       <pc:sldChg chg="addSp delSp modSp mod setBg">
-        <pc:chgData name="João Gaspar" userId="7dec15aa-df9c-4e56-83fb-de5e1da84347" providerId="ADAL" clId="{5F5A64CD-14DA-4429-AD0D-339DD7191AF6}" dt="2024-06-03T00:04:41.883" v="733" actId="26606"/>
+        <pc:chgData name="João Gaspar" userId="7dec15aa-df9c-4e56-83fb-de5e1da84347" providerId="ADAL" clId="{5F5A64CD-14DA-4429-AD0D-339DD7191AF6}" dt="2024-06-03T18:01:53.603" v="887"/>
         <pc:sldMkLst>
           <pc:docMk/>
           <pc:sldMk cId="2832385390" sldId="263"/>
         </pc:sldMkLst>
         <pc:spChg chg="mod ord">
-          <ac:chgData name="João Gaspar" userId="7dec15aa-df9c-4e56-83fb-de5e1da84347" providerId="ADAL" clId="{5F5A64CD-14DA-4429-AD0D-339DD7191AF6}" dt="2024-06-03T00:04:41.883" v="733" actId="26606"/>
+          <ac:chgData name="João Gaspar" userId="7dec15aa-df9c-4e56-83fb-de5e1da84347" providerId="ADAL" clId="{5F5A64CD-14DA-4429-AD0D-339DD7191AF6}" dt="2024-06-03T18:01:32.653" v="881" actId="26606"/>
           <ac:spMkLst>
             <pc:docMk/>
             <pc:sldMk cId="2832385390" sldId="263"/>
@@ -877,7 +1014,7 @@
           </ac:spMkLst>
         </pc:spChg>
         <pc:spChg chg="mod">
-          <ac:chgData name="João Gaspar" userId="7dec15aa-df9c-4e56-83fb-de5e1da84347" providerId="ADAL" clId="{5F5A64CD-14DA-4429-AD0D-339DD7191AF6}" dt="2024-06-03T00:04:41.883" v="733" actId="26606"/>
+          <ac:chgData name="João Gaspar" userId="7dec15aa-df9c-4e56-83fb-de5e1da84347" providerId="ADAL" clId="{5F5A64CD-14DA-4429-AD0D-339DD7191AF6}" dt="2024-06-03T18:01:32.653" v="881" actId="26606"/>
           <ac:spMkLst>
             <pc:docMk/>
             <pc:sldMk cId="2832385390" sldId="263"/>
@@ -892,22 +1029,38 @@
             <ac:spMk id="4" creationId="{279D06DA-5B84-415C-8F61-C7847742AAB1}"/>
           </ac:spMkLst>
         </pc:spChg>
-        <pc:spChg chg="mod">
-          <ac:chgData name="João Gaspar" userId="7dec15aa-df9c-4e56-83fb-de5e1da84347" providerId="ADAL" clId="{5F5A64CD-14DA-4429-AD0D-339DD7191AF6}" dt="2024-06-03T00:04:41.883" v="733" actId="26606"/>
+        <pc:spChg chg="add del mod">
+          <ac:chgData name="João Gaspar" userId="7dec15aa-df9c-4e56-83fb-de5e1da84347" providerId="ADAL" clId="{5F5A64CD-14DA-4429-AD0D-339DD7191AF6}" dt="2024-06-03T18:01:53.310" v="886" actId="478"/>
+          <ac:spMkLst>
+            <pc:docMk/>
+            <pc:sldMk cId="2832385390" sldId="263"/>
+            <ac:spMk id="4" creationId="{B18B2D79-1C7D-565D-2FAB-6A9BDE503663}"/>
+          </ac:spMkLst>
+        </pc:spChg>
+        <pc:spChg chg="mod ord">
+          <ac:chgData name="João Gaspar" userId="7dec15aa-df9c-4e56-83fb-de5e1da84347" providerId="ADAL" clId="{5F5A64CD-14DA-4429-AD0D-339DD7191AF6}" dt="2024-06-03T18:01:32.653" v="881" actId="26606"/>
           <ac:spMkLst>
             <pc:docMk/>
             <pc:sldMk cId="2832385390" sldId="263"/>
             <ac:spMk id="5" creationId="{1D3DFBEB-7750-F056-BE82-8158E725F8BE}"/>
           </ac:spMkLst>
         </pc:spChg>
-        <pc:spChg chg="add mod ord">
-          <ac:chgData name="João Gaspar" userId="7dec15aa-df9c-4e56-83fb-de5e1da84347" providerId="ADAL" clId="{5F5A64CD-14DA-4429-AD0D-339DD7191AF6}" dt="2024-06-03T00:04:37.172" v="732" actId="26606"/>
+        <pc:spChg chg="add del mod ord">
+          <ac:chgData name="João Gaspar" userId="7dec15aa-df9c-4e56-83fb-de5e1da84347" providerId="ADAL" clId="{5F5A64CD-14DA-4429-AD0D-339DD7191AF6}" dt="2024-06-03T17:56:07.167" v="832" actId="478"/>
           <ac:spMkLst>
             <pc:docMk/>
             <pc:sldMk cId="2832385390" sldId="263"/>
             <ac:spMk id="6" creationId="{9ED20EE6-852D-1387-4E9C-0E925B78142B}"/>
           </ac:spMkLst>
         </pc:spChg>
+        <pc:spChg chg="add mod">
+          <ac:chgData name="João Gaspar" userId="7dec15aa-df9c-4e56-83fb-de5e1da84347" providerId="ADAL" clId="{5F5A64CD-14DA-4429-AD0D-339DD7191AF6}" dt="2024-06-03T18:01:53.603" v="887"/>
+          <ac:spMkLst>
+            <pc:docMk/>
+            <pc:sldMk cId="2832385390" sldId="263"/>
+            <ac:spMk id="6" creationId="{A826850F-12A5-D49F-402E-D5A9E25BDB85}"/>
+          </ac:spMkLst>
+        </pc:spChg>
         <pc:spChg chg="add del">
           <ac:chgData name="João Gaspar" userId="7dec15aa-df9c-4e56-83fb-de5e1da84347" providerId="ADAL" clId="{5F5A64CD-14DA-4429-AD0D-339DD7191AF6}" dt="2024-06-02T22:04:44.303" v="683" actId="26606"/>
           <ac:spMkLst>
@@ -972,24 +1125,40 @@
             <ac:spMk id="34" creationId="{02F8C595-E68C-4306-AED8-DC7826A0A506}"/>
           </ac:spMkLst>
         </pc:spChg>
-        <pc:spChg chg="add">
-          <ac:chgData name="João Gaspar" userId="7dec15aa-df9c-4e56-83fb-de5e1da84347" providerId="ADAL" clId="{5F5A64CD-14DA-4429-AD0D-339DD7191AF6}" dt="2024-06-03T00:04:41.883" v="733" actId="26606"/>
+        <pc:spChg chg="add del">
+          <ac:chgData name="João Gaspar" userId="7dec15aa-df9c-4e56-83fb-de5e1da84347" providerId="ADAL" clId="{5F5A64CD-14DA-4429-AD0D-339DD7191AF6}" dt="2024-06-03T18:01:32.653" v="881" actId="26606"/>
           <ac:spMkLst>
             <pc:docMk/>
             <pc:sldMk cId="2832385390" sldId="263"/>
             <ac:spMk id="39" creationId="{3ECBE1F1-D69B-4AFA-ABD5-8E41720EF6DE}"/>
           </ac:spMkLst>
         </pc:spChg>
-        <pc:spChg chg="add">
-          <ac:chgData name="João Gaspar" userId="7dec15aa-df9c-4e56-83fb-de5e1da84347" providerId="ADAL" clId="{5F5A64CD-14DA-4429-AD0D-339DD7191AF6}" dt="2024-06-03T00:04:41.883" v="733" actId="26606"/>
+        <pc:spChg chg="add del">
+          <ac:chgData name="João Gaspar" userId="7dec15aa-df9c-4e56-83fb-de5e1da84347" providerId="ADAL" clId="{5F5A64CD-14DA-4429-AD0D-339DD7191AF6}" dt="2024-06-03T18:01:32.653" v="881" actId="26606"/>
           <ac:spMkLst>
             <pc:docMk/>
             <pc:sldMk cId="2832385390" sldId="263"/>
             <ac:spMk id="41" creationId="{603A6265-E10C-4B85-9C20-E75FCAF9CC63}"/>
           </ac:spMkLst>
         </pc:spChg>
+        <pc:spChg chg="add">
+          <ac:chgData name="João Gaspar" userId="7dec15aa-df9c-4e56-83fb-de5e1da84347" providerId="ADAL" clId="{5F5A64CD-14DA-4429-AD0D-339DD7191AF6}" dt="2024-06-03T18:01:32.653" v="881" actId="26606"/>
+          <ac:spMkLst>
+            <pc:docMk/>
+            <pc:sldMk cId="2832385390" sldId="263"/>
+            <ac:spMk id="46" creationId="{C0763A76-9F1C-4FC5-82B7-DD475DA461B2}"/>
+          </ac:spMkLst>
+        </pc:spChg>
+        <pc:spChg chg="add">
+          <ac:chgData name="João Gaspar" userId="7dec15aa-df9c-4e56-83fb-de5e1da84347" providerId="ADAL" clId="{5F5A64CD-14DA-4429-AD0D-339DD7191AF6}" dt="2024-06-03T18:01:32.653" v="881" actId="26606"/>
+          <ac:spMkLst>
+            <pc:docMk/>
+            <pc:sldMk cId="2832385390" sldId="263"/>
+            <ac:spMk id="48" creationId="{E81BF4F6-F2CF-4984-9D14-D6966D92F99F}"/>
+          </ac:spMkLst>
+        </pc:spChg>
         <pc:picChg chg="add mod ord">
-          <ac:chgData name="João Gaspar" userId="7dec15aa-df9c-4e56-83fb-de5e1da84347" providerId="ADAL" clId="{5F5A64CD-14DA-4429-AD0D-339DD7191AF6}" dt="2024-06-03T00:04:41.883" v="733" actId="26606"/>
+          <ac:chgData name="João Gaspar" userId="7dec15aa-df9c-4e56-83fb-de5e1da84347" providerId="ADAL" clId="{5F5A64CD-14DA-4429-AD0D-339DD7191AF6}" dt="2024-06-03T18:01:32.653" v="881" actId="26606"/>
           <ac:picMkLst>
             <pc:docMk/>
             <pc:sldMk cId="2832385390" sldId="263"/>
@@ -998,13 +1167,13 @@
         </pc:picChg>
       </pc:sldChg>
       <pc:sldChg chg="addSp delSp modSp mod setBg">
-        <pc:chgData name="João Gaspar" userId="7dec15aa-df9c-4e56-83fb-de5e1da84347" providerId="ADAL" clId="{5F5A64CD-14DA-4429-AD0D-339DD7191AF6}" dt="2024-06-03T00:04:34.765" v="731" actId="26606"/>
+        <pc:chgData name="João Gaspar" userId="7dec15aa-df9c-4e56-83fb-de5e1da84347" providerId="ADAL" clId="{5F5A64CD-14DA-4429-AD0D-339DD7191AF6}" dt="2024-06-03T18:01:50.442" v="885" actId="207"/>
         <pc:sldMkLst>
           <pc:docMk/>
           <pc:sldMk cId="3173771447" sldId="264"/>
         </pc:sldMkLst>
         <pc:spChg chg="mod">
-          <ac:chgData name="João Gaspar" userId="7dec15aa-df9c-4e56-83fb-de5e1da84347" providerId="ADAL" clId="{5F5A64CD-14DA-4429-AD0D-339DD7191AF6}" dt="2024-06-03T00:04:34.765" v="731" actId="26606"/>
+          <ac:chgData name="João Gaspar" userId="7dec15aa-df9c-4e56-83fb-de5e1da84347" providerId="ADAL" clId="{5F5A64CD-14DA-4429-AD0D-339DD7191AF6}" dt="2024-06-03T18:01:35.322" v="882" actId="26606"/>
           <ac:spMkLst>
             <pc:docMk/>
             <pc:sldMk cId="3173771447" sldId="264"/>
@@ -1012,13 +1181,29 @@
           </ac:spMkLst>
         </pc:spChg>
         <pc:spChg chg="mod">
-          <ac:chgData name="João Gaspar" userId="7dec15aa-df9c-4e56-83fb-de5e1da84347" providerId="ADAL" clId="{5F5A64CD-14DA-4429-AD0D-339DD7191AF6}" dt="2024-06-03T00:04:34.765" v="731" actId="26606"/>
+          <ac:chgData name="João Gaspar" userId="7dec15aa-df9c-4e56-83fb-de5e1da84347" providerId="ADAL" clId="{5F5A64CD-14DA-4429-AD0D-339DD7191AF6}" dt="2024-06-03T18:01:35.322" v="882" actId="26606"/>
           <ac:spMkLst>
             <pc:docMk/>
             <pc:sldMk cId="3173771447" sldId="264"/>
             <ac:spMk id="3" creationId="{63326C6E-5F1E-0E8D-F642-983D87164C61}"/>
           </ac:spMkLst>
         </pc:spChg>
+        <pc:spChg chg="add mod">
+          <ac:chgData name="João Gaspar" userId="7dec15aa-df9c-4e56-83fb-de5e1da84347" providerId="ADAL" clId="{5F5A64CD-14DA-4429-AD0D-339DD7191AF6}" dt="2024-06-03T18:01:50.442" v="885" actId="207"/>
+          <ac:spMkLst>
+            <pc:docMk/>
+            <pc:sldMk cId="3173771447" sldId="264"/>
+            <ac:spMk id="4" creationId="{3B399166-74C1-4B10-A95D-521B6B62EB4D}"/>
+          </ac:spMkLst>
+        </pc:spChg>
+        <pc:spChg chg="add mod">
+          <ac:chgData name="João Gaspar" userId="7dec15aa-df9c-4e56-83fb-de5e1da84347" providerId="ADAL" clId="{5F5A64CD-14DA-4429-AD0D-339DD7191AF6}" dt="2024-06-03T17:56:01.285" v="829"/>
+          <ac:spMkLst>
+            <pc:docMk/>
+            <pc:sldMk cId="3173771447" sldId="264"/>
+            <ac:spMk id="4" creationId="{6B3909FB-E57A-997B-EBC9-E582876C6157}"/>
+          </ac:spMkLst>
+        </pc:spChg>
         <pc:spChg chg="del mod">
           <ac:chgData name="João Gaspar" userId="7dec15aa-df9c-4e56-83fb-de5e1da84347" providerId="ADAL" clId="{5F5A64CD-14DA-4429-AD0D-339DD7191AF6}" dt="2024-06-02T21:56:41.579" v="317" actId="478"/>
           <ac:spMkLst>
@@ -1028,21 +1213,29 @@
           </ac:spMkLst>
         </pc:spChg>
         <pc:spChg chg="mod ord">
-          <ac:chgData name="João Gaspar" userId="7dec15aa-df9c-4e56-83fb-de5e1da84347" providerId="ADAL" clId="{5F5A64CD-14DA-4429-AD0D-339DD7191AF6}" dt="2024-06-03T00:04:34.765" v="731" actId="26606"/>
+          <ac:chgData name="João Gaspar" userId="7dec15aa-df9c-4e56-83fb-de5e1da84347" providerId="ADAL" clId="{5F5A64CD-14DA-4429-AD0D-339DD7191AF6}" dt="2024-06-03T18:01:35.322" v="882" actId="26606"/>
           <ac:spMkLst>
             <pc:docMk/>
             <pc:sldMk cId="3173771447" sldId="264"/>
             <ac:spMk id="5" creationId="{09584837-1C74-DD42-E69B-D85B02C81CBA}"/>
           </ac:spMkLst>
         </pc:spChg>
-        <pc:spChg chg="add mod">
-          <ac:chgData name="João Gaspar" userId="7dec15aa-df9c-4e56-83fb-de5e1da84347" providerId="ADAL" clId="{5F5A64CD-14DA-4429-AD0D-339DD7191AF6}" dt="2024-06-03T00:04:34.765" v="731" actId="26606"/>
+        <pc:spChg chg="add del mod">
+          <ac:chgData name="João Gaspar" userId="7dec15aa-df9c-4e56-83fb-de5e1da84347" providerId="ADAL" clId="{5F5A64CD-14DA-4429-AD0D-339DD7191AF6}" dt="2024-06-03T17:56:03.161" v="830" actId="478"/>
           <ac:spMkLst>
             <pc:docMk/>
             <pc:sldMk cId="3173771447" sldId="264"/>
             <ac:spMk id="6" creationId="{029FED57-33C5-855C-4776-592884EB5D56}"/>
           </ac:spMkLst>
         </pc:spChg>
+        <pc:spChg chg="add del mod">
+          <ac:chgData name="João Gaspar" userId="7dec15aa-df9c-4e56-83fb-de5e1da84347" providerId="ADAL" clId="{5F5A64CD-14DA-4429-AD0D-339DD7191AF6}" dt="2024-06-03T18:01:47.685" v="883" actId="478"/>
+          <ac:spMkLst>
+            <pc:docMk/>
+            <pc:sldMk cId="3173771447" sldId="264"/>
+            <ac:spMk id="8" creationId="{2FC07E68-D36B-4D44-128D-6FE96E67C56C}"/>
+          </ac:spMkLst>
+        </pc:spChg>
         <pc:spChg chg="add del">
           <ac:chgData name="João Gaspar" userId="7dec15aa-df9c-4e56-83fb-de5e1da84347" providerId="ADAL" clId="{5F5A64CD-14DA-4429-AD0D-339DD7191AF6}" dt="2024-06-03T00:04:34.765" v="731" actId="26606"/>
           <ac:spMkLst>
@@ -1059,36 +1252,76 @@
             <ac:spMk id="13" creationId="{603A6265-E10C-4B85-9C20-E75FCAF9CC63}"/>
           </ac:spMkLst>
         </pc:spChg>
-        <pc:spChg chg="add">
-          <ac:chgData name="João Gaspar" userId="7dec15aa-df9c-4e56-83fb-de5e1da84347" providerId="ADAL" clId="{5F5A64CD-14DA-4429-AD0D-339DD7191AF6}" dt="2024-06-03T00:04:34.765" v="731" actId="26606"/>
+        <pc:spChg chg="add del">
+          <ac:chgData name="João Gaspar" userId="7dec15aa-df9c-4e56-83fb-de5e1da84347" providerId="ADAL" clId="{5F5A64CD-14DA-4429-AD0D-339DD7191AF6}" dt="2024-06-03T17:54:55.099" v="817" actId="26606"/>
           <ac:spMkLst>
             <pc:docMk/>
             <pc:sldMk cId="3173771447" sldId="264"/>
             <ac:spMk id="18" creationId="{9F7D5CDA-D291-4307-BF55-1381FED29634}"/>
           </ac:spMkLst>
         </pc:spChg>
-        <pc:spChg chg="add">
-          <ac:chgData name="João Gaspar" userId="7dec15aa-df9c-4e56-83fb-de5e1da84347" providerId="ADAL" clId="{5F5A64CD-14DA-4429-AD0D-339DD7191AF6}" dt="2024-06-03T00:04:34.765" v="731" actId="26606"/>
+        <pc:spChg chg="add del">
+          <ac:chgData name="João Gaspar" userId="7dec15aa-df9c-4e56-83fb-de5e1da84347" providerId="ADAL" clId="{5F5A64CD-14DA-4429-AD0D-339DD7191AF6}" dt="2024-06-03T17:54:55.099" v="817" actId="26606"/>
           <ac:spMkLst>
             <pc:docMk/>
             <pc:sldMk cId="3173771447" sldId="264"/>
             <ac:spMk id="20" creationId="{59B296B9-C5A5-4E4F-9B60-C907B5F1466C}"/>
           </ac:spMkLst>
         </pc:spChg>
-        <pc:spChg chg="add">
-          <ac:chgData name="João Gaspar" userId="7dec15aa-df9c-4e56-83fb-de5e1da84347" providerId="ADAL" clId="{5F5A64CD-14DA-4429-AD0D-339DD7191AF6}" dt="2024-06-03T00:04:34.765" v="731" actId="26606"/>
+        <pc:spChg chg="add del">
+          <ac:chgData name="João Gaspar" userId="7dec15aa-df9c-4e56-83fb-de5e1da84347" providerId="ADAL" clId="{5F5A64CD-14DA-4429-AD0D-339DD7191AF6}" dt="2024-06-03T17:54:55.099" v="817" actId="26606"/>
           <ac:spMkLst>
             <pc:docMk/>
             <pc:sldMk cId="3173771447" sldId="264"/>
             <ac:spMk id="22" creationId="{D0300FD3-5AF1-6305-15FA-9078072672E2}"/>
           </ac:spMkLst>
         </pc:spChg>
-        <pc:picChg chg="add mod">
-          <ac:chgData name="João Gaspar" userId="7dec15aa-df9c-4e56-83fb-de5e1da84347" providerId="ADAL" clId="{5F5A64CD-14DA-4429-AD0D-339DD7191AF6}" dt="2024-06-03T00:04:34.765" v="731" actId="26606"/>
+        <pc:spChg chg="add del">
+          <ac:chgData name="João Gaspar" userId="7dec15aa-df9c-4e56-83fb-de5e1da84347" providerId="ADAL" clId="{5F5A64CD-14DA-4429-AD0D-339DD7191AF6}" dt="2024-06-03T18:01:35.322" v="882" actId="26606"/>
+          <ac:spMkLst>
+            <pc:docMk/>
+            <pc:sldMk cId="3173771447" sldId="264"/>
+            <ac:spMk id="28" creationId="{C0763A76-9F1C-4FC5-82B7-DD475DA461B2}"/>
+          </ac:spMkLst>
+        </pc:spChg>
+        <pc:spChg chg="add del">
+          <ac:chgData name="João Gaspar" userId="7dec15aa-df9c-4e56-83fb-de5e1da84347" providerId="ADAL" clId="{5F5A64CD-14DA-4429-AD0D-339DD7191AF6}" dt="2024-06-03T18:01:35.322" v="882" actId="26606"/>
+          <ac:spMkLst>
+            <pc:docMk/>
+            <pc:sldMk cId="3173771447" sldId="264"/>
+            <ac:spMk id="30" creationId="{E81BF4F6-F2CF-4984-9D14-D6966D92F99F}"/>
+          </ac:spMkLst>
+        </pc:spChg>
+        <pc:spChg chg="add">
+          <ac:chgData name="João Gaspar" userId="7dec15aa-df9c-4e56-83fb-de5e1da84347" providerId="ADAL" clId="{5F5A64CD-14DA-4429-AD0D-339DD7191AF6}" dt="2024-06-03T18:01:35.322" v="882" actId="26606"/>
+          <ac:spMkLst>
+            <pc:docMk/>
+            <pc:sldMk cId="3173771447" sldId="264"/>
+            <ac:spMk id="35" creationId="{3ECBE1F1-D69B-4AFA-ABD5-8E41720EF6DE}"/>
+          </ac:spMkLst>
+        </pc:spChg>
+        <pc:spChg chg="add">
+          <ac:chgData name="João Gaspar" userId="7dec15aa-df9c-4e56-83fb-de5e1da84347" providerId="ADAL" clId="{5F5A64CD-14DA-4429-AD0D-339DD7191AF6}" dt="2024-06-03T18:01:35.322" v="882" actId="26606"/>
+          <ac:spMkLst>
+            <pc:docMk/>
+            <pc:sldMk cId="3173771447" sldId="264"/>
+            <ac:spMk id="37" creationId="{603A6265-E10C-4B85-9C20-E75FCAF9CC63}"/>
+          </ac:spMkLst>
+        </pc:spChg>
+        <pc:picChg chg="add del mod">
+          <ac:chgData name="João Gaspar" userId="7dec15aa-df9c-4e56-83fb-de5e1da84347" providerId="ADAL" clId="{5F5A64CD-14DA-4429-AD0D-339DD7191AF6}" dt="2024-06-03T17:54:52.587" v="816" actId="478"/>
           <ac:picMkLst>
             <pc:docMk/>
             <pc:sldMk cId="3173771447" sldId="264"/>
             <ac:picMk id="7" creationId="{1D6FD1B4-CA86-95E3-721F-84754E4148ED}"/>
+          </ac:picMkLst>
+        </pc:picChg>
+        <pc:picChg chg="add mod ord">
+          <ac:chgData name="João Gaspar" userId="7dec15aa-df9c-4e56-83fb-de5e1da84347" providerId="ADAL" clId="{5F5A64CD-14DA-4429-AD0D-339DD7191AF6}" dt="2024-06-03T18:01:35.322" v="882" actId="26606"/>
+          <ac:picMkLst>
+            <pc:docMk/>
+            <pc:sldMk cId="3173771447" sldId="264"/>
+            <ac:picMk id="24" creationId="{A4087CD9-8E07-BB53-2623-3A20C66E69F4}"/>
           </ac:picMkLst>
         </pc:picChg>
       </pc:sldChg>
@@ -1211,13 +1444,13 @@
         </pc:spChg>
       </pc:sldChg>
       <pc:sldChg chg="addSp delSp modSp add mod setBg delDesignElem">
-        <pc:chgData name="João Gaspar" userId="7dec15aa-df9c-4e56-83fb-de5e1da84347" providerId="ADAL" clId="{5F5A64CD-14DA-4429-AD0D-339DD7191AF6}" dt="2024-06-03T00:06:20.294" v="740" actId="20577"/>
+        <pc:chgData name="João Gaspar" userId="7dec15aa-df9c-4e56-83fb-de5e1da84347" providerId="ADAL" clId="{5F5A64CD-14DA-4429-AD0D-339DD7191AF6}" dt="2024-06-03T18:02:03.995" v="892"/>
         <pc:sldMkLst>
           <pc:docMk/>
           <pc:sldMk cId="3112891430" sldId="266"/>
         </pc:sldMkLst>
         <pc:spChg chg="mod">
-          <ac:chgData name="João Gaspar" userId="7dec15aa-df9c-4e56-83fb-de5e1da84347" providerId="ADAL" clId="{5F5A64CD-14DA-4429-AD0D-339DD7191AF6}" dt="2024-06-03T00:04:11.145" v="728" actId="26606"/>
+          <ac:chgData name="João Gaspar" userId="7dec15aa-df9c-4e56-83fb-de5e1da84347" providerId="ADAL" clId="{5F5A64CD-14DA-4429-AD0D-339DD7191AF6}" dt="2024-06-03T18:01:25.168" v="879" actId="26606"/>
           <ac:spMkLst>
             <pc:docMk/>
             <pc:sldMk cId="3112891430" sldId="266"/>
@@ -1225,29 +1458,53 @@
           </ac:spMkLst>
         </pc:spChg>
         <pc:spChg chg="mod">
-          <ac:chgData name="João Gaspar" userId="7dec15aa-df9c-4e56-83fb-de5e1da84347" providerId="ADAL" clId="{5F5A64CD-14DA-4429-AD0D-339DD7191AF6}" dt="2024-06-03T00:06:20.294" v="740" actId="20577"/>
+          <ac:chgData name="João Gaspar" userId="7dec15aa-df9c-4e56-83fb-de5e1da84347" providerId="ADAL" clId="{5F5A64CD-14DA-4429-AD0D-339DD7191AF6}" dt="2024-06-03T18:01:25.168" v="879" actId="26606"/>
           <ac:spMkLst>
             <pc:docMk/>
             <pc:sldMk cId="3112891430" sldId="266"/>
             <ac:spMk id="3" creationId="{C63E7569-D78E-A980-42C5-E03FCBCB4FAE}"/>
           </ac:spMkLst>
         </pc:spChg>
-        <pc:spChg chg="add mod">
-          <ac:chgData name="João Gaspar" userId="7dec15aa-df9c-4e56-83fb-de5e1da84347" providerId="ADAL" clId="{5F5A64CD-14DA-4429-AD0D-339DD7191AF6}" dt="2024-06-03T00:04:54.470" v="735"/>
+        <pc:spChg chg="add del mod">
+          <ac:chgData name="João Gaspar" userId="7dec15aa-df9c-4e56-83fb-de5e1da84347" providerId="ADAL" clId="{5F5A64CD-14DA-4429-AD0D-339DD7191AF6}" dt="2024-06-03T17:56:24.934" v="837" actId="478"/>
           <ac:spMkLst>
             <pc:docMk/>
             <pc:sldMk cId="3112891430" sldId="266"/>
             <ac:spMk id="4" creationId="{30981E7F-39BF-F46F-2F37-EC0640A89C9A}"/>
           </ac:spMkLst>
         </pc:spChg>
+        <pc:spChg chg="add mod">
+          <ac:chgData name="João Gaspar" userId="7dec15aa-df9c-4e56-83fb-de5e1da84347" providerId="ADAL" clId="{5F5A64CD-14DA-4429-AD0D-339DD7191AF6}" dt="2024-06-03T18:02:03.995" v="892"/>
+          <ac:spMkLst>
+            <pc:docMk/>
+            <pc:sldMk cId="3112891430" sldId="266"/>
+            <ac:spMk id="4" creationId="{9B164F7A-F11F-3251-DEA0-F4F53F75D7E8}"/>
+          </ac:spMkLst>
+        </pc:spChg>
         <pc:spChg chg="mod ord">
-          <ac:chgData name="João Gaspar" userId="7dec15aa-df9c-4e56-83fb-de5e1da84347" providerId="ADAL" clId="{5F5A64CD-14DA-4429-AD0D-339DD7191AF6}" dt="2024-06-03T00:04:11.145" v="728" actId="26606"/>
+          <ac:chgData name="João Gaspar" userId="7dec15aa-df9c-4e56-83fb-de5e1da84347" providerId="ADAL" clId="{5F5A64CD-14DA-4429-AD0D-339DD7191AF6}" dt="2024-06-03T18:01:25.168" v="879" actId="26606"/>
           <ac:spMkLst>
             <pc:docMk/>
             <pc:sldMk cId="3112891430" sldId="266"/>
             <ac:spMk id="5" creationId="{B8B4F806-50C1-2A3B-B7FF-66DE4B6A8F81}"/>
           </ac:spMkLst>
         </pc:spChg>
+        <pc:spChg chg="add del mod">
+          <ac:chgData name="João Gaspar" userId="7dec15aa-df9c-4e56-83fb-de5e1da84347" providerId="ADAL" clId="{5F5A64CD-14DA-4429-AD0D-339DD7191AF6}" dt="2024-06-03T17:57:08.484" v="841" actId="478"/>
+          <ac:spMkLst>
+            <pc:docMk/>
+            <pc:sldMk cId="3112891430" sldId="266"/>
+            <ac:spMk id="6" creationId="{E94B681B-1AF7-B0EB-B0A8-67D4BAE938CD}"/>
+          </ac:spMkLst>
+        </pc:spChg>
+        <pc:spChg chg="add del mod">
+          <ac:chgData name="João Gaspar" userId="7dec15aa-df9c-4e56-83fb-de5e1da84347" providerId="ADAL" clId="{5F5A64CD-14DA-4429-AD0D-339DD7191AF6}" dt="2024-06-03T18:02:03.689" v="891" actId="478"/>
+          <ac:spMkLst>
+            <pc:docMk/>
+            <pc:sldMk cId="3112891430" sldId="266"/>
+            <ac:spMk id="7" creationId="{0C1469B5-52A9-901E-6823-FCF9D602F9BA}"/>
+          </ac:spMkLst>
+        </pc:spChg>
         <pc:spChg chg="del mod">
           <ac:chgData name="João Gaspar" userId="7dec15aa-df9c-4e56-83fb-de5e1da84347" providerId="ADAL" clId="{5F5A64CD-14DA-4429-AD0D-339DD7191AF6}" dt="2024-06-03T00:04:54.190" v="734" actId="478"/>
           <ac:spMkLst>
@@ -1304,20 +1561,68 @@
             <ac:spMk id="24" creationId="{E81BF4F6-F2CF-4984-9D14-D6966D92F99F}"/>
           </ac:spMkLst>
         </pc:spChg>
-        <pc:spChg chg="add">
-          <ac:chgData name="João Gaspar" userId="7dec15aa-df9c-4e56-83fb-de5e1da84347" providerId="ADAL" clId="{5F5A64CD-14DA-4429-AD0D-339DD7191AF6}" dt="2024-06-03T00:04:11.145" v="728" actId="26606"/>
+        <pc:spChg chg="add del">
+          <ac:chgData name="João Gaspar" userId="7dec15aa-df9c-4e56-83fb-de5e1da84347" providerId="ADAL" clId="{5F5A64CD-14DA-4429-AD0D-339DD7191AF6}" dt="2024-06-03T17:53:07.752" v="755" actId="26606"/>
           <ac:spMkLst>
             <pc:docMk/>
             <pc:sldMk cId="3112891430" sldId="266"/>
             <ac:spMk id="25" creationId="{3ECBE1F1-D69B-4AFA-ABD5-8E41720EF6DE}"/>
           </ac:spMkLst>
         </pc:spChg>
-        <pc:spChg chg="add">
-          <ac:chgData name="João Gaspar" userId="7dec15aa-df9c-4e56-83fb-de5e1da84347" providerId="ADAL" clId="{5F5A64CD-14DA-4429-AD0D-339DD7191AF6}" dt="2024-06-03T00:04:11.145" v="728" actId="26606"/>
+        <pc:spChg chg="add del">
+          <ac:chgData name="João Gaspar" userId="7dec15aa-df9c-4e56-83fb-de5e1da84347" providerId="ADAL" clId="{5F5A64CD-14DA-4429-AD0D-339DD7191AF6}" dt="2024-06-03T17:53:07.752" v="755" actId="26606"/>
           <ac:spMkLst>
             <pc:docMk/>
             <pc:sldMk cId="3112891430" sldId="266"/>
             <ac:spMk id="27" creationId="{603A6265-E10C-4B85-9C20-E75FCAF9CC63}"/>
+          </ac:spMkLst>
+        </pc:spChg>
+        <pc:spChg chg="add del">
+          <ac:chgData name="João Gaspar" userId="7dec15aa-df9c-4e56-83fb-de5e1da84347" providerId="ADAL" clId="{5F5A64CD-14DA-4429-AD0D-339DD7191AF6}" dt="2024-06-03T17:56:59.851" v="840" actId="26606"/>
+          <ac:spMkLst>
+            <pc:docMk/>
+            <pc:sldMk cId="3112891430" sldId="266"/>
+            <ac:spMk id="32" creationId="{3ECBE1F1-D69B-4AFA-ABD5-8E41720EF6DE}"/>
+          </ac:spMkLst>
+        </pc:spChg>
+        <pc:spChg chg="add del">
+          <ac:chgData name="João Gaspar" userId="7dec15aa-df9c-4e56-83fb-de5e1da84347" providerId="ADAL" clId="{5F5A64CD-14DA-4429-AD0D-339DD7191AF6}" dt="2024-06-03T17:56:59.851" v="840" actId="26606"/>
+          <ac:spMkLst>
+            <pc:docMk/>
+            <pc:sldMk cId="3112891430" sldId="266"/>
+            <ac:spMk id="34" creationId="{603A6265-E10C-4B85-9C20-E75FCAF9CC63}"/>
+          </ac:spMkLst>
+        </pc:spChg>
+        <pc:spChg chg="add del">
+          <ac:chgData name="João Gaspar" userId="7dec15aa-df9c-4e56-83fb-de5e1da84347" providerId="ADAL" clId="{5F5A64CD-14DA-4429-AD0D-339DD7191AF6}" dt="2024-06-03T18:01:25.168" v="879" actId="26606"/>
+          <ac:spMkLst>
+            <pc:docMk/>
+            <pc:sldMk cId="3112891430" sldId="266"/>
+            <ac:spMk id="40" creationId="{3ECBE1F1-D69B-4AFA-ABD5-8E41720EF6DE}"/>
+          </ac:spMkLst>
+        </pc:spChg>
+        <pc:spChg chg="add del">
+          <ac:chgData name="João Gaspar" userId="7dec15aa-df9c-4e56-83fb-de5e1da84347" providerId="ADAL" clId="{5F5A64CD-14DA-4429-AD0D-339DD7191AF6}" dt="2024-06-03T18:01:25.168" v="879" actId="26606"/>
+          <ac:spMkLst>
+            <pc:docMk/>
+            <pc:sldMk cId="3112891430" sldId="266"/>
+            <ac:spMk id="42" creationId="{603A6265-E10C-4B85-9C20-E75FCAF9CC63}"/>
+          </ac:spMkLst>
+        </pc:spChg>
+        <pc:spChg chg="add">
+          <ac:chgData name="João Gaspar" userId="7dec15aa-df9c-4e56-83fb-de5e1da84347" providerId="ADAL" clId="{5F5A64CD-14DA-4429-AD0D-339DD7191AF6}" dt="2024-06-03T18:01:25.168" v="879" actId="26606"/>
+          <ac:spMkLst>
+            <pc:docMk/>
+            <pc:sldMk cId="3112891430" sldId="266"/>
+            <ac:spMk id="47" creationId="{C0763A76-9F1C-4FC5-82B7-DD475DA461B2}"/>
+          </ac:spMkLst>
+        </pc:spChg>
+        <pc:spChg chg="add">
+          <ac:chgData name="João Gaspar" userId="7dec15aa-df9c-4e56-83fb-de5e1da84347" providerId="ADAL" clId="{5F5A64CD-14DA-4429-AD0D-339DD7191AF6}" dt="2024-06-03T18:01:25.168" v="879" actId="26606"/>
+          <ac:spMkLst>
+            <pc:docMk/>
+            <pc:sldMk cId="3112891430" sldId="266"/>
+            <ac:spMk id="49" creationId="{E81BF4F6-F2CF-4984-9D14-D6966D92F99F}"/>
           </ac:spMkLst>
         </pc:spChg>
         <pc:picChg chg="del">
@@ -1328,12 +1633,99 @@
             <ac:picMk id="7" creationId="{E4A09083-226A-4A96-D9E8-8941DA5EF78C}"/>
           </ac:picMkLst>
         </pc:picChg>
-        <pc:picChg chg="add mod ord">
-          <ac:chgData name="João Gaspar" userId="7dec15aa-df9c-4e56-83fb-de5e1da84347" providerId="ADAL" clId="{5F5A64CD-14DA-4429-AD0D-339DD7191AF6}" dt="2024-06-03T00:04:11.145" v="728" actId="26606"/>
+        <pc:picChg chg="add del mod ord">
+          <ac:chgData name="João Gaspar" userId="7dec15aa-df9c-4e56-83fb-de5e1da84347" providerId="ADAL" clId="{5F5A64CD-14DA-4429-AD0D-339DD7191AF6}" dt="2024-06-03T17:56:54.658" v="839" actId="478"/>
           <ac:picMkLst>
             <pc:docMk/>
             <pc:sldMk cId="3112891430" sldId="266"/>
             <ac:picMk id="11" creationId="{169B76FD-E307-05CB-A02C-6E5ECE1AB16E}"/>
+          </ac:picMkLst>
+        </pc:picChg>
+        <pc:picChg chg="add mod ord">
+          <ac:chgData name="João Gaspar" userId="7dec15aa-df9c-4e56-83fb-de5e1da84347" providerId="ADAL" clId="{5F5A64CD-14DA-4429-AD0D-339DD7191AF6}" dt="2024-06-03T18:01:25.168" v="879" actId="26606"/>
+          <ac:picMkLst>
+            <pc:docMk/>
+            <pc:sldMk cId="3112891430" sldId="266"/>
+            <ac:picMk id="36" creationId="{400493C3-0CBD-6078-ECFF-8EF1537DD7BF}"/>
+          </ac:picMkLst>
+        </pc:picChg>
+      </pc:sldChg>
+      <pc:sldChg chg="addSp delSp modSp add mod setBg delDesignElem">
+        <pc:chgData name="João Gaspar" userId="7dec15aa-df9c-4e56-83fb-de5e1da84347" providerId="ADAL" clId="{5F5A64CD-14DA-4429-AD0D-339DD7191AF6}" dt="2024-06-03T18:04:43.507" v="911" actId="20577"/>
+        <pc:sldMkLst>
+          <pc:docMk/>
+          <pc:sldMk cId="1372406629" sldId="267"/>
+        </pc:sldMkLst>
+        <pc:spChg chg="mod">
+          <ac:chgData name="João Gaspar" userId="7dec15aa-df9c-4e56-83fb-de5e1da84347" providerId="ADAL" clId="{5F5A64CD-14DA-4429-AD0D-339DD7191AF6}" dt="2024-06-03T18:00:35.207" v="872" actId="26606"/>
+          <ac:spMkLst>
+            <pc:docMk/>
+            <pc:sldMk cId="1372406629" sldId="267"/>
+            <ac:spMk id="2" creationId="{44DB5274-431B-6EFB-56B1-B3309A117188}"/>
+          </ac:spMkLst>
+        </pc:spChg>
+        <pc:spChg chg="mod">
+          <ac:chgData name="João Gaspar" userId="7dec15aa-df9c-4e56-83fb-de5e1da84347" providerId="ADAL" clId="{5F5A64CD-14DA-4429-AD0D-339DD7191AF6}" dt="2024-06-03T18:04:43.507" v="911" actId="20577"/>
+          <ac:spMkLst>
+            <pc:docMk/>
+            <pc:sldMk cId="1372406629" sldId="267"/>
+            <ac:spMk id="3" creationId="{340F0F31-346D-0EB3-59C5-A11D190BB3CE}"/>
+          </ac:spMkLst>
+        </pc:spChg>
+        <pc:spChg chg="add mod">
+          <ac:chgData name="João Gaspar" userId="7dec15aa-df9c-4e56-83fb-de5e1da84347" providerId="ADAL" clId="{5F5A64CD-14DA-4429-AD0D-339DD7191AF6}" dt="2024-06-03T18:02:26.644" v="904"/>
+          <ac:spMkLst>
+            <pc:docMk/>
+            <pc:sldMk cId="1372406629" sldId="267"/>
+            <ac:spMk id="4" creationId="{503EEE9F-4D7B-A60B-34C3-6663254EF337}"/>
+          </ac:spMkLst>
+        </pc:spChg>
+        <pc:spChg chg="del mod ord">
+          <ac:chgData name="João Gaspar" userId="7dec15aa-df9c-4e56-83fb-de5e1da84347" providerId="ADAL" clId="{5F5A64CD-14DA-4429-AD0D-339DD7191AF6}" dt="2024-06-03T18:02:26.312" v="903" actId="478"/>
+          <ac:spMkLst>
+            <pc:docMk/>
+            <pc:sldMk cId="1372406629" sldId="267"/>
+            <ac:spMk id="6" creationId="{9B218848-1FA0-DA85-A878-6DD1EFBE1598}"/>
+          </ac:spMkLst>
+        </pc:spChg>
+        <pc:spChg chg="del">
+          <ac:chgData name="João Gaspar" userId="7dec15aa-df9c-4e56-83fb-de5e1da84347" providerId="ADAL" clId="{5F5A64CD-14DA-4429-AD0D-339DD7191AF6}" dt="2024-06-03T17:59:07.496" v="845"/>
+          <ac:spMkLst>
+            <pc:docMk/>
+            <pc:sldMk cId="1372406629" sldId="267"/>
+            <ac:spMk id="11" creationId="{C0763A76-9F1C-4FC5-82B7-DD475DA461B2}"/>
+          </ac:spMkLst>
+        </pc:spChg>
+        <pc:spChg chg="add">
+          <ac:chgData name="João Gaspar" userId="7dec15aa-df9c-4e56-83fb-de5e1da84347" providerId="ADAL" clId="{5F5A64CD-14DA-4429-AD0D-339DD7191AF6}" dt="2024-06-03T18:00:35.207" v="872" actId="26606"/>
+          <ac:spMkLst>
+            <pc:docMk/>
+            <pc:sldMk cId="1372406629" sldId="267"/>
+            <ac:spMk id="12" creationId="{C0763A76-9F1C-4FC5-82B7-DD475DA461B2}"/>
+          </ac:spMkLst>
+        </pc:spChg>
+        <pc:spChg chg="del">
+          <ac:chgData name="João Gaspar" userId="7dec15aa-df9c-4e56-83fb-de5e1da84347" providerId="ADAL" clId="{5F5A64CD-14DA-4429-AD0D-339DD7191AF6}" dt="2024-06-03T17:59:07.496" v="845"/>
+          <ac:spMkLst>
+            <pc:docMk/>
+            <pc:sldMk cId="1372406629" sldId="267"/>
+            <ac:spMk id="13" creationId="{E81BF4F6-F2CF-4984-9D14-D6966D92F99F}"/>
+          </ac:spMkLst>
+        </pc:spChg>
+        <pc:spChg chg="add">
+          <ac:chgData name="João Gaspar" userId="7dec15aa-df9c-4e56-83fb-de5e1da84347" providerId="ADAL" clId="{5F5A64CD-14DA-4429-AD0D-339DD7191AF6}" dt="2024-06-03T18:00:35.207" v="872" actId="26606"/>
+          <ac:spMkLst>
+            <pc:docMk/>
+            <pc:sldMk cId="1372406629" sldId="267"/>
+            <ac:spMk id="14" creationId="{E81BF4F6-F2CF-4984-9D14-D6966D92F99F}"/>
+          </ac:spMkLst>
+        </pc:spChg>
+        <pc:picChg chg="mod">
+          <ac:chgData name="João Gaspar" userId="7dec15aa-df9c-4e56-83fb-de5e1da84347" providerId="ADAL" clId="{5F5A64CD-14DA-4429-AD0D-339DD7191AF6}" dt="2024-06-03T18:00:36.679" v="873" actId="27614"/>
+          <ac:picMkLst>
+            <pc:docMk/>
+            <pc:sldMk cId="1372406629" sldId="267"/>
+            <ac:picMk id="7" creationId="{CC918716-95D2-CCED-CC13-030701CBDC63}"/>
           </ac:picMkLst>
         </pc:picChg>
       </pc:sldChg>
@@ -2182,7 +2574,7 @@
           <a:p>
             <a:fld id="{5C0AF832-54E1-4B1C-8983-BE7858CA31D0}" type="slidenum">
               <a:rPr lang="pt-PT" smtClean="0"/>
-              <a:t>4</a:t>
+              <a:t>5</a:t>
             </a:fld>
             <a:endParaRPr lang="pt-PT" dirty="0"/>
           </a:p>
@@ -2266,7 +2658,7 @@
           <a:p>
             <a:fld id="{5C0AF832-54E1-4B1C-8983-BE7858CA31D0}" type="slidenum">
               <a:rPr lang="pt-PT" smtClean="0"/>
-              <a:t>5</a:t>
+              <a:t>6</a:t>
             </a:fld>
             <a:endParaRPr lang="pt-PT" dirty="0"/>
           </a:p>
@@ -2350,7 +2742,7 @@
           <a:p>
             <a:fld id="{5C0AF832-54E1-4B1C-8983-BE7858CA31D0}" type="slidenum">
               <a:rPr lang="pt-PT" smtClean="0"/>
-              <a:t>6</a:t>
+              <a:t>7</a:t>
             </a:fld>
             <a:endParaRPr lang="pt-PT" dirty="0"/>
           </a:p>
@@ -6117,6 +6509,373 @@
       </p:grpSpPr>
       <p:sp useBgFill="1">
         <p:nvSpPr>
+          <p:cNvPr id="35" name="Slide Background">
+            <a:extLst>
+              <a:ext uri="{FF2B5EF4-FFF2-40B4-BE49-F238E27FC236}">
+                <a16:creationId xmlns:a16="http://schemas.microsoft.com/office/drawing/2014/main" id="{3ECBE1F1-D69B-4AFA-ABD5-8E41720EF6DE}"/>
+              </a:ext>
+              <a:ext uri="{C183D7F6-B498-43B3-948B-1728B52AA6E4}">
+                <adec:decorative xmlns:adec="http://schemas.microsoft.com/office/drawing/2017/decorative" val="1"/>
+              </a:ext>
+            </a:extLst>
+          </p:cNvPr>
+          <p:cNvSpPr>
+            <a:spLocks noGrp="1" noRot="1" noChangeAspect="1" noMove="1" noResize="1" noEditPoints="1" noAdjustHandles="1" noChangeArrowheads="1" noChangeShapeType="1" noTextEdit="1"/>
+          </p:cNvSpPr>
+          <p:nvPr>
+            <p:extLst>
+              <p:ext uri="{386F3935-93C4-4BCD-93E2-E3B085C9AB24}">
+                <p16:designElem xmlns:p16="http://schemas.microsoft.com/office/powerpoint/2015/main" val="1"/>
+              </p:ext>
+            </p:extLst>
+          </p:nvPr>
+        </p:nvSpPr>
+        <p:spPr>
+          <a:xfrm>
+            <a:off x="0" y="0"/>
+            <a:ext cx="12192000" cy="6858000"/>
+          </a:xfrm>
+          <a:prstGeom prst="rect">
+            <a:avLst/>
+          </a:prstGeom>
+          <a:ln>
+            <a:noFill/>
+          </a:ln>
+        </p:spPr>
+        <p:style>
+          <a:lnRef idx="2">
+            <a:schemeClr val="accent1">
+              <a:shade val="50000"/>
+            </a:schemeClr>
+          </a:lnRef>
+          <a:fillRef idx="1">
+            <a:schemeClr val="accent1"/>
+          </a:fillRef>
+          <a:effectRef idx="0">
+            <a:schemeClr val="accent1"/>
+          </a:effectRef>
+          <a:fontRef idx="minor">
+            <a:schemeClr val="lt1"/>
+          </a:fontRef>
+        </p:style>
+        <p:txBody>
+          <a:bodyPr rtlCol="0" anchor="ctr"/>
+          <a:lstStyle/>
+          <a:p>
+            <a:pPr algn="ctr"/>
+            <a:endParaRPr lang="en-US"/>
+          </a:p>
+        </p:txBody>
+      </p:sp>
+      <p:pic>
+        <p:nvPicPr>
+          <p:cNvPr id="24" name="Picture 23" descr="White bulbs with a yellow one standing out">
+            <a:extLst>
+              <a:ext uri="{FF2B5EF4-FFF2-40B4-BE49-F238E27FC236}">
+                <a16:creationId xmlns:a16="http://schemas.microsoft.com/office/drawing/2014/main" id="{A4087CD9-8E07-BB53-2623-3A20C66E69F4}"/>
+              </a:ext>
+            </a:extLst>
+          </p:cNvPr>
+          <p:cNvPicPr>
+            <a:picLocks noChangeAspect="1"/>
+          </p:cNvPicPr>
+          <p:nvPr/>
+        </p:nvPicPr>
+        <p:blipFill rotWithShape="1">
+          <a:blip r:embed="rId2"/>
+          <a:srcRect l="26678" r="20662" b="-2"/>
+          <a:stretch/>
+        </p:blipFill>
+        <p:spPr>
+          <a:xfrm>
+            <a:off x="-1" y="-2"/>
+            <a:ext cx="5410198" cy="6858002"/>
+          </a:xfrm>
+          <a:prstGeom prst="rect">
+            <a:avLst/>
+          </a:prstGeom>
+        </p:spPr>
+      </p:pic>
+      <p:sp useBgFill="1">
+        <p:nvSpPr>
+          <p:cNvPr id="37" name="Rectangle 36">
+            <a:extLst>
+              <a:ext uri="{FF2B5EF4-FFF2-40B4-BE49-F238E27FC236}">
+                <a16:creationId xmlns:a16="http://schemas.microsoft.com/office/drawing/2014/main" id="{603A6265-E10C-4B85-9C20-E75FCAF9CC63}"/>
+              </a:ext>
+              <a:ext uri="{C183D7F6-B498-43B3-948B-1728B52AA6E4}">
+                <adec:decorative xmlns:adec="http://schemas.microsoft.com/office/drawing/2017/decorative" val="1"/>
+              </a:ext>
+            </a:extLst>
+          </p:cNvPr>
+          <p:cNvSpPr>
+            <a:spLocks noGrp="1" noRot="1" noChangeAspect="1" noMove="1" noResize="1" noEditPoints="1" noAdjustHandles="1" noChangeArrowheads="1" noChangeShapeType="1" noTextEdit="1"/>
+          </p:cNvSpPr>
+          <p:nvPr>
+            <p:extLst>
+              <p:ext uri="{386F3935-93C4-4BCD-93E2-E3B085C9AB24}">
+                <p16:designElem xmlns:p16="http://schemas.microsoft.com/office/powerpoint/2015/main" val="1"/>
+              </p:ext>
+            </p:extLst>
+          </p:nvPr>
+        </p:nvSpPr>
+        <p:spPr>
+          <a:xfrm>
+            <a:off x="5410197" y="-1"/>
+            <a:ext cx="6781802" cy="2286000"/>
+          </a:xfrm>
+          <a:prstGeom prst="rect">
+            <a:avLst/>
+          </a:prstGeom>
+          <a:ln>
+            <a:noFill/>
+          </a:ln>
+          <a:effectLst>
+            <a:outerShdw blurRad="355600" dist="152400" sx="95000" sy="95000" algn="t" rotWithShape="0">
+              <a:srgbClr val="000000">
+                <a:alpha val="29000"/>
+              </a:srgbClr>
+            </a:outerShdw>
+          </a:effectLst>
+        </p:spPr>
+        <p:style>
+          <a:lnRef idx="2">
+            <a:schemeClr val="accent1">
+              <a:shade val="50000"/>
+            </a:schemeClr>
+          </a:lnRef>
+          <a:fillRef idx="1">
+            <a:schemeClr val="accent1"/>
+          </a:fillRef>
+          <a:effectRef idx="0">
+            <a:schemeClr val="accent1"/>
+          </a:effectRef>
+          <a:fontRef idx="minor">
+            <a:schemeClr val="lt1"/>
+          </a:fontRef>
+        </p:style>
+        <p:txBody>
+          <a:bodyPr rtlCol="0" anchor="ctr"/>
+          <a:lstStyle/>
+          <a:p>
+            <a:pPr algn="ctr"/>
+            <a:endParaRPr lang="en-US"/>
+          </a:p>
+        </p:txBody>
+      </p:sp>
+      <p:sp>
+        <p:nvSpPr>
+          <p:cNvPr id="2" name="Título 1">
+            <a:extLst>
+              <a:ext uri="{FF2B5EF4-FFF2-40B4-BE49-F238E27FC236}">
+                <a16:creationId xmlns:a16="http://schemas.microsoft.com/office/drawing/2014/main" id="{06EE0CD9-859B-FFDC-7F6F-65A1864810C7}"/>
+              </a:ext>
+            </a:extLst>
+          </p:cNvPr>
+          <p:cNvSpPr>
+            <a:spLocks noGrp="1"/>
+          </p:cNvSpPr>
+          <p:nvPr>
+            <p:ph type="title"/>
+          </p:nvPr>
+        </p:nvSpPr>
+        <p:spPr>
+          <a:xfrm>
+            <a:off x="6115317" y="405685"/>
+            <a:ext cx="5464968" cy="1559301"/>
+          </a:xfrm>
+        </p:spPr>
+        <p:txBody>
+          <a:bodyPr>
+            <a:normAutofit/>
+          </a:bodyPr>
+          <a:lstStyle/>
+          <a:p>
+            <a:r>
+              <a:rPr lang="pt-PT" sz="4000" dirty="0"/>
+              <a:t>Conclusions</a:t>
+            </a:r>
+          </a:p>
+        </p:txBody>
+      </p:sp>
+      <p:sp>
+        <p:nvSpPr>
+          <p:cNvPr id="3" name="Marcador de Posição de Conteúdo 2">
+            <a:extLst>
+              <a:ext uri="{FF2B5EF4-FFF2-40B4-BE49-F238E27FC236}">
+                <a16:creationId xmlns:a16="http://schemas.microsoft.com/office/drawing/2014/main" id="{63326C6E-5F1E-0E8D-F642-983D87164C61}"/>
+              </a:ext>
+            </a:extLst>
+          </p:cNvPr>
+          <p:cNvSpPr>
+            <a:spLocks noGrp="1"/>
+          </p:cNvSpPr>
+          <p:nvPr>
+            <p:ph idx="1"/>
+          </p:nvPr>
+        </p:nvSpPr>
+        <p:spPr>
+          <a:xfrm>
+            <a:off x="6115317" y="2743200"/>
+            <a:ext cx="5247340" cy="3496878"/>
+          </a:xfrm>
+        </p:spPr>
+        <p:txBody>
+          <a:bodyPr anchor="ctr">
+            <a:normAutofit/>
+          </a:bodyPr>
+          <a:lstStyle/>
+          <a:p>
+            <a:pPr>
+              <a:buFont typeface="Symbol" panose="05050102010706020507" pitchFamily="18" charset="2"/>
+              <a:buChar char="-"/>
+            </a:pPr>
+            <a:r>
+              <a:rPr lang="en-US" sz="2000" dirty="0"/>
+              <a:t>In conclusion, all goals were successfully achieved, albeit with some challenges encountered along the way and various project ideas considered throughout the development process.</a:t>
+            </a:r>
+            <a:endParaRPr lang="pt-PT" sz="2000"/>
+          </a:p>
+        </p:txBody>
+      </p:sp>
+      <p:sp>
+        <p:nvSpPr>
+          <p:cNvPr id="5" name="Marcador de Posição do Número do Diapositivo 4">
+            <a:extLst>
+              <a:ext uri="{FF2B5EF4-FFF2-40B4-BE49-F238E27FC236}">
+                <a16:creationId xmlns:a16="http://schemas.microsoft.com/office/drawing/2014/main" id="{09584837-1C74-DD42-E69B-D85B02C81CBA}"/>
+              </a:ext>
+            </a:extLst>
+          </p:cNvPr>
+          <p:cNvSpPr>
+            <a:spLocks noGrp="1"/>
+          </p:cNvSpPr>
+          <p:nvPr>
+            <p:ph type="sldNum" sz="quarter" idx="12"/>
+          </p:nvPr>
+        </p:nvSpPr>
+        <p:spPr>
+          <a:xfrm>
+            <a:off x="8732520" y="6356350"/>
+            <a:ext cx="3200400" cy="365125"/>
+          </a:xfrm>
+        </p:spPr>
+        <p:txBody>
+          <a:bodyPr>
+            <a:normAutofit/>
+          </a:bodyPr>
+          <a:lstStyle/>
+          <a:p>
+            <a:pPr>
+              <a:spcAft>
+                <a:spcPts val="600"/>
+              </a:spcAft>
+            </a:pPr>
+            <a:fld id="{A275E76C-0B34-4617-92BE-2419D92E4442}" type="slidenum">
+              <a:rPr lang="pt-PT">
+                <a:solidFill>
+                  <a:schemeClr val="tx1"/>
+                </a:solidFill>
+              </a:rPr>
+              <a:pPr>
+                <a:spcAft>
+                  <a:spcPts val="600"/>
+                </a:spcAft>
+              </a:pPr>
+              <a:t>10</a:t>
+            </a:fld>
+            <a:endParaRPr lang="pt-PT">
+              <a:solidFill>
+                <a:schemeClr val="tx1"/>
+              </a:solidFill>
+            </a:endParaRPr>
+          </a:p>
+        </p:txBody>
+      </p:sp>
+      <p:sp>
+        <p:nvSpPr>
+          <p:cNvPr id="4" name="Marcador de Posição da Data 3">
+            <a:extLst>
+              <a:ext uri="{FF2B5EF4-FFF2-40B4-BE49-F238E27FC236}">
+                <a16:creationId xmlns:a16="http://schemas.microsoft.com/office/drawing/2014/main" id="{3B399166-74C1-4B10-A95D-521B6B62EB4D}"/>
+              </a:ext>
+            </a:extLst>
+          </p:cNvPr>
+          <p:cNvSpPr>
+            <a:spLocks noGrp="1"/>
+          </p:cNvSpPr>
+          <p:nvPr>
+            <p:ph type="dt" sz="half" idx="10"/>
+          </p:nvPr>
+        </p:nvSpPr>
+        <p:spPr>
+          <a:xfrm>
+            <a:off x="243025" y="6356349"/>
+            <a:ext cx="2743200" cy="365125"/>
+          </a:xfrm>
+        </p:spPr>
+        <p:txBody>
+          <a:bodyPr>
+            <a:normAutofit/>
+          </a:bodyPr>
+          <a:lstStyle/>
+          <a:p>
+            <a:pPr>
+              <a:spcAft>
+                <a:spcPts val="600"/>
+              </a:spcAft>
+            </a:pPr>
+            <a:r>
+              <a:rPr lang="pt-PT" dirty="0">
+                <a:solidFill>
+                  <a:schemeClr val="bg1"/>
+                </a:solidFill>
+              </a:rPr>
+              <a:t>ICG - 2023/2024</a:t>
+            </a:r>
+          </a:p>
+        </p:txBody>
+      </p:sp>
+    </p:spTree>
+    <p:extLst>
+      <p:ext uri="{BB962C8B-B14F-4D97-AF65-F5344CB8AC3E}">
+        <p14:creationId xmlns:p14="http://schemas.microsoft.com/office/powerpoint/2010/main" val="3173771447"/>
+      </p:ext>
+    </p:extLst>
+  </p:cSld>
+  <p:clrMapOvr>
+    <a:masterClrMapping/>
+  </p:clrMapOvr>
+</p:sld>
+</file>
+
+<file path=ppt/slides/slide11.xml><?xml version="1.0" encoding="utf-8"?>
+<p:sld xmlns:a="http://schemas.openxmlformats.org/drawingml/2006/main" xmlns:r="http://schemas.openxmlformats.org/officeDocument/2006/relationships" xmlns:p="http://schemas.openxmlformats.org/presentationml/2006/main">
+  <p:cSld>
+    <p:bg>
+      <p:bgPr>
+        <a:solidFill>
+          <a:schemeClr val="bg1"/>
+        </a:solidFill>
+        <a:effectLst/>
+      </p:bgPr>
+    </p:bg>
+    <p:spTree>
+      <p:nvGrpSpPr>
+        <p:cNvPr id="1" name=""/>
+        <p:cNvGrpSpPr/>
+        <p:nvPr/>
+      </p:nvGrpSpPr>
+      <p:grpSpPr>
+        <a:xfrm>
+          <a:off x="0" y="0"/>
+          <a:ext cx="0" cy="0"/>
+          <a:chOff x="0" y="0"/>
+          <a:chExt cx="0" cy="0"/>
+        </a:xfrm>
+      </p:grpSpPr>
+      <p:sp useBgFill="1">
+        <p:nvSpPr>
           <p:cNvPr id="10" name="Rectangle 9">
             <a:extLst>
               <a:ext uri="{FF2B5EF4-FFF2-40B4-BE49-F238E27FC236}">
@@ -6451,7 +7210,7 @@
                   <a:spcPts val="600"/>
                 </a:spcAft>
               </a:pPr>
-              <a:t>10</a:t>
+              <a:t>11</a:t>
             </a:fld>
             <a:endParaRPr lang="pt-PT" dirty="0">
               <a:solidFill>
@@ -6738,7 +7497,7 @@
                 </a:solidFill>
                 <a:latin typeface="Calibri" panose="020F0502020204030204" pitchFamily="34" charset="0"/>
               </a:rPr>
-              <a:t>Create a medieval environment and allow the user to explore it and fight against enemies withing the setting.</a:t>
+              <a:t>Create a medieval environment and allow the user to explore it and fight against an enemy withing the setting.</a:t>
             </a:r>
           </a:p>
           <a:p>
@@ -6947,7 +7706,7 @@
       </p:grpSpPr>
       <p:sp useBgFill="1">
         <p:nvSpPr>
-          <p:cNvPr id="11" name="Slide Background">
+          <p:cNvPr id="12" name="Slide Background">
             <a:extLst>
               <a:ext uri="{FF2B5EF4-FFF2-40B4-BE49-F238E27FC236}">
                 <a16:creationId xmlns:a16="http://schemas.microsoft.com/office/drawing/2014/main" id="{C0763A76-9F1C-4FC5-82B7-DD475DA461B2}"/>
@@ -7095,13 +7854,13 @@
           </a:lstStyle>
           <a:p>
             <a:pPr algn="ctr"/>
-            <a:endParaRPr lang="en-US" dirty="0"/>
+            <a:endParaRPr lang="en-US"/>
           </a:p>
         </p:txBody>
       </p:sp>
       <p:sp useBgFill="1">
         <p:nvSpPr>
-          <p:cNvPr id="13" name="Rectangle 12">
+          <p:cNvPr id="14" name="Rectangle 13">
             <a:extLst>
               <a:ext uri="{FF2B5EF4-FFF2-40B4-BE49-F238E27FC236}">
                 <a16:creationId xmlns:a16="http://schemas.microsoft.com/office/drawing/2014/main" id="{E81BF4F6-F2CF-4984-9D14-D6966D92F99F}"/>
@@ -7162,7 +7921,7 @@
           <a:lstStyle/>
           <a:p>
             <a:pPr algn="ctr"/>
-            <a:endParaRPr lang="en-US" dirty="0"/>
+            <a:endParaRPr lang="en-US"/>
           </a:p>
         </p:txBody>
       </p:sp>
@@ -7195,8 +7954,20 @@
           <a:lstStyle/>
           <a:p>
             <a:r>
+              <a:rPr lang="pt-PT" sz="4000"/>
+              <a:t>Initial</a:t>
+            </a:r>
+            <a:r>
               <a:rPr lang="pt-PT" sz="4000" dirty="0"/>
-              <a:t>Models and the scene graph</a:t>
+              <a:t> Menu and </a:t>
+            </a:r>
+            <a:r>
+              <a:rPr lang="pt-PT" sz="4000"/>
+              <a:t>End</a:t>
+            </a:r>
+            <a:r>
+              <a:rPr lang="pt-PT" sz="4000" dirty="0"/>
+              <a:t> Game</a:t>
             </a:r>
           </a:p>
         </p:txBody>
@@ -7225,173 +7996,26 @@
         </p:spPr>
         <p:txBody>
           <a:bodyPr anchor="ctr">
-            <a:noAutofit/>
+            <a:normAutofit/>
           </a:bodyPr>
           <a:lstStyle/>
           <a:p>
-            <a:pPr algn="just">
-              <a:lnSpc>
-                <a:spcPct val="100000"/>
-              </a:lnSpc>
+            <a:pPr>
               <a:buFont typeface="Symbol" panose="05050102010706020507" pitchFamily="18" charset="2"/>
               <a:buChar char="-"/>
             </a:pPr>
             <a:r>
-              <a:rPr lang="en-US" sz="1800" b="0" i="0" u="none" strike="noStrike" baseline="0" dirty="0">
-                <a:solidFill>
-                  <a:srgbClr val="000000"/>
-                </a:solidFill>
+              <a:rPr lang="pt-PT" sz="1900" b="0" i="0" u="none" strike="noStrike" baseline="0" dirty="0">
                 <a:latin typeface="Calibri" panose="020F0502020204030204" pitchFamily="34" charset="0"/>
               </a:rPr>
-              <a:t>There are various models, made both using three.js (by me) and Blender, such as:</a:t>
-            </a:r>
-          </a:p>
-          <a:p>
-            <a:pPr lvl="1" algn="just">
-              <a:lnSpc>
-                <a:spcPct val="100000"/>
-              </a:lnSpc>
-              <a:buFont typeface="Symbol" panose="05050102010706020507" pitchFamily="18" charset="2"/>
-              <a:buChar char="-"/>
-            </a:pPr>
-            <a:r>
-              <a:rPr lang="en-US" sz="1800" b="0" i="0" u="none" strike="noStrike" baseline="0" dirty="0">
-                <a:solidFill>
-                  <a:srgbClr val="000000"/>
-                </a:solidFill>
-                <a:latin typeface="Calibri" panose="020F0502020204030204" pitchFamily="34" charset="0"/>
-              </a:rPr>
-              <a:t>Fog	(three.js)</a:t>
-            </a:r>
-          </a:p>
-          <a:p>
-            <a:pPr lvl="1" algn="just">
-              <a:lnSpc>
-                <a:spcPct val="100000"/>
-              </a:lnSpc>
-              <a:buFont typeface="Symbol" panose="05050102010706020507" pitchFamily="18" charset="2"/>
-              <a:buChar char="-"/>
-            </a:pPr>
-            <a:r>
-              <a:rPr lang="pt-PT" sz="1800" b="0" i="0" u="none" strike="noStrike" baseline="0" dirty="0">
-                <a:solidFill>
-                  <a:srgbClr val="000000"/>
-                </a:solidFill>
-                <a:latin typeface="Calibri" panose="020F0502020204030204" pitchFamily="34" charset="0"/>
-              </a:rPr>
-              <a:t>Sun	(three.js)</a:t>
-            </a:r>
-          </a:p>
-          <a:p>
-            <a:pPr lvl="1" algn="just">
-              <a:lnSpc>
-                <a:spcPct val="100000"/>
-              </a:lnSpc>
-              <a:buFont typeface="Symbol" panose="05050102010706020507" pitchFamily="18" charset="2"/>
-              <a:buChar char="-"/>
-            </a:pPr>
-            <a:r>
-              <a:rPr lang="pt-PT" sz="1800" b="0" i="0" u="none" strike="noStrike" baseline="0" dirty="0">
-                <a:solidFill>
-                  <a:srgbClr val="000000"/>
-                </a:solidFill>
-                <a:latin typeface="Calibri" panose="020F0502020204030204" pitchFamily="34" charset="0"/>
-              </a:rPr>
-              <a:t>Trees	(three.js and blender)</a:t>
-            </a:r>
-          </a:p>
-          <a:p>
-            <a:pPr lvl="1" algn="just">
-              <a:lnSpc>
-                <a:spcPct val="100000"/>
-              </a:lnSpc>
-              <a:buFont typeface="Symbol" panose="05050102010706020507" pitchFamily="18" charset="2"/>
-              <a:buChar char="-"/>
-            </a:pPr>
-            <a:r>
-              <a:rPr lang="pt-PT" sz="1800" b="0" i="0" u="none" strike="noStrike" baseline="0" dirty="0">
-                <a:solidFill>
-                  <a:srgbClr val="000000"/>
-                </a:solidFill>
-                <a:latin typeface="Calibri" panose="020F0502020204030204" pitchFamily="34" charset="0"/>
-              </a:rPr>
-              <a:t>Grass	(Blender)</a:t>
-            </a:r>
-          </a:p>
-          <a:p>
-            <a:pPr lvl="1" algn="just">
-              <a:lnSpc>
-                <a:spcPct val="100000"/>
-              </a:lnSpc>
-              <a:buFont typeface="Symbol" panose="05050102010706020507" pitchFamily="18" charset="2"/>
-              <a:buChar char="-"/>
-            </a:pPr>
-            <a:r>
-              <a:rPr lang="pt-PT" sz="1800" b="0" i="0" u="none" strike="noStrike" baseline="0" dirty="0">
-                <a:solidFill>
-                  <a:srgbClr val="000000"/>
-                </a:solidFill>
-                <a:latin typeface="Calibri" panose="020F0502020204030204" pitchFamily="34" charset="0"/>
-              </a:rPr>
-              <a:t>House	(Blender)</a:t>
-            </a:r>
-          </a:p>
-          <a:p>
-            <a:pPr algn="just">
-              <a:lnSpc>
-                <a:spcPct val="100000"/>
-              </a:lnSpc>
-              <a:buFont typeface="Symbol" panose="05050102010706020507" pitchFamily="18" charset="2"/>
-              <a:buChar char="-"/>
-            </a:pPr>
-            <a:endParaRPr lang="pt-PT" sz="2600" b="0" i="0" u="none" strike="noStrike" baseline="0" dirty="0">
-              <a:solidFill>
-                <a:srgbClr val="000000"/>
-              </a:solidFill>
-              <a:latin typeface="Calibri" panose="020F0502020204030204" pitchFamily="34" charset="0"/>
-            </a:endParaRPr>
-          </a:p>
-          <a:p>
-            <a:pPr algn="just">
-              <a:lnSpc>
-                <a:spcPct val="100000"/>
-              </a:lnSpc>
-              <a:buFont typeface="Symbol" panose="05050102010706020507" pitchFamily="18" charset="2"/>
-              <a:buChar char="-"/>
-            </a:pPr>
-            <a:r>
-              <a:rPr lang="pt-PT" sz="1800" b="0" i="0" u="none" strike="noStrike" baseline="0" dirty="0">
-                <a:solidFill>
-                  <a:srgbClr val="000000"/>
-                </a:solidFill>
-                <a:latin typeface="Calibri" panose="020F0502020204030204" pitchFamily="34" charset="0"/>
-              </a:rPr>
-              <a:t>Regarding illumination, there</a:t>
-            </a:r>
-            <a:r>
-              <a:rPr lang="pt-PT" sz="1800" dirty="0">
-                <a:solidFill>
-                  <a:srgbClr val="000000"/>
-                </a:solidFill>
-                <a:latin typeface="Calibri" panose="020F0502020204030204" pitchFamily="34" charset="0"/>
-              </a:rPr>
-              <a:t>’</a:t>
-            </a:r>
-            <a:r>
-              <a:rPr lang="pt-PT" sz="1800" b="0" i="0" u="none" strike="noStrike" baseline="0" dirty="0">
-                <a:solidFill>
-                  <a:srgbClr val="000000"/>
-                </a:solidFill>
-                <a:latin typeface="Calibri" panose="020F0502020204030204" pitchFamily="34" charset="0"/>
-              </a:rPr>
-              <a:t>s na Ambient Light and a Directional Light. </a:t>
+              <a:t>j</a:t>
             </a:r>
           </a:p>
         </p:txBody>
       </p:sp>
       <p:pic>
         <p:nvPicPr>
-          <p:cNvPr id="7" name="Picture 6">
+          <p:cNvPr id="7" name="Picture 6" descr="Uma imagem com texto, captura de ecrã, Tipo de letra, design&#10;&#10;Descrição gerada automaticamente">
             <a:extLst>
               <a:ext uri="{FF2B5EF4-FFF2-40B4-BE49-F238E27FC236}">
                 <a16:creationId xmlns:a16="http://schemas.microsoft.com/office/drawing/2014/main" id="{CC918716-95D2-CCED-CC13-030701CBDC63}"/>
@@ -7411,7 +8035,7 @@
               </a:ext>
             </a:extLst>
           </a:blip>
-          <a:srcRect l="15139" r="15139"/>
+          <a:srcRect l="2206" r="1945" b="3"/>
           <a:stretch/>
         </p:blipFill>
         <p:spPr>
@@ -7480,10 +8104,10 @@
       </p:sp>
       <p:sp>
         <p:nvSpPr>
-          <p:cNvPr id="6" name="Marcador de Posição da Data 3">
-            <a:extLst>
-              <a:ext uri="{FF2B5EF4-FFF2-40B4-BE49-F238E27FC236}">
-                <a16:creationId xmlns:a16="http://schemas.microsoft.com/office/drawing/2014/main" id="{9B218848-1FA0-DA85-A878-6DD1EFBE1598}"/>
+          <p:cNvPr id="4" name="Marcador de Posição da Data 3">
+            <a:extLst>
+              <a:ext uri="{FF2B5EF4-FFF2-40B4-BE49-F238E27FC236}">
+                <a16:creationId xmlns:a16="http://schemas.microsoft.com/office/drawing/2014/main" id="{503EEE9F-4D7B-A60B-34C3-6663254EF337}"/>
               </a:ext>
             </a:extLst>
           </p:cNvPr>
@@ -7525,7 +8149,7 @@
     </p:spTree>
     <p:extLst>
       <p:ext uri="{BB962C8B-B14F-4D97-AF65-F5344CB8AC3E}">
-        <p14:creationId xmlns:p14="http://schemas.microsoft.com/office/powerpoint/2010/main" val="1111987917"/>
+        <p14:creationId xmlns:p14="http://schemas.microsoft.com/office/powerpoint/2010/main" val="1372406629"/>
       </p:ext>
     </p:extLst>
   </p:cSld>
@@ -7562,10 +8186,10 @@
       </p:grpSpPr>
       <p:sp useBgFill="1">
         <p:nvSpPr>
-          <p:cNvPr id="11" name="Slide Background">
-            <a:extLst>
-              <a:ext uri="{FF2B5EF4-FFF2-40B4-BE49-F238E27FC236}">
-                <a16:creationId xmlns:a16="http://schemas.microsoft.com/office/drawing/2014/main" id="{B65C0385-5E30-4D2E-AF9F-4639659D34E9}"/>
+          <p:cNvPr id="18" name="Slide Background">
+            <a:extLst>
+              <a:ext uri="{FF2B5EF4-FFF2-40B4-BE49-F238E27FC236}">
+                <a16:creationId xmlns:a16="http://schemas.microsoft.com/office/drawing/2014/main" id="{3ECBE1F1-D69B-4AFA-ABD5-8E41720EF6DE}"/>
               </a:ext>
               <a:ext uri="{C183D7F6-B498-43B3-948B-1728B52AA6E4}">
                 <adec:decorative xmlns:adec="http://schemas.microsoft.com/office/drawing/2017/decorative" val="1"/>
@@ -7616,7 +8240,7 @@
           <a:lstStyle/>
           <a:p>
             <a:pPr algn="ctr"/>
-            <a:endParaRPr lang="en-US" dirty="0"/>
+            <a:endParaRPr lang="en-US"/>
           </a:p>
         </p:txBody>
       </p:sp>
@@ -7625,7 +8249,7 @@
           <p:cNvPr id="7" name="Picture 6">
             <a:extLst>
               <a:ext uri="{FF2B5EF4-FFF2-40B4-BE49-F238E27FC236}">
-                <a16:creationId xmlns:a16="http://schemas.microsoft.com/office/drawing/2014/main" id="{796166FB-D679-52F5-022E-0B0D60A315F4}"/>
+                <a16:creationId xmlns:a16="http://schemas.microsoft.com/office/drawing/2014/main" id="{CC918716-95D2-CCED-CC13-030701CBDC63}"/>
               </a:ext>
             </a:extLst>
           </p:cNvPr>
@@ -7635,20 +8259,20 @@
           <p:nvPr/>
         </p:nvPicPr>
         <p:blipFill rotWithShape="1">
-          <a:blip r:embed="rId3">
+          <a:blip r:embed="rId2">
             <a:extLst>
               <a:ext uri="{28A0092B-C50C-407E-A947-70E740481C1C}">
                 <a14:useLocalDpi xmlns:a14="http://schemas.microsoft.com/office/drawing/2010/main" val="0"/>
               </a:ext>
             </a:extLst>
           </a:blip>
-          <a:srcRect l="22123" r="22123"/>
+          <a:srcRect l="19134" r="19136" b="2"/>
           <a:stretch/>
         </p:blipFill>
         <p:spPr>
           <a:xfrm>
-            <a:off x="20" y="1729116"/>
-            <a:ext cx="6106195" cy="5128884"/>
+            <a:off x="-1" y="-2"/>
+            <a:ext cx="5410198" cy="6858002"/>
           </a:xfrm>
           <a:prstGeom prst="rect">
             <a:avLst/>
@@ -7657,10 +8281,10 @@
       </p:pic>
       <p:sp useBgFill="1">
         <p:nvSpPr>
-          <p:cNvPr id="13" name="Rectangle 12">
-            <a:extLst>
-              <a:ext uri="{FF2B5EF4-FFF2-40B4-BE49-F238E27FC236}">
-                <a16:creationId xmlns:a16="http://schemas.microsoft.com/office/drawing/2014/main" id="{E335820B-3A29-42C5-AA8D-10ECA43CD985}"/>
+          <p:cNvPr id="20" name="Rectangle 19">
+            <a:extLst>
+              <a:ext uri="{FF2B5EF4-FFF2-40B4-BE49-F238E27FC236}">
+                <a16:creationId xmlns:a16="http://schemas.microsoft.com/office/drawing/2014/main" id="{603A6265-E10C-4B85-9C20-E75FCAF9CC63}"/>
               </a:ext>
               <a:ext uri="{C183D7F6-B498-43B3-948B-1728B52AA6E4}">
                 <adec:decorative xmlns:adec="http://schemas.microsoft.com/office/drawing/2017/decorative" val="1"/>
@@ -7680,8 +8304,8 @@
         </p:nvSpPr>
         <p:spPr>
           <a:xfrm>
-            <a:off x="0" y="0"/>
-            <a:ext cx="12191999" cy="1729117"/>
+            <a:off x="5410197" y="-1"/>
+            <a:ext cx="6781802" cy="2286000"/>
           </a:xfrm>
           <a:prstGeom prst="rect">
             <a:avLst/>
@@ -7690,9 +8314,9 @@
             <a:noFill/>
           </a:ln>
           <a:effectLst>
-            <a:outerShdw blurRad="368300" dist="101600" dir="5460000" sx="90000" sy="90000" algn="t" rotWithShape="0">
+            <a:outerShdw blurRad="355600" dist="152400" sx="95000" sy="95000" algn="t" rotWithShape="0">
               <a:srgbClr val="000000">
-                <a:alpha val="20000"/>
+                <a:alpha val="29000"/>
               </a:srgbClr>
             </a:outerShdw>
           </a:effectLst>
@@ -7718,7 +8342,7 @@
           <a:lstStyle/>
           <a:p>
             <a:pPr algn="ctr"/>
-            <a:endParaRPr lang="en-US" dirty="0"/>
+            <a:endParaRPr lang="en-US"/>
           </a:p>
         </p:txBody>
       </p:sp>
@@ -7727,7 +8351,7 @@
           <p:cNvPr id="2" name="Título 1">
             <a:extLst>
               <a:ext uri="{FF2B5EF4-FFF2-40B4-BE49-F238E27FC236}">
-                <a16:creationId xmlns:a16="http://schemas.microsoft.com/office/drawing/2014/main" id="{DC8B6D5C-15CE-B61B-84A3-E2BD3FF4A127}"/>
+                <a16:creationId xmlns:a16="http://schemas.microsoft.com/office/drawing/2014/main" id="{44DB5274-431B-6EFB-56B1-B3309A117188}"/>
               </a:ext>
             </a:extLst>
           </p:cNvPr>
@@ -7740,8 +8364,8 @@
         </p:nvSpPr>
         <p:spPr>
           <a:xfrm>
-            <a:off x="761801" y="352766"/>
-            <a:ext cx="10591999" cy="1023584"/>
+            <a:off x="6115317" y="405685"/>
+            <a:ext cx="5464968" cy="1559301"/>
           </a:xfrm>
         </p:spPr>
         <p:txBody>
@@ -7752,7 +8376,7 @@
           <a:p>
             <a:r>
               <a:rPr lang="pt-PT" sz="4000" dirty="0"/>
-              <a:t>Animation</a:t>
+              <a:t>Models and the scene graph</a:t>
             </a:r>
           </a:p>
         </p:txBody>
@@ -7762,7 +8386,7 @@
           <p:cNvPr id="3" name="Marcador de Posição de Conteúdo 2">
             <a:extLst>
               <a:ext uri="{FF2B5EF4-FFF2-40B4-BE49-F238E27FC236}">
-                <a16:creationId xmlns:a16="http://schemas.microsoft.com/office/drawing/2014/main" id="{101CFC4D-8A21-E6F7-817A-F16C73908F00}"/>
+                <a16:creationId xmlns:a16="http://schemas.microsoft.com/office/drawing/2014/main" id="{340F0F31-346D-0EB3-59C5-A11D190BB3CE}"/>
               </a:ext>
             </a:extLst>
           </p:cNvPr>
@@ -7775,120 +8399,137 @@
         </p:nvSpPr>
         <p:spPr>
           <a:xfrm>
-            <a:off x="6803408" y="2249766"/>
-            <a:ext cx="4550391" cy="4070303"/>
+            <a:off x="6115317" y="2743200"/>
+            <a:ext cx="5247340" cy="3496878"/>
           </a:xfrm>
         </p:spPr>
         <p:txBody>
           <a:bodyPr anchor="ctr">
-            <a:normAutofit/>
+            <a:normAutofit lnSpcReduction="10000"/>
           </a:bodyPr>
           <a:lstStyle/>
           <a:p>
-            <a:pPr algn="just">
-              <a:lnSpc>
-                <a:spcPct val="100000"/>
-              </a:lnSpc>
+            <a:pPr>
               <a:buFont typeface="Symbol" panose="05050102010706020507" pitchFamily="18" charset="2"/>
               <a:buChar char="-"/>
             </a:pPr>
             <a:r>
-              <a:rPr lang="en-US" sz="2000" dirty="0"/>
-              <a:t>Forest Animation and 3D Objects.</a:t>
-            </a:r>
-          </a:p>
-          <a:p>
-            <a:pPr algn="just">
-              <a:lnSpc>
-                <a:spcPct val="100000"/>
-              </a:lnSpc>
+              <a:rPr lang="en-US" sz="2000" b="0" i="0" u="none" strike="noStrike" baseline="0" dirty="0">
+                <a:latin typeface="Calibri" panose="020F0502020204030204" pitchFamily="34" charset="0"/>
+              </a:rPr>
+              <a:t>There are various models, made both using three.js (by me) and Blender, such as:</a:t>
+            </a:r>
+          </a:p>
+          <a:p>
+            <a:pPr lvl="1">
               <a:buFont typeface="Symbol" panose="05050102010706020507" pitchFamily="18" charset="2"/>
               <a:buChar char="-"/>
             </a:pPr>
-            <a:endParaRPr lang="en-US" sz="2000" dirty="0"/>
-          </a:p>
-          <a:p>
-            <a:pPr algn="just">
-              <a:lnSpc>
-                <a:spcPct val="100000"/>
-              </a:lnSpc>
+            <a:r>
+              <a:rPr lang="en-US" sz="2000" b="0" i="0" u="none" strike="noStrike" baseline="0" dirty="0">
+                <a:latin typeface="Calibri" panose="020F0502020204030204" pitchFamily="34" charset="0"/>
+              </a:rPr>
+              <a:t>Fog	(three.js)</a:t>
+            </a:r>
+          </a:p>
+          <a:p>
+            <a:pPr lvl="1">
               <a:buFont typeface="Symbol" panose="05050102010706020507" pitchFamily="18" charset="2"/>
               <a:buChar char="-"/>
             </a:pPr>
             <a:r>
-              <a:rPr lang="en-US" sz="2000" dirty="0"/>
-              <a:t>Player Movement.</a:t>
-            </a:r>
-          </a:p>
-          <a:p>
-            <a:pPr algn="just">
-              <a:lnSpc>
-                <a:spcPct val="100000"/>
-              </a:lnSpc>
+              <a:rPr lang="pt-PT" sz="2000" b="0" i="0" u="none" strike="noStrike" baseline="0" dirty="0">
+                <a:latin typeface="Calibri" panose="020F0502020204030204" pitchFamily="34" charset="0"/>
+              </a:rPr>
+              <a:t>Moon	(three.js)</a:t>
+            </a:r>
+          </a:p>
+          <a:p>
+            <a:pPr lvl="1">
               <a:buFont typeface="Symbol" panose="05050102010706020507" pitchFamily="18" charset="2"/>
               <a:buChar char="-"/>
             </a:pPr>
-            <a:endParaRPr lang="en-US" sz="2000" dirty="0"/>
-          </a:p>
-          <a:p>
-            <a:pPr algn="just">
-              <a:lnSpc>
-                <a:spcPct val="100000"/>
-              </a:lnSpc>
+            <a:r>
+              <a:rPr lang="pt-PT" sz="2000" b="0" i="0" u="none" strike="noStrike" baseline="0" dirty="0">
+                <a:latin typeface="Calibri" panose="020F0502020204030204" pitchFamily="34" charset="0"/>
+              </a:rPr>
+              <a:t>Bullets	(three.js)</a:t>
+            </a:r>
+          </a:p>
+          <a:p>
+            <a:pPr lvl="1">
               <a:buFont typeface="Symbol" panose="05050102010706020507" pitchFamily="18" charset="2"/>
               <a:buChar char="-"/>
             </a:pPr>
             <a:r>
-              <a:rPr lang="en-US" sz="2000" dirty="0"/>
-              <a:t>Ghost Movement.</a:t>
-            </a:r>
-          </a:p>
-          <a:p>
-            <a:pPr algn="just">
-              <a:lnSpc>
-                <a:spcPct val="100000"/>
-              </a:lnSpc>
+              <a:rPr lang="pt-PT" sz="2000" b="0" i="0" u="none" strike="noStrike" baseline="0" dirty="0">
+                <a:latin typeface="Calibri" panose="020F0502020204030204" pitchFamily="34" charset="0"/>
+              </a:rPr>
+              <a:t>Trees	(three.js and blender)</a:t>
+            </a:r>
+          </a:p>
+          <a:p>
+            <a:pPr lvl="1">
               <a:buFont typeface="Symbol" panose="05050102010706020507" pitchFamily="18" charset="2"/>
               <a:buChar char="-"/>
             </a:pPr>
-            <a:endParaRPr lang="en-US" sz="2000" dirty="0"/>
-          </a:p>
-          <a:p>
-            <a:pPr algn="just">
-              <a:lnSpc>
-                <a:spcPct val="100000"/>
-              </a:lnSpc>
+            <a:r>
+              <a:rPr lang="pt-PT" sz="2000" b="0" i="0" u="none" strike="noStrike" baseline="0" dirty="0">
+                <a:latin typeface="Calibri" panose="020F0502020204030204" pitchFamily="34" charset="0"/>
+              </a:rPr>
+              <a:t>Grass	(Blender)</a:t>
+            </a:r>
+          </a:p>
+          <a:p>
+            <a:pPr lvl="1">
               <a:buFont typeface="Symbol" panose="05050102010706020507" pitchFamily="18" charset="2"/>
               <a:buChar char="-"/>
             </a:pPr>
             <a:r>
-              <a:rPr lang="en-US" sz="2000" dirty="0"/>
-              <a:t>Bullet Shooting.</a:t>
-            </a:r>
-          </a:p>
-          <a:p>
-            <a:pPr algn="just">
-              <a:lnSpc>
-                <a:spcPct val="100000"/>
-              </a:lnSpc>
+              <a:rPr lang="pt-PT" sz="2000" b="0" i="0" u="none" strike="noStrike" baseline="0" dirty="0">
+                <a:latin typeface="Calibri" panose="020F0502020204030204" pitchFamily="34" charset="0"/>
+              </a:rPr>
+              <a:t>House	(Blender)</a:t>
+            </a:r>
+          </a:p>
+          <a:p>
+            <a:pPr lvl="1">
               <a:buFont typeface="Symbol" panose="05050102010706020507" pitchFamily="18" charset="2"/>
               <a:buChar char="-"/>
             </a:pPr>
-            <a:endParaRPr lang="en-US" sz="2000" dirty="0"/>
-          </a:p>
-          <a:p>
-            <a:pPr algn="just">
-              <a:lnSpc>
-                <a:spcPct val="100000"/>
-              </a:lnSpc>
+            <a:r>
+              <a:rPr lang="pt-PT" sz="2000" dirty="0">
+                <a:latin typeface="Calibri" panose="020F0502020204030204" pitchFamily="34" charset="0"/>
+              </a:rPr>
+              <a:t>Gun	(Blender)</a:t>
+            </a:r>
+          </a:p>
+          <a:p>
+            <a:pPr lvl="1">
               <a:buFont typeface="Symbol" panose="05050102010706020507" pitchFamily="18" charset="2"/>
               <a:buChar char="-"/>
             </a:pPr>
             <a:r>
-              <a:rPr lang="en-US" sz="2000" dirty="0"/>
-              <a:t>Collisions and Life Update.</a:t>
-            </a:r>
-            <a:endParaRPr lang="pt-PT" sz="2000" dirty="0"/>
+              <a:rPr lang="pt-PT" sz="2000" b="0" i="0" u="none" strike="noStrike" baseline="0" dirty="0">
+                <a:latin typeface="Calibri" panose="020F0502020204030204" pitchFamily="34" charset="0"/>
+              </a:rPr>
+              <a:t>Ghost	(Blender)</a:t>
+            </a:r>
+            <a:endParaRPr lang="pt-PT" sz="2000" dirty="0">
+              <a:latin typeface="Calibri" panose="020F0502020204030204" pitchFamily="34" charset="0"/>
+            </a:endParaRPr>
+          </a:p>
+          <a:p>
+            <a:pPr lvl="1">
+              <a:buFont typeface="Symbol" panose="05050102010706020507" pitchFamily="18" charset="2"/>
+              <a:buChar char="-"/>
+            </a:pPr>
+            <a:r>
+              <a:rPr lang="pt-PT" sz="2000" b="0" i="0" u="none" strike="noStrike" baseline="0" dirty="0">
+                <a:latin typeface="Calibri" panose="020F0502020204030204" pitchFamily="34" charset="0"/>
+              </a:rPr>
+              <a:t>Tower	(Blender)</a:t>
+            </a:r>
           </a:p>
         </p:txBody>
       </p:sp>
@@ -7897,7 +8538,7 @@
           <p:cNvPr id="5" name="Marcador de Posição do Número do Diapositivo 4">
             <a:extLst>
               <a:ext uri="{FF2B5EF4-FFF2-40B4-BE49-F238E27FC236}">
-                <a16:creationId xmlns:a16="http://schemas.microsoft.com/office/drawing/2014/main" id="{8DFE5CDA-5E21-71DD-F590-331350D021C5}"/>
+                <a16:creationId xmlns:a16="http://schemas.microsoft.com/office/drawing/2014/main" id="{8DBCDEA0-CDC7-BE53-B012-696C9B1C0AE7}"/>
               </a:ext>
             </a:extLst>
           </p:cNvPr>
@@ -7910,8 +8551,8 @@
         </p:nvSpPr>
         <p:spPr>
           <a:xfrm>
-            <a:off x="10208240" y="6356350"/>
-            <a:ext cx="1724679" cy="365125"/>
+            <a:off x="8732520" y="6356350"/>
+            <a:ext cx="3200400" cy="365125"/>
           </a:xfrm>
         </p:spPr>
         <p:txBody>
@@ -7938,7 +8579,7 @@
               </a:pPr>
               <a:t>4</a:t>
             </a:fld>
-            <a:endParaRPr lang="pt-PT" dirty="0">
+            <a:endParaRPr lang="pt-PT">
               <a:solidFill>
                 <a:schemeClr val="tx1"/>
               </a:solidFill>
@@ -7948,10 +8589,10 @@
       </p:sp>
       <p:sp>
         <p:nvSpPr>
-          <p:cNvPr id="6" name="Marcador de Posição da Data 3">
-            <a:extLst>
-              <a:ext uri="{FF2B5EF4-FFF2-40B4-BE49-F238E27FC236}">
-                <a16:creationId xmlns:a16="http://schemas.microsoft.com/office/drawing/2014/main" id="{DF4FE554-BEE3-8209-714A-28C16066FA19}"/>
+          <p:cNvPr id="8" name="Marcador de Posição da Data 3">
+            <a:extLst>
+              <a:ext uri="{FF2B5EF4-FFF2-40B4-BE49-F238E27FC236}">
+                <a16:creationId xmlns:a16="http://schemas.microsoft.com/office/drawing/2014/main" id="{327F84F4-82C2-3984-87FC-EF67BADFA131}"/>
               </a:ext>
             </a:extLst>
           </p:cNvPr>
@@ -7993,7 +8634,7 @@
     </p:spTree>
     <p:extLst>
       <p:ext uri="{BB962C8B-B14F-4D97-AF65-F5344CB8AC3E}">
-        <p14:creationId xmlns:p14="http://schemas.microsoft.com/office/powerpoint/2010/main" val="1623836021"/>
+        <p14:creationId xmlns:p14="http://schemas.microsoft.com/office/powerpoint/2010/main" val="1111987917"/>
       </p:ext>
     </p:extLst>
   </p:cSld>
@@ -8030,7 +8671,7 @@
       </p:grpSpPr>
       <p:sp useBgFill="1">
         <p:nvSpPr>
-          <p:cNvPr id="22" name="Slide Background">
+          <p:cNvPr id="18" name="Slide Background">
             <a:extLst>
               <a:ext uri="{FF2B5EF4-FFF2-40B4-BE49-F238E27FC236}">
                 <a16:creationId xmlns:a16="http://schemas.microsoft.com/office/drawing/2014/main" id="{C0763A76-9F1C-4FC5-82B7-DD475DA461B2}"/>
@@ -8178,13 +8819,13 @@
           </a:lstStyle>
           <a:p>
             <a:pPr algn="ctr"/>
-            <a:endParaRPr lang="en-US" dirty="0"/>
+            <a:endParaRPr lang="en-US"/>
           </a:p>
         </p:txBody>
       </p:sp>
       <p:sp useBgFill="1">
         <p:nvSpPr>
-          <p:cNvPr id="24" name="Rectangle 23">
+          <p:cNvPr id="20" name="Rectangle 19">
             <a:extLst>
               <a:ext uri="{FF2B5EF4-FFF2-40B4-BE49-F238E27FC236}">
                 <a16:creationId xmlns:a16="http://schemas.microsoft.com/office/drawing/2014/main" id="{E81BF4F6-F2CF-4984-9D14-D6966D92F99F}"/>
@@ -8245,7 +8886,7 @@
           <a:lstStyle/>
           <a:p>
             <a:pPr algn="ctr"/>
-            <a:endParaRPr lang="en-US" dirty="0"/>
+            <a:endParaRPr lang="en-US"/>
           </a:p>
         </p:txBody>
       </p:sp>
@@ -8254,7 +8895,7 @@
           <p:cNvPr id="2" name="Título 1">
             <a:extLst>
               <a:ext uri="{FF2B5EF4-FFF2-40B4-BE49-F238E27FC236}">
-                <a16:creationId xmlns:a16="http://schemas.microsoft.com/office/drawing/2014/main" id="{D4EAC386-2116-E6B4-0B03-45113820C92E}"/>
+                <a16:creationId xmlns:a16="http://schemas.microsoft.com/office/drawing/2014/main" id="{DC8B6D5C-15CE-B61B-84A3-E2BD3FF4A127}"/>
               </a:ext>
             </a:extLst>
           </p:cNvPr>
@@ -8279,7 +8920,7 @@
           <a:p>
             <a:r>
               <a:rPr lang="pt-PT" sz="4000" dirty="0"/>
-              <a:t>Illumination</a:t>
+              <a:t>Animation</a:t>
             </a:r>
           </a:p>
         </p:txBody>
@@ -8289,7 +8930,7 @@
           <p:cNvPr id="3" name="Marcador de Posição de Conteúdo 2">
             <a:extLst>
               <a:ext uri="{FF2B5EF4-FFF2-40B4-BE49-F238E27FC236}">
-                <a16:creationId xmlns:a16="http://schemas.microsoft.com/office/drawing/2014/main" id="{C63E7569-D78E-A980-42C5-E03FCBCB4FAE}"/>
+                <a16:creationId xmlns:a16="http://schemas.microsoft.com/office/drawing/2014/main" id="{101CFC4D-8A21-E6F7-817A-F16C73908F00}"/>
               </a:ext>
             </a:extLst>
           </p:cNvPr>
@@ -8312,105 +8953,66 @@
           </a:bodyPr>
           <a:lstStyle/>
           <a:p>
-            <a:pPr algn="just">
-              <a:lnSpc>
-                <a:spcPct val="100000"/>
-              </a:lnSpc>
+            <a:pPr>
               <a:buFont typeface="Symbol" panose="05050102010706020507" pitchFamily="18" charset="2"/>
               <a:buChar char="-"/>
             </a:pPr>
             <a:r>
-              <a:rPr lang="pt-PT" sz="2000" dirty="0"/>
-              <a:t>Directional Light (represented by the moon):</a:t>
-            </a:r>
-          </a:p>
-          <a:p>
-            <a:pPr lvl="1" algn="just">
-              <a:lnSpc>
-                <a:spcPct val="100000"/>
-              </a:lnSpc>
+              <a:rPr lang="en-US" sz="2000" dirty="0"/>
+              <a:t>Player Movement.</a:t>
+            </a:r>
+          </a:p>
+          <a:p>
+            <a:pPr>
               <a:buFont typeface="Symbol" panose="05050102010706020507" pitchFamily="18" charset="2"/>
               <a:buChar char="-"/>
             </a:pPr>
-            <a:r>
-              <a:rPr lang="pt-PT" sz="2000" dirty="0"/>
-              <a:t>Color: White.</a:t>
-            </a:r>
-          </a:p>
-          <a:p>
-            <a:pPr lvl="1" algn="just">
-              <a:lnSpc>
-                <a:spcPct val="100000"/>
-              </a:lnSpc>
+            <a:endParaRPr lang="en-US" sz="2000" dirty="0"/>
+          </a:p>
+          <a:p>
+            <a:pPr>
               <a:buFont typeface="Symbol" panose="05050102010706020507" pitchFamily="18" charset="2"/>
               <a:buChar char="-"/>
             </a:pPr>
             <a:r>
-              <a:rPr lang="pt-PT" sz="2000" dirty="0"/>
-              <a:t>Intensity: 1.</a:t>
-            </a:r>
-          </a:p>
-          <a:p>
-            <a:pPr lvl="1" algn="just">
-              <a:lnSpc>
-                <a:spcPct val="100000"/>
-              </a:lnSpc>
+              <a:rPr lang="en-US" sz="2000" dirty="0"/>
+              <a:t>Ghost Movement.</a:t>
+            </a:r>
+          </a:p>
+          <a:p>
+            <a:pPr>
               <a:buFont typeface="Symbol" panose="05050102010706020507" pitchFamily="18" charset="2"/>
               <a:buChar char="-"/>
             </a:pPr>
-            <a:r>
-              <a:rPr lang="pt-PT" sz="2000" dirty="0"/>
-              <a:t>Position: (0, 10, 0).</a:t>
-            </a:r>
-          </a:p>
-          <a:p>
-            <a:pPr algn="just">
-              <a:lnSpc>
-                <a:spcPct val="100000"/>
-              </a:lnSpc>
+            <a:endParaRPr lang="en-US" sz="2000" dirty="0"/>
+          </a:p>
+          <a:p>
+            <a:pPr>
               <a:buFont typeface="Symbol" panose="05050102010706020507" pitchFamily="18" charset="2"/>
               <a:buChar char="-"/>
             </a:pPr>
-            <a:endParaRPr lang="pt-PT" sz="2000" dirty="0"/>
-          </a:p>
-          <a:p>
-            <a:pPr algn="just">
-              <a:lnSpc>
-                <a:spcPct val="100000"/>
-              </a:lnSpc>
+            <a:r>
+              <a:rPr lang="en-US" sz="2000" dirty="0"/>
+              <a:t>Bullet Shooting.</a:t>
+            </a:r>
+          </a:p>
+          <a:p>
+            <a:pPr>
               <a:buFont typeface="Symbol" panose="05050102010706020507" pitchFamily="18" charset="2"/>
               <a:buChar char="-"/>
             </a:pPr>
-            <a:r>
-              <a:rPr lang="pt-PT" sz="2000" dirty="0"/>
-              <a:t>Ambient Light:</a:t>
-            </a:r>
-          </a:p>
-          <a:p>
-            <a:pPr lvl="1" algn="just">
-              <a:lnSpc>
-                <a:spcPct val="100000"/>
-              </a:lnSpc>
+            <a:endParaRPr lang="en-US" sz="2000" dirty="0"/>
+          </a:p>
+          <a:p>
+            <a:pPr>
               <a:buFont typeface="Symbol" panose="05050102010706020507" pitchFamily="18" charset="2"/>
               <a:buChar char="-"/>
             </a:pPr>
             <a:r>
-              <a:rPr lang="pt-PT" sz="2000" dirty="0"/>
-              <a:t>Color: White.</a:t>
-            </a:r>
-          </a:p>
-          <a:p>
-            <a:pPr lvl="1" algn="just">
-              <a:lnSpc>
-                <a:spcPct val="100000"/>
-              </a:lnSpc>
-              <a:buFont typeface="Symbol" panose="05050102010706020507" pitchFamily="18" charset="2"/>
-              <a:buChar char="-"/>
-            </a:pPr>
-            <a:r>
-              <a:rPr lang="pt-PT" sz="2000" dirty="0"/>
-              <a:t>Intensity: 0,2.</a:t>
-            </a:r>
+              <a:rPr lang="en-US" sz="2000" dirty="0"/>
+              <a:t>Collisions and Life Update.</a:t>
+            </a:r>
+            <a:endParaRPr lang="pt-PT" sz="2000" dirty="0"/>
           </a:p>
         </p:txBody>
       </p:sp>
@@ -8419,7 +9021,7 @@
           <p:cNvPr id="7" name="Picture 6">
             <a:extLst>
               <a:ext uri="{FF2B5EF4-FFF2-40B4-BE49-F238E27FC236}">
-                <a16:creationId xmlns:a16="http://schemas.microsoft.com/office/drawing/2014/main" id="{E4A09083-226A-4A96-D9E8-8941DA5EF78C}"/>
+                <a16:creationId xmlns:a16="http://schemas.microsoft.com/office/drawing/2014/main" id="{796166FB-D679-52F5-022E-0B0D60A315F4}"/>
               </a:ext>
             </a:extLst>
           </p:cNvPr>
@@ -8436,13 +9038,13 @@
               </a:ext>
             </a:extLst>
           </a:blip>
-          <a:srcRect t="6" b="6"/>
+          <a:srcRect l="27959" t="111" r="29772" b="-109"/>
           <a:stretch/>
         </p:blipFill>
         <p:spPr>
           <a:xfrm>
-            <a:off x="6099413" y="6"/>
-            <a:ext cx="6095999" cy="6857990"/>
+            <a:off x="6096000" y="1"/>
+            <a:ext cx="6102825" cy="6858000"/>
           </a:xfrm>
           <a:prstGeom prst="rect">
             <a:avLst/>
@@ -8454,7 +9056,7 @@
           <p:cNvPr id="5" name="Marcador de Posição do Número do Diapositivo 4">
             <a:extLst>
               <a:ext uri="{FF2B5EF4-FFF2-40B4-BE49-F238E27FC236}">
-                <a16:creationId xmlns:a16="http://schemas.microsoft.com/office/drawing/2014/main" id="{B8B4F806-50C1-2A3B-B7FF-66DE4B6A8F81}"/>
+                <a16:creationId xmlns:a16="http://schemas.microsoft.com/office/drawing/2014/main" id="{8DFE5CDA-5E21-71DD-F590-331350D021C5}"/>
               </a:ext>
             </a:extLst>
           </p:cNvPr>
@@ -8495,7 +9097,7 @@
               </a:pPr>
               <a:t>5</a:t>
             </a:fld>
-            <a:endParaRPr lang="pt-PT" dirty="0">
+            <a:endParaRPr lang="pt-PT">
               <a:solidFill>
                 <a:srgbClr val="FFFFFF"/>
               </a:solidFill>
@@ -8505,10 +9107,10 @@
       </p:sp>
       <p:sp>
         <p:nvSpPr>
-          <p:cNvPr id="9" name="Marcador de Posição da Data 3">
-            <a:extLst>
-              <a:ext uri="{FF2B5EF4-FFF2-40B4-BE49-F238E27FC236}">
-                <a16:creationId xmlns:a16="http://schemas.microsoft.com/office/drawing/2014/main" id="{657D4DD8-B153-875E-387A-A6DA46DCA0A3}"/>
+          <p:cNvPr id="4" name="Marcador de Posição da Data 3">
+            <a:extLst>
+              <a:ext uri="{FF2B5EF4-FFF2-40B4-BE49-F238E27FC236}">
+                <a16:creationId xmlns:a16="http://schemas.microsoft.com/office/drawing/2014/main" id="{95F20C55-06AA-FAE7-43B6-E40D48588D79}"/>
               </a:ext>
             </a:extLst>
           </p:cNvPr>
@@ -8550,7 +9152,7 @@
     </p:spTree>
     <p:extLst>
       <p:ext uri="{BB962C8B-B14F-4D97-AF65-F5344CB8AC3E}">
-        <p14:creationId xmlns:p14="http://schemas.microsoft.com/office/powerpoint/2010/main" val="2569888114"/>
+        <p14:creationId xmlns:p14="http://schemas.microsoft.com/office/powerpoint/2010/main" val="1623836021"/>
       </p:ext>
     </p:extLst>
   </p:cSld>
@@ -8587,7 +9189,7 @@
       </p:grpSpPr>
       <p:sp useBgFill="1">
         <p:nvSpPr>
-          <p:cNvPr id="25" name="Slide Background">
+          <p:cNvPr id="29" name="Slide Background">
             <a:extLst>
               <a:ext uri="{FF2B5EF4-FFF2-40B4-BE49-F238E27FC236}">
                 <a16:creationId xmlns:a16="http://schemas.microsoft.com/office/drawing/2014/main" id="{3ECBE1F1-D69B-4AFA-ABD5-8E41720EF6DE}"/>
@@ -8647,10 +9249,10 @@
       </p:sp>
       <p:pic>
         <p:nvPicPr>
-          <p:cNvPr id="11" name="Picture 10" descr="Floating white spheres in 3D">
-            <a:extLst>
-              <a:ext uri="{FF2B5EF4-FFF2-40B4-BE49-F238E27FC236}">
-                <a16:creationId xmlns:a16="http://schemas.microsoft.com/office/drawing/2014/main" id="{169B76FD-E307-05CB-A02C-6E5ECE1AB16E}"/>
+          <p:cNvPr id="7" name="Picture 6">
+            <a:extLst>
+              <a:ext uri="{FF2B5EF4-FFF2-40B4-BE49-F238E27FC236}">
+                <a16:creationId xmlns:a16="http://schemas.microsoft.com/office/drawing/2014/main" id="{E4A09083-226A-4A96-D9E8-8941DA5EF78C}"/>
               </a:ext>
             </a:extLst>
           </p:cNvPr>
@@ -8660,8 +9262,14 @@
           <p:nvPr/>
         </p:nvPicPr>
         <p:blipFill rotWithShape="1">
-          <a:blip r:embed="rId3"/>
-          <a:srcRect l="27286" r="20055" b="-2"/>
+          <a:blip r:embed="rId3">
+            <a:extLst>
+              <a:ext uri="{28A0092B-C50C-407E-A947-70E740481C1C}">
+                <a14:useLocalDpi xmlns:a14="http://schemas.microsoft.com/office/drawing/2010/main" val="0"/>
+              </a:ext>
+            </a:extLst>
+          </a:blip>
+          <a:srcRect l="124" r="11236"/>
           <a:stretch/>
         </p:blipFill>
         <p:spPr>
@@ -8676,7 +9284,7 @@
       </p:pic>
       <p:sp useBgFill="1">
         <p:nvSpPr>
-          <p:cNvPr id="27" name="Rectangle 26">
+          <p:cNvPr id="31" name="Rectangle 30">
             <a:extLst>
               <a:ext uri="{FF2B5EF4-FFF2-40B4-BE49-F238E27FC236}">
                 <a16:creationId xmlns:a16="http://schemas.microsoft.com/office/drawing/2014/main" id="{603A6265-E10C-4B85-9C20-E75FCAF9CC63}"/>
@@ -8771,7 +9379,7 @@
           <a:p>
             <a:r>
               <a:rPr lang="pt-PT" sz="4000" dirty="0"/>
-              <a:t>Sounds</a:t>
+              <a:t>Illumination</a:t>
             </a:r>
           </a:p>
         </p:txBody>
@@ -8809,16 +9417,50 @@
               <a:buChar char="-"/>
             </a:pPr>
             <a:r>
-              <a:rPr lang="en-US" sz="2000" dirty="0"/>
-              <a:t>Ambient sound produced by the ghost and related to its distance to the player.</a:t>
-            </a:r>
+              <a:rPr lang="pt-PT" sz="2000" dirty="0"/>
+              <a:t>Directional Light (represented by the moon):</a:t>
+            </a:r>
+            <a:endParaRPr lang="pt-PT" sz="2000"/>
+          </a:p>
+          <a:p>
+            <a:pPr lvl="1">
+              <a:buFont typeface="Symbol" panose="05050102010706020507" pitchFamily="18" charset="2"/>
+              <a:buChar char="-"/>
+            </a:pPr>
+            <a:r>
+              <a:rPr lang="pt-PT" sz="2000" dirty="0"/>
+              <a:t>Color: White.</a:t>
+            </a:r>
+            <a:endParaRPr lang="pt-PT" sz="2000"/>
+          </a:p>
+          <a:p>
+            <a:pPr lvl="1">
+              <a:buFont typeface="Symbol" panose="05050102010706020507" pitchFamily="18" charset="2"/>
+              <a:buChar char="-"/>
+            </a:pPr>
+            <a:r>
+              <a:rPr lang="pt-PT" sz="2000" dirty="0"/>
+              <a:t>Intensity: 1.</a:t>
+            </a:r>
+            <a:endParaRPr lang="pt-PT" sz="2000"/>
+          </a:p>
+          <a:p>
+            <a:pPr lvl="1">
+              <a:buFont typeface="Symbol" panose="05050102010706020507" pitchFamily="18" charset="2"/>
+              <a:buChar char="-"/>
+            </a:pPr>
+            <a:r>
+              <a:rPr lang="pt-PT" sz="2000" dirty="0"/>
+              <a:t>Position: (0, 10, 0).</a:t>
+            </a:r>
+            <a:endParaRPr lang="pt-PT" sz="2000"/>
           </a:p>
           <a:p>
             <a:pPr>
               <a:buFont typeface="Symbol" panose="05050102010706020507" pitchFamily="18" charset="2"/>
               <a:buChar char="-"/>
             </a:pPr>
-            <a:endParaRPr lang="en-US" sz="2000" dirty="0"/>
+            <a:endParaRPr lang="pt-PT" sz="2000"/>
           </a:p>
           <a:p>
             <a:pPr>
@@ -8826,10 +9468,32 @@
               <a:buChar char="-"/>
             </a:pPr>
             <a:r>
-              <a:rPr lang="en-US" sz="2000" dirty="0"/>
-              <a:t>Sound from the gunshots.</a:t>
-            </a:r>
-            <a:endParaRPr lang="pt-PT" sz="2000" dirty="0"/>
+              <a:rPr lang="pt-PT" sz="2000" dirty="0"/>
+              <a:t>Ambient Light:</a:t>
+            </a:r>
+            <a:endParaRPr lang="pt-PT" sz="2000"/>
+          </a:p>
+          <a:p>
+            <a:pPr lvl="1">
+              <a:buFont typeface="Symbol" panose="05050102010706020507" pitchFamily="18" charset="2"/>
+              <a:buChar char="-"/>
+            </a:pPr>
+            <a:r>
+              <a:rPr lang="pt-PT" sz="2000" dirty="0"/>
+              <a:t>Color: White.</a:t>
+            </a:r>
+            <a:endParaRPr lang="pt-PT" sz="2000"/>
+          </a:p>
+          <a:p>
+            <a:pPr lvl="1">
+              <a:buFont typeface="Symbol" panose="05050102010706020507" pitchFamily="18" charset="2"/>
+              <a:buChar char="-"/>
+            </a:pPr>
+            <a:r>
+              <a:rPr lang="pt-PT" sz="2000" dirty="0"/>
+              <a:t>Intensity: 0,2.</a:t>
+            </a:r>
+            <a:endParaRPr lang="pt-PT" sz="2000"/>
           </a:p>
         </p:txBody>
       </p:sp>
@@ -8892,7 +9556,7 @@
           <p:cNvPr id="4" name="Marcador de Posição da Data 3">
             <a:extLst>
               <a:ext uri="{FF2B5EF4-FFF2-40B4-BE49-F238E27FC236}">
-                <a16:creationId xmlns:a16="http://schemas.microsoft.com/office/drawing/2014/main" id="{30981E7F-39BF-F46F-2F37-EC0640A89C9A}"/>
+                <a16:creationId xmlns:a16="http://schemas.microsoft.com/office/drawing/2014/main" id="{D4A8DDB6-AD54-8BC4-9622-FA4D441DF2EB}"/>
               </a:ext>
             </a:extLst>
           </p:cNvPr>
@@ -8923,7 +9587,7 @@
             <a:r>
               <a:rPr lang="pt-PT" dirty="0">
                 <a:solidFill>
-                  <a:schemeClr val="tx1"/>
+                  <a:schemeClr val="bg1"/>
                 </a:solidFill>
               </a:rPr>
               <a:t>ICG - 2023/2024</a:t>
@@ -8934,7 +9598,7 @@
     </p:spTree>
     <p:extLst>
       <p:ext uri="{BB962C8B-B14F-4D97-AF65-F5344CB8AC3E}">
-        <p14:creationId xmlns:p14="http://schemas.microsoft.com/office/powerpoint/2010/main" val="3112891430"/>
+        <p14:creationId xmlns:p14="http://schemas.microsoft.com/office/powerpoint/2010/main" val="2569888114"/>
       </p:ext>
     </p:extLst>
   </p:cSld>
@@ -8971,10 +9635,10 @@
       </p:grpSpPr>
       <p:sp useBgFill="1">
         <p:nvSpPr>
-          <p:cNvPr id="43" name="Slide Background">
-            <a:extLst>
-              <a:ext uri="{FF2B5EF4-FFF2-40B4-BE49-F238E27FC236}">
-                <a16:creationId xmlns:a16="http://schemas.microsoft.com/office/drawing/2014/main" id="{9F7D5CDA-D291-4307-BF55-1381FED29634}"/>
+          <p:cNvPr id="47" name="Slide Background">
+            <a:extLst>
+              <a:ext uri="{FF2B5EF4-FFF2-40B4-BE49-F238E27FC236}">
+                <a16:creationId xmlns:a16="http://schemas.microsoft.com/office/drawing/2014/main" id="{C0763A76-9F1C-4FC5-82B7-DD475DA461B2}"/>
               </a:ext>
               <a:ext uri="{C183D7F6-B498-43B3-948B-1728B52AA6E4}">
                 <adec:decorative xmlns:adec="http://schemas.microsoft.com/office/drawing/2017/decorative" val="1"/>
@@ -8992,10 +9656,10 @@
             </p:extLst>
           </p:nvPr>
         </p:nvSpPr>
-        <p:spPr>
+        <p:spPr bwMode="white">
           <a:xfrm>
-            <a:off x="0" y="0"/>
-            <a:ext cx="12192000" cy="6858000"/>
+            <a:off x="-1" y="0"/>
+            <a:ext cx="12191999" cy="6858000"/>
           </a:xfrm>
           <a:prstGeom prst="rect">
             <a:avLst/>
@@ -9022,48 +9686,113 @@
         </p:style>
         <p:txBody>
           <a:bodyPr rtlCol="0" anchor="ctr"/>
-          <a:lstStyle/>
+          <a:lstStyle>
+            <a:defPPr>
+              <a:defRPr lang="en-US"/>
+            </a:defPPr>
+            <a:lvl1pPr marL="0" algn="l" defTabSz="914400" rtl="0" eaLnBrk="1" latinLnBrk="0" hangingPunct="1">
+              <a:defRPr sz="1800" kern="1200">
+                <a:solidFill>
+                  <a:schemeClr val="lt1"/>
+                </a:solidFill>
+                <a:latin typeface="+mn-lt"/>
+                <a:ea typeface="+mn-ea"/>
+                <a:cs typeface="+mn-cs"/>
+              </a:defRPr>
+            </a:lvl1pPr>
+            <a:lvl2pPr marL="457200" algn="l" defTabSz="914400" rtl="0" eaLnBrk="1" latinLnBrk="0" hangingPunct="1">
+              <a:defRPr sz="1800" kern="1200">
+                <a:solidFill>
+                  <a:schemeClr val="lt1"/>
+                </a:solidFill>
+                <a:latin typeface="+mn-lt"/>
+                <a:ea typeface="+mn-ea"/>
+                <a:cs typeface="+mn-cs"/>
+              </a:defRPr>
+            </a:lvl2pPr>
+            <a:lvl3pPr marL="914400" algn="l" defTabSz="914400" rtl="0" eaLnBrk="1" latinLnBrk="0" hangingPunct="1">
+              <a:defRPr sz="1800" kern="1200">
+                <a:solidFill>
+                  <a:schemeClr val="lt1"/>
+                </a:solidFill>
+                <a:latin typeface="+mn-lt"/>
+                <a:ea typeface="+mn-ea"/>
+                <a:cs typeface="+mn-cs"/>
+              </a:defRPr>
+            </a:lvl3pPr>
+            <a:lvl4pPr marL="1371600" algn="l" defTabSz="914400" rtl="0" eaLnBrk="1" latinLnBrk="0" hangingPunct="1">
+              <a:defRPr sz="1800" kern="1200">
+                <a:solidFill>
+                  <a:schemeClr val="lt1"/>
+                </a:solidFill>
+                <a:latin typeface="+mn-lt"/>
+                <a:ea typeface="+mn-ea"/>
+                <a:cs typeface="+mn-cs"/>
+              </a:defRPr>
+            </a:lvl4pPr>
+            <a:lvl5pPr marL="1828800" algn="l" defTabSz="914400" rtl="0" eaLnBrk="1" latinLnBrk="0" hangingPunct="1">
+              <a:defRPr sz="1800" kern="1200">
+                <a:solidFill>
+                  <a:schemeClr val="lt1"/>
+                </a:solidFill>
+                <a:latin typeface="+mn-lt"/>
+                <a:ea typeface="+mn-ea"/>
+                <a:cs typeface="+mn-cs"/>
+              </a:defRPr>
+            </a:lvl5pPr>
+            <a:lvl6pPr marL="2286000" algn="l" defTabSz="914400" rtl="0" eaLnBrk="1" latinLnBrk="0" hangingPunct="1">
+              <a:defRPr sz="1800" kern="1200">
+                <a:solidFill>
+                  <a:schemeClr val="lt1"/>
+                </a:solidFill>
+                <a:latin typeface="+mn-lt"/>
+                <a:ea typeface="+mn-ea"/>
+                <a:cs typeface="+mn-cs"/>
+              </a:defRPr>
+            </a:lvl6pPr>
+            <a:lvl7pPr marL="2743200" algn="l" defTabSz="914400" rtl="0" eaLnBrk="1" latinLnBrk="0" hangingPunct="1">
+              <a:defRPr sz="1800" kern="1200">
+                <a:solidFill>
+                  <a:schemeClr val="lt1"/>
+                </a:solidFill>
+                <a:latin typeface="+mn-lt"/>
+                <a:ea typeface="+mn-ea"/>
+                <a:cs typeface="+mn-cs"/>
+              </a:defRPr>
+            </a:lvl7pPr>
+            <a:lvl8pPr marL="3200400" algn="l" defTabSz="914400" rtl="0" eaLnBrk="1" latinLnBrk="0" hangingPunct="1">
+              <a:defRPr sz="1800" kern="1200">
+                <a:solidFill>
+                  <a:schemeClr val="lt1"/>
+                </a:solidFill>
+                <a:latin typeface="+mn-lt"/>
+                <a:ea typeface="+mn-ea"/>
+                <a:cs typeface="+mn-cs"/>
+              </a:defRPr>
+            </a:lvl8pPr>
+            <a:lvl9pPr marL="3657600" algn="l" defTabSz="914400" rtl="0" eaLnBrk="1" latinLnBrk="0" hangingPunct="1">
+              <a:defRPr sz="1800" kern="1200">
+                <a:solidFill>
+                  <a:schemeClr val="lt1"/>
+                </a:solidFill>
+                <a:latin typeface="+mn-lt"/>
+                <a:ea typeface="+mn-ea"/>
+                <a:cs typeface="+mn-cs"/>
+              </a:defRPr>
+            </a:lvl9pPr>
+          </a:lstStyle>
           <a:p>
             <a:pPr algn="ctr"/>
             <a:endParaRPr lang="en-US"/>
           </a:p>
         </p:txBody>
       </p:sp>
-      <p:pic>
-        <p:nvPicPr>
-          <p:cNvPr id="20" name="Picture 6" descr="Hands on keyboard and mouse">
-            <a:extLst>
-              <a:ext uri="{FF2B5EF4-FFF2-40B4-BE49-F238E27FC236}">
-                <a16:creationId xmlns:a16="http://schemas.microsoft.com/office/drawing/2014/main" id="{F697300D-85D4-02BA-46CA-6D444AA9FB97}"/>
-              </a:ext>
-            </a:extLst>
-          </p:cNvPr>
-          <p:cNvPicPr>
-            <a:picLocks noChangeAspect="1"/>
-          </p:cNvPicPr>
-          <p:nvPr/>
-        </p:nvPicPr>
-        <p:blipFill rotWithShape="1">
-          <a:blip r:embed="rId2"/>
-          <a:srcRect l="28395" r="12339" b="-1"/>
-          <a:stretch/>
-        </p:blipFill>
-        <p:spPr>
-          <a:xfrm>
-            <a:off x="6103027" y="10"/>
-            <a:ext cx="6088971" cy="6857990"/>
-          </a:xfrm>
-          <a:prstGeom prst="rect">
-            <a:avLst/>
-          </a:prstGeom>
-        </p:spPr>
-      </p:pic>
       <p:sp useBgFill="1">
         <p:nvSpPr>
-          <p:cNvPr id="45" name="Rectangle 44">
-            <a:extLst>
-              <a:ext uri="{FF2B5EF4-FFF2-40B4-BE49-F238E27FC236}">
-                <a16:creationId xmlns:a16="http://schemas.microsoft.com/office/drawing/2014/main" id="{59B296B9-C5A5-4E4F-9B60-C907B5F1466C}"/>
+          <p:cNvPr id="49" name="Rectangle 48">
+            <a:extLst>
+              <a:ext uri="{FF2B5EF4-FFF2-40B4-BE49-F238E27FC236}">
+                <a16:creationId xmlns:a16="http://schemas.microsoft.com/office/drawing/2014/main" id="{E81BF4F6-F2CF-4984-9D14-D6966D92F99F}"/>
               </a:ext>
               <a:ext uri="{C183D7F6-B498-43B3-948B-1728B52AA6E4}">
                 <adec:decorative xmlns:adec="http://schemas.microsoft.com/office/drawing/2017/decorative" val="1"/>
@@ -9083,8 +9812,8 @@
         </p:nvSpPr>
         <p:spPr>
           <a:xfrm>
-            <a:off x="0" y="0"/>
-            <a:ext cx="6103025" cy="6858000"/>
+            <a:off x="1" y="0"/>
+            <a:ext cx="8522446" cy="2285999"/>
           </a:xfrm>
           <a:prstGeom prst="rect">
             <a:avLst/>
@@ -9093,9 +9822,9 @@
             <a:noFill/>
           </a:ln>
           <a:effectLst>
-            <a:outerShdw blurRad="889000" dist="406400" dir="21540000" sx="90000" sy="90000" algn="t" rotWithShape="0">
+            <a:outerShdw blurRad="596900" dist="304800" dir="7140000" sx="90000" sy="90000" algn="t" rotWithShape="0">
               <a:srgbClr val="000000">
-                <a:alpha val="20000"/>
+                <a:alpha val="15000"/>
               </a:srgbClr>
             </a:outerShdw>
           </a:effectLst>
@@ -9125,93 +9854,26 @@
           </a:p>
         </p:txBody>
       </p:sp>
-      <p:sp useBgFill="1">
-        <p:nvSpPr>
-          <p:cNvPr id="47" name="Rectangle 46">
-            <a:extLst>
-              <a:ext uri="{FF2B5EF4-FFF2-40B4-BE49-F238E27FC236}">
-                <a16:creationId xmlns:a16="http://schemas.microsoft.com/office/drawing/2014/main" id="{D0300FD3-5AF1-6305-15FA-9078072672E2}"/>
-              </a:ext>
-              <a:ext uri="{C183D7F6-B498-43B3-948B-1728B52AA6E4}">
-                <adec:decorative xmlns:adec="http://schemas.microsoft.com/office/drawing/2017/decorative" val="1"/>
-              </a:ext>
-            </a:extLst>
-          </p:cNvPr>
-          <p:cNvSpPr>
-            <a:spLocks noGrp="1" noRot="1" noChangeAspect="1" noMove="1" noResize="1" noEditPoints="1" noAdjustHandles="1" noChangeArrowheads="1" noChangeShapeType="1" noTextEdit="1"/>
-          </p:cNvSpPr>
-          <p:nvPr>
-            <p:extLst>
-              <p:ext uri="{386F3935-93C4-4BCD-93E2-E3B085C9AB24}">
-                <p16:designElem xmlns:p16="http://schemas.microsoft.com/office/powerpoint/2015/main" val="1"/>
-              </p:ext>
-            </p:extLst>
+      <p:sp>
+        <p:nvSpPr>
+          <p:cNvPr id="2" name="Título 1">
+            <a:extLst>
+              <a:ext uri="{FF2B5EF4-FFF2-40B4-BE49-F238E27FC236}">
+                <a16:creationId xmlns:a16="http://schemas.microsoft.com/office/drawing/2014/main" id="{D4EAC386-2116-E6B4-0B03-45113820C92E}"/>
+              </a:ext>
+            </a:extLst>
+          </p:cNvPr>
+          <p:cNvSpPr>
+            <a:spLocks noGrp="1"/>
+          </p:cNvSpPr>
+          <p:nvPr>
+            <p:ph type="title"/>
           </p:nvPr>
         </p:nvSpPr>
         <p:spPr>
           <a:xfrm>
-            <a:off x="0" y="0"/>
-            <a:ext cx="6103025" cy="2285995"/>
-          </a:xfrm>
-          <a:prstGeom prst="rect">
-            <a:avLst/>
-          </a:prstGeom>
-          <a:ln>
-            <a:noFill/>
-          </a:ln>
-          <a:effectLst>
-            <a:outerShdw blurRad="254000" dist="127000" dir="5460000" sx="92000" sy="92000" algn="t" rotWithShape="0">
-              <a:srgbClr val="000000">
-                <a:alpha val="30000"/>
-              </a:srgbClr>
-            </a:outerShdw>
-          </a:effectLst>
-        </p:spPr>
-        <p:style>
-          <a:lnRef idx="2">
-            <a:schemeClr val="accent1">
-              <a:shade val="50000"/>
-            </a:schemeClr>
-          </a:lnRef>
-          <a:fillRef idx="1">
-            <a:schemeClr val="accent1"/>
-          </a:fillRef>
-          <a:effectRef idx="0">
-            <a:schemeClr val="accent1"/>
-          </a:effectRef>
-          <a:fontRef idx="minor">
-            <a:schemeClr val="lt1"/>
-          </a:fontRef>
-        </p:style>
-        <p:txBody>
-          <a:bodyPr rtlCol="0" anchor="ctr"/>
-          <a:lstStyle/>
-          <a:p>
-            <a:pPr algn="ctr"/>
-            <a:endParaRPr lang="en-US"/>
-          </a:p>
-        </p:txBody>
-      </p:sp>
-      <p:sp>
-        <p:nvSpPr>
-          <p:cNvPr id="2" name="Título 1">
-            <a:extLst>
-              <a:ext uri="{FF2B5EF4-FFF2-40B4-BE49-F238E27FC236}">
-                <a16:creationId xmlns:a16="http://schemas.microsoft.com/office/drawing/2014/main" id="{33446C54-F7AE-CA4F-E5CE-50948D8171E6}"/>
-              </a:ext>
-            </a:extLst>
-          </p:cNvPr>
-          <p:cNvSpPr>
-            <a:spLocks noGrp="1"/>
-          </p:cNvSpPr>
-          <p:nvPr>
-            <p:ph type="title"/>
-          </p:nvPr>
-        </p:nvSpPr>
-        <p:spPr>
-          <a:xfrm>
-            <a:off x="761801" y="328512"/>
-            <a:ext cx="4778387" cy="1628970"/>
+            <a:off x="761803" y="350196"/>
+            <a:ext cx="4646904" cy="1624520"/>
           </a:xfrm>
         </p:spPr>
         <p:txBody>
@@ -9222,7 +9884,7 @@
           <a:p>
             <a:r>
               <a:rPr lang="pt-PT" sz="4000" dirty="0"/>
-              <a:t>User Interaction</a:t>
+              <a:t>Shadows and Sounds</a:t>
             </a:r>
           </a:p>
         </p:txBody>
@@ -9232,7 +9894,7 @@
           <p:cNvPr id="3" name="Marcador de Posição de Conteúdo 2">
             <a:extLst>
               <a:ext uri="{FF2B5EF4-FFF2-40B4-BE49-F238E27FC236}">
-                <a16:creationId xmlns:a16="http://schemas.microsoft.com/office/drawing/2014/main" id="{02672098-09A7-756F-7E43-F974D6424264}"/>
+                <a16:creationId xmlns:a16="http://schemas.microsoft.com/office/drawing/2014/main" id="{C63E7569-D78E-A980-42C5-E03FCBCB4FAE}"/>
               </a:ext>
             </a:extLst>
           </p:cNvPr>
@@ -9245,8 +9907,8 @@
         </p:nvSpPr>
         <p:spPr>
           <a:xfrm>
-            <a:off x="761801" y="2884929"/>
-            <a:ext cx="4659756" cy="3374137"/>
+            <a:off x="761802" y="2743200"/>
+            <a:ext cx="4646905" cy="3613149"/>
           </a:xfrm>
         </p:spPr>
         <p:txBody>
@@ -9261,7 +9923,7 @@
             </a:pPr>
             <a:r>
               <a:rPr lang="en-US" sz="2000" dirty="0"/>
-              <a:t>With the mouse the user can shot bullets at the Ghost.</a:t>
+              <a:t>The Direction Light produces shadows.</a:t>
             </a:r>
             <a:endParaRPr lang="en-US" sz="2000"/>
           </a:p>
@@ -9279,62 +9941,58 @@
             </a:pPr>
             <a:r>
               <a:rPr lang="en-US" sz="2000" dirty="0"/>
-              <a:t>Using the WASD keys in the keyboard and the SPACE bar the user can move around the map.</a:t>
+              <a:t>Ambient sound produced by the ghost and related to its distance to the player.</a:t>
             </a:r>
             <a:endParaRPr lang="en-US" sz="2000"/>
           </a:p>
-        </p:txBody>
-      </p:sp>
-      <p:sp>
-        <p:nvSpPr>
-          <p:cNvPr id="6" name="Marcador de Posição da Data 3">
-            <a:extLst>
-              <a:ext uri="{FF2B5EF4-FFF2-40B4-BE49-F238E27FC236}">
-                <a16:creationId xmlns:a16="http://schemas.microsoft.com/office/drawing/2014/main" id="{9DEC26D1-9B75-2C97-F0C4-7EEBEEAE11F9}"/>
-              </a:ext>
-            </a:extLst>
-          </p:cNvPr>
-          <p:cNvSpPr>
-            <a:spLocks noGrp="1"/>
-          </p:cNvSpPr>
-          <p:nvPr>
-            <p:ph type="dt" sz="half" idx="10"/>
-          </p:nvPr>
-        </p:nvSpPr>
+          <a:p>
+            <a:pPr>
+              <a:buFont typeface="Symbol" panose="05050102010706020507" pitchFamily="18" charset="2"/>
+              <a:buChar char="-"/>
+            </a:pPr>
+            <a:r>
+              <a:rPr lang="en-US" sz="2000" dirty="0"/>
+              <a:t>Sound from the gunshots.</a:t>
+            </a:r>
+            <a:endParaRPr lang="pt-PT" sz="2000"/>
+          </a:p>
+        </p:txBody>
+      </p:sp>
+      <p:pic>
+        <p:nvPicPr>
+          <p:cNvPr id="36" name="Picture 35" descr="Spinning turntable and bokeh">
+            <a:extLst>
+              <a:ext uri="{FF2B5EF4-FFF2-40B4-BE49-F238E27FC236}">
+                <a16:creationId xmlns:a16="http://schemas.microsoft.com/office/drawing/2014/main" id="{400493C3-0CBD-6078-ECFF-8EF1537DD7BF}"/>
+              </a:ext>
+            </a:extLst>
+          </p:cNvPr>
+          <p:cNvPicPr>
+            <a:picLocks noChangeAspect="1"/>
+          </p:cNvPicPr>
+          <p:nvPr/>
+        </p:nvPicPr>
+        <p:blipFill rotWithShape="1">
+          <a:blip r:embed="rId3"/>
+          <a:srcRect l="17368" r="23231" b="-2"/>
+          <a:stretch/>
+        </p:blipFill>
         <p:spPr>
           <a:xfrm>
-            <a:off x="761801" y="6356350"/>
-            <a:ext cx="2743200" cy="365125"/>
+            <a:off x="6096000" y="1"/>
+            <a:ext cx="6102825" cy="6858000"/>
           </a:xfrm>
+          <a:prstGeom prst="rect">
+            <a:avLst/>
+          </a:prstGeom>
         </p:spPr>
-        <p:txBody>
-          <a:bodyPr>
-            <a:normAutofit/>
-          </a:bodyPr>
-          <a:lstStyle/>
-          <a:p>
-            <a:pPr>
-              <a:spcAft>
-                <a:spcPts val="600"/>
-              </a:spcAft>
-            </a:pPr>
-            <a:r>
-              <a:rPr lang="pt-PT">
-                <a:solidFill>
-                  <a:schemeClr val="tx1"/>
-                </a:solidFill>
-              </a:rPr>
-              <a:t>ICG - 2023/2024</a:t>
-            </a:r>
-          </a:p>
-        </p:txBody>
-      </p:sp>
+      </p:pic>
       <p:sp>
         <p:nvSpPr>
           <p:cNvPr id="5" name="Marcador de Posição do Número do Diapositivo 4">
             <a:extLst>
               <a:ext uri="{FF2B5EF4-FFF2-40B4-BE49-F238E27FC236}">
-                <a16:creationId xmlns:a16="http://schemas.microsoft.com/office/drawing/2014/main" id="{C6690917-D9BF-558B-1172-6B72C41CE0A0}"/>
+                <a16:creationId xmlns:a16="http://schemas.microsoft.com/office/drawing/2014/main" id="{B8B4F806-50C1-2A3B-B7FF-66DE4B6A8F81}"/>
               </a:ext>
             </a:extLst>
           </p:cNvPr>
@@ -9347,8 +10005,8 @@
         </p:nvSpPr>
         <p:spPr>
           <a:xfrm>
-            <a:off x="10515600" y="6356350"/>
-            <a:ext cx="1462825" cy="365125"/>
+            <a:off x="8732520" y="6356350"/>
+            <a:ext cx="3200400" cy="365125"/>
           </a:xfrm>
         </p:spPr>
         <p:txBody>
@@ -9383,10 +10041,54 @@
           </a:p>
         </p:txBody>
       </p:sp>
+      <p:sp>
+        <p:nvSpPr>
+          <p:cNvPr id="4" name="Marcador de Posição da Data 3">
+            <a:extLst>
+              <a:ext uri="{FF2B5EF4-FFF2-40B4-BE49-F238E27FC236}">
+                <a16:creationId xmlns:a16="http://schemas.microsoft.com/office/drawing/2014/main" id="{9B164F7A-F11F-3251-DEA0-F4F53F75D7E8}"/>
+              </a:ext>
+            </a:extLst>
+          </p:cNvPr>
+          <p:cNvSpPr>
+            <a:spLocks noGrp="1"/>
+          </p:cNvSpPr>
+          <p:nvPr>
+            <p:ph type="dt" sz="half" idx="10"/>
+          </p:nvPr>
+        </p:nvSpPr>
+        <p:spPr>
+          <a:xfrm>
+            <a:off x="243025" y="6356349"/>
+            <a:ext cx="2743200" cy="365125"/>
+          </a:xfrm>
+        </p:spPr>
+        <p:txBody>
+          <a:bodyPr>
+            <a:normAutofit/>
+          </a:bodyPr>
+          <a:lstStyle/>
+          <a:p>
+            <a:pPr>
+              <a:spcAft>
+                <a:spcPts val="600"/>
+              </a:spcAft>
+            </a:pPr>
+            <a:r>
+              <a:rPr lang="pt-PT" dirty="0">
+                <a:solidFill>
+                  <a:schemeClr val="tx1"/>
+                </a:solidFill>
+              </a:rPr>
+              <a:t>ICG - 2023/2024</a:t>
+            </a:r>
+          </a:p>
+        </p:txBody>
+      </p:sp>
     </p:spTree>
     <p:extLst>
       <p:ext uri="{BB962C8B-B14F-4D97-AF65-F5344CB8AC3E}">
-        <p14:creationId xmlns:p14="http://schemas.microsoft.com/office/powerpoint/2010/main" val="567565778"/>
+        <p14:creationId xmlns:p14="http://schemas.microsoft.com/office/powerpoint/2010/main" val="3112891430"/>
       </p:ext>
     </p:extLst>
   </p:cSld>
@@ -9423,7 +10125,7 @@
       </p:grpSpPr>
       <p:sp useBgFill="1">
         <p:nvSpPr>
-          <p:cNvPr id="39" name="Slide Background">
+          <p:cNvPr id="60" name="Slide Background">
             <a:extLst>
               <a:ext uri="{FF2B5EF4-FFF2-40B4-BE49-F238E27FC236}">
                 <a16:creationId xmlns:a16="http://schemas.microsoft.com/office/drawing/2014/main" id="{3ECBE1F1-D69B-4AFA-ABD5-8E41720EF6DE}"/>
@@ -9483,10 +10185,10 @@
       </p:sp>
       <p:pic>
         <p:nvPicPr>
-          <p:cNvPr id="7" name="Picture 6" descr="Computer script on a screen">
-            <a:extLst>
-              <a:ext uri="{FF2B5EF4-FFF2-40B4-BE49-F238E27FC236}">
-                <a16:creationId xmlns:a16="http://schemas.microsoft.com/office/drawing/2014/main" id="{DDF14196-F223-ADCE-F3CC-8573A5AB48A0}"/>
+          <p:cNvPr id="49" name="Picture 48">
+            <a:extLst>
+              <a:ext uri="{FF2B5EF4-FFF2-40B4-BE49-F238E27FC236}">
+                <a16:creationId xmlns:a16="http://schemas.microsoft.com/office/drawing/2014/main" id="{C60495D6-445A-356A-D02C-CEE2ABEBF902}"/>
               </a:ext>
             </a:extLst>
           </p:cNvPr>
@@ -9497,7 +10199,7 @@
         </p:nvPicPr>
         <p:blipFill rotWithShape="1">
           <a:blip r:embed="rId2"/>
-          <a:srcRect l="3458" r="43883" b="-2"/>
+          <a:srcRect l="25443" r="30182"/>
           <a:stretch/>
         </p:blipFill>
         <p:spPr>
@@ -9512,7 +10214,7 @@
       </p:pic>
       <p:sp useBgFill="1">
         <p:nvSpPr>
-          <p:cNvPr id="41" name="Rectangle 40">
+          <p:cNvPr id="62" name="Rectangle 61">
             <a:extLst>
               <a:ext uri="{FF2B5EF4-FFF2-40B4-BE49-F238E27FC236}">
                 <a16:creationId xmlns:a16="http://schemas.microsoft.com/office/drawing/2014/main" id="{603A6265-E10C-4B85-9C20-E75FCAF9CC63}"/>
@@ -9582,7 +10284,7 @@
           <p:cNvPr id="2" name="Título 1">
             <a:extLst>
               <a:ext uri="{FF2B5EF4-FFF2-40B4-BE49-F238E27FC236}">
-                <a16:creationId xmlns:a16="http://schemas.microsoft.com/office/drawing/2014/main" id="{42C9CCDD-7F42-FFCC-3807-54BD3E902B5B}"/>
+                <a16:creationId xmlns:a16="http://schemas.microsoft.com/office/drawing/2014/main" id="{33446C54-F7AE-CA4F-E5CE-50948D8171E6}"/>
               </a:ext>
             </a:extLst>
           </p:cNvPr>
@@ -9607,7 +10309,7 @@
           <a:p>
             <a:r>
               <a:rPr lang="pt-PT" sz="4000" dirty="0"/>
-              <a:t>Development</a:t>
+              <a:t>User Interaction</a:t>
             </a:r>
           </a:p>
         </p:txBody>
@@ -9617,7 +10319,7 @@
           <p:cNvPr id="3" name="Marcador de Posição de Conteúdo 2">
             <a:extLst>
               <a:ext uri="{FF2B5EF4-FFF2-40B4-BE49-F238E27FC236}">
-                <a16:creationId xmlns:a16="http://schemas.microsoft.com/office/drawing/2014/main" id="{C25F349C-DF7A-76B3-539A-D9AC348B7850}"/>
+                <a16:creationId xmlns:a16="http://schemas.microsoft.com/office/drawing/2014/main" id="{02672098-09A7-756F-7E43-F974D6424264}"/>
               </a:ext>
             </a:extLst>
           </p:cNvPr>
@@ -9646,29 +10348,7 @@
             </a:pPr>
             <a:r>
               <a:rPr lang="en-US" sz="2000" dirty="0"/>
-              <a:t>The code is organized into different sections to facilitate understanding and maintenance.</a:t>
-            </a:r>
-            <a:endParaRPr lang="en-US" sz="2000"/>
-          </a:p>
-          <a:p>
-            <a:pPr>
-              <a:buFont typeface="Symbol" panose="05050102010706020507" pitchFamily="18" charset="2"/>
-              <a:buChar char="-"/>
-            </a:pPr>
-            <a:r>
-              <a:rPr lang="en-US" sz="2000" dirty="0"/>
-              <a:t>Collisions and Event Detection.</a:t>
-            </a:r>
-            <a:endParaRPr lang="en-US" sz="2000"/>
-          </a:p>
-          <a:p>
-            <a:pPr>
-              <a:buFont typeface="Symbol" panose="05050102010706020507" pitchFamily="18" charset="2"/>
-              <a:buChar char="-"/>
-            </a:pPr>
-            <a:r>
-              <a:rPr lang="en-US" sz="2000" dirty="0"/>
-              <a:t>Position and Rotation Update.</a:t>
+              <a:t>With the mouse the user can shot bullets at the Ghost.</a:t>
             </a:r>
             <a:endParaRPr lang="en-US" sz="2000"/>
           </a:p>
@@ -9685,76 +10365,10 @@
               <a:buChar char="-"/>
             </a:pPr>
             <a:r>
-              <a:rPr lang="pt-PT" sz="2000" dirty="0"/>
-              <a:t>Difficulties:</a:t>
-            </a:r>
-            <a:endParaRPr lang="pt-PT" sz="2000"/>
-          </a:p>
-          <a:p>
-            <a:pPr lvl="1">
-              <a:buFont typeface="Symbol" panose="05050102010706020507" pitchFamily="18" charset="2"/>
-              <a:buChar char="-"/>
-            </a:pPr>
-            <a:r>
-              <a:rPr lang="pt-PT" sz="2000" dirty="0"/>
-              <a:t>Collision Management</a:t>
-            </a:r>
-            <a:endParaRPr lang="pt-PT" sz="2000"/>
-          </a:p>
-          <a:p>
-            <a:pPr lvl="1">
-              <a:buFont typeface="Symbol" panose="05050102010706020507" pitchFamily="18" charset="2"/>
-              <a:buChar char="-"/>
-            </a:pPr>
-            <a:r>
-              <a:rPr lang="pt-PT" sz="2000" dirty="0"/>
-              <a:t>Performance Optimization</a:t>
-            </a:r>
-            <a:endParaRPr lang="pt-PT" sz="2000"/>
-          </a:p>
-        </p:txBody>
-      </p:sp>
-      <p:sp>
-        <p:nvSpPr>
-          <p:cNvPr id="6" name="Marcador de Posição da Data 3">
-            <a:extLst>
-              <a:ext uri="{FF2B5EF4-FFF2-40B4-BE49-F238E27FC236}">
-                <a16:creationId xmlns:a16="http://schemas.microsoft.com/office/drawing/2014/main" id="{9ED20EE6-852D-1387-4E9C-0E925B78142B}"/>
-              </a:ext>
-            </a:extLst>
-          </p:cNvPr>
-          <p:cNvSpPr>
-            <a:spLocks noGrp="1"/>
-          </p:cNvSpPr>
-          <p:nvPr>
-            <p:ph type="dt" sz="half" idx="10"/>
-          </p:nvPr>
-        </p:nvSpPr>
-        <p:spPr>
-          <a:xfrm>
-            <a:off x="758952" y="6356350"/>
-            <a:ext cx="2743200" cy="365125"/>
-          </a:xfrm>
-        </p:spPr>
-        <p:txBody>
-          <a:bodyPr>
-            <a:normAutofit/>
-          </a:bodyPr>
-          <a:lstStyle/>
-          <a:p>
-            <a:pPr>
-              <a:spcAft>
-                <a:spcPts val="600"/>
-              </a:spcAft>
-            </a:pPr>
-            <a:r>
-              <a:rPr lang="pt-PT">
-                <a:solidFill>
-                  <a:srgbClr val="FFFFFF"/>
-                </a:solidFill>
-              </a:rPr>
-              <a:t>ICG - 2023/2024</a:t>
-            </a:r>
+              <a:rPr lang="en-US" sz="2000" dirty="0"/>
+              <a:t>Using the WASD keys in the keyboard and the SPACE bar the user can move around the map.</a:t>
+            </a:r>
+            <a:endParaRPr lang="en-US" sz="2000"/>
           </a:p>
         </p:txBody>
       </p:sp>
@@ -9763,7 +10377,7 @@
           <p:cNvPr id="5" name="Marcador de Posição do Número do Diapositivo 4">
             <a:extLst>
               <a:ext uri="{FF2B5EF4-FFF2-40B4-BE49-F238E27FC236}">
-                <a16:creationId xmlns:a16="http://schemas.microsoft.com/office/drawing/2014/main" id="{1D3DFBEB-7750-F056-BE82-8158E725F8BE}"/>
+                <a16:creationId xmlns:a16="http://schemas.microsoft.com/office/drawing/2014/main" id="{C6690917-D9BF-558B-1172-6B72C41CE0A0}"/>
               </a:ext>
             </a:extLst>
           </p:cNvPr>
@@ -9812,10 +10426,54 @@
           </a:p>
         </p:txBody>
       </p:sp>
+      <p:sp>
+        <p:nvSpPr>
+          <p:cNvPr id="6" name="Marcador de Posição da Data 3">
+            <a:extLst>
+              <a:ext uri="{FF2B5EF4-FFF2-40B4-BE49-F238E27FC236}">
+                <a16:creationId xmlns:a16="http://schemas.microsoft.com/office/drawing/2014/main" id="{61A9A774-DBB4-4C5D-4446-6F384C9E3FA2}"/>
+              </a:ext>
+            </a:extLst>
+          </p:cNvPr>
+          <p:cNvSpPr>
+            <a:spLocks noGrp="1"/>
+          </p:cNvSpPr>
+          <p:nvPr>
+            <p:ph type="dt" sz="half" idx="10"/>
+          </p:nvPr>
+        </p:nvSpPr>
+        <p:spPr>
+          <a:xfrm>
+            <a:off x="243025" y="6356349"/>
+            <a:ext cx="2743200" cy="365125"/>
+          </a:xfrm>
+        </p:spPr>
+        <p:txBody>
+          <a:bodyPr>
+            <a:normAutofit/>
+          </a:bodyPr>
+          <a:lstStyle/>
+          <a:p>
+            <a:pPr>
+              <a:spcAft>
+                <a:spcPts val="600"/>
+              </a:spcAft>
+            </a:pPr>
+            <a:r>
+              <a:rPr lang="pt-PT" dirty="0">
+                <a:solidFill>
+                  <a:schemeClr val="bg1"/>
+                </a:solidFill>
+              </a:rPr>
+              <a:t>ICG - 2023/2024</a:t>
+            </a:r>
+          </a:p>
+        </p:txBody>
+      </p:sp>
     </p:spTree>
     <p:extLst>
       <p:ext uri="{BB962C8B-B14F-4D97-AF65-F5344CB8AC3E}">
-        <p14:creationId xmlns:p14="http://schemas.microsoft.com/office/powerpoint/2010/main" val="2832385390"/>
+        <p14:creationId xmlns:p14="http://schemas.microsoft.com/office/powerpoint/2010/main" val="567565778"/>
       </p:ext>
     </p:extLst>
   </p:cSld>
@@ -9852,10 +10510,10 @@
       </p:grpSpPr>
       <p:sp useBgFill="1">
         <p:nvSpPr>
-          <p:cNvPr id="18" name="Slide Background">
-            <a:extLst>
-              <a:ext uri="{FF2B5EF4-FFF2-40B4-BE49-F238E27FC236}">
-                <a16:creationId xmlns:a16="http://schemas.microsoft.com/office/drawing/2014/main" id="{9F7D5CDA-D291-4307-BF55-1381FED29634}"/>
+          <p:cNvPr id="46" name="Slide Background">
+            <a:extLst>
+              <a:ext uri="{FF2B5EF4-FFF2-40B4-BE49-F238E27FC236}">
+                <a16:creationId xmlns:a16="http://schemas.microsoft.com/office/drawing/2014/main" id="{C0763A76-9F1C-4FC5-82B7-DD475DA461B2}"/>
               </a:ext>
               <a:ext uri="{C183D7F6-B498-43B3-948B-1728B52AA6E4}">
                 <adec:decorative xmlns:adec="http://schemas.microsoft.com/office/drawing/2017/decorative" val="1"/>
@@ -9873,10 +10531,10 @@
             </p:extLst>
           </p:nvPr>
         </p:nvSpPr>
-        <p:spPr>
+        <p:spPr bwMode="white">
           <a:xfrm>
-            <a:off x="0" y="0"/>
-            <a:ext cx="12192000" cy="6858000"/>
+            <a:off x="-1" y="0"/>
+            <a:ext cx="12191999" cy="6858000"/>
           </a:xfrm>
           <a:prstGeom prst="rect">
             <a:avLst/>
@@ -9903,48 +10561,113 @@
         </p:style>
         <p:txBody>
           <a:bodyPr rtlCol="0" anchor="ctr"/>
-          <a:lstStyle/>
+          <a:lstStyle>
+            <a:defPPr>
+              <a:defRPr lang="en-US"/>
+            </a:defPPr>
+            <a:lvl1pPr marL="0" algn="l" defTabSz="914400" rtl="0" eaLnBrk="1" latinLnBrk="0" hangingPunct="1">
+              <a:defRPr sz="1800" kern="1200">
+                <a:solidFill>
+                  <a:schemeClr val="lt1"/>
+                </a:solidFill>
+                <a:latin typeface="+mn-lt"/>
+                <a:ea typeface="+mn-ea"/>
+                <a:cs typeface="+mn-cs"/>
+              </a:defRPr>
+            </a:lvl1pPr>
+            <a:lvl2pPr marL="457200" algn="l" defTabSz="914400" rtl="0" eaLnBrk="1" latinLnBrk="0" hangingPunct="1">
+              <a:defRPr sz="1800" kern="1200">
+                <a:solidFill>
+                  <a:schemeClr val="lt1"/>
+                </a:solidFill>
+                <a:latin typeface="+mn-lt"/>
+                <a:ea typeface="+mn-ea"/>
+                <a:cs typeface="+mn-cs"/>
+              </a:defRPr>
+            </a:lvl2pPr>
+            <a:lvl3pPr marL="914400" algn="l" defTabSz="914400" rtl="0" eaLnBrk="1" latinLnBrk="0" hangingPunct="1">
+              <a:defRPr sz="1800" kern="1200">
+                <a:solidFill>
+                  <a:schemeClr val="lt1"/>
+                </a:solidFill>
+                <a:latin typeface="+mn-lt"/>
+                <a:ea typeface="+mn-ea"/>
+                <a:cs typeface="+mn-cs"/>
+              </a:defRPr>
+            </a:lvl3pPr>
+            <a:lvl4pPr marL="1371600" algn="l" defTabSz="914400" rtl="0" eaLnBrk="1" latinLnBrk="0" hangingPunct="1">
+              <a:defRPr sz="1800" kern="1200">
+                <a:solidFill>
+                  <a:schemeClr val="lt1"/>
+                </a:solidFill>
+                <a:latin typeface="+mn-lt"/>
+                <a:ea typeface="+mn-ea"/>
+                <a:cs typeface="+mn-cs"/>
+              </a:defRPr>
+            </a:lvl4pPr>
+            <a:lvl5pPr marL="1828800" algn="l" defTabSz="914400" rtl="0" eaLnBrk="1" latinLnBrk="0" hangingPunct="1">
+              <a:defRPr sz="1800" kern="1200">
+                <a:solidFill>
+                  <a:schemeClr val="lt1"/>
+                </a:solidFill>
+                <a:latin typeface="+mn-lt"/>
+                <a:ea typeface="+mn-ea"/>
+                <a:cs typeface="+mn-cs"/>
+              </a:defRPr>
+            </a:lvl5pPr>
+            <a:lvl6pPr marL="2286000" algn="l" defTabSz="914400" rtl="0" eaLnBrk="1" latinLnBrk="0" hangingPunct="1">
+              <a:defRPr sz="1800" kern="1200">
+                <a:solidFill>
+                  <a:schemeClr val="lt1"/>
+                </a:solidFill>
+                <a:latin typeface="+mn-lt"/>
+                <a:ea typeface="+mn-ea"/>
+                <a:cs typeface="+mn-cs"/>
+              </a:defRPr>
+            </a:lvl6pPr>
+            <a:lvl7pPr marL="2743200" algn="l" defTabSz="914400" rtl="0" eaLnBrk="1" latinLnBrk="0" hangingPunct="1">
+              <a:defRPr sz="1800" kern="1200">
+                <a:solidFill>
+                  <a:schemeClr val="lt1"/>
+                </a:solidFill>
+                <a:latin typeface="+mn-lt"/>
+                <a:ea typeface="+mn-ea"/>
+                <a:cs typeface="+mn-cs"/>
+              </a:defRPr>
+            </a:lvl7pPr>
+            <a:lvl8pPr marL="3200400" algn="l" defTabSz="914400" rtl="0" eaLnBrk="1" latinLnBrk="0" hangingPunct="1">
+              <a:defRPr sz="1800" kern="1200">
+                <a:solidFill>
+                  <a:schemeClr val="lt1"/>
+                </a:solidFill>
+                <a:latin typeface="+mn-lt"/>
+                <a:ea typeface="+mn-ea"/>
+                <a:cs typeface="+mn-cs"/>
+              </a:defRPr>
+            </a:lvl8pPr>
+            <a:lvl9pPr marL="3657600" algn="l" defTabSz="914400" rtl="0" eaLnBrk="1" latinLnBrk="0" hangingPunct="1">
+              <a:defRPr sz="1800" kern="1200">
+                <a:solidFill>
+                  <a:schemeClr val="lt1"/>
+                </a:solidFill>
+                <a:latin typeface="+mn-lt"/>
+                <a:ea typeface="+mn-ea"/>
+                <a:cs typeface="+mn-cs"/>
+              </a:defRPr>
+            </a:lvl9pPr>
+          </a:lstStyle>
           <a:p>
             <a:pPr algn="ctr"/>
             <a:endParaRPr lang="en-US"/>
           </a:p>
         </p:txBody>
       </p:sp>
-      <p:pic>
-        <p:nvPicPr>
-          <p:cNvPr id="7" name="Picture 6" descr="Light bulb on yellow background with sketched light beams and cord">
-            <a:extLst>
-              <a:ext uri="{FF2B5EF4-FFF2-40B4-BE49-F238E27FC236}">
-                <a16:creationId xmlns:a16="http://schemas.microsoft.com/office/drawing/2014/main" id="{1D6FD1B4-CA86-95E3-721F-84754E4148ED}"/>
-              </a:ext>
-            </a:extLst>
-          </p:cNvPr>
-          <p:cNvPicPr>
-            <a:picLocks noChangeAspect="1"/>
-          </p:cNvPicPr>
-          <p:nvPr/>
-        </p:nvPicPr>
-        <p:blipFill rotWithShape="1">
-          <a:blip r:embed="rId2"/>
-          <a:srcRect l="45124" r="273"/>
-          <a:stretch/>
-        </p:blipFill>
-        <p:spPr>
-          <a:xfrm>
-            <a:off x="6103027" y="10"/>
-            <a:ext cx="6088971" cy="6857990"/>
-          </a:xfrm>
-          <a:prstGeom prst="rect">
-            <a:avLst/>
-          </a:prstGeom>
-        </p:spPr>
-      </p:pic>
       <p:sp useBgFill="1">
         <p:nvSpPr>
-          <p:cNvPr id="20" name="Rectangle 19">
-            <a:extLst>
-              <a:ext uri="{FF2B5EF4-FFF2-40B4-BE49-F238E27FC236}">
-                <a16:creationId xmlns:a16="http://schemas.microsoft.com/office/drawing/2014/main" id="{59B296B9-C5A5-4E4F-9B60-C907B5F1466C}"/>
+          <p:cNvPr id="48" name="Rectangle 47">
+            <a:extLst>
+              <a:ext uri="{FF2B5EF4-FFF2-40B4-BE49-F238E27FC236}">
+                <a16:creationId xmlns:a16="http://schemas.microsoft.com/office/drawing/2014/main" id="{E81BF4F6-F2CF-4984-9D14-D6966D92F99F}"/>
               </a:ext>
               <a:ext uri="{C183D7F6-B498-43B3-948B-1728B52AA6E4}">
                 <adec:decorative xmlns:adec="http://schemas.microsoft.com/office/drawing/2017/decorative" val="1"/>
@@ -9964,8 +10687,8 @@
         </p:nvSpPr>
         <p:spPr>
           <a:xfrm>
-            <a:off x="0" y="0"/>
-            <a:ext cx="6103025" cy="6858000"/>
+            <a:off x="1" y="0"/>
+            <a:ext cx="8522446" cy="2285999"/>
           </a:xfrm>
           <a:prstGeom prst="rect">
             <a:avLst/>
@@ -9974,9 +10697,9 @@
             <a:noFill/>
           </a:ln>
           <a:effectLst>
-            <a:outerShdw blurRad="889000" dist="406400" dir="21540000" sx="90000" sy="90000" algn="t" rotWithShape="0">
+            <a:outerShdw blurRad="596900" dist="304800" dir="7140000" sx="90000" sy="90000" algn="t" rotWithShape="0">
               <a:srgbClr val="000000">
-                <a:alpha val="20000"/>
+                <a:alpha val="15000"/>
               </a:srgbClr>
             </a:outerShdw>
           </a:effectLst>
@@ -10006,212 +10729,192 @@
           </a:p>
         </p:txBody>
       </p:sp>
-      <p:sp useBgFill="1">
-        <p:nvSpPr>
-          <p:cNvPr id="22" name="Rectangle 21">
-            <a:extLst>
-              <a:ext uri="{FF2B5EF4-FFF2-40B4-BE49-F238E27FC236}">
-                <a16:creationId xmlns:a16="http://schemas.microsoft.com/office/drawing/2014/main" id="{D0300FD3-5AF1-6305-15FA-9078072672E2}"/>
-              </a:ext>
-              <a:ext uri="{C183D7F6-B498-43B3-948B-1728B52AA6E4}">
-                <adec:decorative xmlns:adec="http://schemas.microsoft.com/office/drawing/2017/decorative" val="1"/>
-              </a:ext>
-            </a:extLst>
-          </p:cNvPr>
-          <p:cNvSpPr>
-            <a:spLocks noGrp="1" noRot="1" noChangeAspect="1" noMove="1" noResize="1" noEditPoints="1" noAdjustHandles="1" noChangeArrowheads="1" noChangeShapeType="1" noTextEdit="1"/>
-          </p:cNvSpPr>
-          <p:nvPr>
-            <p:extLst>
-              <p:ext uri="{386F3935-93C4-4BCD-93E2-E3B085C9AB24}">
-                <p16:designElem xmlns:p16="http://schemas.microsoft.com/office/powerpoint/2015/main" val="1"/>
-              </p:ext>
-            </p:extLst>
+      <p:sp>
+        <p:nvSpPr>
+          <p:cNvPr id="2" name="Título 1">
+            <a:extLst>
+              <a:ext uri="{FF2B5EF4-FFF2-40B4-BE49-F238E27FC236}">
+                <a16:creationId xmlns:a16="http://schemas.microsoft.com/office/drawing/2014/main" id="{42C9CCDD-7F42-FFCC-3807-54BD3E902B5B}"/>
+              </a:ext>
+            </a:extLst>
+          </p:cNvPr>
+          <p:cNvSpPr>
+            <a:spLocks noGrp="1"/>
+          </p:cNvSpPr>
+          <p:nvPr>
+            <p:ph type="title"/>
           </p:nvPr>
         </p:nvSpPr>
         <p:spPr>
           <a:xfrm>
-            <a:off x="0" y="0"/>
-            <a:ext cx="6103025" cy="2285995"/>
+            <a:off x="761803" y="350196"/>
+            <a:ext cx="4646904" cy="1624520"/>
+          </a:xfrm>
+        </p:spPr>
+        <p:txBody>
+          <a:bodyPr anchor="ctr">
+            <a:normAutofit/>
+          </a:bodyPr>
+          <a:lstStyle/>
+          <a:p>
+            <a:r>
+              <a:rPr lang="pt-PT" sz="4000" dirty="0"/>
+              <a:t>Development</a:t>
+            </a:r>
+          </a:p>
+        </p:txBody>
+      </p:sp>
+      <p:sp>
+        <p:nvSpPr>
+          <p:cNvPr id="3" name="Marcador de Posição de Conteúdo 2">
+            <a:extLst>
+              <a:ext uri="{FF2B5EF4-FFF2-40B4-BE49-F238E27FC236}">
+                <a16:creationId xmlns:a16="http://schemas.microsoft.com/office/drawing/2014/main" id="{C25F349C-DF7A-76B3-539A-D9AC348B7850}"/>
+              </a:ext>
+            </a:extLst>
+          </p:cNvPr>
+          <p:cNvSpPr>
+            <a:spLocks noGrp="1"/>
+          </p:cNvSpPr>
+          <p:nvPr>
+            <p:ph idx="1"/>
+          </p:nvPr>
+        </p:nvSpPr>
+        <p:spPr>
+          <a:xfrm>
+            <a:off x="761802" y="2743200"/>
+            <a:ext cx="4646905" cy="3613149"/>
+          </a:xfrm>
+        </p:spPr>
+        <p:txBody>
+          <a:bodyPr anchor="ctr">
+            <a:normAutofit/>
+          </a:bodyPr>
+          <a:lstStyle/>
+          <a:p>
+            <a:pPr>
+              <a:buFont typeface="Symbol" panose="05050102010706020507" pitchFamily="18" charset="2"/>
+              <a:buChar char="-"/>
+            </a:pPr>
+            <a:r>
+              <a:rPr lang="en-US" sz="2000" dirty="0"/>
+              <a:t>The code is organized into different sections to facilitate understanding and maintenance.</a:t>
+            </a:r>
+            <a:endParaRPr lang="en-US" sz="2000"/>
+          </a:p>
+          <a:p>
+            <a:pPr>
+              <a:buFont typeface="Symbol" panose="05050102010706020507" pitchFamily="18" charset="2"/>
+              <a:buChar char="-"/>
+            </a:pPr>
+            <a:r>
+              <a:rPr lang="en-US" sz="2000" dirty="0"/>
+              <a:t>Collisions and Event Detection.</a:t>
+            </a:r>
+            <a:endParaRPr lang="en-US" sz="2000"/>
+          </a:p>
+          <a:p>
+            <a:pPr>
+              <a:buFont typeface="Symbol" panose="05050102010706020507" pitchFamily="18" charset="2"/>
+              <a:buChar char="-"/>
+            </a:pPr>
+            <a:r>
+              <a:rPr lang="en-US" sz="2000" dirty="0"/>
+              <a:t>Position and Rotation Update.</a:t>
+            </a:r>
+            <a:endParaRPr lang="en-US" sz="2000"/>
+          </a:p>
+          <a:p>
+            <a:pPr>
+              <a:buFont typeface="Symbol" panose="05050102010706020507" pitchFamily="18" charset="2"/>
+              <a:buChar char="-"/>
+            </a:pPr>
+            <a:endParaRPr lang="en-US" sz="2000"/>
+          </a:p>
+          <a:p>
+            <a:pPr>
+              <a:buFont typeface="Symbol" panose="05050102010706020507" pitchFamily="18" charset="2"/>
+              <a:buChar char="-"/>
+            </a:pPr>
+            <a:r>
+              <a:rPr lang="pt-PT" sz="2000" dirty="0"/>
+              <a:t>Difficulties:</a:t>
+            </a:r>
+            <a:endParaRPr lang="pt-PT" sz="2000"/>
+          </a:p>
+          <a:p>
+            <a:pPr lvl="1">
+              <a:buFont typeface="Symbol" panose="05050102010706020507" pitchFamily="18" charset="2"/>
+              <a:buChar char="-"/>
+            </a:pPr>
+            <a:r>
+              <a:rPr lang="pt-PT" sz="2000" dirty="0"/>
+              <a:t>Collision Management</a:t>
+            </a:r>
+            <a:endParaRPr lang="pt-PT" sz="2000"/>
+          </a:p>
+          <a:p>
+            <a:pPr lvl="1">
+              <a:buFont typeface="Symbol" panose="05050102010706020507" pitchFamily="18" charset="2"/>
+              <a:buChar char="-"/>
+            </a:pPr>
+            <a:r>
+              <a:rPr lang="pt-PT" sz="2000" dirty="0"/>
+              <a:t>Performance Optimization</a:t>
+            </a:r>
+            <a:endParaRPr lang="pt-PT" sz="2000"/>
+          </a:p>
+        </p:txBody>
+      </p:sp>
+      <p:pic>
+        <p:nvPicPr>
+          <p:cNvPr id="7" name="Picture 6" descr="Computer script on a screen">
+            <a:extLst>
+              <a:ext uri="{FF2B5EF4-FFF2-40B4-BE49-F238E27FC236}">
+                <a16:creationId xmlns:a16="http://schemas.microsoft.com/office/drawing/2014/main" id="{DDF14196-F223-ADCE-F3CC-8573A5AB48A0}"/>
+              </a:ext>
+            </a:extLst>
+          </p:cNvPr>
+          <p:cNvPicPr>
+            <a:picLocks noChangeAspect="1"/>
+          </p:cNvPicPr>
+          <p:nvPr/>
+        </p:nvPicPr>
+        <p:blipFill rotWithShape="1">
+          <a:blip r:embed="rId2"/>
+          <a:srcRect l="87" r="40512" b="-2"/>
+          <a:stretch/>
+        </p:blipFill>
+        <p:spPr>
+          <a:xfrm>
+            <a:off x="6096000" y="1"/>
+            <a:ext cx="6102825" cy="6858000"/>
           </a:xfrm>
           <a:prstGeom prst="rect">
             <a:avLst/>
           </a:prstGeom>
-          <a:ln>
-            <a:noFill/>
-          </a:ln>
-          <a:effectLst>
-            <a:outerShdw blurRad="254000" dist="127000" dir="5460000" sx="92000" sy="92000" algn="t" rotWithShape="0">
-              <a:srgbClr val="000000">
-                <a:alpha val="30000"/>
-              </a:srgbClr>
-            </a:outerShdw>
-          </a:effectLst>
         </p:spPr>
-        <p:style>
-          <a:lnRef idx="2">
-            <a:schemeClr val="accent1">
-              <a:shade val="50000"/>
-            </a:schemeClr>
-          </a:lnRef>
-          <a:fillRef idx="1">
-            <a:schemeClr val="accent1"/>
-          </a:fillRef>
-          <a:effectRef idx="0">
-            <a:schemeClr val="accent1"/>
-          </a:effectRef>
-          <a:fontRef idx="minor">
-            <a:schemeClr val="lt1"/>
-          </a:fontRef>
-        </p:style>
-        <p:txBody>
-          <a:bodyPr rtlCol="0" anchor="ctr"/>
-          <a:lstStyle/>
-          <a:p>
-            <a:pPr algn="ctr"/>
-            <a:endParaRPr lang="en-US"/>
-          </a:p>
-        </p:txBody>
-      </p:sp>
-      <p:sp>
-        <p:nvSpPr>
-          <p:cNvPr id="2" name="Título 1">
-            <a:extLst>
-              <a:ext uri="{FF2B5EF4-FFF2-40B4-BE49-F238E27FC236}">
-                <a16:creationId xmlns:a16="http://schemas.microsoft.com/office/drawing/2014/main" id="{06EE0CD9-859B-FFDC-7F6F-65A1864810C7}"/>
-              </a:ext>
-            </a:extLst>
-          </p:cNvPr>
-          <p:cNvSpPr>
-            <a:spLocks noGrp="1"/>
-          </p:cNvSpPr>
-          <p:nvPr>
-            <p:ph type="title"/>
+      </p:pic>
+      <p:sp>
+        <p:nvSpPr>
+          <p:cNvPr id="5" name="Marcador de Posição do Número do Diapositivo 4">
+            <a:extLst>
+              <a:ext uri="{FF2B5EF4-FFF2-40B4-BE49-F238E27FC236}">
+                <a16:creationId xmlns:a16="http://schemas.microsoft.com/office/drawing/2014/main" id="{1D3DFBEB-7750-F056-BE82-8158E725F8BE}"/>
+              </a:ext>
+            </a:extLst>
+          </p:cNvPr>
+          <p:cNvSpPr>
+            <a:spLocks noGrp="1"/>
+          </p:cNvSpPr>
+          <p:nvPr>
+            <p:ph type="sldNum" sz="quarter" idx="12"/>
           </p:nvPr>
         </p:nvSpPr>
         <p:spPr>
           <a:xfrm>
-            <a:off x="761801" y="328512"/>
-            <a:ext cx="4778387" cy="1628970"/>
-          </a:xfrm>
-        </p:spPr>
-        <p:txBody>
-          <a:bodyPr anchor="ctr">
-            <a:normAutofit/>
-          </a:bodyPr>
-          <a:lstStyle/>
-          <a:p>
-            <a:r>
-              <a:rPr lang="pt-PT" sz="4000" dirty="0"/>
-              <a:t>Conclusions</a:t>
-            </a:r>
-          </a:p>
-        </p:txBody>
-      </p:sp>
-      <p:sp>
-        <p:nvSpPr>
-          <p:cNvPr id="3" name="Marcador de Posição de Conteúdo 2">
-            <a:extLst>
-              <a:ext uri="{FF2B5EF4-FFF2-40B4-BE49-F238E27FC236}">
-                <a16:creationId xmlns:a16="http://schemas.microsoft.com/office/drawing/2014/main" id="{63326C6E-5F1E-0E8D-F642-983D87164C61}"/>
-              </a:ext>
-            </a:extLst>
-          </p:cNvPr>
-          <p:cNvSpPr>
-            <a:spLocks noGrp="1"/>
-          </p:cNvSpPr>
-          <p:nvPr>
-            <p:ph idx="1"/>
-          </p:nvPr>
-        </p:nvSpPr>
-        <p:spPr>
-          <a:xfrm>
-            <a:off x="761801" y="2884929"/>
-            <a:ext cx="4659756" cy="3374137"/>
-          </a:xfrm>
-        </p:spPr>
-        <p:txBody>
-          <a:bodyPr anchor="ctr">
-            <a:normAutofit/>
-          </a:bodyPr>
-          <a:lstStyle/>
-          <a:p>
-            <a:pPr>
-              <a:buFont typeface="Symbol" panose="05050102010706020507" pitchFamily="18" charset="2"/>
-              <a:buChar char="-"/>
-            </a:pPr>
-            <a:r>
-              <a:rPr lang="en-US" sz="2000" dirty="0"/>
-              <a:t>In conclusion, all goals were successfully achieved, albeit with some challenges encountered along the way and various project ideas considered throughout the development process.</a:t>
-            </a:r>
-            <a:endParaRPr lang="pt-PT" sz="2000"/>
-          </a:p>
-        </p:txBody>
-      </p:sp>
-      <p:sp>
-        <p:nvSpPr>
-          <p:cNvPr id="6" name="Marcador de Posição da Data 3">
-            <a:extLst>
-              <a:ext uri="{FF2B5EF4-FFF2-40B4-BE49-F238E27FC236}">
-                <a16:creationId xmlns:a16="http://schemas.microsoft.com/office/drawing/2014/main" id="{029FED57-33C5-855C-4776-592884EB5D56}"/>
-              </a:ext>
-            </a:extLst>
-          </p:cNvPr>
-          <p:cNvSpPr>
-            <a:spLocks noGrp="1"/>
-          </p:cNvSpPr>
-          <p:nvPr>
-            <p:ph type="dt" sz="half" idx="10"/>
-          </p:nvPr>
-        </p:nvSpPr>
-        <p:spPr>
-          <a:xfrm>
-            <a:off x="761801" y="6356350"/>
-            <a:ext cx="2743200" cy="365125"/>
-          </a:xfrm>
-        </p:spPr>
-        <p:txBody>
-          <a:bodyPr>
-            <a:normAutofit/>
-          </a:bodyPr>
-          <a:lstStyle/>
-          <a:p>
-            <a:pPr>
-              <a:spcAft>
-                <a:spcPts val="600"/>
-              </a:spcAft>
-            </a:pPr>
-            <a:r>
-              <a:rPr lang="pt-PT">
-                <a:solidFill>
-                  <a:schemeClr val="tx1"/>
-                </a:solidFill>
-              </a:rPr>
-              <a:t>ICG - 2023/2024</a:t>
-            </a:r>
-          </a:p>
-        </p:txBody>
-      </p:sp>
-      <p:sp>
-        <p:nvSpPr>
-          <p:cNvPr id="5" name="Marcador de Posição do Número do Diapositivo 4">
-            <a:extLst>
-              <a:ext uri="{FF2B5EF4-FFF2-40B4-BE49-F238E27FC236}">
-                <a16:creationId xmlns:a16="http://schemas.microsoft.com/office/drawing/2014/main" id="{09584837-1C74-DD42-E69B-D85B02C81CBA}"/>
-              </a:ext>
-            </a:extLst>
-          </p:cNvPr>
-          <p:cNvSpPr>
-            <a:spLocks noGrp="1"/>
-          </p:cNvSpPr>
-          <p:nvPr>
-            <p:ph type="sldNum" sz="quarter" idx="12"/>
-          </p:nvPr>
-        </p:nvSpPr>
-        <p:spPr>
-          <a:xfrm>
-            <a:off x="10515600" y="6356350"/>
-            <a:ext cx="1462825" cy="365125"/>
+            <a:off x="8732520" y="6356350"/>
+            <a:ext cx="3200400" cy="365125"/>
           </a:xfrm>
         </p:spPr>
         <p:txBody>
@@ -10246,10 +10949,54 @@
           </a:p>
         </p:txBody>
       </p:sp>
+      <p:sp>
+        <p:nvSpPr>
+          <p:cNvPr id="6" name="Marcador de Posição da Data 3">
+            <a:extLst>
+              <a:ext uri="{FF2B5EF4-FFF2-40B4-BE49-F238E27FC236}">
+                <a16:creationId xmlns:a16="http://schemas.microsoft.com/office/drawing/2014/main" id="{A826850F-12A5-D49F-402E-D5A9E25BDB85}"/>
+              </a:ext>
+            </a:extLst>
+          </p:cNvPr>
+          <p:cNvSpPr>
+            <a:spLocks noGrp="1"/>
+          </p:cNvSpPr>
+          <p:nvPr>
+            <p:ph type="dt" sz="half" idx="10"/>
+          </p:nvPr>
+        </p:nvSpPr>
+        <p:spPr>
+          <a:xfrm>
+            <a:off x="243025" y="6356349"/>
+            <a:ext cx="2743200" cy="365125"/>
+          </a:xfrm>
+        </p:spPr>
+        <p:txBody>
+          <a:bodyPr>
+            <a:normAutofit/>
+          </a:bodyPr>
+          <a:lstStyle/>
+          <a:p>
+            <a:pPr>
+              <a:spcAft>
+                <a:spcPts val="600"/>
+              </a:spcAft>
+            </a:pPr>
+            <a:r>
+              <a:rPr lang="pt-PT" dirty="0">
+                <a:solidFill>
+                  <a:schemeClr val="tx1"/>
+                </a:solidFill>
+              </a:rPr>
+              <a:t>ICG - 2023/2024</a:t>
+            </a:r>
+          </a:p>
+        </p:txBody>
+      </p:sp>
     </p:spTree>
     <p:extLst>
       <p:ext uri="{BB962C8B-B14F-4D97-AF65-F5344CB8AC3E}">
-        <p14:creationId xmlns:p14="http://schemas.microsoft.com/office/powerpoint/2010/main" val="3173771447"/>
+        <p14:creationId xmlns:p14="http://schemas.microsoft.com/office/powerpoint/2010/main" val="2832385390"/>
       </p:ext>
     </p:extLst>
   </p:cSld>
